--- a/slides/datasets-in-10-minutes-imagenet.pptx
+++ b/slides/datasets-in-10-minutes-imagenet.pptx
@@ -71,6 +71,7 @@
     <p:sldId id="305" r:id="rId56"/>
     <p:sldId id="306" r:id="rId57"/>
     <p:sldId id="307" r:id="rId58"/>
+    <p:sldId id="322" r:id="rId72"/>
   </p:sldIdLst>
   <p:sldSz cx="9144000" cy="5143500" type="screen16x9"/>
   <p:notesSz cx="6858000" cy="9144000"/>
@@ -894,7 +895,7 @@
             </a:lvl9pPr>
           </a:lstStyle>
           <a:p>
-            <a:pPr algn="l">
+            <a:pPr algn="r">
               <a:lnSpc>
                 <a:spcPct val="100000"/>
               </a:lnSpc>
@@ -929,8 +930,8 @@
         </p:nvSpPr>
         <p:spPr>
           <a:xfrm>
-            <a:off x="5486400" y="4498848"/>
-            <a:ext cx="3108960" cy="228600"/>
+            <a:off x="5486400" y="4416552"/>
+            <a:ext cx="3108960" cy="402336"/>
           </a:xfrm>
           <a:prstGeom prst="rect">
             <a:avLst/>
@@ -1076,7 +1077,7 @@
             </a:lvl9pPr>
           </a:lstStyle>
           <a:p>
-            <a:pPr algn="l">
+            <a:pPr algn="r">
               <a:lnSpc>
                 <a:spcPct val="100000"/>
               </a:lnSpc>
@@ -1086,7 +1087,7 @@
               <a:spcAft>
                 <a:spcPts val="0"/>
               </a:spcAft>
-              <a:defRPr sz="1400" b="0">
+              <a:defRPr sz="2000" b="0">
                 <a:solidFill>
                   <a:srgbClr val="626669"/>
                 </a:solidFill>
@@ -1094,6 +1095,11 @@
               </a:defRPr>
             </a:pPr>
             <a:r>
+              <a:rPr sz="2000">
+                <a:solidFill>
+                  <a:srgbClr val="303437"/>
+                </a:solidFill>
+              </a:rPr>
               <a:t>氏名　［氏名］</a:t>
             </a:r>
           </a:p>
@@ -5862,33 +5868,35 @@
         </p:nvSpPr>
         <p:spPr>
           <a:xfrm>
-            <a:off x="5486400" y="4498848"/>
-            <a:ext cx="3108960" cy="228600"/>
-          </a:xfrm>
-        </p:spPr>
-        <p:txBody>
-          <a:bodyPr wrap="square" lIns="0" rIns="0" tIns="0" bIns="0" anchor="ctr"/>
-          <a:lstStyle/>
-          <a:p>
-            <a:pPr algn="l" marL="0" indent="0">
+            <a:off x="5486400" y="4416552"/>
+            <a:ext cx="3108960" cy="402336"/>
+          </a:xfrm>
+        </p:spPr>
+        <p:txBody>
+          <a:bodyPr wrap="square" lIns="0" rIns="0" tIns="0" bIns="0" anchor="t"/>
+          <a:lstStyle/>
+          <a:p>
+            <a:pPr algn="r" marL="0" indent="0">
+              <a:buNone/>
               <a:lnSpc>
                 <a:spcPct val="110000"/>
               </a:lnSpc>
               <a:spcBef>
                 <a:spcPts val="0"/>
               </a:spcBef>
-              <a:spcAft>
-                <a:spcPts val="0"/>
-              </a:spcAft>
-              <a:defRPr sz="1400" b="0">
-                <a:latin typeface="Noto Sans CJK JP"/>
-              </a:defRPr>
-              <a:buNone/>
-            </a:pPr>
-            <a:r>
-              <a:rPr sz="1400" lang="ja-JP">
-                <a:solidFill>
-                  <a:srgbClr val="626669"/>
+              <a:defRPr sz="2000" b="0" lang="ja-JP">
+                <a:latin typeface="Noto Sans CJK JP"/>
+                <a:ea typeface="Noto Sans CJK JP"/>
+              </a:defRPr>
+              <a:spcAft>
+                <a:spcPts val="600"/>
+              </a:spcAft>
+              <a:buNone/>
+            </a:pPr>
+            <a:r>
+              <a:rPr sz="2000" lang="ja-JP">
+                <a:solidFill>
+                  <a:srgbClr val="303437"/>
                 </a:solidFill>
                 <a:latin typeface="Noto Sans CJK JP"/>
                 <a:ea typeface="Noto Sans CJK JP"/>
@@ -9819,25 +9827,28 @@
               <a:spcBef>
                 <a:spcPts val="0"/>
               </a:spcBef>
-              <a:spcAft>
-                <a:spcPts val="1200"/>
-              </a:spcAft>
-              <a:defRPr sz="2400">
-                <a:latin typeface="Noto Sans CJK JP"/>
-              </a:defRPr>
+              <a:defRPr sz="2800" lang="ja-JP">
+                <a:latin typeface="Noto Sans CJK JP"/>
+                <a:ea typeface="Noto Sans CJK JP"/>
+                <a:cs typeface="Noto Sans CJK JP"/>
+              </a:defRPr>
+              <a:spcAft>
+                <a:spcPts val="1100"/>
+              </a:spcAft>
               <a:buAutoNum type="arabicPeriod" startAt="1"/>
             </a:pPr>
             <a:r>
-              <a:rPr sz="2400" lang="ja-JP">
+              <a:rPr sz="2800" lang="ja-JP">
                 <a:solidFill>
                   <a:srgbClr val="303437"/>
                 </a:solidFill>
                 <a:latin typeface="Noto Sans CJK JP"/>
                 <a:ea typeface="Noto Sans CJK JP"/>
+                <a:cs typeface="Noto Sans CJK JP"/>
               </a:rPr>
               <a:t>概要とタスク</a:t>
             </a:r>
-            <a:endParaRPr sz="2400"/>
+            <a:endParaRPr sz="2800" lang="ja-JP"/>
           </a:p>
           <a:p>
             <a:pPr algn="l" marL="533400" indent="-482600">
@@ -9847,25 +9858,28 @@
               <a:spcBef>
                 <a:spcPts val="0"/>
               </a:spcBef>
-              <a:spcAft>
-                <a:spcPts val="1200"/>
-              </a:spcAft>
-              <a:defRPr sz="2400">
-                <a:latin typeface="Noto Sans CJK JP"/>
-              </a:defRPr>
+              <a:defRPr sz="2800" lang="ja-JP">
+                <a:latin typeface="Noto Sans CJK JP"/>
+                <a:ea typeface="Noto Sans CJK JP"/>
+                <a:cs typeface="Noto Sans CJK JP"/>
+              </a:defRPr>
+              <a:spcAft>
+                <a:spcPts val="1100"/>
+              </a:spcAft>
               <a:buAutoNum type="arabicPeriod" startAt="2"/>
             </a:pPr>
             <a:r>
-              <a:rPr sz="2400" lang="ja-JP">
+              <a:rPr sz="2800" lang="ja-JP">
                 <a:solidFill>
                   <a:srgbClr val="303437"/>
                 </a:solidFill>
                 <a:latin typeface="Noto Sans CJK JP"/>
                 <a:ea typeface="Noto Sans CJK JP"/>
+                <a:cs typeface="Noto Sans CJK JP"/>
               </a:rPr>
               <a:t>作成方法と規模</a:t>
             </a:r>
-            <a:endParaRPr sz="2400"/>
+            <a:endParaRPr sz="2800" lang="ja-JP"/>
           </a:p>
           <a:p>
             <a:pPr algn="l" marL="533400" indent="-482600">
@@ -9875,25 +9889,28 @@
               <a:spcBef>
                 <a:spcPts val="0"/>
               </a:spcBef>
-              <a:spcAft>
-                <a:spcPts val="1200"/>
-              </a:spcAft>
-              <a:defRPr sz="2400">
-                <a:latin typeface="Noto Sans CJK JP"/>
-              </a:defRPr>
+              <a:defRPr sz="2800" lang="ja-JP">
+                <a:latin typeface="Noto Sans CJK JP"/>
+                <a:ea typeface="Noto Sans CJK JP"/>
+                <a:cs typeface="Noto Sans CJK JP"/>
+              </a:defRPr>
+              <a:spcAft>
+                <a:spcPts val="1100"/>
+              </a:spcAft>
               <a:buAutoNum type="arabicPeriod" startAt="3"/>
             </a:pPr>
             <a:r>
-              <a:rPr sz="2400" lang="ja-JP">
+              <a:rPr sz="2800" lang="ja-JP">
                 <a:solidFill>
                   <a:srgbClr val="303437"/>
                 </a:solidFill>
                 <a:latin typeface="Noto Sans CJK JP"/>
                 <a:ea typeface="Noto Sans CJK JP"/>
+                <a:cs typeface="Noto Sans CJK JP"/>
               </a:rPr>
               <a:t>評価と性能</a:t>
             </a:r>
-            <a:endParaRPr sz="2400"/>
+            <a:endParaRPr sz="2800" lang="ja-JP"/>
           </a:p>
           <a:p>
             <a:pPr algn="l" marL="533400" indent="-482600">
@@ -9903,25 +9920,28 @@
               <a:spcBef>
                 <a:spcPts val="0"/>
               </a:spcBef>
-              <a:spcAft>
-                <a:spcPts val="1200"/>
-              </a:spcAft>
-              <a:defRPr sz="2400">
-                <a:latin typeface="Noto Sans CJK JP"/>
-              </a:defRPr>
+              <a:defRPr sz="2800" lang="ja-JP">
+                <a:latin typeface="Noto Sans CJK JP"/>
+                <a:ea typeface="Noto Sans CJK JP"/>
+                <a:cs typeface="Noto Sans CJK JP"/>
+              </a:defRPr>
+              <a:spcAft>
+                <a:spcPts val="1100"/>
+              </a:spcAft>
               <a:buAutoNum type="arabicPeriod" startAt="4"/>
             </a:pPr>
             <a:r>
-              <a:rPr sz="2400" lang="ja-JP">
+              <a:rPr sz="2800" lang="ja-JP">
                 <a:solidFill>
                   <a:srgbClr val="303437"/>
                 </a:solidFill>
                 <a:latin typeface="Noto Sans CJK JP"/>
                 <a:ea typeface="Noto Sans CJK JP"/>
+                <a:cs typeface="Noto Sans CJK JP"/>
               </a:rPr>
               <a:t>利用の変遷と現在</a:t>
             </a:r>
-            <a:endParaRPr sz="2400"/>
+            <a:endParaRPr sz="2800" lang="ja-JP"/>
           </a:p>
           <a:p>
             <a:pPr algn="l" marL="533400" indent="-482600">
@@ -9931,25 +9951,28 @@
               <a:spcBef>
                 <a:spcPts val="0"/>
               </a:spcBef>
-              <a:spcAft>
-                <a:spcPts val="1200"/>
-              </a:spcAft>
-              <a:defRPr sz="2400">
-                <a:latin typeface="Noto Sans CJK JP"/>
-              </a:defRPr>
+              <a:defRPr sz="2800" lang="ja-JP">
+                <a:latin typeface="Noto Sans CJK JP"/>
+                <a:ea typeface="Noto Sans CJK JP"/>
+                <a:cs typeface="Noto Sans CJK JP"/>
+              </a:defRPr>
+              <a:spcAft>
+                <a:spcPts val="1100"/>
+              </a:spcAft>
               <a:buAutoNum type="arabicPeriod" startAt="5"/>
             </a:pPr>
             <a:r>
-              <a:rPr sz="2400" lang="ja-JP">
+              <a:rPr sz="2800" lang="ja-JP">
                 <a:solidFill>
                   <a:srgbClr val="303437"/>
                 </a:solidFill>
                 <a:latin typeface="Noto Sans CJK JP"/>
                 <a:ea typeface="Noto Sans CJK JP"/>
+                <a:cs typeface="Noto Sans CJK JP"/>
               </a:rPr>
               <a:t>入手方法とまとめ</a:t>
             </a:r>
-            <a:endParaRPr sz="2400"/>
+            <a:endParaRPr sz="2800" lang="ja-JP"/>
           </a:p>
         </p:txBody>
       </p:sp>
@@ -15328,25 +15351,28 @@
               <a:spcBef>
                 <a:spcPts val="0"/>
               </a:spcBef>
+              <a:spcAft>
+                <a:spcPts val="800"/>
+              </a:spcAft>
               <a:buAutoNum type="arabicPeriod" startAt="1"/>
-              <a:defRPr sz="2300">
-                <a:latin typeface="Noto Sans CJK JP"/>
-              </a:defRPr>
-              <a:spcAft>
-                <a:spcPts val="700"/>
-              </a:spcAft>
-            </a:pPr>
-            <a:r>
-              <a:rPr sz="2300" lang="ja-JP">
+              <a:defRPr sz="2500" lang="ja-JP">
+                <a:latin typeface="Noto Sans CJK JP"/>
+                <a:ea typeface="Noto Sans CJK JP"/>
+                <a:cs typeface="Noto Sans CJK JP"/>
+              </a:defRPr>
+            </a:pPr>
+            <a:r>
+              <a:rPr sz="2500" lang="ja-JP">
                 <a:solidFill>
                   <a:srgbClr val="303437"/>
                 </a:solidFill>
                 <a:latin typeface="Noto Sans CJK JP"/>
                 <a:ea typeface="Noto Sans CJK JP"/>
+                <a:cs typeface="Noto Sans CJK JP"/>
               </a:rPr>
               <a:t>著者と発表先</a:t>
             </a:r>
-            <a:endParaRPr sz="2300"/>
+            <a:endParaRPr sz="2500" lang="ja-JP"/>
           </a:p>
           <a:p>
             <a:pPr marL="533400" indent="-482600">
@@ -15357,20 +15383,23 @@
                 <a:spcPts val="0"/>
               </a:spcBef>
               <a:spcAft>
-                <a:spcPts val="700"/>
+                <a:spcPts val="800"/>
               </a:spcAft>
               <a:buAutoNum type="arabicPeriod" startAt="2"/>
-              <a:defRPr sz="2300">
-                <a:latin typeface="Noto Sans CJK JP"/>
-              </a:defRPr>
-            </a:pPr>
-            <a:r>
-              <a:rPr sz="2300" lang="ja-JP">
+              <a:defRPr sz="2500" lang="ja-JP">
+                <a:latin typeface="Noto Sans CJK JP"/>
+                <a:ea typeface="Noto Sans CJK JP"/>
+                <a:cs typeface="Noto Sans CJK JP"/>
+              </a:defRPr>
+            </a:pPr>
+            <a:r>
+              <a:rPr sz="2500" lang="ja-JP">
                 <a:solidFill>
                   <a:srgbClr val="303437"/>
                 </a:solidFill>
                 <a:latin typeface="Noto Sans CJK JP"/>
                 <a:ea typeface="Noto Sans CJK JP"/>
+                <a:cs typeface="Noto Sans CJK JP"/>
               </a:rPr>
               <a:t>カテゴリの見取り図</a:t>
             </a:r>
@@ -15384,20 +15413,23 @@
                 <a:spcPts val="0"/>
               </a:spcBef>
               <a:spcAft>
-                <a:spcPts val="700"/>
+                <a:spcPts val="800"/>
               </a:spcAft>
               <a:buAutoNum type="arabicPeriod" startAt="3"/>
-              <a:defRPr sz="2300">
-                <a:latin typeface="Noto Sans CJK JP"/>
-              </a:defRPr>
-            </a:pPr>
-            <a:r>
-              <a:rPr sz="2300" lang="ja-JP">
+              <a:defRPr sz="2500" lang="ja-JP">
+                <a:latin typeface="Noto Sans CJK JP"/>
+                <a:ea typeface="Noto Sans CJK JP"/>
+                <a:cs typeface="Noto Sans CJK JP"/>
+              </a:defRPr>
+            </a:pPr>
+            <a:r>
+              <a:rPr sz="2500" lang="ja-JP">
                 <a:solidFill>
                   <a:srgbClr val="303437"/>
                 </a:solidFill>
                 <a:latin typeface="Noto Sans CJK JP"/>
                 <a:ea typeface="Noto Sans CJK JP"/>
+                <a:cs typeface="Noto Sans CJK JP"/>
               </a:rPr>
               <a:t>画像の追加例</a:t>
             </a:r>
@@ -15411,20 +15443,23 @@
                 <a:spcPts val="0"/>
               </a:spcBef>
               <a:spcAft>
-                <a:spcPts val="700"/>
+                <a:spcPts val="800"/>
               </a:spcAft>
               <a:buAutoNum type="arabicPeriod" startAt="4"/>
-              <a:defRPr sz="2300">
-                <a:latin typeface="Noto Sans CJK JP"/>
-              </a:defRPr>
-            </a:pPr>
-            <a:r>
-              <a:rPr sz="2300" lang="ja-JP">
+              <a:defRPr sz="2500" lang="ja-JP">
+                <a:latin typeface="Noto Sans CJK JP"/>
+                <a:ea typeface="Noto Sans CJK JP"/>
+                <a:cs typeface="Noto Sans CJK JP"/>
+              </a:defRPr>
+            </a:pPr>
+            <a:r>
+              <a:rPr sz="2500" lang="ja-JP">
                 <a:solidFill>
                   <a:srgbClr val="303437"/>
                 </a:solidFill>
                 <a:latin typeface="Noto Sans CJK JP"/>
                 <a:ea typeface="Noto Sans CJK JP"/>
+                <a:cs typeface="Noto Sans CJK JP"/>
               </a:rPr>
               <a:t>ImageNet-1kの学習画像数</a:t>
             </a:r>
@@ -15438,20 +15473,23 @@
                 <a:spcPts val="0"/>
               </a:spcBef>
               <a:spcAft>
-                <a:spcPts val="700"/>
+                <a:spcPts val="800"/>
               </a:spcAft>
               <a:buAutoNum type="arabicPeriod" startAt="5"/>
-              <a:defRPr sz="2300">
-                <a:latin typeface="Noto Sans CJK JP"/>
-              </a:defRPr>
-            </a:pPr>
-            <a:r>
-              <a:rPr sz="2300" lang="ja-JP">
+              <a:defRPr sz="2500" lang="ja-JP">
+                <a:latin typeface="Noto Sans CJK JP"/>
+                <a:ea typeface="Noto Sans CJK JP"/>
+                <a:cs typeface="Noto Sans CJK JP"/>
+              </a:defRPr>
+            </a:pPr>
+            <a:r>
+              <a:rPr sz="2500" lang="ja-JP">
                 <a:solidFill>
                   <a:srgbClr val="303437"/>
                 </a:solidFill>
                 <a:latin typeface="Noto Sans CJK JP"/>
                 <a:ea typeface="Noto Sans CJK JP"/>
+                <a:cs typeface="Noto Sans CJK JP"/>
               </a:rPr>
               <a:t>Imagenetteの画像サイズ</a:t>
             </a:r>
@@ -15465,20 +15503,23 @@
                 <a:spcPts val="0"/>
               </a:spcBef>
               <a:spcAft>
-                <a:spcPts val="700"/>
+                <a:spcPts val="800"/>
               </a:spcAft>
               <a:buAutoNum type="arabicPeriod" startAt="6"/>
-              <a:defRPr sz="2300">
-                <a:latin typeface="Noto Sans CJK JP"/>
-              </a:defRPr>
-            </a:pPr>
-            <a:r>
-              <a:rPr sz="2300" lang="ja-JP">
+              <a:defRPr sz="2500" lang="ja-JP">
+                <a:latin typeface="Noto Sans CJK JP"/>
+                <a:ea typeface="Noto Sans CJK JP"/>
+                <a:cs typeface="Noto Sans CJK JP"/>
+              </a:defRPr>
+            </a:pPr>
+            <a:r>
+              <a:rPr sz="2500" lang="ja-JP">
                 <a:solidFill>
                   <a:srgbClr val="303437"/>
                 </a:solidFill>
                 <a:latin typeface="Noto Sans CJK JP"/>
                 <a:ea typeface="Noto Sans CJK JP"/>
+                <a:cs typeface="Noto Sans CJK JP"/>
               </a:rPr>
               <a:t>モデル評価と前処理</a:t>
             </a:r>
@@ -15492,20 +15533,23 @@
                 <a:spcPts val="0"/>
               </a:spcBef>
               <a:spcAft>
-                <a:spcPts val="700"/>
+                <a:spcPts val="800"/>
               </a:spcAft>
               <a:buAutoNum type="arabicPeriod" startAt="7"/>
-              <a:defRPr sz="2300">
-                <a:latin typeface="Noto Sans CJK JP"/>
-              </a:defRPr>
-            </a:pPr>
-            <a:r>
-              <a:rPr sz="2300" lang="ja-JP">
+              <a:defRPr sz="2500" lang="ja-JP">
+                <a:latin typeface="Noto Sans CJK JP"/>
+                <a:ea typeface="Noto Sans CJK JP"/>
+                <a:cs typeface="Noto Sans CJK JP"/>
+              </a:defRPr>
+            </a:pPr>
+            <a:r>
+              <a:rPr sz="2500" lang="ja-JP">
                 <a:solidFill>
                   <a:srgbClr val="303437"/>
                 </a:solidFill>
                 <a:latin typeface="Noto Sans CJK JP"/>
                 <a:ea typeface="Noto Sans CJK JP"/>
+                <a:cs typeface="Noto Sans CJK JP"/>
               </a:rPr>
               <a:t>入手コードと参考文献</a:t>
             </a:r>
@@ -37649,7 +37693,7 @@
         <p:spPr>
           <a:xfrm>
             <a:off x="548640" y="1481328"/>
-            <a:ext cx="8046720" cy="2385822"/>
+            <a:ext cx="8046720" cy="2127250"/>
           </a:xfrm>
           <a:prstGeom prst="rect">
             <a:avLst/>
@@ -37692,8 +37736,8 @@
         </p:nvSpPr>
         <p:spPr>
           <a:xfrm>
-            <a:off x="685800" y="1609344"/>
-            <a:ext cx="7772400" cy="2129790"/>
+            <a:off x="548640" y="1481328"/>
+            <a:ext cx="8046720" cy="2127250"/>
           </a:xfrm>
           <a:prstGeom prst="rect">
             <a:avLst/>
@@ -37701,279 +37745,290 @@
           <a:noFill/>
         </p:spPr>
         <p:txBody>
-          <a:bodyPr wrap="none" lIns="0" rIns="0" tIns="0" bIns="0" anchor="t">
+          <a:bodyPr wrap="none" lIns="152400" rIns="152400" tIns="114300" bIns="114300" anchor="t">
             <a:spAutoFit/>
           </a:bodyPr>
           <a:lstStyle/>
           <a:p>
-            <a:pPr algn="l">
-              <a:lnSpc>
-                <a:spcPts val="1690"/>
-              </a:lnSpc>
-              <a:spcBef>
-                <a:spcPts val="0"/>
-              </a:spcBef>
-              <a:spcAft>
-                <a:spcPts val="0"/>
-              </a:spcAft>
-              <a:defRPr sz="1300" b="0">
+            <a:pPr algn="l" marL="0" indent="0">
+              <a:buNone/>
+              <a:lnSpc>
+                <a:spcPts val="1495"/>
+              </a:lnSpc>
+              <a:spcBef>
+                <a:spcPts val="0"/>
+              </a:spcBef>
+              <a:spcAft>
+                <a:spcPts val="0"/>
+              </a:spcAft>
+              <a:defRPr sz="1300" b="0" lang="ja-JP">
                 <a:latin typeface="Liberation Mono"/>
-              </a:defRPr>
-            </a:pPr>
-            <a:r>
-              <a:rPr sz="1300" b="0" lang="en-US">
+                <a:ea typeface="Noto Sans CJK JP"/>
+              </a:defRPr>
+            </a:pPr>
+            <a:r>
+              <a:rPr sz="1300" lang="ja-JP">
                 <a:solidFill>
                   <a:srgbClr val="303437"/>
                 </a:solidFill>
                 <a:latin typeface="Liberation Mono"/>
-                <a:ea typeface="Liberation Mono"/>
+                <a:ea typeface="Noto Sans CJK JP"/>
               </a:rPr>
               <a:t>from scipy.io import loadmat</a:t>
             </a:r>
             <a:endParaRPr sz="1300"/>
           </a:p>
           <a:p>
-            <a:pPr algn="l">
-              <a:lnSpc>
-                <a:spcPts val="1690"/>
-              </a:lnSpc>
-              <a:spcBef>
-                <a:spcPts val="0"/>
-              </a:spcBef>
-              <a:spcAft>
-                <a:spcPts val="0"/>
-              </a:spcAft>
-              <a:defRPr sz="1300" b="0">
+            <a:pPr algn="l" marL="0" indent="0">
+              <a:buNone/>
+              <a:lnSpc>
+                <a:spcPts val="1495"/>
+              </a:lnSpc>
+              <a:spcBef>
+                <a:spcPts val="0"/>
+              </a:spcBef>
+              <a:spcAft>
+                <a:spcPts val="0"/>
+              </a:spcAft>
+              <a:defRPr sz="1300" lang="ja-JP">
                 <a:latin typeface="Liberation Mono"/>
-              </a:defRPr>
-            </a:pPr>
-            <a:r>
-              <a:rPr sz="1300" b="0" lang="en-US">
+                <a:ea typeface="Noto Sans CJK JP"/>
+              </a:defRPr>
+            </a:pPr>
+            <a:r>
+              <a:rPr sz="1300" lang="ja-JP">
                 <a:solidFill>
                   <a:srgbClr val="303437"/>
                 </a:solidFill>
                 <a:latin typeface="Liberation Mono"/>
-                <a:ea typeface="Liberation Mono"/>
+                <a:ea typeface="Noto Sans CJK JP"/>
               </a:rPr>
               <a:t/>
             </a:r>
-            <a:endParaRPr sz="1300"/>
-          </a:p>
-          <a:p>
-            <a:pPr algn="l">
-              <a:lnSpc>
-                <a:spcPts val="1690"/>
-              </a:lnSpc>
-              <a:spcBef>
-                <a:spcPts val="0"/>
-              </a:spcBef>
-              <a:spcAft>
-                <a:spcPts val="0"/>
-              </a:spcAft>
-              <a:defRPr sz="1300" b="0">
+          </a:p>
+          <a:p>
+            <a:pPr algn="l" marL="0" indent="0">
+              <a:buNone/>
+              <a:lnSpc>
+                <a:spcPts val="1495"/>
+              </a:lnSpc>
+              <a:spcBef>
+                <a:spcPts val="0"/>
+              </a:spcBef>
+              <a:spcAft>
+                <a:spcPts val="0"/>
+              </a:spcAft>
+              <a:defRPr sz="1300" lang="ja-JP">
                 <a:latin typeface="Liberation Mono"/>
-              </a:defRPr>
-            </a:pPr>
-            <a:r>
-              <a:rPr sz="1300" b="0" lang="en-US">
+                <a:ea typeface="Noto Sans CJK JP"/>
+              </a:defRPr>
+            </a:pPr>
+            <a:r>
+              <a:rPr sz="1300" lang="ja-JP">
                 <a:solidFill>
                   <a:srgbClr val="303437"/>
                 </a:solidFill>
                 <a:latin typeface="Liberation Mono"/>
-                <a:ea typeface="Liberation Mono"/>
+                <a:ea typeface="Noto Sans CJK JP"/>
               </a:rPr>
               <a:t>meta = loadmat(</a:t>
             </a:r>
-            <a:endParaRPr sz="1300"/>
-          </a:p>
-          <a:p>
-            <a:pPr algn="l">
-              <a:lnSpc>
-                <a:spcPts val="1690"/>
-              </a:lnSpc>
-              <a:spcBef>
-                <a:spcPts val="0"/>
-              </a:spcBef>
-              <a:spcAft>
-                <a:spcPts val="0"/>
-              </a:spcAft>
-              <a:defRPr sz="1300" b="0">
+          </a:p>
+          <a:p>
+            <a:pPr algn="l" marL="0" indent="0">
+              <a:buNone/>
+              <a:lnSpc>
+                <a:spcPts val="1495"/>
+              </a:lnSpc>
+              <a:spcBef>
+                <a:spcPts val="0"/>
+              </a:spcBef>
+              <a:spcAft>
+                <a:spcPts val="0"/>
+              </a:spcAft>
+              <a:defRPr sz="1300" lang="ja-JP">
                 <a:latin typeface="Liberation Mono"/>
-              </a:defRPr>
-            </a:pPr>
-            <a:r>
-              <a:rPr sz="1300" b="0" lang="en-US">
+                <a:ea typeface="Noto Sans CJK JP"/>
+              </a:defRPr>
+            </a:pPr>
+            <a:r>
+              <a:rPr sz="1300" lang="ja-JP">
                 <a:solidFill>
                   <a:srgbClr val="303437"/>
                 </a:solidFill>
                 <a:latin typeface="Liberation Mono"/>
-                <a:ea typeface="Liberation Mono"/>
+                <a:ea typeface="Noto Sans CJK JP"/>
               </a:rPr>
               <a:t>    "ILSVRC2012_devkit_t12/data/meta.mat",</a:t>
             </a:r>
-            <a:endParaRPr sz="1300"/>
-          </a:p>
-          <a:p>
-            <a:pPr algn="l">
-              <a:lnSpc>
-                <a:spcPts val="1690"/>
-              </a:lnSpc>
-              <a:spcBef>
-                <a:spcPts val="0"/>
-              </a:spcBef>
-              <a:spcAft>
-                <a:spcPts val="0"/>
-              </a:spcAft>
-              <a:defRPr sz="1300" b="0">
+          </a:p>
+          <a:p>
+            <a:pPr algn="l" marL="0" indent="0">
+              <a:buNone/>
+              <a:lnSpc>
+                <a:spcPts val="1495"/>
+              </a:lnSpc>
+              <a:spcBef>
+                <a:spcPts val="0"/>
+              </a:spcBef>
+              <a:spcAft>
+                <a:spcPts val="0"/>
+              </a:spcAft>
+              <a:defRPr sz="1300" lang="ja-JP">
                 <a:latin typeface="Liberation Mono"/>
-              </a:defRPr>
-            </a:pPr>
-            <a:r>
-              <a:rPr sz="1300" b="0" lang="en-US">
+                <a:ea typeface="Noto Sans CJK JP"/>
+              </a:defRPr>
+            </a:pPr>
+            <a:r>
+              <a:rPr sz="1300" lang="ja-JP">
                 <a:solidFill>
                   <a:srgbClr val="303437"/>
                 </a:solidFill>
                 <a:latin typeface="Liberation Mono"/>
-                <a:ea typeface="Liberation Mono"/>
+                <a:ea typeface="Noto Sans CJK JP"/>
               </a:rPr>
               <a:t>    squeeze_me=True, struct_as_record=False</a:t>
             </a:r>
-            <a:endParaRPr sz="1300"/>
-          </a:p>
-          <a:p>
-            <a:pPr algn="l">
-              <a:lnSpc>
-                <a:spcPts val="1690"/>
-              </a:lnSpc>
-              <a:spcBef>
-                <a:spcPts val="0"/>
-              </a:spcBef>
-              <a:spcAft>
-                <a:spcPts val="0"/>
-              </a:spcAft>
-              <a:defRPr sz="1300" b="0">
+          </a:p>
+          <a:p>
+            <a:pPr algn="l" marL="0" indent="0">
+              <a:buNone/>
+              <a:lnSpc>
+                <a:spcPts val="1495"/>
+              </a:lnSpc>
+              <a:spcBef>
+                <a:spcPts val="0"/>
+              </a:spcBef>
+              <a:spcAft>
+                <a:spcPts val="0"/>
+              </a:spcAft>
+              <a:defRPr sz="1300" lang="ja-JP">
                 <a:latin typeface="Liberation Mono"/>
-              </a:defRPr>
-            </a:pPr>
-            <a:r>
-              <a:rPr sz="1300" b="0" lang="en-US">
+                <a:ea typeface="Noto Sans CJK JP"/>
+              </a:defRPr>
+            </a:pPr>
+            <a:r>
+              <a:rPr sz="1300" lang="ja-JP">
                 <a:solidFill>
                   <a:srgbClr val="303437"/>
                 </a:solidFill>
                 <a:latin typeface="Liberation Mono"/>
-                <a:ea typeface="Liberation Mono"/>
+                <a:ea typeface="Noto Sans CJK JP"/>
               </a:rPr>
               <a:t>)["synsets"]</a:t>
             </a:r>
-            <a:endParaRPr sz="1300"/>
-          </a:p>
-          <a:p>
-            <a:pPr algn="l">
-              <a:lnSpc>
-                <a:spcPts val="1690"/>
-              </a:lnSpc>
-              <a:spcBef>
-                <a:spcPts val="0"/>
-              </a:spcBef>
-              <a:spcAft>
-                <a:spcPts val="0"/>
-              </a:spcAft>
-              <a:defRPr sz="1300" b="0">
+          </a:p>
+          <a:p>
+            <a:pPr algn="l" marL="0" indent="0">
+              <a:buNone/>
+              <a:lnSpc>
+                <a:spcPts val="1495"/>
+              </a:lnSpc>
+              <a:spcBef>
+                <a:spcPts val="0"/>
+              </a:spcBef>
+              <a:spcAft>
+                <a:spcPts val="0"/>
+              </a:spcAft>
+              <a:defRPr sz="1300" lang="ja-JP">
                 <a:latin typeface="Liberation Mono"/>
-              </a:defRPr>
-            </a:pPr>
-            <a:r>
-              <a:rPr sz="1300" b="0" lang="en-US">
+                <a:ea typeface="Noto Sans CJK JP"/>
+              </a:defRPr>
+            </a:pPr>
+            <a:r>
+              <a:rPr sz="1300" lang="ja-JP">
                 <a:solidFill>
                   <a:srgbClr val="303437"/>
                 </a:solidFill>
                 <a:latin typeface="Liberation Mono"/>
-                <a:ea typeface="Liberation Mono"/>
+                <a:ea typeface="Noto Sans CJK JP"/>
               </a:rPr>
               <a:t>classes = [x for x in meta if x.num_children == 0]</a:t>
             </a:r>
-            <a:endParaRPr sz="1300"/>
-          </a:p>
-          <a:p>
-            <a:pPr algn="l">
-              <a:lnSpc>
-                <a:spcPts val="1690"/>
-              </a:lnSpc>
-              <a:spcBef>
-                <a:spcPts val="0"/>
-              </a:spcBef>
-              <a:spcAft>
-                <a:spcPts val="0"/>
-              </a:spcAft>
-              <a:defRPr sz="1300" b="0">
+          </a:p>
+          <a:p>
+            <a:pPr algn="l" marL="0" indent="0">
+              <a:buNone/>
+              <a:lnSpc>
+                <a:spcPts val="1495"/>
+              </a:lnSpc>
+              <a:spcBef>
+                <a:spcPts val="0"/>
+              </a:spcBef>
+              <a:spcAft>
+                <a:spcPts val="0"/>
+              </a:spcAft>
+              <a:defRPr sz="1300" lang="ja-JP">
                 <a:latin typeface="Liberation Mono"/>
-              </a:defRPr>
-            </a:pPr>
-            <a:r>
-              <a:rPr sz="1300" b="0" lang="en-US">
+                <a:ea typeface="Noto Sans CJK JP"/>
+              </a:defRPr>
+            </a:pPr>
+            <a:r>
+              <a:rPr sz="1300" lang="ja-JP">
                 <a:solidFill>
                   <a:srgbClr val="303437"/>
                 </a:solidFill>
                 <a:latin typeface="Liberation Mono"/>
-                <a:ea typeface="Liberation Mono"/>
+                <a:ea typeface="Noto Sans CJK JP"/>
               </a:rPr>
               <a:t>counts = [int(x.num_train_images) for x in classes]</a:t>
             </a:r>
-            <a:endParaRPr sz="1300"/>
-          </a:p>
-          <a:p>
-            <a:pPr algn="l">
-              <a:lnSpc>
-                <a:spcPts val="1690"/>
-              </a:lnSpc>
-              <a:spcBef>
-                <a:spcPts val="0"/>
-              </a:spcBef>
-              <a:spcAft>
-                <a:spcPts val="0"/>
-              </a:spcAft>
-              <a:defRPr sz="1300" b="0">
+          </a:p>
+          <a:p>
+            <a:pPr algn="l" marL="0" indent="0">
+              <a:buNone/>
+              <a:lnSpc>
+                <a:spcPts val="1495"/>
+              </a:lnSpc>
+              <a:spcBef>
+                <a:spcPts val="0"/>
+              </a:spcBef>
+              <a:spcAft>
+                <a:spcPts val="0"/>
+              </a:spcAft>
+              <a:defRPr sz="1300" lang="ja-JP">
                 <a:latin typeface="Liberation Mono"/>
-              </a:defRPr>
-            </a:pPr>
-            <a:r>
-              <a:rPr sz="1300" b="0" lang="en-US">
+                <a:ea typeface="Noto Sans CJK JP"/>
+              </a:defRPr>
+            </a:pPr>
+            <a:r>
+              <a:rPr sz="1300" lang="ja-JP">
                 <a:solidFill>
                   <a:srgbClr val="303437"/>
                 </a:solidFill>
                 <a:latin typeface="Liberation Mono"/>
-                <a:ea typeface="Liberation Mono"/>
+                <a:ea typeface="Noto Sans CJK JP"/>
               </a:rPr>
               <a:t>print(len(classes), sum(counts))</a:t>
             </a:r>
-            <a:endParaRPr sz="1300"/>
-          </a:p>
-          <a:p>
-            <a:pPr algn="l">
-              <a:lnSpc>
-                <a:spcPts val="1690"/>
-              </a:lnSpc>
-              <a:spcBef>
-                <a:spcPts val="0"/>
-              </a:spcBef>
-              <a:spcAft>
-                <a:spcPts val="0"/>
-              </a:spcAft>
-              <a:defRPr sz="1300" b="0">
+          </a:p>
+          <a:p>
+            <a:pPr algn="l" marL="0" indent="0">
+              <a:buNone/>
+              <a:lnSpc>
+                <a:spcPts val="1495"/>
+              </a:lnSpc>
+              <a:spcBef>
+                <a:spcPts val="0"/>
+              </a:spcBef>
+              <a:spcAft>
+                <a:spcPts val="0"/>
+              </a:spcAft>
+              <a:defRPr sz="1300" lang="ja-JP">
                 <a:latin typeface="Liberation Mono"/>
-              </a:defRPr>
-            </a:pPr>
-            <a:r>
-              <a:rPr sz="1300" b="0" lang="en-US">
+                <a:ea typeface="Noto Sans CJK JP"/>
+              </a:defRPr>
+            </a:pPr>
+            <a:r>
+              <a:rPr sz="1300" lang="ja-JP">
                 <a:solidFill>
                   <a:srgbClr val="303437"/>
                 </a:solidFill>
                 <a:latin typeface="Liberation Mono"/>
-                <a:ea typeface="Liberation Mono"/>
+                <a:ea typeface="Noto Sans CJK JP"/>
               </a:rPr>
               <a:t># 1000 1281167</a:t>
             </a:r>
-            <a:endParaRPr sz="1300"/>
           </a:p>
         </p:txBody>
       </p:sp>
@@ -38267,7 +38322,7 @@
         <p:spPr>
           <a:xfrm>
             <a:off x="548640" y="1655064"/>
-            <a:ext cx="8046720" cy="855980"/>
+            <a:ext cx="8046720" cy="798194"/>
           </a:xfrm>
           <a:prstGeom prst="rect">
             <a:avLst/>
@@ -38310,8 +38365,8 @@
         </p:nvSpPr>
         <p:spPr>
           <a:xfrm>
-            <a:off x="685800" y="1764792"/>
-            <a:ext cx="7772400" cy="746252"/>
+            <a:off x="548640" y="1655064"/>
+            <a:ext cx="8046720" cy="798194"/>
           </a:xfrm>
           <a:prstGeom prst="rect">
             <a:avLst/>
@@ -38319,90 +38374,94 @@
           <a:noFill/>
         </p:spPr>
         <p:txBody>
-          <a:bodyPr wrap="none" lIns="0" rIns="0" tIns="0" bIns="0" anchor="t">
+          <a:bodyPr wrap="none" lIns="152400" rIns="152400" tIns="114300" bIns="114300" anchor="t">
             <a:spAutoFit/>
           </a:bodyPr>
           <a:lstStyle/>
           <a:p>
-            <a:pPr algn="l">
-              <a:lnSpc>
-                <a:spcPts val="1690"/>
-              </a:lnSpc>
-              <a:spcBef>
-                <a:spcPts val="0"/>
-              </a:spcBef>
-              <a:spcAft>
-                <a:spcPts val="0"/>
-              </a:spcAft>
-              <a:defRPr sz="1300" b="0">
+            <a:pPr algn="l" marL="0" indent="0">
+              <a:buNone/>
+              <a:lnSpc>
+                <a:spcPts val="1495"/>
+              </a:lnSpc>
+              <a:spcBef>
+                <a:spcPts val="0"/>
+              </a:spcBef>
+              <a:spcAft>
+                <a:spcPts val="0"/>
+              </a:spcAft>
+              <a:defRPr sz="1300" b="0" lang="ja-JP">
                 <a:latin typeface="Liberation Mono"/>
-              </a:defRPr>
-            </a:pPr>
-            <a:r>
-              <a:rPr sz="1300" b="0" lang="en-US">
+                <a:ea typeface="Noto Sans CJK JP"/>
+              </a:defRPr>
+            </a:pPr>
+            <a:r>
+              <a:rPr sz="1300" lang="ja-JP">
                 <a:solidFill>
                   <a:srgbClr val="303437"/>
                 </a:solidFill>
                 <a:latin typeface="Liberation Mono"/>
-                <a:ea typeface="Liberation Mono"/>
+                <a:ea typeface="Noto Sans CJK JP"/>
               </a:rPr>
               <a:t>curl -L --fail -o imagenette.tgz \</a:t>
             </a:r>
             <a:endParaRPr sz="1300"/>
           </a:p>
           <a:p>
-            <a:pPr algn="l">
-              <a:lnSpc>
-                <a:spcPts val="1690"/>
-              </a:lnSpc>
-              <a:spcBef>
-                <a:spcPts val="0"/>
-              </a:spcBef>
-              <a:spcAft>
-                <a:spcPts val="0"/>
-              </a:spcAft>
-              <a:defRPr sz="1300" b="0">
+            <a:pPr algn="l" marL="0" indent="0">
+              <a:buNone/>
+              <a:lnSpc>
+                <a:spcPts val="1495"/>
+              </a:lnSpc>
+              <a:spcBef>
+                <a:spcPts val="0"/>
+              </a:spcBef>
+              <a:spcAft>
+                <a:spcPts val="0"/>
+              </a:spcAft>
+              <a:defRPr sz="1300" lang="ja-JP">
                 <a:latin typeface="Liberation Mono"/>
-              </a:defRPr>
-            </a:pPr>
-            <a:r>
-              <a:rPr sz="1300" b="0" lang="en-US">
+                <a:ea typeface="Noto Sans CJK JP"/>
+              </a:defRPr>
+            </a:pPr>
+            <a:r>
+              <a:rPr sz="1300" lang="ja-JP">
                 <a:solidFill>
                   <a:srgbClr val="303437"/>
                 </a:solidFill>
                 <a:latin typeface="Liberation Mono"/>
-                <a:ea typeface="Liberation Mono"/>
+                <a:ea typeface="Noto Sans CJK JP"/>
               </a:rPr>
               <a:t>  https://s3.amazonaws.com/fast-ai-imageclas/imagenette2-160.tgz</a:t>
             </a:r>
-            <a:endParaRPr sz="1300"/>
-          </a:p>
-          <a:p>
-            <a:pPr algn="l">
-              <a:lnSpc>
-                <a:spcPts val="1690"/>
-              </a:lnSpc>
-              <a:spcBef>
-                <a:spcPts val="0"/>
-              </a:spcBef>
-              <a:spcAft>
-                <a:spcPts val="0"/>
-              </a:spcAft>
-              <a:defRPr sz="1300" b="0">
+          </a:p>
+          <a:p>
+            <a:pPr algn="l" marL="0" indent="0">
+              <a:buNone/>
+              <a:lnSpc>
+                <a:spcPts val="1495"/>
+              </a:lnSpc>
+              <a:spcBef>
+                <a:spcPts val="0"/>
+              </a:spcBef>
+              <a:spcAft>
+                <a:spcPts val="0"/>
+              </a:spcAft>
+              <a:defRPr sz="1300" lang="ja-JP">
                 <a:latin typeface="Liberation Mono"/>
-              </a:defRPr>
-            </a:pPr>
-            <a:r>
-              <a:rPr sz="1300" b="0" lang="en-US">
+                <a:ea typeface="Noto Sans CJK JP"/>
+              </a:defRPr>
+            </a:pPr>
+            <a:r>
+              <a:rPr sz="1300" lang="ja-JP">
                 <a:solidFill>
                   <a:srgbClr val="303437"/>
                 </a:solidFill>
                 <a:latin typeface="Liberation Mono"/>
-                <a:ea typeface="Liberation Mono"/>
+                <a:ea typeface="Noto Sans CJK JP"/>
               </a:rPr>
               <a:t>tar -xzf imagenette.tgz</a:t>
             </a:r>
-            <a:endParaRPr sz="1300"/>
           </a:p>
         </p:txBody>
       </p:sp>
@@ -38465,7 +38524,7 @@
         <p:spPr>
           <a:xfrm>
             <a:off x="548640" y="2971800"/>
-            <a:ext cx="8046720" cy="1070610"/>
+            <a:ext cx="8046720" cy="988060"/>
           </a:xfrm>
           <a:prstGeom prst="rect">
             <a:avLst/>
@@ -38508,8 +38567,8 @@
         </p:nvSpPr>
         <p:spPr>
           <a:xfrm>
-            <a:off x="685800" y="3081528"/>
-            <a:ext cx="7772400" cy="960882"/>
+            <a:off x="548640" y="2971800"/>
+            <a:ext cx="8046720" cy="988060"/>
           </a:xfrm>
           <a:prstGeom prst="rect">
             <a:avLst/>
@@ -38517,117 +38576,122 @@
           <a:noFill/>
         </p:spPr>
         <p:txBody>
-          <a:bodyPr wrap="none" lIns="0" rIns="0" tIns="0" bIns="0" anchor="t">
+          <a:bodyPr wrap="none" lIns="152400" rIns="152400" tIns="114300" bIns="114300" anchor="t">
             <a:spAutoFit/>
           </a:bodyPr>
           <a:lstStyle/>
           <a:p>
-            <a:pPr algn="l">
-              <a:lnSpc>
-                <a:spcPts val="1690"/>
-              </a:lnSpc>
-              <a:spcBef>
-                <a:spcPts val="0"/>
-              </a:spcBef>
-              <a:spcAft>
-                <a:spcPts val="0"/>
-              </a:spcAft>
-              <a:defRPr sz="1300" b="0">
+            <a:pPr algn="l" marL="0" indent="0">
+              <a:buNone/>
+              <a:lnSpc>
+                <a:spcPts val="1495"/>
+              </a:lnSpc>
+              <a:spcBef>
+                <a:spcPts val="0"/>
+              </a:spcBef>
+              <a:spcAft>
+                <a:spcPts val="0"/>
+              </a:spcAft>
+              <a:defRPr sz="1300" b="0" lang="ja-JP">
                 <a:latin typeface="Liberation Mono"/>
-              </a:defRPr>
-            </a:pPr>
-            <a:r>
-              <a:rPr sz="1300" b="0" lang="en-US">
+                <a:ea typeface="Noto Sans CJK JP"/>
+              </a:defRPr>
+            </a:pPr>
+            <a:r>
+              <a:rPr sz="1300" lang="ja-JP">
                 <a:solidFill>
                   <a:srgbClr val="303437"/>
                 </a:solidFill>
                 <a:latin typeface="Liberation Mono"/>
-                <a:ea typeface="Liberation Mono"/>
+                <a:ea typeface="Noto Sans CJK JP"/>
               </a:rPr>
               <a:t>from torchvision.datasets import ImageFolder</a:t>
             </a:r>
             <a:endParaRPr sz="1300"/>
           </a:p>
           <a:p>
-            <a:pPr algn="l">
-              <a:lnSpc>
-                <a:spcPts val="1690"/>
-              </a:lnSpc>
-              <a:spcBef>
-                <a:spcPts val="0"/>
-              </a:spcBef>
-              <a:spcAft>
-                <a:spcPts val="0"/>
-              </a:spcAft>
-              <a:defRPr sz="1300" b="0">
+            <a:pPr algn="l" marL="0" indent="0">
+              <a:buNone/>
+              <a:lnSpc>
+                <a:spcPts val="1495"/>
+              </a:lnSpc>
+              <a:spcBef>
+                <a:spcPts val="0"/>
+              </a:spcBef>
+              <a:spcAft>
+                <a:spcPts val="0"/>
+              </a:spcAft>
+              <a:defRPr sz="1300" lang="ja-JP">
                 <a:latin typeface="Liberation Mono"/>
-              </a:defRPr>
-            </a:pPr>
-            <a:r>
-              <a:rPr sz="1300" b="0" lang="en-US">
+                <a:ea typeface="Noto Sans CJK JP"/>
+              </a:defRPr>
+            </a:pPr>
+            <a:r>
+              <a:rPr sz="1300" lang="ja-JP">
                 <a:solidFill>
                   <a:srgbClr val="303437"/>
                 </a:solidFill>
                 <a:latin typeface="Liberation Mono"/>
-                <a:ea typeface="Liberation Mono"/>
+                <a:ea typeface="Noto Sans CJK JP"/>
               </a:rPr>
               <a:t>data = ImageFolder("imagenette2-160/train")</a:t>
             </a:r>
-            <a:endParaRPr sz="1300"/>
-          </a:p>
-          <a:p>
-            <a:pPr algn="l">
-              <a:lnSpc>
-                <a:spcPts val="1690"/>
-              </a:lnSpc>
-              <a:spcBef>
-                <a:spcPts val="0"/>
-              </a:spcBef>
-              <a:spcAft>
-                <a:spcPts val="0"/>
-              </a:spcAft>
-              <a:defRPr sz="1300" b="0">
+          </a:p>
+          <a:p>
+            <a:pPr algn="l" marL="0" indent="0">
+              <a:buNone/>
+              <a:lnSpc>
+                <a:spcPts val="1495"/>
+              </a:lnSpc>
+              <a:spcBef>
+                <a:spcPts val="0"/>
+              </a:spcBef>
+              <a:spcAft>
+                <a:spcPts val="0"/>
+              </a:spcAft>
+              <a:defRPr sz="1300" lang="ja-JP">
                 <a:latin typeface="Liberation Mono"/>
-              </a:defRPr>
-            </a:pPr>
-            <a:r>
-              <a:rPr sz="1300" b="0" lang="en-US">
+                <a:ea typeface="Noto Sans CJK JP"/>
+              </a:defRPr>
+            </a:pPr>
+            <a:r>
+              <a:rPr sz="1300" lang="ja-JP">
                 <a:solidFill>
                   <a:srgbClr val="303437"/>
                 </a:solidFill>
                 <a:latin typeface="Liberation Mono"/>
-                <a:ea typeface="Liberation Mono"/>
+                <a:ea typeface="Noto Sans CJK JP"/>
               </a:rPr>
               <a:t>image, label = data[0]</a:t>
             </a:r>
-            <a:endParaRPr sz="1300"/>
-          </a:p>
-          <a:p>
-            <a:pPr algn="l">
-              <a:lnSpc>
-                <a:spcPts val="1690"/>
-              </a:lnSpc>
-              <a:spcBef>
-                <a:spcPts val="0"/>
-              </a:spcBef>
-              <a:spcAft>
-                <a:spcPts val="0"/>
-              </a:spcAft>
-              <a:defRPr sz="1300" b="0">
+          </a:p>
+          <a:p>
+            <a:pPr algn="l" marL="0" indent="0">
+              <a:buNone/>
+              <a:lnSpc>
+                <a:spcPts val="1495"/>
+              </a:lnSpc>
+              <a:spcBef>
+                <a:spcPts val="0"/>
+              </a:spcBef>
+              <a:spcAft>
+                <a:spcPts val="0"/>
+              </a:spcAft>
+              <a:defRPr sz="1300" lang="ja-JP">
                 <a:latin typeface="Liberation Mono"/>
-              </a:defRPr>
-            </a:pPr>
-            <a:r>
-              <a:rPr sz="1300" b="0" lang="en-US">
+                <a:ea typeface="Noto Sans CJK JP"/>
+              </a:defRPr>
+            </a:pPr>
+            <a:r>
+              <a:rPr sz="1300" lang="ja-JP">
                 <a:solidFill>
                   <a:srgbClr val="303437"/>
                 </a:solidFill>
                 <a:latin typeface="Liberation Mono"/>
-                <a:ea typeface="Liberation Mono"/>
+                <a:ea typeface="Noto Sans CJK JP"/>
               </a:rPr>
               <a:t>print(data.classes[label], image.size)</a:t>
             </a:r>
-            <a:endParaRPr sz="1300"/>
           </a:p>
         </p:txBody>
       </p:sp>
@@ -38871,7 +38935,7 @@
         <p:spPr>
           <a:xfrm>
             <a:off x="548640" y="1481328"/>
-            <a:ext cx="8046720" cy="1956562"/>
+            <a:ext cx="8046720" cy="1747520"/>
           </a:xfrm>
           <a:prstGeom prst="rect">
             <a:avLst/>
@@ -38914,8 +38978,8 @@
         </p:nvSpPr>
         <p:spPr>
           <a:xfrm>
-            <a:off x="685800" y="1609344"/>
-            <a:ext cx="7772400" cy="1700530"/>
+            <a:off x="548640" y="1481328"/>
+            <a:ext cx="8046720" cy="1747520"/>
           </a:xfrm>
           <a:prstGeom prst="rect">
             <a:avLst/>
@@ -38923,225 +38987,234 @@
           <a:noFill/>
         </p:spPr>
         <p:txBody>
-          <a:bodyPr wrap="none" lIns="0" rIns="0" tIns="0" bIns="0" anchor="t">
+          <a:bodyPr wrap="none" lIns="152400" rIns="152400" tIns="114300" bIns="114300" anchor="t">
             <a:spAutoFit/>
           </a:bodyPr>
           <a:lstStyle/>
           <a:p>
-            <a:pPr algn="l">
-              <a:lnSpc>
-                <a:spcPts val="1690"/>
-              </a:lnSpc>
-              <a:spcBef>
-                <a:spcPts val="0"/>
-              </a:spcBef>
-              <a:spcAft>
-                <a:spcPts val="0"/>
-              </a:spcAft>
-              <a:defRPr sz="1300" b="0">
+            <a:pPr algn="l" marL="0" indent="0">
+              <a:buNone/>
+              <a:lnSpc>
+                <a:spcPts val="1495"/>
+              </a:lnSpc>
+              <a:spcBef>
+                <a:spcPts val="0"/>
+              </a:spcBef>
+              <a:spcAft>
+                <a:spcPts val="0"/>
+              </a:spcAft>
+              <a:defRPr sz="1300" b="0" lang="ja-JP">
                 <a:latin typeface="Liberation Mono"/>
-              </a:defRPr>
-            </a:pPr>
-            <a:r>
-              <a:rPr sz="1300" b="0" lang="en-US">
+                <a:ea typeface="Noto Sans CJK JP"/>
+              </a:defRPr>
+            </a:pPr>
+            <a:r>
+              <a:rPr sz="1300" lang="ja-JP">
                 <a:solidFill>
                   <a:srgbClr val="303437"/>
                 </a:solidFill>
                 <a:latin typeface="Liberation Mono"/>
-                <a:ea typeface="Liberation Mono"/>
+                <a:ea typeface="Noto Sans CJK JP"/>
               </a:rPr>
               <a:t>from PIL import Image</a:t>
             </a:r>
             <a:endParaRPr sz="1300"/>
           </a:p>
           <a:p>
-            <a:pPr algn="l">
-              <a:lnSpc>
-                <a:spcPts val="1690"/>
-              </a:lnSpc>
-              <a:spcBef>
-                <a:spcPts val="0"/>
-              </a:spcBef>
-              <a:spcAft>
-                <a:spcPts val="0"/>
-              </a:spcAft>
-              <a:defRPr sz="1300" b="0">
+            <a:pPr algn="l" marL="0" indent="0">
+              <a:buNone/>
+              <a:lnSpc>
+                <a:spcPts val="1495"/>
+              </a:lnSpc>
+              <a:spcBef>
+                <a:spcPts val="0"/>
+              </a:spcBef>
+              <a:spcAft>
+                <a:spcPts val="0"/>
+              </a:spcAft>
+              <a:defRPr sz="1300" lang="ja-JP">
                 <a:latin typeface="Liberation Mono"/>
-              </a:defRPr>
-            </a:pPr>
-            <a:r>
-              <a:rPr sz="1300" b="0" lang="en-US">
+                <a:ea typeface="Noto Sans CJK JP"/>
+              </a:defRPr>
+            </a:pPr>
+            <a:r>
+              <a:rPr sz="1300" lang="ja-JP">
                 <a:solidFill>
                   <a:srgbClr val="303437"/>
                 </a:solidFill>
                 <a:latin typeface="Liberation Mono"/>
-                <a:ea typeface="Liberation Mono"/>
+                <a:ea typeface="Noto Sans CJK JP"/>
               </a:rPr>
               <a:t>from torchvision.models import resnet50, ResNet50_Weights</a:t>
             </a:r>
-            <a:endParaRPr sz="1300"/>
-          </a:p>
-          <a:p>
-            <a:pPr algn="l">
-              <a:lnSpc>
-                <a:spcPts val="1690"/>
-              </a:lnSpc>
-              <a:spcBef>
-                <a:spcPts val="0"/>
-              </a:spcBef>
-              <a:spcAft>
-                <a:spcPts val="0"/>
-              </a:spcAft>
-              <a:defRPr sz="1300" b="0">
+          </a:p>
+          <a:p>
+            <a:pPr algn="l" marL="0" indent="0">
+              <a:buNone/>
+              <a:lnSpc>
+                <a:spcPts val="1495"/>
+              </a:lnSpc>
+              <a:spcBef>
+                <a:spcPts val="0"/>
+              </a:spcBef>
+              <a:spcAft>
+                <a:spcPts val="0"/>
+              </a:spcAft>
+              <a:defRPr sz="1300" lang="ja-JP">
                 <a:latin typeface="Liberation Mono"/>
-              </a:defRPr>
-            </a:pPr>
-            <a:r>
-              <a:rPr sz="1300" b="0" lang="en-US">
+                <a:ea typeface="Noto Sans CJK JP"/>
+              </a:defRPr>
+            </a:pPr>
+            <a:r>
+              <a:rPr sz="1300" lang="ja-JP">
                 <a:solidFill>
                   <a:srgbClr val="303437"/>
                 </a:solidFill>
                 <a:latin typeface="Liberation Mono"/>
-                <a:ea typeface="Liberation Mono"/>
+                <a:ea typeface="Noto Sans CJK JP"/>
               </a:rPr>
               <a:t/>
             </a:r>
-            <a:endParaRPr sz="1300"/>
-          </a:p>
-          <a:p>
-            <a:pPr algn="l">
-              <a:lnSpc>
-                <a:spcPts val="1690"/>
-              </a:lnSpc>
-              <a:spcBef>
-                <a:spcPts val="0"/>
-              </a:spcBef>
-              <a:spcAft>
-                <a:spcPts val="0"/>
-              </a:spcAft>
-              <a:defRPr sz="1300" b="0">
+          </a:p>
+          <a:p>
+            <a:pPr algn="l" marL="0" indent="0">
+              <a:buNone/>
+              <a:lnSpc>
+                <a:spcPts val="1495"/>
+              </a:lnSpc>
+              <a:spcBef>
+                <a:spcPts val="0"/>
+              </a:spcBef>
+              <a:spcAft>
+                <a:spcPts val="0"/>
+              </a:spcAft>
+              <a:defRPr sz="1300" lang="ja-JP">
                 <a:latin typeface="Liberation Mono"/>
-              </a:defRPr>
-            </a:pPr>
-            <a:r>
-              <a:rPr sz="1300" b="0" lang="en-US">
+                <a:ea typeface="Noto Sans CJK JP"/>
+              </a:defRPr>
+            </a:pPr>
+            <a:r>
+              <a:rPr sz="1300" lang="ja-JP">
                 <a:solidFill>
                   <a:srgbClr val="303437"/>
                 </a:solidFill>
                 <a:latin typeface="Liberation Mono"/>
-                <a:ea typeface="Liberation Mono"/>
+                <a:ea typeface="Noto Sans CJK JP"/>
               </a:rPr>
               <a:t>weights = ResNet50_Weights.IMAGENET1K_V1</a:t>
             </a:r>
-            <a:endParaRPr sz="1300"/>
-          </a:p>
-          <a:p>
-            <a:pPr algn="l">
-              <a:lnSpc>
-                <a:spcPts val="1690"/>
-              </a:lnSpc>
-              <a:spcBef>
-                <a:spcPts val="0"/>
-              </a:spcBef>
-              <a:spcAft>
-                <a:spcPts val="0"/>
-              </a:spcAft>
-              <a:defRPr sz="1300" b="0">
+          </a:p>
+          <a:p>
+            <a:pPr algn="l" marL="0" indent="0">
+              <a:buNone/>
+              <a:lnSpc>
+                <a:spcPts val="1495"/>
+              </a:lnSpc>
+              <a:spcBef>
+                <a:spcPts val="0"/>
+              </a:spcBef>
+              <a:spcAft>
+                <a:spcPts val="0"/>
+              </a:spcAft>
+              <a:defRPr sz="1300" lang="ja-JP">
                 <a:latin typeface="Liberation Mono"/>
-              </a:defRPr>
-            </a:pPr>
-            <a:r>
-              <a:rPr sz="1300" b="0" lang="en-US">
+                <a:ea typeface="Noto Sans CJK JP"/>
+              </a:defRPr>
+            </a:pPr>
+            <a:r>
+              <a:rPr sz="1300" lang="ja-JP">
                 <a:solidFill>
                   <a:srgbClr val="303437"/>
                 </a:solidFill>
                 <a:latin typeface="Liberation Mono"/>
-                <a:ea typeface="Liberation Mono"/>
+                <a:ea typeface="Noto Sans CJK JP"/>
               </a:rPr>
               <a:t>model = resnet50(weights=weights).eval()</a:t>
             </a:r>
-            <a:endParaRPr sz="1300"/>
-          </a:p>
-          <a:p>
-            <a:pPr algn="l">
-              <a:lnSpc>
-                <a:spcPts val="1690"/>
-              </a:lnSpc>
-              <a:spcBef>
-                <a:spcPts val="0"/>
-              </a:spcBef>
-              <a:spcAft>
-                <a:spcPts val="0"/>
-              </a:spcAft>
-              <a:defRPr sz="1300" b="0">
+          </a:p>
+          <a:p>
+            <a:pPr algn="l" marL="0" indent="0">
+              <a:buNone/>
+              <a:lnSpc>
+                <a:spcPts val="1495"/>
+              </a:lnSpc>
+              <a:spcBef>
+                <a:spcPts val="0"/>
+              </a:spcBef>
+              <a:spcAft>
+                <a:spcPts val="0"/>
+              </a:spcAft>
+              <a:defRPr sz="1300" lang="ja-JP">
                 <a:latin typeface="Liberation Mono"/>
-              </a:defRPr>
-            </a:pPr>
-            <a:r>
-              <a:rPr sz="1300" b="0" lang="en-US">
+                <a:ea typeface="Noto Sans CJK JP"/>
+              </a:defRPr>
+            </a:pPr>
+            <a:r>
+              <a:rPr sz="1300" lang="ja-JP">
                 <a:solidFill>
                   <a:srgbClr val="303437"/>
                 </a:solidFill>
                 <a:latin typeface="Liberation Mono"/>
-                <a:ea typeface="Liberation Mono"/>
+                <a:ea typeface="Noto Sans CJK JP"/>
               </a:rPr>
               <a:t>image = Image.open("example.JPEG").convert("RGB")</a:t>
             </a:r>
-            <a:endParaRPr sz="1300"/>
-          </a:p>
-          <a:p>
-            <a:pPr algn="l">
-              <a:lnSpc>
-                <a:spcPts val="1690"/>
-              </a:lnSpc>
-              <a:spcBef>
-                <a:spcPts val="0"/>
-              </a:spcBef>
-              <a:spcAft>
-                <a:spcPts val="0"/>
-              </a:spcAft>
-              <a:defRPr sz="1300" b="0">
+          </a:p>
+          <a:p>
+            <a:pPr algn="l" marL="0" indent="0">
+              <a:buNone/>
+              <a:lnSpc>
+                <a:spcPts val="1495"/>
+              </a:lnSpc>
+              <a:spcBef>
+                <a:spcPts val="0"/>
+              </a:spcBef>
+              <a:spcAft>
+                <a:spcPts val="0"/>
+              </a:spcAft>
+              <a:defRPr sz="1300" lang="ja-JP">
                 <a:latin typeface="Liberation Mono"/>
-              </a:defRPr>
-            </a:pPr>
-            <a:r>
-              <a:rPr sz="1300" b="0" lang="en-US">
+                <a:ea typeface="Noto Sans CJK JP"/>
+              </a:defRPr>
+            </a:pPr>
+            <a:r>
+              <a:rPr sz="1300" lang="ja-JP">
                 <a:solidFill>
                   <a:srgbClr val="303437"/>
                 </a:solidFill>
                 <a:latin typeface="Liberation Mono"/>
-                <a:ea typeface="Liberation Mono"/>
+                <a:ea typeface="Noto Sans CJK JP"/>
               </a:rPr>
               <a:t>batch = weights.transforms()(image).unsqueeze(0)</a:t>
             </a:r>
-            <a:endParaRPr sz="1300"/>
-          </a:p>
-          <a:p>
-            <a:pPr algn="l">
-              <a:lnSpc>
-                <a:spcPts val="1690"/>
-              </a:lnSpc>
-              <a:spcBef>
-                <a:spcPts val="0"/>
-              </a:spcBef>
-              <a:spcAft>
-                <a:spcPts val="0"/>
-              </a:spcAft>
-              <a:defRPr sz="1300" b="0">
+          </a:p>
+          <a:p>
+            <a:pPr algn="l" marL="0" indent="0">
+              <a:buNone/>
+              <a:lnSpc>
+                <a:spcPts val="1495"/>
+              </a:lnSpc>
+              <a:spcBef>
+                <a:spcPts val="0"/>
+              </a:spcBef>
+              <a:spcAft>
+                <a:spcPts val="0"/>
+              </a:spcAft>
+              <a:defRPr sz="1300" lang="ja-JP">
                 <a:latin typeface="Liberation Mono"/>
-              </a:defRPr>
-            </a:pPr>
-            <a:r>
-              <a:rPr sz="1300" b="0" lang="en-US">
+                <a:ea typeface="Noto Sans CJK JP"/>
+              </a:defRPr>
+            </a:pPr>
+            <a:r>
+              <a:rPr sz="1300" lang="ja-JP">
                 <a:solidFill>
                   <a:srgbClr val="303437"/>
                 </a:solidFill>
                 <a:latin typeface="Liberation Mono"/>
-                <a:ea typeface="Liberation Mono"/>
+                <a:ea typeface="Noto Sans CJK JP"/>
               </a:rPr>
               <a:t># batch.shape == [1, 3, 224, 224]</a:t>
             </a:r>
-            <a:endParaRPr sz="1300"/>
           </a:p>
         </p:txBody>
       </p:sp>
@@ -39294,22 +39367,24 @@
           </a:xfrm>
         </p:spPr>
         <p:txBody>
-          <a:bodyPr wrap="none" lIns="0" rIns="0" tIns="0" bIns="0" anchor="t"/>
+          <a:bodyPr wrap="square" lIns="0" rIns="0" tIns="0" bIns="0" anchor="t"/>
           <a:lstStyle/>
           <a:p>
             <a:pPr algn="l" marL="0" indent="0">
+              <a:buNone/>
               <a:lnSpc>
                 <a:spcPct val="110000"/>
               </a:lnSpc>
               <a:spcBef>
                 <a:spcPts val="0"/>
               </a:spcBef>
-              <a:spcAft>
-                <a:spcPts val="0"/>
-              </a:spcAft>
-              <a:defRPr sz="2800" b="1">
-                <a:latin typeface="Noto Sans CJK JP"/>
-              </a:defRPr>
+              <a:defRPr sz="2800" b="1" lang="ja-JP">
+                <a:latin typeface="Noto Sans CJK JP"/>
+                <a:ea typeface="Noto Sans CJK JP"/>
+              </a:defRPr>
+              <a:spcAft>
+                <a:spcPts val="600"/>
+              </a:spcAft>
               <a:buNone/>
             </a:pPr>
             <a:r>
@@ -39320,7 +39395,7 @@
                 <a:latin typeface="Noto Sans CJK JP"/>
                 <a:ea typeface="Noto Sans CJK JP"/>
               </a:rPr>
-              <a:t>データと作成方法の参考文献</a:t>
+              <a:t>参考文献と参照した内容</a:t>
             </a:r>
             <a:endParaRPr sz="2800"/>
             <a:endParaRPr sz="2800"/>
@@ -39348,22 +39423,24 @@
           <a:lstStyle/>
           <a:p>
             <a:pPr algn="l" marL="0" indent="0">
+              <a:buNone/>
               <a:lnSpc>
                 <a:spcPct val="110000"/>
               </a:lnSpc>
-              <a:spcBef>
-                <a:spcPts val="0"/>
-              </a:spcBef>
-              <a:defRPr sz="1400" b="1">
-                <a:latin typeface="Noto Sans CJK JP"/>
-              </a:defRPr>
-              <a:spcAft>
-                <a:spcPts val="0"/>
-              </a:spcAft>
-              <a:buNone/>
-            </a:pPr>
-            <a:r>
-              <a:rPr sz="1400" b="1" lang="ja-JP">
+              <a:defRPr sz="1400" b="1" lang="ja-JP">
+                <a:latin typeface="Noto Sans CJK JP"/>
+                <a:ea typeface="Noto Sans CJK JP"/>
+              </a:defRPr>
+              <a:spcBef>
+                <a:spcPts val="0"/>
+              </a:spcBef>
+              <a:spcAft>
+                <a:spcPts val="0"/>
+              </a:spcAft>
+              <a:buNone/>
+            </a:pPr>
+            <a:r>
+              <a:rPr sz="1400" lang="ja-JP" b="1">
                 <a:solidFill>
                   <a:srgbClr val="FFFEF8"/>
                 </a:solidFill>
@@ -39385,8 +39462,8 @@
         </p:nvSpPr>
         <p:spPr>
           <a:xfrm>
-            <a:off x="548640" y="1371600"/>
-            <a:ext cx="8046720" cy="292608"/>
+            <a:off x="594360" y="1280160"/>
+            <a:ext cx="7955279" cy="320040"/>
           </a:xfrm>
           <a:prstGeom prst="rect">
             <a:avLst/>
@@ -39394,12 +39471,13 @@
           <a:noFill/>
         </p:spPr>
         <p:txBody>
-          <a:bodyPr wrap="none" lIns="0" rIns="0" tIns="0" bIns="0" anchor="t">
+          <a:bodyPr wrap="square" lIns="0" rIns="0" tIns="0" bIns="0" anchor="t">
             <a:spAutoFit/>
           </a:bodyPr>
           <a:lstStyle/>
           <a:p>
-            <a:pPr algn="l">
+            <a:pPr algn="l" marL="0" indent="0">
+              <a:buNone/>
               <a:lnSpc>
                 <a:spcPct val="110000"/>
               </a:lnSpc>
@@ -39407,14 +39485,15 @@
                 <a:spcPts val="0"/>
               </a:spcBef>
               <a:spcAft>
-                <a:spcPts val="0"/>
-              </a:spcAft>
-              <a:defRPr sz="1800" b="0">
-                <a:latin typeface="Noto Sans CJK JP"/>
-              </a:defRPr>
-            </a:pPr>
-            <a:r>
-              <a:rPr sz="1800" b="0" lang="ja-JP">
+                <a:spcPts val="600"/>
+              </a:spcAft>
+              <a:defRPr sz="1900" lang="ja-JP">
+                <a:latin typeface="Noto Sans CJK JP"/>
+                <a:ea typeface="Noto Sans CJK JP"/>
+              </a:defRPr>
+            </a:pPr>
+            <a:r>
+              <a:rPr sz="1900" lang="ja-JP">
                 <a:solidFill>
                   <a:srgbClr val="303437"/>
                 </a:solidFill>
@@ -39423,7 +39502,6 @@
               </a:rPr>
               <a:t>Deng et al. (2009). ImageNet. CVPR.</a:t>
             </a:r>
-            <a:endParaRPr sz="1800"/>
           </a:p>
         </p:txBody>
       </p:sp>
@@ -39435,8 +39513,8 @@
         </p:nvSpPr>
         <p:spPr>
           <a:xfrm>
-            <a:off x="548640" y="1773936"/>
-            <a:ext cx="8046720" cy="219456"/>
+            <a:off x="594360" y="1600200"/>
+            <a:ext cx="7955279" cy="292608"/>
           </a:xfrm>
           <a:prstGeom prst="rect">
             <a:avLst/>
@@ -39444,12 +39522,13 @@
           <a:noFill/>
         </p:spPr>
         <p:txBody>
-          <a:bodyPr wrap="none" lIns="0" rIns="0" tIns="0" bIns="0" anchor="t">
+          <a:bodyPr wrap="square" lIns="0" rIns="0" tIns="0" bIns="0" anchor="t">
             <a:spAutoFit/>
           </a:bodyPr>
           <a:lstStyle/>
           <a:p>
-            <a:pPr algn="l">
+            <a:pPr algn="l" marL="0" indent="0">
+              <a:buNone/>
               <a:lnSpc>
                 <a:spcPct val="110000"/>
               </a:lnSpc>
@@ -39457,23 +39536,23 @@
                 <a:spcPts val="0"/>
               </a:spcBef>
               <a:spcAft>
-                <a:spcPts val="0"/>
-              </a:spcAft>
-              <a:defRPr sz="1000" b="0">
-                <a:latin typeface="Liberation Sans"/>
-              </a:defRPr>
-            </a:pPr>
-            <a:r>
-              <a:rPr sz="1000" b="0" lang="en-US">
+                <a:spcPts val="600"/>
+              </a:spcAft>
+              <a:defRPr sz="1700" lang="ja-JP">
+                <a:latin typeface="Noto Sans CJK JP"/>
+                <a:ea typeface="Noto Sans CJK JP"/>
+              </a:defRPr>
+            </a:pPr>
+            <a:r>
+              <a:rPr sz="1700" lang="ja-JP">
                 <a:solidFill>
                   <a:srgbClr val="626669"/>
                 </a:solidFill>
-                <a:latin typeface="Liberation Sans"/>
-                <a:ea typeface="Liberation Sans"/>
-              </a:rPr>
-              <a:t>https://image-net.org/static_files/papers/imagenet_cvpr09.pdf</a:t>
-            </a:r>
-            <a:endParaRPr sz="1000"/>
+                <a:latin typeface="Noto Sans CJK JP"/>
+                <a:ea typeface="Noto Sans CJK JP"/>
+              </a:rPr>
+              <a:t>大規模画像データベースの目的、階層、収集方法を示す原著。</a:t>
+            </a:r>
           </a:p>
         </p:txBody>
       </p:sp>
@@ -39485,8 +39564,8 @@
         </p:nvSpPr>
         <p:spPr>
           <a:xfrm>
-            <a:off x="548640" y="1984248"/>
-            <a:ext cx="8046720" cy="292608"/>
+            <a:off x="594360" y="2011680"/>
+            <a:ext cx="7955279" cy="256032"/>
           </a:xfrm>
           <a:prstGeom prst="rect">
             <a:avLst/>
@@ -39494,12 +39573,13 @@
           <a:noFill/>
         </p:spPr>
         <p:txBody>
-          <a:bodyPr wrap="none" lIns="0" rIns="0" tIns="0" bIns="0" anchor="t">
+          <a:bodyPr wrap="square" lIns="0" rIns="0" tIns="0" bIns="0" anchor="t">
             <a:spAutoFit/>
           </a:bodyPr>
           <a:lstStyle/>
           <a:p>
-            <a:pPr algn="l">
+            <a:pPr algn="l" marL="0" indent="0">
+              <a:buNone/>
               <a:lnSpc>
                 <a:spcPct val="110000"/>
               </a:lnSpc>
@@ -39509,21 +39589,21 @@
               <a:spcAft>
                 <a:spcPts val="0"/>
               </a:spcAft>
-              <a:defRPr sz="1800" b="0">
-                <a:latin typeface="Noto Sans CJK JP"/>
-              </a:defRPr>
-            </a:pPr>
-            <a:r>
-              <a:rPr sz="1800" b="0" lang="ja-JP">
-                <a:solidFill>
-                  <a:srgbClr val="303437"/>
-                </a:solidFill>
-                <a:latin typeface="Noto Sans CJK JP"/>
-                <a:ea typeface="Noto Sans CJK JP"/>
-              </a:rPr>
-              <a:t>Russakovsky et al. (2015). ILSVRC. IJCV.</a:t>
-            </a:r>
-            <a:endParaRPr sz="1800"/>
+              <a:defRPr sz="850" lang="ja-JP">
+                <a:latin typeface="Liberation Sans"/>
+                <a:ea typeface="Noto Sans CJK JP"/>
+              </a:defRPr>
+            </a:pPr>
+            <a:r>
+              <a:rPr sz="850" lang="ja-JP">
+                <a:solidFill>
+                  <a:srgbClr val="626669"/>
+                </a:solidFill>
+                <a:latin typeface="Liberation Sans"/>
+                <a:ea typeface="Noto Sans CJK JP"/>
+              </a:rPr>
+              <a:t>https://image-net.org/static_files/papers/imagenet_cvpr09.pdf</a:t>
+            </a:r>
           </a:p>
         </p:txBody>
       </p:sp>
@@ -39535,8 +39615,8 @@
         </p:nvSpPr>
         <p:spPr>
           <a:xfrm>
-            <a:off x="548640" y="2386584"/>
-            <a:ext cx="8046720" cy="219456"/>
+            <a:off x="594360" y="2194560"/>
+            <a:ext cx="7955279" cy="320040"/>
           </a:xfrm>
           <a:prstGeom prst="rect">
             <a:avLst/>
@@ -39544,12 +39624,13 @@
           <a:noFill/>
         </p:spPr>
         <p:txBody>
-          <a:bodyPr wrap="none" lIns="0" rIns="0" tIns="0" bIns="0" anchor="t">
+          <a:bodyPr wrap="square" lIns="0" rIns="0" tIns="0" bIns="0" anchor="t">
             <a:spAutoFit/>
           </a:bodyPr>
           <a:lstStyle/>
           <a:p>
-            <a:pPr algn="l">
+            <a:pPr algn="l" marL="0" indent="0">
+              <a:buNone/>
               <a:lnSpc>
                 <a:spcPct val="110000"/>
               </a:lnSpc>
@@ -39557,23 +39638,23 @@
                 <a:spcPts val="0"/>
               </a:spcBef>
               <a:spcAft>
-                <a:spcPts val="0"/>
-              </a:spcAft>
-              <a:defRPr sz="1000" b="0">
-                <a:latin typeface="Liberation Sans"/>
-              </a:defRPr>
-            </a:pPr>
-            <a:r>
-              <a:rPr sz="1000" b="0" lang="en-US">
-                <a:solidFill>
-                  <a:srgbClr val="626669"/>
-                </a:solidFill>
-                <a:latin typeface="Liberation Sans"/>
-                <a:ea typeface="Liberation Sans"/>
-              </a:rPr>
-              <a:t>https://arxiv.org/abs/1409.0575</a:t>
-            </a:r>
-            <a:endParaRPr sz="1000"/>
+                <a:spcPts val="600"/>
+              </a:spcAft>
+              <a:defRPr sz="1900" lang="ja-JP">
+                <a:latin typeface="Noto Sans CJK JP"/>
+                <a:ea typeface="Noto Sans CJK JP"/>
+              </a:defRPr>
+            </a:pPr>
+            <a:r>
+              <a:rPr sz="1900" lang="ja-JP">
+                <a:solidFill>
+                  <a:srgbClr val="303437"/>
+                </a:solidFill>
+                <a:latin typeface="Noto Sans CJK JP"/>
+                <a:ea typeface="Noto Sans CJK JP"/>
+              </a:rPr>
+              <a:t>Russakovsky et al. (2015). ILSVRC. IJCV.</a:t>
+            </a:r>
           </a:p>
         </p:txBody>
       </p:sp>
@@ -39585,8 +39666,8 @@
         </p:nvSpPr>
         <p:spPr>
           <a:xfrm>
-            <a:off x="548640" y="2596896"/>
-            <a:ext cx="8046720" cy="292608"/>
+            <a:off x="594360" y="2514600"/>
+            <a:ext cx="7955279" cy="292608"/>
           </a:xfrm>
           <a:prstGeom prst="rect">
             <a:avLst/>
@@ -39594,12 +39675,13 @@
           <a:noFill/>
         </p:spPr>
         <p:txBody>
-          <a:bodyPr wrap="none" lIns="0" rIns="0" tIns="0" bIns="0" anchor="t">
+          <a:bodyPr wrap="square" lIns="0" rIns="0" tIns="0" bIns="0" anchor="t">
             <a:spAutoFit/>
           </a:bodyPr>
           <a:lstStyle/>
           <a:p>
-            <a:pPr algn="l">
+            <a:pPr algn="l" marL="0" indent="0">
+              <a:buNone/>
               <a:lnSpc>
                 <a:spcPct val="110000"/>
               </a:lnSpc>
@@ -39607,23 +39689,23 @@
                 <a:spcPts val="0"/>
               </a:spcBef>
               <a:spcAft>
-                <a:spcPts val="0"/>
-              </a:spcAft>
-              <a:defRPr sz="1800" b="0">
-                <a:latin typeface="Noto Sans CJK JP"/>
-              </a:defRPr>
-            </a:pPr>
-            <a:r>
-              <a:rPr sz="1800" b="0" lang="ja-JP">
-                <a:solidFill>
-                  <a:srgbClr val="303437"/>
-                </a:solidFill>
-                <a:latin typeface="Noto Sans CJK JP"/>
-                <a:ea typeface="Noto Sans CJK JP"/>
-              </a:rPr>
-              <a:t>ImageNet公式サイトとDownload</a:t>
-            </a:r>
-            <a:endParaRPr sz="1800"/>
+                <a:spcPts val="600"/>
+              </a:spcAft>
+              <a:defRPr sz="1700" lang="ja-JP">
+                <a:latin typeface="Noto Sans CJK JP"/>
+                <a:ea typeface="Noto Sans CJK JP"/>
+              </a:defRPr>
+            </a:pPr>
+            <a:r>
+              <a:rPr sz="1700" lang="ja-JP">
+                <a:solidFill>
+                  <a:srgbClr val="626669"/>
+                </a:solidFill>
+                <a:latin typeface="Noto Sans CJK JP"/>
+                <a:ea typeface="Noto Sans CJK JP"/>
+              </a:rPr>
+              <a:t>ImageNetを使う大会の課題、規模、評価法、初期の性能。</a:t>
+            </a:r>
           </a:p>
         </p:txBody>
       </p:sp>
@@ -39635,8 +39717,8 @@
         </p:nvSpPr>
         <p:spPr>
           <a:xfrm>
-            <a:off x="548640" y="2999232"/>
-            <a:ext cx="8046720" cy="219456"/>
+            <a:off x="594360" y="2926080"/>
+            <a:ext cx="7955279" cy="256032"/>
           </a:xfrm>
           <a:prstGeom prst="rect">
             <a:avLst/>
@@ -39644,12 +39726,13 @@
           <a:noFill/>
         </p:spPr>
         <p:txBody>
-          <a:bodyPr wrap="none" lIns="0" rIns="0" tIns="0" bIns="0" anchor="t">
+          <a:bodyPr wrap="square" lIns="0" rIns="0" tIns="0" bIns="0" anchor="t">
             <a:spAutoFit/>
           </a:bodyPr>
           <a:lstStyle/>
           <a:p>
-            <a:pPr algn="l">
+            <a:pPr algn="l" marL="0" indent="0">
+              <a:buNone/>
               <a:lnSpc>
                 <a:spcPct val="110000"/>
               </a:lnSpc>
@@ -39659,21 +39742,21 @@
               <a:spcAft>
                 <a:spcPts val="0"/>
               </a:spcAft>
-              <a:defRPr sz="1000" b="0">
+              <a:defRPr sz="850" lang="ja-JP">
                 <a:latin typeface="Liberation Sans"/>
-              </a:defRPr>
-            </a:pPr>
-            <a:r>
-              <a:rPr sz="1000" b="0" lang="en-US">
+                <a:ea typeface="Noto Sans CJK JP"/>
+              </a:defRPr>
+            </a:pPr>
+            <a:r>
+              <a:rPr sz="850" lang="ja-JP">
                 <a:solidFill>
                   <a:srgbClr val="626669"/>
                 </a:solidFill>
                 <a:latin typeface="Liberation Sans"/>
-                <a:ea typeface="Liberation Sans"/>
-              </a:rPr>
-              <a:t>https://www.image-net.org/download.php</a:t>
-            </a:r>
-            <a:endParaRPr sz="1000"/>
+                <a:ea typeface="Noto Sans CJK JP"/>
+              </a:rPr>
+              <a:t>https://arxiv.org/abs/1409.0575</a:t>
+            </a:r>
           </a:p>
         </p:txBody>
       </p:sp>
@@ -39685,8 +39768,8 @@
         </p:nvSpPr>
         <p:spPr>
           <a:xfrm>
-            <a:off x="548640" y="3209544"/>
-            <a:ext cx="8046720" cy="292608"/>
+            <a:off x="594360" y="3108960"/>
+            <a:ext cx="7955279" cy="320040"/>
           </a:xfrm>
           <a:prstGeom prst="rect">
             <a:avLst/>
@@ -39694,12 +39777,13 @@
           <a:noFill/>
         </p:spPr>
         <p:txBody>
-          <a:bodyPr wrap="none" lIns="0" rIns="0" tIns="0" bIns="0" anchor="t">
+          <a:bodyPr wrap="square" lIns="0" rIns="0" tIns="0" bIns="0" anchor="t">
             <a:spAutoFit/>
           </a:bodyPr>
           <a:lstStyle/>
           <a:p>
-            <a:pPr algn="l">
+            <a:pPr algn="l" marL="0" indent="0">
+              <a:buNone/>
               <a:lnSpc>
                 <a:spcPct val="110000"/>
               </a:lnSpc>
@@ -39707,23 +39791,23 @@
                 <a:spcPts val="0"/>
               </a:spcBef>
               <a:spcAft>
-                <a:spcPts val="0"/>
-              </a:spcAft>
-              <a:defRPr sz="1800" b="0">
-                <a:latin typeface="Noto Sans CJK JP"/>
-              </a:defRPr>
-            </a:pPr>
-            <a:r>
-              <a:rPr sz="1800" b="0" lang="ja-JP">
+                <a:spcPts val="600"/>
+              </a:spcAft>
+              <a:defRPr sz="1900" lang="ja-JP">
+                <a:latin typeface="Noto Sans CJK JP"/>
+                <a:ea typeface="Noto Sans CJK JP"/>
+              </a:defRPr>
+            </a:pPr>
+            <a:r>
+              <a:rPr sz="1900" lang="ja-JP">
                 <a:solidFill>
                   <a:srgbClr val="303437"/>
                 </a:solidFill>
                 <a:latin typeface="Noto Sans CJK JP"/>
                 <a:ea typeface="Noto Sans CJK JP"/>
               </a:rPr>
-              <a:t>ImageNetの2021年の更新</a:t>
-            </a:r>
-            <a:endParaRPr sz="1800"/>
+              <a:t>ImageNet公式サイトとDownload</a:t>
+            </a:r>
           </a:p>
         </p:txBody>
       </p:sp>
@@ -39735,8 +39819,8 @@
         </p:nvSpPr>
         <p:spPr>
           <a:xfrm>
-            <a:off x="548640" y="3611880"/>
-            <a:ext cx="8046720" cy="219456"/>
+            <a:off x="594360" y="3429000"/>
+            <a:ext cx="7955279" cy="292608"/>
           </a:xfrm>
           <a:prstGeom prst="rect">
             <a:avLst/>
@@ -39744,12 +39828,13 @@
           <a:noFill/>
         </p:spPr>
         <p:txBody>
-          <a:bodyPr wrap="none" lIns="0" rIns="0" tIns="0" bIns="0" anchor="t">
+          <a:bodyPr wrap="square" lIns="0" rIns="0" tIns="0" bIns="0" anchor="t">
             <a:spAutoFit/>
           </a:bodyPr>
           <a:lstStyle/>
           <a:p>
-            <a:pPr algn="l">
+            <a:pPr algn="l" marL="0" indent="0">
+              <a:buNone/>
               <a:lnSpc>
                 <a:spcPct val="110000"/>
               </a:lnSpc>
@@ -39757,23 +39842,23 @@
                 <a:spcPts val="0"/>
               </a:spcBef>
               <a:spcAft>
-                <a:spcPts val="0"/>
-              </a:spcAft>
-              <a:defRPr sz="1000" b="0">
-                <a:latin typeface="Liberation Sans"/>
-              </a:defRPr>
-            </a:pPr>
-            <a:r>
-              <a:rPr sz="1000" b="0" lang="en-US">
+                <a:spcPts val="600"/>
+              </a:spcAft>
+              <a:defRPr sz="1700" lang="ja-JP">
+                <a:latin typeface="Noto Sans CJK JP"/>
+                <a:ea typeface="Noto Sans CJK JP"/>
+              </a:defRPr>
+            </a:pPr>
+            <a:r>
+              <a:rPr sz="1700" lang="ja-JP">
                 <a:solidFill>
                   <a:srgbClr val="626669"/>
                 </a:solidFill>
-                <a:latin typeface="Liberation Sans"/>
-                <a:ea typeface="Liberation Sans"/>
-              </a:rPr>
-              <a:t>https://www.image-net.org/update-mar-11-2021.php</a:t>
-            </a:r>
-            <a:endParaRPr sz="1000"/>
+                <a:latin typeface="Noto Sans CJK JP"/>
+                <a:ea typeface="Noto Sans CJK JP"/>
+              </a:rPr>
+              <a:t>データの種類、入手先、利用条件の案内。</a:t>
+            </a:r>
           </a:p>
         </p:txBody>
       </p:sp>
@@ -39785,8 +39870,8 @@
         </p:nvSpPr>
         <p:spPr>
           <a:xfrm>
-            <a:off x="548640" y="3822191"/>
-            <a:ext cx="8046720" cy="292608"/>
+            <a:off x="594360" y="3840480"/>
+            <a:ext cx="7955279" cy="256032"/>
           </a:xfrm>
           <a:prstGeom prst="rect">
             <a:avLst/>
@@ -39794,12 +39879,13 @@
           <a:noFill/>
         </p:spPr>
         <p:txBody>
-          <a:bodyPr wrap="none" lIns="0" rIns="0" tIns="0" bIns="0" anchor="t">
+          <a:bodyPr wrap="square" lIns="0" rIns="0" tIns="0" bIns="0" anchor="t">
             <a:spAutoFit/>
           </a:bodyPr>
           <a:lstStyle/>
           <a:p>
-            <a:pPr algn="l">
+            <a:pPr algn="l" marL="0" indent="0">
+              <a:buNone/>
               <a:lnSpc>
                 <a:spcPct val="110000"/>
               </a:lnSpc>
@@ -39809,21 +39895,21 @@
               <a:spcAft>
                 <a:spcPts val="0"/>
               </a:spcAft>
-              <a:defRPr sz="1800" b="0">
-                <a:latin typeface="Noto Sans CJK JP"/>
-              </a:defRPr>
-            </a:pPr>
-            <a:r>
-              <a:rPr sz="1800" b="0" lang="ja-JP">
-                <a:solidFill>
-                  <a:srgbClr val="303437"/>
-                </a:solidFill>
-                <a:latin typeface="Noto Sans CJK JP"/>
-                <a:ea typeface="Noto Sans CJK JP"/>
-              </a:rPr>
-              <a:t>Imagenetteの公開リポジトリ</a:t>
-            </a:r>
-            <a:endParaRPr sz="1800"/>
+              <a:defRPr sz="850" lang="ja-JP">
+                <a:latin typeface="Liberation Sans"/>
+                <a:ea typeface="Noto Sans CJK JP"/>
+              </a:defRPr>
+            </a:pPr>
+            <a:r>
+              <a:rPr sz="850" lang="ja-JP">
+                <a:solidFill>
+                  <a:srgbClr val="626669"/>
+                </a:solidFill>
+                <a:latin typeface="Liberation Sans"/>
+                <a:ea typeface="Noto Sans CJK JP"/>
+              </a:rPr>
+              <a:t>https://www.image-net.org/download.php</a:t>
+            </a:r>
           </a:p>
         </p:txBody>
       </p:sp>
@@ -39835,8 +39921,8 @@
         </p:nvSpPr>
         <p:spPr>
           <a:xfrm>
-            <a:off x="548640" y="4224528"/>
-            <a:ext cx="8046720" cy="219456"/>
+            <a:off x="594360" y="4023360"/>
+            <a:ext cx="7955279" cy="320040"/>
           </a:xfrm>
           <a:prstGeom prst="rect">
             <a:avLst/>
@@ -39844,12 +39930,13 @@
           <a:noFill/>
         </p:spPr>
         <p:txBody>
-          <a:bodyPr wrap="none" lIns="0" rIns="0" tIns="0" bIns="0" anchor="t">
+          <a:bodyPr wrap="square" lIns="0" rIns="0" tIns="0" bIns="0" anchor="t">
             <a:spAutoFit/>
           </a:bodyPr>
           <a:lstStyle/>
           <a:p>
-            <a:pPr algn="l">
+            <a:pPr algn="l" marL="0" indent="0">
+              <a:buNone/>
               <a:lnSpc>
                 <a:spcPct val="110000"/>
               </a:lnSpc>
@@ -39857,23 +39944,23 @@
                 <a:spcPts val="0"/>
               </a:spcBef>
               <a:spcAft>
-                <a:spcPts val="0"/>
-              </a:spcAft>
-              <a:defRPr sz="1000" b="0">
-                <a:latin typeface="Liberation Sans"/>
-              </a:defRPr>
-            </a:pPr>
-            <a:r>
-              <a:rPr sz="1000" b="0" lang="en-US">
-                <a:solidFill>
-                  <a:srgbClr val="626669"/>
-                </a:solidFill>
-                <a:latin typeface="Liberation Sans"/>
-                <a:ea typeface="Liberation Sans"/>
-              </a:rPr>
-              <a:t>https://github.com/fastai/imagenette</a:t>
-            </a:r>
-            <a:endParaRPr sz="1000"/>
+                <a:spcPts val="600"/>
+              </a:spcAft>
+              <a:defRPr sz="1900" lang="ja-JP">
+                <a:latin typeface="Noto Sans CJK JP"/>
+                <a:ea typeface="Noto Sans CJK JP"/>
+              </a:defRPr>
+            </a:pPr>
+            <a:r>
+              <a:rPr sz="1900" lang="ja-JP">
+                <a:solidFill>
+                  <a:srgbClr val="303437"/>
+                </a:solidFill>
+                <a:latin typeface="Noto Sans CJK JP"/>
+                <a:ea typeface="Noto Sans CJK JP"/>
+              </a:rPr>
+              <a:t>ImageNetの2021年の更新</a:t>
+            </a:r>
           </a:p>
         </p:txBody>
       </p:sp>
@@ -39885,8 +39972,8 @@
         </p:nvSpPr>
         <p:spPr>
           <a:xfrm>
-            <a:off x="548640" y="4434840"/>
-            <a:ext cx="8046720" cy="292608"/>
+            <a:off x="594360" y="4343400"/>
+            <a:ext cx="7955279" cy="292608"/>
           </a:xfrm>
           <a:prstGeom prst="rect">
             <a:avLst/>
@@ -39894,12 +39981,13 @@
           <a:noFill/>
         </p:spPr>
         <p:txBody>
-          <a:bodyPr wrap="none" lIns="0" rIns="0" tIns="0" bIns="0" anchor="t">
+          <a:bodyPr wrap="square" lIns="0" rIns="0" tIns="0" bIns="0" anchor="t">
             <a:spAutoFit/>
           </a:bodyPr>
           <a:lstStyle/>
           <a:p>
-            <a:pPr algn="l">
+            <a:pPr algn="l" marL="0" indent="0">
+              <a:buNone/>
               <a:lnSpc>
                 <a:spcPct val="110000"/>
               </a:lnSpc>
@@ -39907,23 +39995,23 @@
                 <a:spcPts val="0"/>
               </a:spcBef>
               <a:spcAft>
-                <a:spcPts val="0"/>
-              </a:spcAft>
-              <a:defRPr sz="1800" b="0">
-                <a:latin typeface="Noto Sans CJK JP"/>
-              </a:defRPr>
-            </a:pPr>
-            <a:r>
-              <a:rPr sz="1800" b="0" lang="ja-JP">
-                <a:solidFill>
-                  <a:srgbClr val="303437"/>
-                </a:solidFill>
-                <a:latin typeface="Noto Sans CJK JP"/>
-                <a:ea typeface="Noto Sans CJK JP"/>
-              </a:rPr>
-              <a:t>ILSVRC 2012公式devkit</a:t>
-            </a:r>
-            <a:endParaRPr sz="1800"/>
+                <a:spcPts val="600"/>
+              </a:spcAft>
+              <a:defRPr sz="1700" lang="ja-JP">
+                <a:latin typeface="Noto Sans CJK JP"/>
+                <a:ea typeface="Noto Sans CJK JP"/>
+              </a:defRPr>
+            </a:pPr>
+            <a:r>
+              <a:rPr sz="1700" lang="ja-JP">
+                <a:solidFill>
+                  <a:srgbClr val="626669"/>
+                </a:solidFill>
+                <a:latin typeface="Noto Sans CJK JP"/>
+                <a:ea typeface="Noto Sans CJK JP"/>
+              </a:rPr>
+              <a:t>person配下のカテゴリに関するプライバシー対応の根拠。</a:t>
+            </a:r>
           </a:p>
         </p:txBody>
       </p:sp>
@@ -39935,8 +40023,8 @@
         </p:nvSpPr>
         <p:spPr>
           <a:xfrm>
-            <a:off x="548640" y="4837176"/>
-            <a:ext cx="8046720" cy="219456"/>
+            <a:off x="594360" y="4754880"/>
+            <a:ext cx="7955279" cy="256032"/>
           </a:xfrm>
           <a:prstGeom prst="rect">
             <a:avLst/>
@@ -39944,12 +40032,13 @@
           <a:noFill/>
         </p:spPr>
         <p:txBody>
-          <a:bodyPr wrap="none" lIns="0" rIns="0" tIns="0" bIns="0" anchor="t">
+          <a:bodyPr wrap="square" lIns="0" rIns="0" tIns="0" bIns="0" anchor="t">
             <a:spAutoFit/>
           </a:bodyPr>
           <a:lstStyle/>
           <a:p>
-            <a:pPr algn="l">
+            <a:pPr algn="l" marL="0" indent="0">
+              <a:buNone/>
               <a:lnSpc>
                 <a:spcPct val="110000"/>
               </a:lnSpc>
@@ -39959,21 +40048,21 @@
               <a:spcAft>
                 <a:spcPts val="0"/>
               </a:spcAft>
-              <a:defRPr sz="1000" b="0">
+              <a:defRPr sz="850" lang="ja-JP">
                 <a:latin typeface="Liberation Sans"/>
-              </a:defRPr>
-            </a:pPr>
-            <a:r>
-              <a:rPr sz="1000" b="0" lang="en-US">
+                <a:ea typeface="Noto Sans CJK JP"/>
+              </a:defRPr>
+            </a:pPr>
+            <a:r>
+              <a:rPr sz="850" lang="ja-JP">
                 <a:solidFill>
                   <a:srgbClr val="626669"/>
                 </a:solidFill>
                 <a:latin typeface="Liberation Sans"/>
-                <a:ea typeface="Liberation Sans"/>
-              </a:rPr>
-              <a:t>https://image-net.org/data/ILSVRC/2012/ILSVRC2012_devkit_t12.tar.gz</a:t>
-            </a:r>
-            <a:endParaRPr sz="1000"/>
+                <a:ea typeface="Noto Sans CJK JP"/>
+              </a:rPr>
+              <a:t>https://www.image-net.org/update-mar-11-2021.php</a:t>
+            </a:r>
           </a:p>
         </p:txBody>
       </p:sp>
@@ -40012,22 +40101,24 @@
           </a:xfrm>
         </p:spPr>
         <p:txBody>
-          <a:bodyPr wrap="none" lIns="0" rIns="0" tIns="0" bIns="0" anchor="t"/>
+          <a:bodyPr wrap="square" lIns="0" rIns="0" tIns="0" bIns="0" anchor="t"/>
           <a:lstStyle/>
           <a:p>
             <a:pPr algn="l" marL="0" indent="0">
+              <a:buNone/>
               <a:lnSpc>
                 <a:spcPct val="110000"/>
               </a:lnSpc>
               <a:spcBef>
                 <a:spcPts val="0"/>
               </a:spcBef>
-              <a:spcAft>
-                <a:spcPts val="0"/>
-              </a:spcAft>
-              <a:defRPr sz="2800" b="1">
-                <a:latin typeface="Noto Sans CJK JP"/>
-              </a:defRPr>
+              <a:defRPr sz="2800" b="1" lang="ja-JP">
+                <a:latin typeface="Noto Sans CJK JP"/>
+                <a:ea typeface="Noto Sans CJK JP"/>
+              </a:defRPr>
+              <a:spcAft>
+                <a:spcPts val="600"/>
+              </a:spcAft>
               <a:buNone/>
             </a:pPr>
             <a:r>
@@ -40038,7 +40129,7 @@
                 <a:latin typeface="Noto Sans CJK JP"/>
                 <a:ea typeface="Noto Sans CJK JP"/>
               </a:rPr>
-              <a:t>モデルと関連評価の参考文献</a:t>
+              <a:t>参考文献と参照した内容</a:t>
             </a:r>
             <a:endParaRPr sz="2800"/>
             <a:endParaRPr sz="2800"/>
@@ -40066,22 +40157,24 @@
           <a:lstStyle/>
           <a:p>
             <a:pPr algn="l" marL="0" indent="0">
+              <a:buNone/>
               <a:lnSpc>
                 <a:spcPct val="110000"/>
               </a:lnSpc>
-              <a:spcBef>
-                <a:spcPts val="0"/>
-              </a:spcBef>
-              <a:defRPr sz="1400" b="1">
-                <a:latin typeface="Noto Sans CJK JP"/>
-              </a:defRPr>
-              <a:spcAft>
-                <a:spcPts val="0"/>
-              </a:spcAft>
-              <a:buNone/>
-            </a:pPr>
-            <a:r>
-              <a:rPr sz="1400" b="1" lang="ja-JP">
+              <a:defRPr sz="1400" b="1" lang="ja-JP">
+                <a:latin typeface="Noto Sans CJK JP"/>
+                <a:ea typeface="Noto Sans CJK JP"/>
+              </a:defRPr>
+              <a:spcBef>
+                <a:spcPts val="0"/>
+              </a:spcBef>
+              <a:spcAft>
+                <a:spcPts val="0"/>
+              </a:spcAft>
+              <a:buNone/>
+            </a:pPr>
+            <a:r>
+              <a:rPr sz="1400" lang="ja-JP" b="1">
                 <a:solidFill>
                   <a:srgbClr val="FFFEF8"/>
                 </a:solidFill>
@@ -40103,8 +40196,8 @@
         </p:nvSpPr>
         <p:spPr>
           <a:xfrm>
-            <a:off x="548640" y="1371600"/>
-            <a:ext cx="8046720" cy="292608"/>
+            <a:off x="594360" y="1280160"/>
+            <a:ext cx="7955279" cy="320040"/>
           </a:xfrm>
           <a:prstGeom prst="rect">
             <a:avLst/>
@@ -40112,12 +40205,13 @@
           <a:noFill/>
         </p:spPr>
         <p:txBody>
-          <a:bodyPr wrap="none" lIns="0" rIns="0" tIns="0" bIns="0" anchor="t">
+          <a:bodyPr wrap="square" lIns="0" rIns="0" tIns="0" bIns="0" anchor="t">
             <a:spAutoFit/>
           </a:bodyPr>
           <a:lstStyle/>
           <a:p>
-            <a:pPr algn="l">
+            <a:pPr algn="l" marL="0" indent="0">
+              <a:buNone/>
               <a:lnSpc>
                 <a:spcPct val="110000"/>
               </a:lnSpc>
@@ -40125,23 +40219,23 @@
                 <a:spcPts val="0"/>
               </a:spcBef>
               <a:spcAft>
-                <a:spcPts val="0"/>
-              </a:spcAft>
-              <a:defRPr sz="1800" b="0">
-                <a:latin typeface="Noto Sans CJK JP"/>
-              </a:defRPr>
-            </a:pPr>
-            <a:r>
-              <a:rPr sz="1800" b="0" lang="ja-JP">
+                <a:spcPts val="600"/>
+              </a:spcAft>
+              <a:defRPr sz="1900" lang="ja-JP">
+                <a:latin typeface="Noto Sans CJK JP"/>
+                <a:ea typeface="Noto Sans CJK JP"/>
+              </a:defRPr>
+            </a:pPr>
+            <a:r>
+              <a:rPr sz="1900" lang="ja-JP">
                 <a:solidFill>
                   <a:srgbClr val="303437"/>
                 </a:solidFill>
                 <a:latin typeface="Noto Sans CJK JP"/>
                 <a:ea typeface="Noto Sans CJK JP"/>
               </a:rPr>
-              <a:t>He et al. (2016). Deep Residual Learning. CVPR.</a:t>
-            </a:r>
-            <a:endParaRPr sz="1800"/>
+              <a:t>Imagenetteの公開リポジトリ</a:t>
+            </a:r>
           </a:p>
         </p:txBody>
       </p:sp>
@@ -40153,8 +40247,8 @@
         </p:nvSpPr>
         <p:spPr>
           <a:xfrm>
-            <a:off x="548640" y="1773936"/>
-            <a:ext cx="8046720" cy="219456"/>
+            <a:off x="594360" y="1600200"/>
+            <a:ext cx="7955279" cy="292608"/>
           </a:xfrm>
           <a:prstGeom prst="rect">
             <a:avLst/>
@@ -40162,12 +40256,13 @@
           <a:noFill/>
         </p:spPr>
         <p:txBody>
-          <a:bodyPr wrap="none" lIns="0" rIns="0" tIns="0" bIns="0" anchor="t">
+          <a:bodyPr wrap="square" lIns="0" rIns="0" tIns="0" bIns="0" anchor="t">
             <a:spAutoFit/>
           </a:bodyPr>
           <a:lstStyle/>
           <a:p>
-            <a:pPr algn="l">
+            <a:pPr algn="l" marL="0" indent="0">
+              <a:buNone/>
               <a:lnSpc>
                 <a:spcPct val="110000"/>
               </a:lnSpc>
@@ -40175,23 +40270,23 @@
                 <a:spcPts val="0"/>
               </a:spcBef>
               <a:spcAft>
-                <a:spcPts val="0"/>
-              </a:spcAft>
-              <a:defRPr sz="1000" b="0">
-                <a:latin typeface="Liberation Sans"/>
-              </a:defRPr>
-            </a:pPr>
-            <a:r>
-              <a:rPr sz="1000" b="0" lang="en-US">
+                <a:spcPts val="600"/>
+              </a:spcAft>
+              <a:defRPr sz="1700" lang="ja-JP">
+                <a:latin typeface="Noto Sans CJK JP"/>
+                <a:ea typeface="Noto Sans CJK JP"/>
+              </a:defRPr>
+            </a:pPr>
+            <a:r>
+              <a:rPr sz="1700" lang="ja-JP">
                 <a:solidFill>
                   <a:srgbClr val="626669"/>
                 </a:solidFill>
-                <a:latin typeface="Liberation Sans"/>
-                <a:ea typeface="Liberation Sans"/>
-              </a:rPr>
-              <a:t>https://arxiv.org/abs/1512.03385</a:t>
-            </a:r>
-            <a:endParaRPr sz="1000"/>
+                <a:latin typeface="Noto Sans CJK JP"/>
+                <a:ea typeface="Noto Sans CJK JP"/>
+              </a:rPr>
+              <a:t>10クラスの画像例と、画像サイズの実測に使った配布元。</a:t>
+            </a:r>
           </a:p>
         </p:txBody>
       </p:sp>
@@ -40203,8 +40298,8 @@
         </p:nvSpPr>
         <p:spPr>
           <a:xfrm>
-            <a:off x="548640" y="1984248"/>
-            <a:ext cx="8046720" cy="292608"/>
+            <a:off x="594360" y="2011680"/>
+            <a:ext cx="7955279" cy="256032"/>
           </a:xfrm>
           <a:prstGeom prst="rect">
             <a:avLst/>
@@ -40212,12 +40307,13 @@
           <a:noFill/>
         </p:spPr>
         <p:txBody>
-          <a:bodyPr wrap="none" lIns="0" rIns="0" tIns="0" bIns="0" anchor="t">
+          <a:bodyPr wrap="square" lIns="0" rIns="0" tIns="0" bIns="0" anchor="t">
             <a:spAutoFit/>
           </a:bodyPr>
           <a:lstStyle/>
           <a:p>
-            <a:pPr algn="l">
+            <a:pPr algn="l" marL="0" indent="0">
+              <a:buNone/>
               <a:lnSpc>
                 <a:spcPct val="110000"/>
               </a:lnSpc>
@@ -40227,21 +40323,21 @@
               <a:spcAft>
                 <a:spcPts val="0"/>
               </a:spcAft>
-              <a:defRPr sz="1800" b="0">
-                <a:latin typeface="Noto Sans CJK JP"/>
-              </a:defRPr>
-            </a:pPr>
-            <a:r>
-              <a:rPr sz="1800" b="0" lang="ja-JP">
-                <a:solidFill>
-                  <a:srgbClr val="303437"/>
-                </a:solidFill>
-                <a:latin typeface="Noto Sans CJK JP"/>
-                <a:ea typeface="Noto Sans CJK JP"/>
-              </a:rPr>
-              <a:t>Siméoni et al. (2025). DINOv3.</a:t>
-            </a:r>
-            <a:endParaRPr sz="1800"/>
+              <a:defRPr sz="850" lang="ja-JP">
+                <a:latin typeface="Liberation Sans"/>
+                <a:ea typeface="Noto Sans CJK JP"/>
+              </a:defRPr>
+            </a:pPr>
+            <a:r>
+              <a:rPr sz="850" lang="ja-JP">
+                <a:solidFill>
+                  <a:srgbClr val="626669"/>
+                </a:solidFill>
+                <a:latin typeface="Liberation Sans"/>
+                <a:ea typeface="Noto Sans CJK JP"/>
+              </a:rPr>
+              <a:t>https://github.com/fastai/imagenette</a:t>
+            </a:r>
           </a:p>
         </p:txBody>
       </p:sp>
@@ -40253,8 +40349,8 @@
         </p:nvSpPr>
         <p:spPr>
           <a:xfrm>
-            <a:off x="548640" y="2386584"/>
-            <a:ext cx="8046720" cy="219456"/>
+            <a:off x="594360" y="2194560"/>
+            <a:ext cx="7955279" cy="320040"/>
           </a:xfrm>
           <a:prstGeom prst="rect">
             <a:avLst/>
@@ -40262,12 +40358,13 @@
           <a:noFill/>
         </p:spPr>
         <p:txBody>
-          <a:bodyPr wrap="none" lIns="0" rIns="0" tIns="0" bIns="0" anchor="t">
+          <a:bodyPr wrap="square" lIns="0" rIns="0" tIns="0" bIns="0" anchor="t">
             <a:spAutoFit/>
           </a:bodyPr>
           <a:lstStyle/>
           <a:p>
-            <a:pPr algn="l">
+            <a:pPr algn="l" marL="0" indent="0">
+              <a:buNone/>
               <a:lnSpc>
                 <a:spcPct val="110000"/>
               </a:lnSpc>
@@ -40275,23 +40372,23 @@
                 <a:spcPts val="0"/>
               </a:spcBef>
               <a:spcAft>
-                <a:spcPts val="0"/>
-              </a:spcAft>
-              <a:defRPr sz="1000" b="0">
-                <a:latin typeface="Liberation Sans"/>
-              </a:defRPr>
-            </a:pPr>
-            <a:r>
-              <a:rPr sz="1000" b="0" lang="en-US">
-                <a:solidFill>
-                  <a:srgbClr val="626669"/>
-                </a:solidFill>
-                <a:latin typeface="Liberation Sans"/>
-                <a:ea typeface="Liberation Sans"/>
-              </a:rPr>
-              <a:t>https://arxiv.org/abs/2508.10104</a:t>
-            </a:r>
-            <a:endParaRPr sz="1000"/>
+                <a:spcPts val="600"/>
+              </a:spcAft>
+              <a:defRPr sz="1900" lang="ja-JP">
+                <a:latin typeface="Noto Sans CJK JP"/>
+                <a:ea typeface="Noto Sans CJK JP"/>
+              </a:defRPr>
+            </a:pPr>
+            <a:r>
+              <a:rPr sz="1900" lang="ja-JP">
+                <a:solidFill>
+                  <a:srgbClr val="303437"/>
+                </a:solidFill>
+                <a:latin typeface="Noto Sans CJK JP"/>
+                <a:ea typeface="Noto Sans CJK JP"/>
+              </a:rPr>
+              <a:t>ILSVRC 2012公式devkit</a:t>
+            </a:r>
           </a:p>
         </p:txBody>
       </p:sp>
@@ -40303,8 +40400,8 @@
         </p:nvSpPr>
         <p:spPr>
           <a:xfrm>
-            <a:off x="548640" y="2596896"/>
-            <a:ext cx="8046720" cy="292608"/>
+            <a:off x="594360" y="2514600"/>
+            <a:ext cx="7955279" cy="292608"/>
           </a:xfrm>
           <a:prstGeom prst="rect">
             <a:avLst/>
@@ -40312,12 +40409,13 @@
           <a:noFill/>
         </p:spPr>
         <p:txBody>
-          <a:bodyPr wrap="none" lIns="0" rIns="0" tIns="0" bIns="0" anchor="t">
+          <a:bodyPr wrap="square" lIns="0" rIns="0" tIns="0" bIns="0" anchor="t">
             <a:spAutoFit/>
           </a:bodyPr>
           <a:lstStyle/>
           <a:p>
-            <a:pPr algn="l">
+            <a:pPr algn="l" marL="0" indent="0">
+              <a:buNone/>
               <a:lnSpc>
                 <a:spcPct val="110000"/>
               </a:lnSpc>
@@ -40325,23 +40423,23 @@
                 <a:spcPts val="0"/>
               </a:spcBef>
               <a:spcAft>
-                <a:spcPts val="0"/>
-              </a:spcAft>
-              <a:defRPr sz="1800" b="0">
-                <a:latin typeface="Noto Sans CJK JP"/>
-              </a:defRPr>
-            </a:pPr>
-            <a:r>
-              <a:rPr sz="1800" b="0" lang="ja-JP">
-                <a:solidFill>
-                  <a:srgbClr val="303437"/>
-                </a:solidFill>
-                <a:latin typeface="Noto Sans CJK JP"/>
-                <a:ea typeface="Noto Sans CJK JP"/>
-              </a:rPr>
-              <a:t>Beyer et al. (2020). Are we done with ImageNet?</a:t>
-            </a:r>
-            <a:endParaRPr sz="1800"/>
+                <a:spcPts val="600"/>
+              </a:spcAft>
+              <a:defRPr sz="1700" lang="ja-JP">
+                <a:latin typeface="Noto Sans CJK JP"/>
+                <a:ea typeface="Noto Sans CJK JP"/>
+              </a:defRPr>
+            </a:pPr>
+            <a:r>
+              <a:rPr sz="1700" lang="ja-JP">
+                <a:solidFill>
+                  <a:srgbClr val="626669"/>
+                </a:solidFill>
+                <a:latin typeface="Noto Sans CJK JP"/>
+                <a:ea typeface="Noto Sans CJK JP"/>
+              </a:rPr>
+              <a:t>1,000クラスの定義と学習画像数の全件集計に使用。</a:t>
+            </a:r>
           </a:p>
         </p:txBody>
       </p:sp>
@@ -40353,8 +40451,8 @@
         </p:nvSpPr>
         <p:spPr>
           <a:xfrm>
-            <a:off x="548640" y="2999232"/>
-            <a:ext cx="8046720" cy="219456"/>
+            <a:off x="594360" y="2926080"/>
+            <a:ext cx="7955279" cy="256032"/>
           </a:xfrm>
           <a:prstGeom prst="rect">
             <a:avLst/>
@@ -40362,12 +40460,13 @@
           <a:noFill/>
         </p:spPr>
         <p:txBody>
-          <a:bodyPr wrap="none" lIns="0" rIns="0" tIns="0" bIns="0" anchor="t">
+          <a:bodyPr wrap="square" lIns="0" rIns="0" tIns="0" bIns="0" anchor="t">
             <a:spAutoFit/>
           </a:bodyPr>
           <a:lstStyle/>
           <a:p>
-            <a:pPr algn="l">
+            <a:pPr algn="l" marL="0" indent="0">
+              <a:buNone/>
               <a:lnSpc>
                 <a:spcPct val="110000"/>
               </a:lnSpc>
@@ -40377,21 +40476,21 @@
               <a:spcAft>
                 <a:spcPts val="0"/>
               </a:spcAft>
-              <a:defRPr sz="1000" b="0">
+              <a:defRPr sz="850" lang="ja-JP">
                 <a:latin typeface="Liberation Sans"/>
-              </a:defRPr>
-            </a:pPr>
-            <a:r>
-              <a:rPr sz="1000" b="0" lang="en-US">
+                <a:ea typeface="Noto Sans CJK JP"/>
+              </a:defRPr>
+            </a:pPr>
+            <a:r>
+              <a:rPr sz="850" lang="ja-JP">
                 <a:solidFill>
                   <a:srgbClr val="626669"/>
                 </a:solidFill>
                 <a:latin typeface="Liberation Sans"/>
-                <a:ea typeface="Liberation Sans"/>
-              </a:rPr>
-              <a:t>https://arxiv.org/abs/2006.07159</a:t>
-            </a:r>
-            <a:endParaRPr sz="1000"/>
+                <a:ea typeface="Noto Sans CJK JP"/>
+              </a:rPr>
+              <a:t>https://image-net.org/data/ILSVRC/2012/ILSVRC2012_devkit_t12.tar.gz</a:t>
+            </a:r>
           </a:p>
         </p:txBody>
       </p:sp>
@@ -40403,8 +40502,8 @@
         </p:nvSpPr>
         <p:spPr>
           <a:xfrm>
-            <a:off x="548640" y="3209544"/>
-            <a:ext cx="8046720" cy="292608"/>
+            <a:off x="594360" y="3108960"/>
+            <a:ext cx="7955279" cy="320040"/>
           </a:xfrm>
           <a:prstGeom prst="rect">
             <a:avLst/>
@@ -40412,12 +40511,13 @@
           <a:noFill/>
         </p:spPr>
         <p:txBody>
-          <a:bodyPr wrap="none" lIns="0" rIns="0" tIns="0" bIns="0" anchor="t">
+          <a:bodyPr wrap="square" lIns="0" rIns="0" tIns="0" bIns="0" anchor="t">
             <a:spAutoFit/>
           </a:bodyPr>
           <a:lstStyle/>
           <a:p>
-            <a:pPr algn="l">
+            <a:pPr algn="l" marL="0" indent="0">
+              <a:buNone/>
               <a:lnSpc>
                 <a:spcPct val="110000"/>
               </a:lnSpc>
@@ -40425,23 +40525,23 @@
                 <a:spcPts val="0"/>
               </a:spcBef>
               <a:spcAft>
-                <a:spcPts val="0"/>
-              </a:spcAft>
-              <a:defRPr sz="1800" b="0">
-                <a:latin typeface="Noto Sans CJK JP"/>
-              </a:defRPr>
-            </a:pPr>
-            <a:r>
-              <a:rPr sz="1800" b="0" lang="ja-JP">
+                <a:spcPts val="600"/>
+              </a:spcAft>
+              <a:defRPr sz="1900" lang="ja-JP">
+                <a:latin typeface="Noto Sans CJK JP"/>
+                <a:ea typeface="Noto Sans CJK JP"/>
+              </a:defRPr>
+            </a:pPr>
+            <a:r>
+              <a:rPr sz="1900" lang="ja-JP">
                 <a:solidFill>
                   <a:srgbClr val="303437"/>
                 </a:solidFill>
                 <a:latin typeface="Noto Sans CJK JP"/>
                 <a:ea typeface="Noto Sans CJK JP"/>
               </a:rPr>
-              <a:t>Recht et al. (2019). ImageNetV2. ICML.</a:t>
-            </a:r>
-            <a:endParaRPr sz="1800"/>
+              <a:t>He et al. (2016). Deep Residual Learning. CVPR.</a:t>
+            </a:r>
           </a:p>
         </p:txBody>
       </p:sp>
@@ -40453,8 +40553,8 @@
         </p:nvSpPr>
         <p:spPr>
           <a:xfrm>
-            <a:off x="548640" y="3611880"/>
-            <a:ext cx="8046720" cy="219456"/>
+            <a:off x="594360" y="3429000"/>
+            <a:ext cx="7955279" cy="292608"/>
           </a:xfrm>
           <a:prstGeom prst="rect">
             <a:avLst/>
@@ -40462,12 +40562,13 @@
           <a:noFill/>
         </p:spPr>
         <p:txBody>
-          <a:bodyPr wrap="none" lIns="0" rIns="0" tIns="0" bIns="0" anchor="t">
+          <a:bodyPr wrap="square" lIns="0" rIns="0" tIns="0" bIns="0" anchor="t">
             <a:spAutoFit/>
           </a:bodyPr>
           <a:lstStyle/>
           <a:p>
-            <a:pPr algn="l">
+            <a:pPr algn="l" marL="0" indent="0">
+              <a:buNone/>
               <a:lnSpc>
                 <a:spcPct val="110000"/>
               </a:lnSpc>
@@ -40475,23 +40576,23 @@
                 <a:spcPts val="0"/>
               </a:spcBef>
               <a:spcAft>
-                <a:spcPts val="0"/>
-              </a:spcAft>
-              <a:defRPr sz="1000" b="0">
-                <a:latin typeface="Liberation Sans"/>
-              </a:defRPr>
-            </a:pPr>
-            <a:r>
-              <a:rPr sz="1000" b="0" lang="en-US">
+                <a:spcPts val="600"/>
+              </a:spcAft>
+              <a:defRPr sz="1700" lang="ja-JP">
+                <a:latin typeface="Noto Sans CJK JP"/>
+                <a:ea typeface="Noto Sans CJK JP"/>
+              </a:defRPr>
+            </a:pPr>
+            <a:r>
+              <a:rPr sz="1700" lang="ja-JP">
                 <a:solidFill>
                   <a:srgbClr val="626669"/>
                 </a:solidFill>
-                <a:latin typeface="Liberation Sans"/>
-                <a:ea typeface="Liberation Sans"/>
-              </a:rPr>
-              <a:t>https://github.com/modestyachts/ImageNetV2</a:t>
-            </a:r>
-            <a:endParaRPr sz="1000"/>
+                <a:latin typeface="Noto Sans CJK JP"/>
+                <a:ea typeface="Noto Sans CJK JP"/>
+              </a:rPr>
+              <a:t>ResNetのImageNet分類性能を示す原著。</a:t>
+            </a:r>
           </a:p>
         </p:txBody>
       </p:sp>
@@ -40503,8 +40604,8 @@
         </p:nvSpPr>
         <p:spPr>
           <a:xfrm>
-            <a:off x="548640" y="3822191"/>
-            <a:ext cx="8046720" cy="292608"/>
+            <a:off x="594360" y="3840480"/>
+            <a:ext cx="7955279" cy="256032"/>
           </a:xfrm>
           <a:prstGeom prst="rect">
             <a:avLst/>
@@ -40512,12 +40613,13 @@
           <a:noFill/>
         </p:spPr>
         <p:txBody>
-          <a:bodyPr wrap="none" lIns="0" rIns="0" tIns="0" bIns="0" anchor="t">
+          <a:bodyPr wrap="square" lIns="0" rIns="0" tIns="0" bIns="0" anchor="t">
             <a:spAutoFit/>
           </a:bodyPr>
           <a:lstStyle/>
           <a:p>
-            <a:pPr algn="l">
+            <a:pPr algn="l" marL="0" indent="0">
+              <a:buNone/>
               <a:lnSpc>
                 <a:spcPct val="110000"/>
               </a:lnSpc>
@@ -40527,21 +40629,21 @@
               <a:spcAft>
                 <a:spcPts val="0"/>
               </a:spcAft>
-              <a:defRPr sz="1800" b="0">
-                <a:latin typeface="Noto Sans CJK JP"/>
-              </a:defRPr>
-            </a:pPr>
-            <a:r>
-              <a:rPr sz="1800" b="0" lang="ja-JP">
-                <a:solidFill>
-                  <a:srgbClr val="303437"/>
-                </a:solidFill>
-                <a:latin typeface="Noto Sans CJK JP"/>
-                <a:ea typeface="Noto Sans CJK JP"/>
-              </a:rPr>
-              <a:t>Torchvisionのモデルと公開重み</a:t>
-            </a:r>
-            <a:endParaRPr sz="1800"/>
+              <a:defRPr sz="850" lang="ja-JP">
+                <a:latin typeface="Liberation Sans"/>
+                <a:ea typeface="Noto Sans CJK JP"/>
+              </a:defRPr>
+            </a:pPr>
+            <a:r>
+              <a:rPr sz="850" lang="ja-JP">
+                <a:solidFill>
+                  <a:srgbClr val="626669"/>
+                </a:solidFill>
+                <a:latin typeface="Liberation Sans"/>
+                <a:ea typeface="Noto Sans CJK JP"/>
+              </a:rPr>
+              <a:t>https://arxiv.org/abs/1512.03385</a:t>
+            </a:r>
           </a:p>
         </p:txBody>
       </p:sp>
@@ -40553,8 +40655,8 @@
         </p:nvSpPr>
         <p:spPr>
           <a:xfrm>
-            <a:off x="548640" y="4224528"/>
-            <a:ext cx="8046720" cy="219456"/>
+            <a:off x="594360" y="4023360"/>
+            <a:ext cx="7955279" cy="320040"/>
           </a:xfrm>
           <a:prstGeom prst="rect">
             <a:avLst/>
@@ -40562,12 +40664,13 @@
           <a:noFill/>
         </p:spPr>
         <p:txBody>
-          <a:bodyPr wrap="none" lIns="0" rIns="0" tIns="0" bIns="0" anchor="t">
+          <a:bodyPr wrap="square" lIns="0" rIns="0" tIns="0" bIns="0" anchor="t">
             <a:spAutoFit/>
           </a:bodyPr>
           <a:lstStyle/>
           <a:p>
-            <a:pPr algn="l">
+            <a:pPr algn="l" marL="0" indent="0">
+              <a:buNone/>
               <a:lnSpc>
                 <a:spcPct val="110000"/>
               </a:lnSpc>
@@ -40575,23 +40678,23 @@
                 <a:spcPts val="0"/>
               </a:spcBef>
               <a:spcAft>
-                <a:spcPts val="0"/>
-              </a:spcAft>
-              <a:defRPr sz="1000" b="0">
-                <a:latin typeface="Liberation Sans"/>
-              </a:defRPr>
-            </a:pPr>
-            <a:r>
-              <a:rPr sz="1000" b="0" lang="en-US">
-                <a:solidFill>
-                  <a:srgbClr val="626669"/>
-                </a:solidFill>
-                <a:latin typeface="Liberation Sans"/>
-                <a:ea typeface="Liberation Sans"/>
-              </a:rPr>
-              <a:t>https://github.com/pytorch/vision/tree/main/torchvision/models</a:t>
-            </a:r>
-            <a:endParaRPr sz="1000"/>
+                <a:spcPts val="600"/>
+              </a:spcAft>
+              <a:defRPr sz="1900" lang="ja-JP">
+                <a:latin typeface="Noto Sans CJK JP"/>
+                <a:ea typeface="Noto Sans CJK JP"/>
+              </a:defRPr>
+            </a:pPr>
+            <a:r>
+              <a:rPr sz="1900" lang="ja-JP">
+                <a:solidFill>
+                  <a:srgbClr val="303437"/>
+                </a:solidFill>
+                <a:latin typeface="Noto Sans CJK JP"/>
+                <a:ea typeface="Noto Sans CJK JP"/>
+              </a:rPr>
+              <a:t>Siméoni et al. (2025). DINOv3.</a:t>
+            </a:r>
           </a:p>
         </p:txBody>
       </p:sp>
@@ -40603,8 +40706,8 @@
         </p:nvSpPr>
         <p:spPr>
           <a:xfrm>
-            <a:off x="548640" y="4434840"/>
-            <a:ext cx="8046720" cy="292608"/>
+            <a:off x="594360" y="4343400"/>
+            <a:ext cx="7955279" cy="292608"/>
           </a:xfrm>
           <a:prstGeom prst="rect">
             <a:avLst/>
@@ -40612,12 +40715,13 @@
           <a:noFill/>
         </p:spPr>
         <p:txBody>
-          <a:bodyPr wrap="none" lIns="0" rIns="0" tIns="0" bIns="0" anchor="t">
+          <a:bodyPr wrap="square" lIns="0" rIns="0" tIns="0" bIns="0" anchor="t">
             <a:spAutoFit/>
           </a:bodyPr>
           <a:lstStyle/>
           <a:p>
-            <a:pPr algn="l">
+            <a:pPr algn="l" marL="0" indent="0">
+              <a:buNone/>
               <a:lnSpc>
                 <a:spcPct val="110000"/>
               </a:lnSpc>
@@ -40625,23 +40729,23 @@
                 <a:spcPts val="0"/>
               </a:spcBef>
               <a:spcAft>
-                <a:spcPts val="0"/>
-              </a:spcAft>
-              <a:defRPr sz="1800" b="0">
-                <a:latin typeface="Noto Sans CJK JP"/>
-              </a:defRPr>
-            </a:pPr>
-            <a:r>
-              <a:rPr sz="1800" b="0" lang="ja-JP">
-                <a:solidFill>
-                  <a:srgbClr val="303437"/>
-                </a:solidFill>
-                <a:latin typeface="Noto Sans CJK JP"/>
-                <a:ea typeface="Noto Sans CJK JP"/>
-              </a:rPr>
-              <a:t>カテゴリ別の画像例</a:t>
-            </a:r>
-            <a:endParaRPr sz="1800"/>
+                <a:spcPts val="600"/>
+              </a:spcAft>
+              <a:defRPr sz="1700" lang="ja-JP">
+                <a:latin typeface="Noto Sans CJK JP"/>
+                <a:ea typeface="Noto Sans CJK JP"/>
+              </a:defRPr>
+            </a:pPr>
+            <a:r>
+              <a:rPr sz="1700" lang="ja-JP">
+                <a:solidFill>
+                  <a:srgbClr val="626669"/>
+                </a:solidFill>
+                <a:latin typeface="Noto Sans CJK JP"/>
+                <a:ea typeface="Noto Sans CJK JP"/>
+              </a:rPr>
+              <a:t>近年の画像特徴の評価と線形分類性能の比較。</a:t>
+            </a:r>
           </a:p>
         </p:txBody>
       </p:sp>
@@ -40653,8 +40757,8 @@
         </p:nvSpPr>
         <p:spPr>
           <a:xfrm>
-            <a:off x="548640" y="4837176"/>
-            <a:ext cx="8046720" cy="219456"/>
+            <a:off x="594360" y="4754880"/>
+            <a:ext cx="7955279" cy="256032"/>
           </a:xfrm>
           <a:prstGeom prst="rect">
             <a:avLst/>
@@ -40662,12 +40766,13 @@
           <a:noFill/>
         </p:spPr>
         <p:txBody>
-          <a:bodyPr wrap="none" lIns="0" rIns="0" tIns="0" bIns="0" anchor="t">
+          <a:bodyPr wrap="square" lIns="0" rIns="0" tIns="0" bIns="0" anchor="t">
             <a:spAutoFit/>
           </a:bodyPr>
           <a:lstStyle/>
           <a:p>
-            <a:pPr algn="l">
+            <a:pPr algn="l" marL="0" indent="0">
+              <a:buNone/>
               <a:lnSpc>
                 <a:spcPct val="110000"/>
               </a:lnSpc>
@@ -40677,21 +40782,743 @@
               <a:spcAft>
                 <a:spcPts val="0"/>
               </a:spcAft>
-              <a:defRPr sz="1000" b="0">
+              <a:defRPr sz="850" lang="ja-JP">
                 <a:latin typeface="Liberation Sans"/>
-              </a:defRPr>
-            </a:pPr>
-            <a:r>
-              <a:rPr sz="1000" b="0" lang="en-US">
+                <a:ea typeface="Noto Sans CJK JP"/>
+              </a:defRPr>
+            </a:pPr>
+            <a:r>
+              <a:rPr sz="850" lang="ja-JP">
                 <a:solidFill>
                   <a:srgbClr val="626669"/>
                 </a:solidFill>
                 <a:latin typeface="Liberation Sans"/>
-                <a:ea typeface="Liberation Sans"/>
+                <a:ea typeface="Noto Sans CJK JP"/>
+              </a:rPr>
+              <a:t>https://arxiv.org/abs/2508.10104</a:t>
+            </a:r>
+          </a:p>
+        </p:txBody>
+      </p:sp>
+    </p:spTree>
+  </p:cSld>
+  <p:clrMapOvr>
+    <a:masterClrMapping/>
+  </p:clrMapOvr>
+</p:sld>
+</file>
+
+<file path=ppt/slides/slide67.xml><?xml version="1.0" encoding="utf-8"?>
+<p:sld xmlns:a="http://schemas.openxmlformats.org/drawingml/2006/main" xmlns:p="http://schemas.openxmlformats.org/presentationml/2006/main" xmlns:r="http://schemas.openxmlformats.org/officeDocument/2006/relationships">
+  <p:cSld>
+    <p:spTree>
+      <p:nvGrpSpPr>
+        <p:cNvPr id="1" name=""/>
+        <p:cNvGrpSpPr/>
+        <p:nvPr/>
+      </p:nvGrpSpPr>
+      <p:grpSpPr/>
+      <p:sp>
+        <p:nvSpPr>
+          <p:cNvPr id="2" name="Title 1"/>
+          <p:cNvSpPr>
+            <a:spLocks noGrp="1"/>
+          </p:cNvSpPr>
+          <p:nvPr>
+            <p:ph type="title"/>
+          </p:nvPr>
+        </p:nvSpPr>
+        <p:spPr/>
+        <p:txBody>
+          <a:bodyPr wrap="square" lIns="0" rIns="0" tIns="0" bIns="0" anchor="t"/>
+          <a:lstStyle/>
+          <a:p>
+            <a:pPr algn="l" marL="0" indent="0">
+              <a:buNone/>
+              <a:spcAft>
+                <a:spcPts val="600"/>
+              </a:spcAft>
+              <a:buNone/>
+              <a:lnSpc>
+                <a:spcPct val="110000"/>
+              </a:lnSpc>
+              <a:spcBef>
+                <a:spcPts val="0"/>
+              </a:spcBef>
+              <a:defRPr sz="2800" lang="ja-JP">
+                <a:latin typeface="Noto Sans CJK JP"/>
+                <a:ea typeface="Noto Sans CJK JP"/>
+                <a:ea typeface="Noto Sans CJK JP"/>
+              </a:defRPr>
+            </a:pPr>
+            <a:r>
+              <a:rPr sz="2800" lang="ja-JP" b="1">
+                <a:solidFill>
+                  <a:srgbClr val="303437"/>
+                </a:solidFill>
+                <a:latin typeface="Noto Sans CJK JP"/>
+                <a:ea typeface="Noto Sans CJK JP"/>
+              </a:rPr>
+              <a:t>参考文献と参照した内容</a:t>
+            </a:r>
+          </a:p>
+        </p:txBody>
+      </p:sp>
+      <p:sp>
+        <p:nvSpPr>
+          <p:cNvPr id="3" name="Title 2"/>
+          <p:cNvSpPr>
+            <a:spLocks noGrp="1"/>
+          </p:cNvSpPr>
+          <p:nvPr>
+            <p:ph type="title" idx="2"/>
+          </p:nvPr>
+        </p:nvSpPr>
+        <p:spPr/>
+        <p:txBody>
+          <a:bodyPr wrap="square" lIns="0" rIns="0" tIns="0" bIns="0" anchor="ctr"/>
+          <a:lstStyle/>
+          <a:p>
+            <a:pPr algn="l" marL="0" indent="0">
+              <a:buNone/>
+              <a:spcAft>
+                <a:spcPts val="0"/>
+              </a:spcAft>
+              <a:buNone/>
+              <a:lnSpc>
+                <a:spcPct val="110000"/>
+              </a:lnSpc>
+              <a:spcBef>
+                <a:spcPts val="0"/>
+              </a:spcBef>
+              <a:defRPr sz="1400" lang="ja-JP">
+                <a:latin typeface="Noto Sans CJK JP"/>
+                <a:ea typeface="Noto Sans CJK JP"/>
+                <a:ea typeface="Noto Sans CJK JP"/>
+              </a:defRPr>
+            </a:pPr>
+            <a:r>
+              <a:rPr sz="1400" lang="ja-JP" b="1">
+                <a:solidFill>
+                  <a:srgbClr val="FFFEF8"/>
+                </a:solidFill>
+                <a:latin typeface="Noto Sans CJK JP"/>
+                <a:ea typeface="Noto Sans CJK JP"/>
+              </a:rPr>
+              <a:t>Appendix: 7 入手コードと参考文献</a:t>
+            </a:r>
+          </a:p>
+        </p:txBody>
+      </p:sp>
+      <p:sp>
+        <p:nvSpPr>
+          <p:cNvPr id="4" name="TextBox 3"/>
+          <p:cNvSpPr txBox="1"/>
+          <p:nvPr/>
+        </p:nvSpPr>
+        <p:spPr>
+          <a:xfrm>
+            <a:off x="594360" y="1280160"/>
+            <a:ext cx="7955279" cy="320040"/>
+          </a:xfrm>
+          <a:prstGeom prst="rect">
+            <a:avLst/>
+          </a:prstGeom>
+          <a:noFill/>
+        </p:spPr>
+        <p:txBody>
+          <a:bodyPr wrap="square" lIns="0" rIns="0" tIns="0" bIns="0" anchor="t">
+            <a:spAutoFit/>
+          </a:bodyPr>
+          <a:lstStyle/>
+          <a:p>
+            <a:pPr algn="l" marL="0" indent="0">
+              <a:buNone/>
+              <a:lnSpc>
+                <a:spcPct val="110000"/>
+              </a:lnSpc>
+              <a:spcBef>
+                <a:spcPts val="0"/>
+              </a:spcBef>
+              <a:spcAft>
+                <a:spcPts val="600"/>
+              </a:spcAft>
+              <a:defRPr sz="1900" lang="ja-JP">
+                <a:latin typeface="Noto Sans CJK JP"/>
+                <a:ea typeface="Noto Sans CJK JP"/>
+              </a:defRPr>
+            </a:pPr>
+            <a:r>
+              <a:rPr sz="1900" lang="ja-JP">
+                <a:solidFill>
+                  <a:srgbClr val="303437"/>
+                </a:solidFill>
+                <a:latin typeface="Noto Sans CJK JP"/>
+                <a:ea typeface="Noto Sans CJK JP"/>
+              </a:rPr>
+              <a:t>Beyer et al. (2020). Are we done with ImageNet?</a:t>
+            </a:r>
+          </a:p>
+        </p:txBody>
+      </p:sp>
+      <p:sp>
+        <p:nvSpPr>
+          <p:cNvPr id="5" name="TextBox 4"/>
+          <p:cNvSpPr txBox="1"/>
+          <p:nvPr/>
+        </p:nvSpPr>
+        <p:spPr>
+          <a:xfrm>
+            <a:off x="594360" y="1600200"/>
+            <a:ext cx="7955279" cy="292608"/>
+          </a:xfrm>
+          <a:prstGeom prst="rect">
+            <a:avLst/>
+          </a:prstGeom>
+          <a:noFill/>
+        </p:spPr>
+        <p:txBody>
+          <a:bodyPr wrap="square" lIns="0" rIns="0" tIns="0" bIns="0" anchor="t">
+            <a:spAutoFit/>
+          </a:bodyPr>
+          <a:lstStyle/>
+          <a:p>
+            <a:pPr algn="l" marL="0" indent="0">
+              <a:buNone/>
+              <a:lnSpc>
+                <a:spcPct val="110000"/>
+              </a:lnSpc>
+              <a:spcBef>
+                <a:spcPts val="0"/>
+              </a:spcBef>
+              <a:spcAft>
+                <a:spcPts val="600"/>
+              </a:spcAft>
+              <a:defRPr sz="1700" lang="ja-JP">
+                <a:latin typeface="Noto Sans CJK JP"/>
+                <a:ea typeface="Noto Sans CJK JP"/>
+              </a:defRPr>
+            </a:pPr>
+            <a:r>
+              <a:rPr sz="1700" lang="ja-JP">
+                <a:solidFill>
+                  <a:srgbClr val="626669"/>
+                </a:solidFill>
+                <a:latin typeface="Noto Sans CJK JP"/>
+                <a:ea typeface="Noto Sans CJK JP"/>
+              </a:rPr>
+              <a:t>複数の物体に対応して検証ラベルを見直したReaLの根拠。</a:t>
+            </a:r>
+          </a:p>
+        </p:txBody>
+      </p:sp>
+      <p:sp>
+        <p:nvSpPr>
+          <p:cNvPr id="6" name="TextBox 5"/>
+          <p:cNvSpPr txBox="1"/>
+          <p:nvPr/>
+        </p:nvSpPr>
+        <p:spPr>
+          <a:xfrm>
+            <a:off x="594360" y="2011680"/>
+            <a:ext cx="7955279" cy="256032"/>
+          </a:xfrm>
+          <a:prstGeom prst="rect">
+            <a:avLst/>
+          </a:prstGeom>
+          <a:noFill/>
+        </p:spPr>
+        <p:txBody>
+          <a:bodyPr wrap="square" lIns="0" rIns="0" tIns="0" bIns="0" anchor="t">
+            <a:spAutoFit/>
+          </a:bodyPr>
+          <a:lstStyle/>
+          <a:p>
+            <a:pPr algn="l" marL="0" indent="0">
+              <a:buNone/>
+              <a:lnSpc>
+                <a:spcPct val="110000"/>
+              </a:lnSpc>
+              <a:spcBef>
+                <a:spcPts val="0"/>
+              </a:spcBef>
+              <a:spcAft>
+                <a:spcPts val="0"/>
+              </a:spcAft>
+              <a:defRPr sz="850" lang="ja-JP">
+                <a:latin typeface="Liberation Sans"/>
+                <a:ea typeface="Noto Sans CJK JP"/>
+              </a:defRPr>
+            </a:pPr>
+            <a:r>
+              <a:rPr sz="850" lang="ja-JP">
+                <a:solidFill>
+                  <a:srgbClr val="626669"/>
+                </a:solidFill>
+                <a:latin typeface="Liberation Sans"/>
+                <a:ea typeface="Noto Sans CJK JP"/>
+              </a:rPr>
+              <a:t>https://arxiv.org/abs/2006.07159</a:t>
+            </a:r>
+          </a:p>
+        </p:txBody>
+      </p:sp>
+      <p:sp>
+        <p:nvSpPr>
+          <p:cNvPr id="7" name="TextBox 6"/>
+          <p:cNvSpPr txBox="1"/>
+          <p:nvPr/>
+        </p:nvSpPr>
+        <p:spPr>
+          <a:xfrm>
+            <a:off x="594360" y="2194560"/>
+            <a:ext cx="7955279" cy="320040"/>
+          </a:xfrm>
+          <a:prstGeom prst="rect">
+            <a:avLst/>
+          </a:prstGeom>
+          <a:noFill/>
+        </p:spPr>
+        <p:txBody>
+          <a:bodyPr wrap="square" lIns="0" rIns="0" tIns="0" bIns="0" anchor="t">
+            <a:spAutoFit/>
+          </a:bodyPr>
+          <a:lstStyle/>
+          <a:p>
+            <a:pPr algn="l" marL="0" indent="0">
+              <a:buNone/>
+              <a:lnSpc>
+                <a:spcPct val="110000"/>
+              </a:lnSpc>
+              <a:spcBef>
+                <a:spcPts val="0"/>
+              </a:spcBef>
+              <a:spcAft>
+                <a:spcPts val="600"/>
+              </a:spcAft>
+              <a:defRPr sz="1900" lang="ja-JP">
+                <a:latin typeface="Noto Sans CJK JP"/>
+                <a:ea typeface="Noto Sans CJK JP"/>
+              </a:defRPr>
+            </a:pPr>
+            <a:r>
+              <a:rPr sz="1900" lang="ja-JP">
+                <a:solidFill>
+                  <a:srgbClr val="303437"/>
+                </a:solidFill>
+                <a:latin typeface="Noto Sans CJK JP"/>
+                <a:ea typeface="Noto Sans CJK JP"/>
+              </a:rPr>
+              <a:t>Recht et al. (2019). ImageNetV2. ICML.</a:t>
+            </a:r>
+          </a:p>
+        </p:txBody>
+      </p:sp>
+      <p:sp>
+        <p:nvSpPr>
+          <p:cNvPr id="8" name="TextBox 7"/>
+          <p:cNvSpPr txBox="1"/>
+          <p:nvPr/>
+        </p:nvSpPr>
+        <p:spPr>
+          <a:xfrm>
+            <a:off x="594360" y="2514600"/>
+            <a:ext cx="7955279" cy="292608"/>
+          </a:xfrm>
+          <a:prstGeom prst="rect">
+            <a:avLst/>
+          </a:prstGeom>
+          <a:noFill/>
+        </p:spPr>
+        <p:txBody>
+          <a:bodyPr wrap="square" lIns="0" rIns="0" tIns="0" bIns="0" anchor="t">
+            <a:spAutoFit/>
+          </a:bodyPr>
+          <a:lstStyle/>
+          <a:p>
+            <a:pPr algn="l" marL="0" indent="0">
+              <a:buNone/>
+              <a:lnSpc>
+                <a:spcPct val="110000"/>
+              </a:lnSpc>
+              <a:spcBef>
+                <a:spcPts val="0"/>
+              </a:spcBef>
+              <a:spcAft>
+                <a:spcPts val="600"/>
+              </a:spcAft>
+              <a:defRPr sz="1700" lang="ja-JP">
+                <a:latin typeface="Noto Sans CJK JP"/>
+                <a:ea typeface="Noto Sans CJK JP"/>
+              </a:defRPr>
+            </a:pPr>
+            <a:r>
+              <a:rPr sz="1700" lang="ja-JP">
+                <a:solidFill>
+                  <a:srgbClr val="626669"/>
+                </a:solidFill>
+                <a:latin typeface="Noto Sans CJK JP"/>
+                <a:ea typeface="Noto Sans CJK JP"/>
+              </a:rPr>
+              <a:t>新しい画像集合で分類性能の汎化を調べる後続評価。</a:t>
+            </a:r>
+          </a:p>
+        </p:txBody>
+      </p:sp>
+      <p:sp>
+        <p:nvSpPr>
+          <p:cNvPr id="9" name="TextBox 8"/>
+          <p:cNvSpPr txBox="1"/>
+          <p:nvPr/>
+        </p:nvSpPr>
+        <p:spPr>
+          <a:xfrm>
+            <a:off x="594360" y="2926080"/>
+            <a:ext cx="7955279" cy="256032"/>
+          </a:xfrm>
+          <a:prstGeom prst="rect">
+            <a:avLst/>
+          </a:prstGeom>
+          <a:noFill/>
+        </p:spPr>
+        <p:txBody>
+          <a:bodyPr wrap="square" lIns="0" rIns="0" tIns="0" bIns="0" anchor="t">
+            <a:spAutoFit/>
+          </a:bodyPr>
+          <a:lstStyle/>
+          <a:p>
+            <a:pPr algn="l" marL="0" indent="0">
+              <a:buNone/>
+              <a:lnSpc>
+                <a:spcPct val="110000"/>
+              </a:lnSpc>
+              <a:spcBef>
+                <a:spcPts val="0"/>
+              </a:spcBef>
+              <a:spcAft>
+                <a:spcPts val="0"/>
+              </a:spcAft>
+              <a:defRPr sz="850" lang="ja-JP">
+                <a:latin typeface="Liberation Sans"/>
+                <a:ea typeface="Noto Sans CJK JP"/>
+              </a:defRPr>
+            </a:pPr>
+            <a:r>
+              <a:rPr sz="850" lang="ja-JP">
+                <a:solidFill>
+                  <a:srgbClr val="626669"/>
+                </a:solidFill>
+                <a:latin typeface="Liberation Sans"/>
+                <a:ea typeface="Noto Sans CJK JP"/>
+              </a:rPr>
+              <a:t>https://github.com/modestyachts/ImageNetV2</a:t>
+            </a:r>
+          </a:p>
+        </p:txBody>
+      </p:sp>
+      <p:sp>
+        <p:nvSpPr>
+          <p:cNvPr id="10" name="TextBox 9"/>
+          <p:cNvSpPr txBox="1"/>
+          <p:nvPr/>
+        </p:nvSpPr>
+        <p:spPr>
+          <a:xfrm>
+            <a:off x="594360" y="3108960"/>
+            <a:ext cx="7955279" cy="320040"/>
+          </a:xfrm>
+          <a:prstGeom prst="rect">
+            <a:avLst/>
+          </a:prstGeom>
+          <a:noFill/>
+        </p:spPr>
+        <p:txBody>
+          <a:bodyPr wrap="square" lIns="0" rIns="0" tIns="0" bIns="0" anchor="t">
+            <a:spAutoFit/>
+          </a:bodyPr>
+          <a:lstStyle/>
+          <a:p>
+            <a:pPr algn="l" marL="0" indent="0">
+              <a:buNone/>
+              <a:lnSpc>
+                <a:spcPct val="110000"/>
+              </a:lnSpc>
+              <a:spcBef>
+                <a:spcPts val="0"/>
+              </a:spcBef>
+              <a:spcAft>
+                <a:spcPts val="600"/>
+              </a:spcAft>
+              <a:defRPr sz="1900" lang="ja-JP">
+                <a:latin typeface="Noto Sans CJK JP"/>
+                <a:ea typeface="Noto Sans CJK JP"/>
+              </a:defRPr>
+            </a:pPr>
+            <a:r>
+              <a:rPr sz="1900" lang="ja-JP">
+                <a:solidFill>
+                  <a:srgbClr val="303437"/>
+                </a:solidFill>
+                <a:latin typeface="Noto Sans CJK JP"/>
+                <a:ea typeface="Noto Sans CJK JP"/>
+              </a:rPr>
+              <a:t>Torchvisionのモデルと公開重み</a:t>
+            </a:r>
+          </a:p>
+        </p:txBody>
+      </p:sp>
+      <p:sp>
+        <p:nvSpPr>
+          <p:cNvPr id="11" name="TextBox 10"/>
+          <p:cNvSpPr txBox="1"/>
+          <p:nvPr/>
+        </p:nvSpPr>
+        <p:spPr>
+          <a:xfrm>
+            <a:off x="594360" y="3429000"/>
+            <a:ext cx="7955279" cy="292608"/>
+          </a:xfrm>
+          <a:prstGeom prst="rect">
+            <a:avLst/>
+          </a:prstGeom>
+          <a:noFill/>
+        </p:spPr>
+        <p:txBody>
+          <a:bodyPr wrap="square" lIns="0" rIns="0" tIns="0" bIns="0" anchor="t">
+            <a:spAutoFit/>
+          </a:bodyPr>
+          <a:lstStyle/>
+          <a:p>
+            <a:pPr algn="l" marL="0" indent="0">
+              <a:buNone/>
+              <a:lnSpc>
+                <a:spcPct val="110000"/>
+              </a:lnSpc>
+              <a:spcBef>
+                <a:spcPts val="0"/>
+              </a:spcBef>
+              <a:spcAft>
+                <a:spcPts val="600"/>
+              </a:spcAft>
+              <a:defRPr sz="1700" lang="ja-JP">
+                <a:latin typeface="Noto Sans CJK JP"/>
+                <a:ea typeface="Noto Sans CJK JP"/>
+              </a:defRPr>
+            </a:pPr>
+            <a:r>
+              <a:rPr sz="1700" lang="ja-JP">
+                <a:solidFill>
+                  <a:srgbClr val="626669"/>
+                </a:solidFill>
+                <a:latin typeface="Noto Sans CJK JP"/>
+                <a:ea typeface="Noto Sans CJK JP"/>
+              </a:rPr>
+              <a:t>公開重みの性能と前処理条件を比較するための実装。</a:t>
+            </a:r>
+          </a:p>
+        </p:txBody>
+      </p:sp>
+      <p:sp>
+        <p:nvSpPr>
+          <p:cNvPr id="12" name="TextBox 11"/>
+          <p:cNvSpPr txBox="1"/>
+          <p:nvPr/>
+        </p:nvSpPr>
+        <p:spPr>
+          <a:xfrm>
+            <a:off x="594360" y="3840480"/>
+            <a:ext cx="7955279" cy="256032"/>
+          </a:xfrm>
+          <a:prstGeom prst="rect">
+            <a:avLst/>
+          </a:prstGeom>
+          <a:noFill/>
+        </p:spPr>
+        <p:txBody>
+          <a:bodyPr wrap="square" lIns="0" rIns="0" tIns="0" bIns="0" anchor="t">
+            <a:spAutoFit/>
+          </a:bodyPr>
+          <a:lstStyle/>
+          <a:p>
+            <a:pPr algn="l" marL="0" indent="0">
+              <a:buNone/>
+              <a:lnSpc>
+                <a:spcPct val="110000"/>
+              </a:lnSpc>
+              <a:spcBef>
+                <a:spcPts val="0"/>
+              </a:spcBef>
+              <a:spcAft>
+                <a:spcPts val="0"/>
+              </a:spcAft>
+              <a:defRPr sz="850" lang="ja-JP">
+                <a:latin typeface="Liberation Sans"/>
+                <a:ea typeface="Noto Sans CJK JP"/>
+              </a:defRPr>
+            </a:pPr>
+            <a:r>
+              <a:rPr sz="850" lang="ja-JP">
+                <a:solidFill>
+                  <a:srgbClr val="626669"/>
+                </a:solidFill>
+                <a:latin typeface="Liberation Sans"/>
+                <a:ea typeface="Noto Sans CJK JP"/>
+              </a:rPr>
+              <a:t>https://github.com/pytorch/vision/tree/main/torchvision/models</a:t>
+            </a:r>
+          </a:p>
+        </p:txBody>
+      </p:sp>
+      <p:sp>
+        <p:nvSpPr>
+          <p:cNvPr id="13" name="TextBox 12"/>
+          <p:cNvSpPr txBox="1"/>
+          <p:nvPr/>
+        </p:nvSpPr>
+        <p:spPr>
+          <a:xfrm>
+            <a:off x="594360" y="4023360"/>
+            <a:ext cx="7955279" cy="320040"/>
+          </a:xfrm>
+          <a:prstGeom prst="rect">
+            <a:avLst/>
+          </a:prstGeom>
+          <a:noFill/>
+        </p:spPr>
+        <p:txBody>
+          <a:bodyPr wrap="square" lIns="0" rIns="0" tIns="0" bIns="0" anchor="t">
+            <a:spAutoFit/>
+          </a:bodyPr>
+          <a:lstStyle/>
+          <a:p>
+            <a:pPr algn="l" marL="0" indent="0">
+              <a:buNone/>
+              <a:lnSpc>
+                <a:spcPct val="110000"/>
+              </a:lnSpc>
+              <a:spcBef>
+                <a:spcPts val="0"/>
+              </a:spcBef>
+              <a:spcAft>
+                <a:spcPts val="600"/>
+              </a:spcAft>
+              <a:defRPr sz="1900" lang="ja-JP">
+                <a:latin typeface="Noto Sans CJK JP"/>
+                <a:ea typeface="Noto Sans CJK JP"/>
+              </a:defRPr>
+            </a:pPr>
+            <a:r>
+              <a:rPr sz="1900" lang="ja-JP">
+                <a:solidFill>
+                  <a:srgbClr val="303437"/>
+                </a:solidFill>
+                <a:latin typeface="Noto Sans CJK JP"/>
+                <a:ea typeface="Noto Sans CJK JP"/>
+              </a:rPr>
+              <a:t>ImageNetカテゴリ別の画像例</a:t>
+            </a:r>
+          </a:p>
+        </p:txBody>
+      </p:sp>
+      <p:sp>
+        <p:nvSpPr>
+          <p:cNvPr id="14" name="TextBox 13"/>
+          <p:cNvSpPr txBox="1"/>
+          <p:nvPr/>
+        </p:nvSpPr>
+        <p:spPr>
+          <a:xfrm>
+            <a:off x="594360" y="4343400"/>
+            <a:ext cx="7955279" cy="292608"/>
+          </a:xfrm>
+          <a:prstGeom prst="rect">
+            <a:avLst/>
+          </a:prstGeom>
+          <a:noFill/>
+        </p:spPr>
+        <p:txBody>
+          <a:bodyPr wrap="square" lIns="0" rIns="0" tIns="0" bIns="0" anchor="t">
+            <a:spAutoFit/>
+          </a:bodyPr>
+          <a:lstStyle/>
+          <a:p>
+            <a:pPr algn="l" marL="0" indent="0">
+              <a:buNone/>
+              <a:lnSpc>
+                <a:spcPct val="110000"/>
+              </a:lnSpc>
+              <a:spcBef>
+                <a:spcPts val="0"/>
+              </a:spcBef>
+              <a:spcAft>
+                <a:spcPts val="600"/>
+              </a:spcAft>
+              <a:defRPr sz="1700" lang="ja-JP">
+                <a:latin typeface="Noto Sans CJK JP"/>
+                <a:ea typeface="Noto Sans CJK JP"/>
+              </a:defRPr>
+            </a:pPr>
+            <a:r>
+              <a:rPr sz="1700" lang="ja-JP">
+                <a:solidFill>
+                  <a:srgbClr val="626669"/>
+                </a:solidFill>
+                <a:latin typeface="Noto Sans CJK JP"/>
+                <a:ea typeface="Noto Sans CJK JP"/>
+              </a:rPr>
+              <a:t>Imagenetteにないカテゴリの画像例の取得元。</a:t>
+            </a:r>
+          </a:p>
+        </p:txBody>
+      </p:sp>
+      <p:sp>
+        <p:nvSpPr>
+          <p:cNvPr id="15" name="TextBox 14"/>
+          <p:cNvSpPr txBox="1"/>
+          <p:nvPr/>
+        </p:nvSpPr>
+        <p:spPr>
+          <a:xfrm>
+            <a:off x="594360" y="4754880"/>
+            <a:ext cx="7955279" cy="256032"/>
+          </a:xfrm>
+          <a:prstGeom prst="rect">
+            <a:avLst/>
+          </a:prstGeom>
+          <a:noFill/>
+        </p:spPr>
+        <p:txBody>
+          <a:bodyPr wrap="square" lIns="0" rIns="0" tIns="0" bIns="0" anchor="t">
+            <a:spAutoFit/>
+          </a:bodyPr>
+          <a:lstStyle/>
+          <a:p>
+            <a:pPr algn="l" marL="0" indent="0">
+              <a:buNone/>
+              <a:lnSpc>
+                <a:spcPct val="110000"/>
+              </a:lnSpc>
+              <a:spcBef>
+                <a:spcPts val="0"/>
+              </a:spcBef>
+              <a:spcAft>
+                <a:spcPts val="0"/>
+              </a:spcAft>
+              <a:defRPr sz="850" lang="ja-JP">
+                <a:latin typeface="Liberation Sans"/>
+                <a:ea typeface="Noto Sans CJK JP"/>
+              </a:defRPr>
+            </a:pPr>
+            <a:r>
+              <a:rPr sz="850" lang="ja-JP">
+                <a:solidFill>
+                  <a:srgbClr val="626669"/>
+                </a:solidFill>
+                <a:latin typeface="Liberation Sans"/>
+                <a:ea typeface="Noto Sans CJK JP"/>
               </a:rPr>
               <a:t>https://github.com/EliSchwartz/imagenet-sample-images</a:t>
             </a:r>
-            <a:endParaRPr sz="1000"/>
           </a:p>
         </p:txBody>
       </p:sp>

--- a/slides/datasets-in-10-minutes-imagenet.pptx
+++ b/slides/datasets-in-10-minutes-imagenet.pptx
@@ -379,7 +379,6 @@
               <a:buClr>
                 <a:schemeClr val="dk1"/>
               </a:buClr>
-              <a:buSzPts val="5200"/>
               <a:buNone/>
               <a:defRPr sz="5200" b="1" lang="ja-JP">
                 <a:solidFill>
@@ -397,7 +396,6 @@
               <a:spcAft>
                 <a:spcPts val="0"/>
               </a:spcAft>
-              <a:buSzPts val="5200"/>
               <a:buNone/>
               <a:defRPr sz="5200" lang="ja-JP">
                 <a:latin typeface="Noto Sans"/>
@@ -412,7 +410,6 @@
               <a:spcAft>
                 <a:spcPts val="0"/>
               </a:spcAft>
-              <a:buSzPts val="5200"/>
               <a:buNone/>
               <a:defRPr sz="5200" lang="ja-JP">
                 <a:latin typeface="Noto Sans"/>
@@ -427,7 +424,6 @@
               <a:spcAft>
                 <a:spcPts val="0"/>
               </a:spcAft>
-              <a:buSzPts val="5200"/>
               <a:buNone/>
               <a:defRPr sz="5200" lang="ja-JP">
                 <a:latin typeface="Noto Sans"/>
@@ -442,7 +438,6 @@
               <a:spcAft>
                 <a:spcPts val="0"/>
               </a:spcAft>
-              <a:buSzPts val="5200"/>
               <a:buNone/>
               <a:defRPr sz="5200" lang="ja-JP">
                 <a:latin typeface="Noto Sans"/>
@@ -457,7 +452,6 @@
               <a:spcAft>
                 <a:spcPts val="0"/>
               </a:spcAft>
-              <a:buSzPts val="5200"/>
               <a:buNone/>
               <a:defRPr sz="5200" lang="ja-JP">
                 <a:latin typeface="Noto Sans"/>
@@ -472,7 +466,6 @@
               <a:spcAft>
                 <a:spcPts val="0"/>
               </a:spcAft>
-              <a:buSzPts val="5200"/>
               <a:buNone/>
               <a:defRPr sz="5200" lang="ja-JP">
                 <a:latin typeface="Noto Sans"/>
@@ -487,7 +480,6 @@
               <a:spcAft>
                 <a:spcPts val="0"/>
               </a:spcAft>
-              <a:buSzPts val="5200"/>
               <a:buNone/>
               <a:defRPr sz="5200" lang="ja-JP">
                 <a:latin typeface="Noto Sans"/>
@@ -502,7 +494,6 @@
               <a:spcAft>
                 <a:spcPts val="0"/>
               </a:spcAft>
-              <a:buSzPts val="5200"/>
               <a:buNone/>
               <a:defRPr sz="5200" lang="ja-JP">
                 <a:latin typeface="Noto Sans"/>
@@ -557,7 +548,6 @@
               <a:buClr>
                 <a:schemeClr val="dk1"/>
               </a:buClr>
-              <a:buSzPts val="2800"/>
               <a:buNone/>
               <a:defRPr sz="2800" lang="ja-JP">
                 <a:solidFill>
@@ -578,7 +568,6 @@
               <a:spcAft>
                 <a:spcPts val="0"/>
               </a:spcAft>
-              <a:buSzPts val="2800"/>
               <a:buNone/>
               <a:defRPr sz="2800" lang="ja-JP">
                 <a:latin typeface="Noto Sans"/>
@@ -596,7 +585,6 @@
               <a:spcAft>
                 <a:spcPts val="0"/>
               </a:spcAft>
-              <a:buSzPts val="2800"/>
               <a:buNone/>
               <a:defRPr sz="2800" lang="ja-JP">
                 <a:latin typeface="Noto Sans"/>
@@ -614,7 +602,6 @@
               <a:spcAft>
                 <a:spcPts val="0"/>
               </a:spcAft>
-              <a:buSzPts val="2800"/>
               <a:buNone/>
               <a:defRPr sz="2800" lang="ja-JP">
                 <a:latin typeface="Noto Sans"/>
@@ -632,7 +619,6 @@
               <a:spcAft>
                 <a:spcPts val="0"/>
               </a:spcAft>
-              <a:buSzPts val="2800"/>
               <a:buNone/>
               <a:defRPr sz="2800" lang="ja-JP">
                 <a:latin typeface="Noto Sans"/>
@@ -650,7 +636,6 @@
               <a:spcAft>
                 <a:spcPts val="0"/>
               </a:spcAft>
-              <a:buSzPts val="2800"/>
               <a:buNone/>
               <a:defRPr sz="2800" lang="ja-JP">
                 <a:latin typeface="Noto Sans"/>
@@ -668,7 +653,6 @@
               <a:spcAft>
                 <a:spcPts val="0"/>
               </a:spcAft>
-              <a:buSzPts val="2800"/>
               <a:buNone/>
               <a:defRPr sz="2800" lang="ja-JP">
                 <a:latin typeface="Noto Sans"/>
@@ -686,7 +670,6 @@
               <a:spcAft>
                 <a:spcPts val="0"/>
               </a:spcAft>
-              <a:buSzPts val="2800"/>
               <a:buNone/>
               <a:defRPr sz="2800" lang="ja-JP">
                 <a:latin typeface="Noto Sans"/>
@@ -704,7 +687,6 @@
               <a:spcAft>
                 <a:spcPts val="0"/>
               </a:spcAft>
-              <a:buSzPts val="2800"/>
               <a:buNone/>
               <a:defRPr sz="2800" lang="ja-JP">
                 <a:latin typeface="Noto Sans"/>
@@ -863,7 +845,8 @@
               <a:buClr>
                 <a:srgbClr val="303437"/>
               </a:buClr>
-              <a:buSzPts val="2000"/>
+              <a:buSzPct val="66500"/>
+              <a:buFont typeface="Noto Sans CJK JP"/>
               <a:buChar char="●"/>
               <a:defRPr sz="2000" lang="ja-JP">
                 <a:solidFill>
@@ -884,7 +867,8 @@
               <a:buClr>
                 <a:srgbClr val="303437"/>
               </a:buClr>
-              <a:buSzPts val="2000"/>
+              <a:buSzPct val="66500"/>
+              <a:buFont typeface="Noto Sans CJK JP"/>
               <a:buChar char="○"/>
               <a:defRPr sz="2000" lang="ja-JP">
                 <a:solidFill>
@@ -905,8 +889,9 @@
               <a:buClr>
                 <a:srgbClr val="303437"/>
               </a:buClr>
-              <a:buSzPts val="2000"/>
-              <a:buChar char="■"/>
+              <a:buSzPct val="66500"/>
+              <a:buFont typeface="Noto Sans CJK JP"/>
+              <a:buChar char="○"/>
               <a:defRPr sz="2000" lang="ja-JP">
                 <a:solidFill>
                   <a:srgbClr val="303437"/>
@@ -926,7 +911,8 @@
               <a:buClr>
                 <a:srgbClr val="303437"/>
               </a:buClr>
-              <a:buSzPts val="2200"/>
+              <a:buSzPct val="60455"/>
+              <a:buFont typeface="Noto Sans CJK JP"/>
               <a:buChar char="●"/>
               <a:defRPr sz="2200" lang="ja-JP">
                 <a:solidFill>
@@ -947,7 +933,8 @@
               <a:buClr>
                 <a:srgbClr val="303437"/>
               </a:buClr>
-              <a:buSzPts val="2000"/>
+              <a:buSzPct val="66500"/>
+              <a:buFont typeface="Noto Sans CJK JP"/>
               <a:buChar char="○"/>
               <a:defRPr sz="2000" lang="ja-JP">
                 <a:solidFill>
@@ -968,8 +955,9 @@
               <a:buClr>
                 <a:srgbClr val="303437"/>
               </a:buClr>
-              <a:buSzPts val="2000"/>
-              <a:buChar char="■"/>
+              <a:buSzPct val="66500"/>
+              <a:buFont typeface="Noto Sans CJK JP"/>
+              <a:buChar char="○"/>
               <a:defRPr sz="2000" lang="ja-JP">
                 <a:solidFill>
                   <a:srgbClr val="303437"/>
@@ -989,7 +977,8 @@
               <a:buClr>
                 <a:srgbClr val="303437"/>
               </a:buClr>
-              <a:buSzPts val="2000"/>
+              <a:buSzPct val="66500"/>
+              <a:buFont typeface="Noto Sans CJK JP"/>
               <a:buChar char="●"/>
               <a:defRPr sz="2000" lang="ja-JP">
                 <a:solidFill>
@@ -1010,7 +999,8 @@
               <a:buClr>
                 <a:srgbClr val="303437"/>
               </a:buClr>
-              <a:buSzPts val="2000"/>
+              <a:buSzPct val="66500"/>
+              <a:buFont typeface="Noto Sans CJK JP"/>
               <a:buChar char="○"/>
               <a:defRPr sz="2000" lang="ja-JP">
                 <a:solidFill>
@@ -1031,8 +1021,9 @@
               <a:buClr>
                 <a:srgbClr val="303437"/>
               </a:buClr>
-              <a:buSzPts val="2000"/>
-              <a:buChar char="■"/>
+              <a:buSzPct val="66500"/>
+              <a:buFont typeface="Noto Sans CJK JP"/>
+              <a:buChar char="○"/>
               <a:defRPr sz="2000" lang="ja-JP">
                 <a:solidFill>
                   <a:srgbClr val="303437"/>
@@ -1103,7 +1094,8 @@
               <a:buClr>
                 <a:srgbClr val="303437"/>
               </a:buClr>
-              <a:buSzPts val="2000"/>
+              <a:buSzPct val="66500"/>
+              <a:buFont typeface="Noto Sans CJK JP"/>
               <a:buChar char="●"/>
               <a:defRPr sz="2000" lang="ja-JP">
                 <a:solidFill>
@@ -1124,7 +1116,8 @@
               <a:buClr>
                 <a:srgbClr val="303437"/>
               </a:buClr>
-              <a:buSzPts val="2000"/>
+              <a:buSzPct val="66500"/>
+              <a:buFont typeface="Noto Sans CJK JP"/>
               <a:buChar char="○"/>
               <a:defRPr sz="2000" lang="ja-JP">
                 <a:solidFill>
@@ -1145,8 +1138,9 @@
               <a:buClr>
                 <a:srgbClr val="303437"/>
               </a:buClr>
-              <a:buSzPts val="2000"/>
-              <a:buChar char="■"/>
+              <a:buSzPct val="66500"/>
+              <a:buFont typeface="Noto Sans CJK JP"/>
+              <a:buChar char="○"/>
               <a:defRPr sz="2000" lang="ja-JP">
                 <a:solidFill>
                   <a:srgbClr val="303437"/>
@@ -1166,7 +1160,8 @@
               <a:buClr>
                 <a:srgbClr val="303437"/>
               </a:buClr>
-              <a:buSzPts val="2200"/>
+              <a:buSzPct val="60455"/>
+              <a:buFont typeface="Noto Sans CJK JP"/>
               <a:buChar char="●"/>
               <a:defRPr sz="2200" lang="ja-JP">
                 <a:solidFill>
@@ -1187,7 +1182,8 @@
               <a:buClr>
                 <a:srgbClr val="303437"/>
               </a:buClr>
-              <a:buSzPts val="2000"/>
+              <a:buSzPct val="66500"/>
+              <a:buFont typeface="Noto Sans CJK JP"/>
               <a:buChar char="○"/>
               <a:defRPr sz="2000" lang="ja-JP">
                 <a:solidFill>
@@ -1208,8 +1204,9 @@
               <a:buClr>
                 <a:srgbClr val="303437"/>
               </a:buClr>
-              <a:buSzPts val="2000"/>
-              <a:buChar char="■"/>
+              <a:buSzPct val="66500"/>
+              <a:buFont typeface="Noto Sans CJK JP"/>
+              <a:buChar char="○"/>
               <a:defRPr sz="2000" lang="ja-JP">
                 <a:solidFill>
                   <a:srgbClr val="303437"/>
@@ -1229,7 +1226,8 @@
               <a:buClr>
                 <a:srgbClr val="303437"/>
               </a:buClr>
-              <a:buSzPts val="2000"/>
+              <a:buSzPct val="66500"/>
+              <a:buFont typeface="Noto Sans CJK JP"/>
               <a:buChar char="●"/>
               <a:defRPr sz="2000" lang="ja-JP">
                 <a:solidFill>
@@ -1250,7 +1248,8 @@
               <a:buClr>
                 <a:srgbClr val="303437"/>
               </a:buClr>
-              <a:buSzPts val="2000"/>
+              <a:buSzPct val="66500"/>
+              <a:buFont typeface="Noto Sans CJK JP"/>
               <a:buChar char="○"/>
               <a:defRPr sz="2000" lang="ja-JP">
                 <a:solidFill>
@@ -1271,8 +1270,9 @@
               <a:buClr>
                 <a:srgbClr val="303437"/>
               </a:buClr>
-              <a:buSzPts val="2000"/>
-              <a:buChar char="■"/>
+              <a:buSzPct val="66500"/>
+              <a:buFont typeface="Noto Sans CJK JP"/>
+              <a:buChar char="○"/>
               <a:defRPr sz="2000" lang="ja-JP">
                 <a:solidFill>
                   <a:srgbClr val="303437"/>
@@ -1351,7 +1351,8 @@
               <a:buClr>
                 <a:srgbClr val="303437"/>
               </a:buClr>
-              <a:buSzPts val="2000"/>
+              <a:buSzPct val="66500"/>
+              <a:buFont typeface="Noto Sans CJK JP"/>
               <a:buChar char="●"/>
               <a:defRPr sz="2000" lang="ja-JP">
                 <a:solidFill>
@@ -1372,7 +1373,8 @@
               <a:buClr>
                 <a:srgbClr val="303437"/>
               </a:buClr>
-              <a:buSzPts val="2000"/>
+              <a:buSzPct val="66500"/>
+              <a:buFont typeface="Noto Sans CJK JP"/>
               <a:buChar char="○"/>
               <a:defRPr sz="2000" lang="ja-JP">
                 <a:solidFill>
@@ -1393,8 +1395,9 @@
               <a:buClr>
                 <a:srgbClr val="303437"/>
               </a:buClr>
-              <a:buSzPts val="2000"/>
-              <a:buChar char="■"/>
+              <a:buSzPct val="66500"/>
+              <a:buFont typeface="Noto Sans CJK JP"/>
+              <a:buChar char="○"/>
               <a:defRPr sz="2000" lang="ja-JP">
                 <a:solidFill>
                   <a:srgbClr val="303437"/>
@@ -1414,7 +1417,8 @@
               <a:buClr>
                 <a:srgbClr val="303437"/>
               </a:buClr>
-              <a:buSzPts val="2200"/>
+              <a:buSzPct val="60455"/>
+              <a:buFont typeface="Noto Sans CJK JP"/>
               <a:buChar char="●"/>
               <a:defRPr sz="2200" lang="ja-JP">
                 <a:solidFill>
@@ -1435,7 +1439,8 @@
               <a:buClr>
                 <a:srgbClr val="303437"/>
               </a:buClr>
-              <a:buSzPts val="2000"/>
+              <a:buSzPct val="66500"/>
+              <a:buFont typeface="Noto Sans CJK JP"/>
               <a:buChar char="○"/>
               <a:defRPr sz="2000" lang="ja-JP">
                 <a:solidFill>
@@ -1456,8 +1461,9 @@
               <a:buClr>
                 <a:srgbClr val="303437"/>
               </a:buClr>
-              <a:buSzPts val="2000"/>
-              <a:buChar char="■"/>
+              <a:buSzPct val="66500"/>
+              <a:buFont typeface="Noto Sans CJK JP"/>
+              <a:buChar char="○"/>
               <a:defRPr sz="2000" lang="ja-JP">
                 <a:solidFill>
                   <a:srgbClr val="303437"/>
@@ -1477,7 +1483,8 @@
               <a:buClr>
                 <a:srgbClr val="303437"/>
               </a:buClr>
-              <a:buSzPts val="2000"/>
+              <a:buSzPct val="66500"/>
+              <a:buFont typeface="Noto Sans CJK JP"/>
               <a:buChar char="●"/>
               <a:defRPr sz="2000" lang="ja-JP">
                 <a:solidFill>
@@ -1498,7 +1505,8 @@
               <a:buClr>
                 <a:srgbClr val="303437"/>
               </a:buClr>
-              <a:buSzPts val="2000"/>
+              <a:buSzPct val="66500"/>
+              <a:buFont typeface="Noto Sans CJK JP"/>
               <a:buChar char="○"/>
               <a:defRPr sz="2000" lang="ja-JP">
                 <a:solidFill>
@@ -1519,8 +1527,9 @@
               <a:buClr>
                 <a:srgbClr val="303437"/>
               </a:buClr>
-              <a:buSzPts val="2000"/>
-              <a:buChar char="■"/>
+              <a:buSzPct val="66500"/>
+              <a:buFont typeface="Noto Sans CJK JP"/>
+              <a:buChar char="○"/>
               <a:defRPr sz="2000" lang="ja-JP">
                 <a:solidFill>
                   <a:srgbClr val="303437"/>
@@ -1759,7 +1768,6 @@
               <a:buClr>
                 <a:schemeClr val="dk1"/>
               </a:buClr>
-              <a:buSzPts val="1018"/>
               <a:buFont typeface="Noto Sans CJK JP"/>
               <a:buNone/>
               <a:tabLst/>
@@ -1851,7 +1859,6 @@
               <a:buClr>
                 <a:schemeClr val="dk1"/>
               </a:buClr>
-              <a:buSzPts val="1018"/>
               <a:buFont typeface="Noto Sans CJK JP"/>
               <a:buNone/>
               <a:tabLst/>
@@ -1943,7 +1950,6 @@
               <a:buClr>
                 <a:schemeClr val="dk1"/>
               </a:buClr>
-              <a:buSzPts val="1018"/>
               <a:buFont typeface="Noto Sans CJK JP"/>
               <a:buNone/>
               <a:tabLst/>
@@ -2035,7 +2041,6 @@
               <a:buClr>
                 <a:schemeClr val="dk1"/>
               </a:buClr>
-              <a:buSzPts val="1018"/>
               <a:buFont typeface="Noto Sans CJK JP"/>
               <a:buNone/>
               <a:tabLst/>
@@ -2172,7 +2177,6 @@
               <a:buClr>
                 <a:schemeClr val="dk1"/>
               </a:buClr>
-              <a:buSzPts val="1018"/>
               <a:buFont typeface="Noto Sans CJK JP"/>
               <a:buNone/>
               <a:tabLst/>
@@ -2375,7 +2379,6 @@
               <a:buClr>
                 <a:schemeClr val="dk1"/>
               </a:buClr>
-              <a:buSzPts val="3000"/>
               <a:buNone/>
               <a:defRPr sz="3000" b="1" lang="ja-JP">
                 <a:solidFill>
@@ -2393,7 +2396,6 @@
               <a:spcAft>
                 <a:spcPts val="0"/>
               </a:spcAft>
-              <a:buSzPts val="2800"/>
               <a:buNone/>
               <a:defRPr lang="ja-JP">
                 <a:latin typeface="Noto Sans"/>
@@ -2408,7 +2410,6 @@
               <a:spcAft>
                 <a:spcPts val="0"/>
               </a:spcAft>
-              <a:buSzPts val="2800"/>
               <a:buNone/>
               <a:defRPr lang="ja-JP">
                 <a:latin typeface="Noto Sans"/>
@@ -2423,7 +2424,6 @@
               <a:spcAft>
                 <a:spcPts val="0"/>
               </a:spcAft>
-              <a:buSzPts val="2800"/>
               <a:buNone/>
               <a:defRPr lang="ja-JP">
                 <a:latin typeface="Noto Sans"/>
@@ -2438,7 +2438,6 @@
               <a:spcAft>
                 <a:spcPts val="0"/>
               </a:spcAft>
-              <a:buSzPts val="2800"/>
               <a:buNone/>
               <a:defRPr lang="ja-JP">
                 <a:latin typeface="Noto Sans"/>
@@ -2453,7 +2452,6 @@
               <a:spcAft>
                 <a:spcPts val="0"/>
               </a:spcAft>
-              <a:buSzPts val="2800"/>
               <a:buNone/>
               <a:defRPr lang="ja-JP">
                 <a:latin typeface="Noto Sans"/>
@@ -2468,7 +2466,6 @@
               <a:spcAft>
                 <a:spcPts val="0"/>
               </a:spcAft>
-              <a:buSzPts val="2800"/>
               <a:buNone/>
               <a:defRPr lang="ja-JP">
                 <a:latin typeface="Noto Sans"/>
@@ -2483,7 +2480,6 @@
               <a:spcAft>
                 <a:spcPts val="0"/>
               </a:spcAft>
-              <a:buSzPts val="2800"/>
               <a:buNone/>
               <a:defRPr lang="ja-JP">
                 <a:latin typeface="Noto Sans"/>
@@ -2498,7 +2494,6 @@
               <a:spcAft>
                 <a:spcPts val="0"/>
               </a:spcAft>
-              <a:buSzPts val="2800"/>
               <a:buNone/>
               <a:defRPr lang="ja-JP">
                 <a:latin typeface="Noto Sans"/>
@@ -2550,7 +2545,8 @@
               <a:buClr>
                 <a:srgbClr val="303437"/>
               </a:buClr>
-              <a:buSzPts val="2000"/>
+              <a:buSzPct val="66500"/>
+              <a:buFont typeface="Noto Sans CJK JP"/>
               <a:buChar char="●"/>
               <a:defRPr sz="2000" lang="ja-JP">
                 <a:solidFill>
@@ -2571,7 +2567,8 @@
               <a:buClr>
                 <a:srgbClr val="303437"/>
               </a:buClr>
-              <a:buSzPts val="2000"/>
+              <a:buSzPct val="66500"/>
+              <a:buFont typeface="Noto Sans CJK JP"/>
               <a:buChar char="○"/>
               <a:defRPr sz="2000" lang="ja-JP">
                 <a:solidFill>
@@ -2592,8 +2589,9 @@
               <a:buClr>
                 <a:srgbClr val="303437"/>
               </a:buClr>
-              <a:buSzPts val="2000"/>
-              <a:buChar char="■"/>
+              <a:buSzPct val="66500"/>
+              <a:buFont typeface="Noto Sans CJK JP"/>
+              <a:buChar char="○"/>
               <a:defRPr sz="2000" lang="ja-JP">
                 <a:solidFill>
                   <a:srgbClr val="303437"/>
@@ -2613,7 +2611,8 @@
               <a:buClr>
                 <a:srgbClr val="303437"/>
               </a:buClr>
-              <a:buSzPts val="2200"/>
+              <a:buSzPct val="60455"/>
+              <a:buFont typeface="Noto Sans CJK JP"/>
               <a:buChar char="●"/>
               <a:defRPr sz="2200" lang="ja-JP">
                 <a:solidFill>
@@ -2634,7 +2633,8 @@
               <a:buClr>
                 <a:srgbClr val="303437"/>
               </a:buClr>
-              <a:buSzPts val="2000"/>
+              <a:buSzPct val="66500"/>
+              <a:buFont typeface="Noto Sans CJK JP"/>
               <a:buChar char="○"/>
               <a:defRPr sz="2000" lang="ja-JP">
                 <a:solidFill>
@@ -2655,8 +2655,9 @@
               <a:buClr>
                 <a:srgbClr val="303437"/>
               </a:buClr>
-              <a:buSzPts val="2000"/>
-              <a:buChar char="■"/>
+              <a:buSzPct val="66500"/>
+              <a:buFont typeface="Noto Sans CJK JP"/>
+              <a:buChar char="○"/>
               <a:defRPr sz="2000" lang="ja-JP">
                 <a:solidFill>
                   <a:srgbClr val="303437"/>
@@ -2676,7 +2677,8 @@
               <a:buClr>
                 <a:srgbClr val="303437"/>
               </a:buClr>
-              <a:buSzPts val="2000"/>
+              <a:buSzPct val="66500"/>
+              <a:buFont typeface="Noto Sans CJK JP"/>
               <a:buChar char="●"/>
               <a:defRPr sz="2000" lang="ja-JP">
                 <a:solidFill>
@@ -2697,7 +2699,8 @@
               <a:buClr>
                 <a:srgbClr val="303437"/>
               </a:buClr>
-              <a:buSzPts val="2000"/>
+              <a:buSzPct val="66500"/>
+              <a:buFont typeface="Noto Sans CJK JP"/>
               <a:buChar char="○"/>
               <a:defRPr sz="2000" lang="ja-JP">
                 <a:solidFill>
@@ -2718,8 +2721,9 @@
               <a:buClr>
                 <a:srgbClr val="303437"/>
               </a:buClr>
-              <a:buSzPts val="2000"/>
-              <a:buChar char="■"/>
+              <a:buSzPct val="66500"/>
+              <a:buFont typeface="Noto Sans CJK JP"/>
+              <a:buChar char="○"/>
               <a:defRPr sz="2000" lang="ja-JP">
                 <a:solidFill>
                   <a:srgbClr val="303437"/>
@@ -2776,7 +2780,6 @@
               <a:buClr>
                 <a:schemeClr val="lt1"/>
               </a:buClr>
-              <a:buSzPts val="1400"/>
               <a:buNone/>
               <a:defRPr sz="1400" b="1" lang="ja-JP">
                 <a:solidFill>
@@ -2794,7 +2797,6 @@
               <a:spcAft>
                 <a:spcPts val="0"/>
               </a:spcAft>
-              <a:buSzPts val="2800"/>
               <a:buNone/>
               <a:defRPr lang="ja-JP">
                 <a:latin typeface="Noto Sans"/>
@@ -2809,7 +2811,6 @@
               <a:spcAft>
                 <a:spcPts val="0"/>
               </a:spcAft>
-              <a:buSzPts val="2800"/>
               <a:buNone/>
               <a:defRPr lang="ja-JP">
                 <a:latin typeface="Noto Sans"/>
@@ -2824,7 +2825,6 @@
               <a:spcAft>
                 <a:spcPts val="0"/>
               </a:spcAft>
-              <a:buSzPts val="2800"/>
               <a:buNone/>
               <a:defRPr lang="ja-JP">
                 <a:latin typeface="Noto Sans"/>
@@ -2839,7 +2839,6 @@
               <a:spcAft>
                 <a:spcPts val="0"/>
               </a:spcAft>
-              <a:buSzPts val="2800"/>
               <a:buNone/>
               <a:defRPr lang="ja-JP">
                 <a:latin typeface="Noto Sans"/>
@@ -2854,7 +2853,6 @@
               <a:spcAft>
                 <a:spcPts val="0"/>
               </a:spcAft>
-              <a:buSzPts val="2800"/>
               <a:buNone/>
               <a:defRPr lang="ja-JP">
                 <a:latin typeface="Noto Sans"/>
@@ -2869,7 +2867,6 @@
               <a:spcAft>
                 <a:spcPts val="0"/>
               </a:spcAft>
-              <a:buSzPts val="2800"/>
               <a:buNone/>
               <a:defRPr lang="ja-JP">
                 <a:latin typeface="Noto Sans"/>
@@ -2884,7 +2881,6 @@
               <a:spcAft>
                 <a:spcPts val="0"/>
               </a:spcAft>
-              <a:buSzPts val="2800"/>
               <a:buNone/>
               <a:defRPr lang="ja-JP">
                 <a:latin typeface="Noto Sans"/>
@@ -2899,7 +2895,6 @@
               <a:spcAft>
                 <a:spcPts val="0"/>
               </a:spcAft>
-              <a:buSzPts val="2800"/>
               <a:buNone/>
               <a:defRPr lang="ja-JP">
                 <a:latin typeface="Noto Sans"/>
@@ -3077,7 +3072,6 @@
               <a:buClr>
                 <a:schemeClr val="dk1"/>
               </a:buClr>
-              <a:buSzPts val="3000"/>
               <a:buNone/>
               <a:defRPr sz="3000" b="1" lang="ja-JP">
                 <a:solidFill>
@@ -3095,7 +3089,6 @@
               <a:spcAft>
                 <a:spcPts val="0"/>
               </a:spcAft>
-              <a:buSzPts val="2800"/>
               <a:buNone/>
               <a:defRPr lang="ja-JP">
                 <a:latin typeface="Noto Sans"/>
@@ -3110,7 +3103,6 @@
               <a:spcAft>
                 <a:spcPts val="0"/>
               </a:spcAft>
-              <a:buSzPts val="2800"/>
               <a:buNone/>
               <a:defRPr lang="ja-JP">
                 <a:latin typeface="Noto Sans"/>
@@ -3125,7 +3117,6 @@
               <a:spcAft>
                 <a:spcPts val="0"/>
               </a:spcAft>
-              <a:buSzPts val="2800"/>
               <a:buNone/>
               <a:defRPr lang="ja-JP">
                 <a:latin typeface="Noto Sans"/>
@@ -3140,7 +3131,6 @@
               <a:spcAft>
                 <a:spcPts val="0"/>
               </a:spcAft>
-              <a:buSzPts val="2800"/>
               <a:buNone/>
               <a:defRPr lang="ja-JP">
                 <a:latin typeface="Noto Sans"/>
@@ -3155,7 +3145,6 @@
               <a:spcAft>
                 <a:spcPts val="0"/>
               </a:spcAft>
-              <a:buSzPts val="2800"/>
               <a:buNone/>
               <a:defRPr lang="ja-JP">
                 <a:latin typeface="Noto Sans"/>
@@ -3170,7 +3159,6 @@
               <a:spcAft>
                 <a:spcPts val="0"/>
               </a:spcAft>
-              <a:buSzPts val="2800"/>
               <a:buNone/>
               <a:defRPr lang="ja-JP">
                 <a:latin typeface="Noto Sans"/>
@@ -3185,7 +3173,6 @@
               <a:spcAft>
                 <a:spcPts val="0"/>
               </a:spcAft>
-              <a:buSzPts val="2800"/>
               <a:buNone/>
               <a:defRPr lang="ja-JP">
                 <a:latin typeface="Noto Sans"/>
@@ -3200,7 +3187,6 @@
               <a:spcAft>
                 <a:spcPts val="0"/>
               </a:spcAft>
-              <a:buSzPts val="2800"/>
               <a:buNone/>
               <a:defRPr lang="ja-JP">
                 <a:latin typeface="Noto Sans"/>
@@ -3255,7 +3241,6 @@
               <a:buClr>
                 <a:schemeClr val="lt1"/>
               </a:buClr>
-              <a:buSzPts val="1400"/>
               <a:buNone/>
               <a:defRPr sz="1400" b="1" lang="ja-JP">
                 <a:solidFill>
@@ -3273,7 +3258,6 @@
               <a:spcAft>
                 <a:spcPts val="0"/>
               </a:spcAft>
-              <a:buSzPts val="2800"/>
               <a:buNone/>
               <a:defRPr lang="ja-JP">
                 <a:latin typeface="Noto Sans"/>
@@ -3288,7 +3272,6 @@
               <a:spcAft>
                 <a:spcPts val="0"/>
               </a:spcAft>
-              <a:buSzPts val="2800"/>
               <a:buNone/>
               <a:defRPr lang="ja-JP">
                 <a:latin typeface="Noto Sans"/>
@@ -3303,7 +3286,6 @@
               <a:spcAft>
                 <a:spcPts val="0"/>
               </a:spcAft>
-              <a:buSzPts val="2800"/>
               <a:buNone/>
               <a:defRPr lang="ja-JP">
                 <a:latin typeface="Noto Sans"/>
@@ -3318,7 +3300,6 @@
               <a:spcAft>
                 <a:spcPts val="0"/>
               </a:spcAft>
-              <a:buSzPts val="2800"/>
               <a:buNone/>
               <a:defRPr lang="ja-JP">
                 <a:latin typeface="Noto Sans"/>
@@ -3333,7 +3314,6 @@
               <a:spcAft>
                 <a:spcPts val="0"/>
               </a:spcAft>
-              <a:buSzPts val="2800"/>
               <a:buNone/>
               <a:defRPr lang="ja-JP">
                 <a:latin typeface="Noto Sans"/>
@@ -3348,7 +3328,6 @@
               <a:spcAft>
                 <a:spcPts val="0"/>
               </a:spcAft>
-              <a:buSzPts val="2800"/>
               <a:buNone/>
               <a:defRPr lang="ja-JP">
                 <a:latin typeface="Noto Sans"/>
@@ -3363,7 +3342,6 @@
               <a:spcAft>
                 <a:spcPts val="0"/>
               </a:spcAft>
-              <a:buSzPts val="2800"/>
               <a:buNone/>
               <a:defRPr lang="ja-JP">
                 <a:latin typeface="Noto Sans"/>
@@ -3378,7 +3356,6 @@
               <a:spcAft>
                 <a:spcPts val="0"/>
               </a:spcAft>
-              <a:buSzPts val="2800"/>
               <a:buNone/>
               <a:defRPr lang="ja-JP">
                 <a:latin typeface="Noto Sans"/>
@@ -3556,7 +3533,6 @@
               <a:buClr>
                 <a:schemeClr val="dk1"/>
               </a:buClr>
-              <a:buSzPts val="3000"/>
               <a:buNone/>
               <a:defRPr sz="3000" b="1" lang="ja-JP">
                 <a:solidFill>
@@ -3574,7 +3550,6 @@
               <a:spcAft>
                 <a:spcPts val="0"/>
               </a:spcAft>
-              <a:buSzPts val="2800"/>
               <a:buNone/>
               <a:defRPr lang="ja-JP">
                 <a:latin typeface="Noto Sans"/>
@@ -3589,7 +3564,6 @@
               <a:spcAft>
                 <a:spcPts val="0"/>
               </a:spcAft>
-              <a:buSzPts val="2800"/>
               <a:buNone/>
               <a:defRPr lang="ja-JP">
                 <a:latin typeface="Noto Sans"/>
@@ -3604,7 +3578,6 @@
               <a:spcAft>
                 <a:spcPts val="0"/>
               </a:spcAft>
-              <a:buSzPts val="2800"/>
               <a:buNone/>
               <a:defRPr lang="ja-JP">
                 <a:latin typeface="Noto Sans"/>
@@ -3619,7 +3592,6 @@
               <a:spcAft>
                 <a:spcPts val="0"/>
               </a:spcAft>
-              <a:buSzPts val="2800"/>
               <a:buNone/>
               <a:defRPr lang="ja-JP">
                 <a:latin typeface="Noto Sans"/>
@@ -3634,7 +3606,6 @@
               <a:spcAft>
                 <a:spcPts val="0"/>
               </a:spcAft>
-              <a:buSzPts val="2800"/>
               <a:buNone/>
               <a:defRPr lang="ja-JP">
                 <a:latin typeface="Noto Sans"/>
@@ -3649,7 +3620,6 @@
               <a:spcAft>
                 <a:spcPts val="0"/>
               </a:spcAft>
-              <a:buSzPts val="2800"/>
               <a:buNone/>
               <a:defRPr lang="ja-JP">
                 <a:latin typeface="Noto Sans"/>
@@ -3664,7 +3634,6 @@
               <a:spcAft>
                 <a:spcPts val="0"/>
               </a:spcAft>
-              <a:buSzPts val="2800"/>
               <a:buNone/>
               <a:defRPr lang="ja-JP">
                 <a:latin typeface="Noto Sans"/>
@@ -3679,7 +3648,6 @@
               <a:spcAft>
                 <a:spcPts val="0"/>
               </a:spcAft>
-              <a:buSzPts val="2800"/>
               <a:buNone/>
               <a:defRPr lang="ja-JP">
                 <a:latin typeface="Noto Sans"/>
@@ -3734,7 +3702,6 @@
               <a:buClr>
                 <a:schemeClr val="lt1"/>
               </a:buClr>
-              <a:buSzPts val="1400"/>
               <a:buNone/>
               <a:defRPr sz="1400" b="1" lang="ja-JP">
                 <a:solidFill>
@@ -3752,7 +3719,6 @@
               <a:spcAft>
                 <a:spcPts val="0"/>
               </a:spcAft>
-              <a:buSzPts val="2800"/>
               <a:buNone/>
               <a:defRPr lang="ja-JP">
                 <a:latin typeface="Noto Sans"/>
@@ -3767,7 +3733,6 @@
               <a:spcAft>
                 <a:spcPts val="0"/>
               </a:spcAft>
-              <a:buSzPts val="2800"/>
               <a:buNone/>
               <a:defRPr lang="ja-JP">
                 <a:latin typeface="Noto Sans"/>
@@ -3782,7 +3747,6 @@
               <a:spcAft>
                 <a:spcPts val="0"/>
               </a:spcAft>
-              <a:buSzPts val="2800"/>
               <a:buNone/>
               <a:defRPr lang="ja-JP">
                 <a:latin typeface="Noto Sans"/>
@@ -3797,7 +3761,6 @@
               <a:spcAft>
                 <a:spcPts val="0"/>
               </a:spcAft>
-              <a:buSzPts val="2800"/>
               <a:buNone/>
               <a:defRPr lang="ja-JP">
                 <a:latin typeface="Noto Sans"/>
@@ -3812,7 +3775,6 @@
               <a:spcAft>
                 <a:spcPts val="0"/>
               </a:spcAft>
-              <a:buSzPts val="2800"/>
               <a:buNone/>
               <a:defRPr lang="ja-JP">
                 <a:latin typeface="Noto Sans"/>
@@ -3827,7 +3789,6 @@
               <a:spcAft>
                 <a:spcPts val="0"/>
               </a:spcAft>
-              <a:buSzPts val="2800"/>
               <a:buNone/>
               <a:defRPr lang="ja-JP">
                 <a:latin typeface="Noto Sans"/>
@@ -3842,7 +3803,6 @@
               <a:spcAft>
                 <a:spcPts val="0"/>
               </a:spcAft>
-              <a:buSzPts val="2800"/>
               <a:buNone/>
               <a:defRPr lang="ja-JP">
                 <a:latin typeface="Noto Sans"/>
@@ -3857,7 +3817,6 @@
               <a:spcAft>
                 <a:spcPts val="0"/>
               </a:spcAft>
-              <a:buSzPts val="2800"/>
               <a:buNone/>
               <a:defRPr lang="ja-JP">
                 <a:latin typeface="Noto Sans"/>
@@ -4035,7 +3994,8 @@
               <a:buClr>
                 <a:srgbClr val="303437"/>
               </a:buClr>
-              <a:buSzPts val="2000"/>
+              <a:buSzPct val="66500"/>
+              <a:buFont typeface="Noto Sans CJK JP"/>
               <a:buChar char="●"/>
               <a:defRPr sz="2000" lang="ja-JP">
                 <a:solidFill>
@@ -4056,7 +4016,8 @@
               <a:buClr>
                 <a:srgbClr val="303437"/>
               </a:buClr>
-              <a:buSzPts val="2000"/>
+              <a:buSzPct val="66500"/>
+              <a:buFont typeface="Noto Sans CJK JP"/>
               <a:buChar char="○"/>
               <a:defRPr sz="2000" lang="ja-JP">
                 <a:solidFill>
@@ -4077,8 +4038,9 @@
               <a:buClr>
                 <a:srgbClr val="303437"/>
               </a:buClr>
-              <a:buSzPts val="2000"/>
-              <a:buChar char="■"/>
+              <a:buSzPct val="66500"/>
+              <a:buFont typeface="Noto Sans CJK JP"/>
+              <a:buChar char="○"/>
               <a:defRPr sz="2000" lang="ja-JP">
                 <a:solidFill>
                   <a:srgbClr val="303437"/>
@@ -4098,7 +4060,8 @@
               <a:buClr>
                 <a:srgbClr val="303437"/>
               </a:buClr>
-              <a:buSzPts val="2200"/>
+              <a:buSzPct val="60455"/>
+              <a:buFont typeface="Noto Sans CJK JP"/>
               <a:buChar char="●"/>
               <a:defRPr sz="2200" lang="ja-JP">
                 <a:solidFill>
@@ -4119,7 +4082,8 @@
               <a:buClr>
                 <a:srgbClr val="303437"/>
               </a:buClr>
-              <a:buSzPts val="2000"/>
+              <a:buSzPct val="66500"/>
+              <a:buFont typeface="Noto Sans CJK JP"/>
               <a:buChar char="○"/>
               <a:defRPr sz="2000" lang="ja-JP">
                 <a:solidFill>
@@ -4140,8 +4104,9 @@
               <a:buClr>
                 <a:srgbClr val="303437"/>
               </a:buClr>
-              <a:buSzPts val="2000"/>
-              <a:buChar char="■"/>
+              <a:buSzPct val="66500"/>
+              <a:buFont typeface="Noto Sans CJK JP"/>
+              <a:buChar char="○"/>
               <a:defRPr sz="2000" lang="ja-JP">
                 <a:solidFill>
                   <a:srgbClr val="303437"/>
@@ -4161,7 +4126,8 @@
               <a:buClr>
                 <a:srgbClr val="303437"/>
               </a:buClr>
-              <a:buSzPts val="2000"/>
+              <a:buSzPct val="66500"/>
+              <a:buFont typeface="Noto Sans CJK JP"/>
               <a:buChar char="●"/>
               <a:defRPr sz="2000" lang="ja-JP">
                 <a:solidFill>
@@ -4182,7 +4148,8 @@
               <a:buClr>
                 <a:srgbClr val="303437"/>
               </a:buClr>
-              <a:buSzPts val="2000"/>
+              <a:buSzPct val="66500"/>
+              <a:buFont typeface="Noto Sans CJK JP"/>
               <a:buChar char="○"/>
               <a:defRPr sz="2000" lang="ja-JP">
                 <a:solidFill>
@@ -4203,8 +4170,9 @@
               <a:buClr>
                 <a:srgbClr val="303437"/>
               </a:buClr>
-              <a:buSzPts val="2000"/>
-              <a:buChar char="■"/>
+              <a:buSzPct val="66500"/>
+              <a:buFont typeface="Noto Sans CJK JP"/>
+              <a:buChar char="○"/>
               <a:defRPr sz="2000" lang="ja-JP">
                 <a:solidFill>
                   <a:srgbClr val="303437"/>
@@ -4261,7 +4229,6 @@
               <a:buClr>
                 <a:schemeClr val="lt1"/>
               </a:buClr>
-              <a:buSzPts val="1400"/>
               <a:buNone/>
               <a:defRPr sz="1400" b="1" lang="ja-JP">
                 <a:solidFill>
@@ -4279,7 +4246,6 @@
               <a:spcAft>
                 <a:spcPts val="0"/>
               </a:spcAft>
-              <a:buSzPts val="2800"/>
               <a:buNone/>
               <a:defRPr lang="ja-JP">
                 <a:latin typeface="Noto Sans"/>
@@ -4294,7 +4260,6 @@
               <a:spcAft>
                 <a:spcPts val="0"/>
               </a:spcAft>
-              <a:buSzPts val="2800"/>
               <a:buNone/>
               <a:defRPr lang="ja-JP">
                 <a:latin typeface="Noto Sans"/>
@@ -4309,7 +4274,6 @@
               <a:spcAft>
                 <a:spcPts val="0"/>
               </a:spcAft>
-              <a:buSzPts val="2800"/>
               <a:buNone/>
               <a:defRPr lang="ja-JP">
                 <a:latin typeface="Noto Sans"/>
@@ -4324,7 +4288,6 @@
               <a:spcAft>
                 <a:spcPts val="0"/>
               </a:spcAft>
-              <a:buSzPts val="2800"/>
               <a:buNone/>
               <a:defRPr lang="ja-JP">
                 <a:latin typeface="Noto Sans"/>
@@ -4339,7 +4302,6 @@
               <a:spcAft>
                 <a:spcPts val="0"/>
               </a:spcAft>
-              <a:buSzPts val="2800"/>
               <a:buNone/>
               <a:defRPr lang="ja-JP">
                 <a:latin typeface="Noto Sans"/>
@@ -4354,7 +4316,6 @@
               <a:spcAft>
                 <a:spcPts val="0"/>
               </a:spcAft>
-              <a:buSzPts val="2800"/>
               <a:buNone/>
               <a:defRPr lang="ja-JP">
                 <a:latin typeface="Noto Sans"/>
@@ -4369,7 +4330,6 @@
               <a:spcAft>
                 <a:spcPts val="0"/>
               </a:spcAft>
-              <a:buSzPts val="2800"/>
               <a:buNone/>
               <a:defRPr lang="ja-JP">
                 <a:latin typeface="Noto Sans"/>
@@ -4384,7 +4344,6 @@
               <a:spcAft>
                 <a:spcPts val="0"/>
               </a:spcAft>
-              <a:buSzPts val="2800"/>
               <a:buNone/>
               <a:defRPr lang="ja-JP">
                 <a:latin typeface="Noto Sans"/>
@@ -4565,7 +4524,6 @@
               <a:buClr>
                 <a:schemeClr val="lt1"/>
               </a:buClr>
-              <a:buSzPts val="1400"/>
               <a:buNone/>
               <a:defRPr sz="1400" b="1" lang="ja-JP">
                 <a:solidFill>
@@ -4583,7 +4541,6 @@
               <a:spcAft>
                 <a:spcPts val="0"/>
               </a:spcAft>
-              <a:buSzPts val="2800"/>
               <a:buNone/>
               <a:defRPr lang="ja-JP">
                 <a:latin typeface="Noto Sans"/>
@@ -4598,7 +4555,6 @@
               <a:spcAft>
                 <a:spcPts val="0"/>
               </a:spcAft>
-              <a:buSzPts val="2800"/>
               <a:buNone/>
               <a:defRPr lang="ja-JP">
                 <a:latin typeface="Noto Sans"/>
@@ -4613,7 +4569,6 @@
               <a:spcAft>
                 <a:spcPts val="0"/>
               </a:spcAft>
-              <a:buSzPts val="2800"/>
               <a:buNone/>
               <a:defRPr lang="ja-JP">
                 <a:latin typeface="Noto Sans"/>
@@ -4628,7 +4583,6 @@
               <a:spcAft>
                 <a:spcPts val="0"/>
               </a:spcAft>
-              <a:buSzPts val="2800"/>
               <a:buNone/>
               <a:defRPr lang="ja-JP">
                 <a:latin typeface="Noto Sans"/>
@@ -4643,7 +4597,6 @@
               <a:spcAft>
                 <a:spcPts val="0"/>
               </a:spcAft>
-              <a:buSzPts val="2800"/>
               <a:buNone/>
               <a:defRPr lang="ja-JP">
                 <a:latin typeface="Noto Sans"/>
@@ -4658,7 +4611,6 @@
               <a:spcAft>
                 <a:spcPts val="0"/>
               </a:spcAft>
-              <a:buSzPts val="2800"/>
               <a:buNone/>
               <a:defRPr lang="ja-JP">
                 <a:latin typeface="Noto Sans"/>
@@ -4673,7 +4625,6 @@
               <a:spcAft>
                 <a:spcPts val="0"/>
               </a:spcAft>
-              <a:buSzPts val="2800"/>
               <a:buNone/>
               <a:defRPr lang="ja-JP">
                 <a:latin typeface="Noto Sans"/>
@@ -4688,7 +4639,6 @@
               <a:spcAft>
                 <a:spcPts val="0"/>
               </a:spcAft>
-              <a:buSzPts val="2800"/>
               <a:buNone/>
               <a:defRPr lang="ja-JP">
                 <a:latin typeface="Noto Sans"/>
@@ -4913,7 +4863,8 @@
               <a:buClr>
                 <a:srgbClr val="303437"/>
               </a:buClr>
-              <a:buSzPts val="2000"/>
+              <a:buSzPct val="66500"/>
+              <a:buFont typeface="Noto Sans CJK JP"/>
               <a:buChar char="●"/>
               <a:defRPr sz="2000" lang="ja-JP">
                 <a:solidFill>
@@ -4934,7 +4885,8 @@
               <a:buClr>
                 <a:srgbClr val="303437"/>
               </a:buClr>
-              <a:buSzPts val="2000"/>
+              <a:buSzPct val="66500"/>
+              <a:buFont typeface="Noto Sans CJK JP"/>
               <a:buChar char="○"/>
               <a:defRPr sz="2000" lang="ja-JP">
                 <a:solidFill>
@@ -4955,8 +4907,9 @@
               <a:buClr>
                 <a:srgbClr val="303437"/>
               </a:buClr>
-              <a:buSzPts val="2000"/>
-              <a:buChar char="■"/>
+              <a:buSzPct val="66500"/>
+              <a:buFont typeface="Noto Sans CJK JP"/>
+              <a:buChar char="○"/>
               <a:defRPr sz="2000" lang="ja-JP">
                 <a:solidFill>
                   <a:srgbClr val="303437"/>
@@ -4976,7 +4929,8 @@
               <a:buClr>
                 <a:srgbClr val="303437"/>
               </a:buClr>
-              <a:buSzPts val="2200"/>
+              <a:buSzPct val="60455"/>
+              <a:buFont typeface="Noto Sans CJK JP"/>
               <a:buChar char="●"/>
               <a:defRPr sz="2200" lang="ja-JP">
                 <a:solidFill>
@@ -4997,7 +4951,8 @@
               <a:buClr>
                 <a:srgbClr val="303437"/>
               </a:buClr>
-              <a:buSzPts val="2000"/>
+              <a:buSzPct val="66500"/>
+              <a:buFont typeface="Noto Sans CJK JP"/>
               <a:buChar char="○"/>
               <a:defRPr sz="2000" lang="ja-JP">
                 <a:solidFill>
@@ -5018,8 +4973,9 @@
               <a:buClr>
                 <a:srgbClr val="303437"/>
               </a:buClr>
-              <a:buSzPts val="2000"/>
-              <a:buChar char="■"/>
+              <a:buSzPct val="66500"/>
+              <a:buFont typeface="Noto Sans CJK JP"/>
+              <a:buChar char="○"/>
               <a:defRPr sz="2000" lang="ja-JP">
                 <a:solidFill>
                   <a:srgbClr val="303437"/>
@@ -5039,7 +4995,8 @@
               <a:buClr>
                 <a:srgbClr val="303437"/>
               </a:buClr>
-              <a:buSzPts val="2000"/>
+              <a:buSzPct val="66500"/>
+              <a:buFont typeface="Noto Sans CJK JP"/>
               <a:buChar char="●"/>
               <a:defRPr sz="2000" lang="ja-JP">
                 <a:solidFill>
@@ -5060,7 +5017,8 @@
               <a:buClr>
                 <a:srgbClr val="303437"/>
               </a:buClr>
-              <a:buSzPts val="2000"/>
+              <a:buSzPct val="66500"/>
+              <a:buFont typeface="Noto Sans CJK JP"/>
               <a:buChar char="○"/>
               <a:defRPr sz="2000" lang="ja-JP">
                 <a:solidFill>
@@ -5081,8 +5039,9 @@
               <a:buClr>
                 <a:srgbClr val="303437"/>
               </a:buClr>
-              <a:buSzPts val="2000"/>
-              <a:buChar char="■"/>
+              <a:buSzPct val="66500"/>
+              <a:buFont typeface="Noto Sans CJK JP"/>
+              <a:buChar char="○"/>
               <a:defRPr sz="2000" lang="ja-JP">
                 <a:solidFill>
                   <a:srgbClr val="303437"/>
@@ -5138,7 +5097,8 @@
               <a:buClr>
                 <a:srgbClr val="303437"/>
               </a:buClr>
-              <a:buSzPts val="2000"/>
+              <a:buSzPct val="66500"/>
+              <a:buFont typeface="Noto Sans CJK JP"/>
               <a:buChar char="●"/>
               <a:defRPr sz="2000" lang="ja-JP">
                 <a:solidFill>
@@ -5159,7 +5119,8 @@
               <a:buClr>
                 <a:srgbClr val="303437"/>
               </a:buClr>
-              <a:buSzPts val="2000"/>
+              <a:buSzPct val="66500"/>
+              <a:buFont typeface="Noto Sans CJK JP"/>
               <a:buChar char="○"/>
               <a:defRPr sz="2000" lang="ja-JP">
                 <a:solidFill>
@@ -5180,8 +5141,9 @@
               <a:buClr>
                 <a:srgbClr val="303437"/>
               </a:buClr>
-              <a:buSzPts val="2000"/>
-              <a:buChar char="■"/>
+              <a:buSzPct val="66500"/>
+              <a:buFont typeface="Noto Sans CJK JP"/>
+              <a:buChar char="○"/>
               <a:defRPr sz="2000" lang="ja-JP">
                 <a:solidFill>
                   <a:srgbClr val="303437"/>
@@ -5201,7 +5163,8 @@
               <a:buClr>
                 <a:srgbClr val="303437"/>
               </a:buClr>
-              <a:buSzPts val="2200"/>
+              <a:buSzPct val="60455"/>
+              <a:buFont typeface="Noto Sans CJK JP"/>
               <a:buChar char="●"/>
               <a:defRPr sz="2200" lang="ja-JP">
                 <a:solidFill>
@@ -5222,7 +5185,8 @@
               <a:buClr>
                 <a:srgbClr val="303437"/>
               </a:buClr>
-              <a:buSzPts val="2000"/>
+              <a:buSzPct val="66500"/>
+              <a:buFont typeface="Noto Sans CJK JP"/>
               <a:buChar char="○"/>
               <a:defRPr sz="2000" lang="ja-JP">
                 <a:solidFill>
@@ -5243,8 +5207,9 @@
               <a:buClr>
                 <a:srgbClr val="303437"/>
               </a:buClr>
-              <a:buSzPts val="2000"/>
-              <a:buChar char="■"/>
+              <a:buSzPct val="66500"/>
+              <a:buFont typeface="Noto Sans CJK JP"/>
+              <a:buChar char="○"/>
               <a:defRPr sz="2000" lang="ja-JP">
                 <a:solidFill>
                   <a:srgbClr val="303437"/>
@@ -5264,7 +5229,8 @@
               <a:buClr>
                 <a:srgbClr val="303437"/>
               </a:buClr>
-              <a:buSzPts val="2000"/>
+              <a:buSzPct val="66500"/>
+              <a:buFont typeface="Noto Sans CJK JP"/>
               <a:buChar char="●"/>
               <a:defRPr sz="2000" lang="ja-JP">
                 <a:solidFill>
@@ -5285,7 +5251,8 @@
               <a:buClr>
                 <a:srgbClr val="303437"/>
               </a:buClr>
-              <a:buSzPts val="2000"/>
+              <a:buSzPct val="66500"/>
+              <a:buFont typeface="Noto Sans CJK JP"/>
               <a:buChar char="○"/>
               <a:defRPr sz="2000" lang="ja-JP">
                 <a:solidFill>
@@ -5306,8 +5273,9 @@
               <a:buClr>
                 <a:srgbClr val="303437"/>
               </a:buClr>
-              <a:buSzPts val="2000"/>
-              <a:buChar char="■"/>
+              <a:buSzPct val="66500"/>
+              <a:buFont typeface="Noto Sans CJK JP"/>
+              <a:buChar char="○"/>
               <a:defRPr sz="2000" lang="ja-JP">
                 <a:solidFill>
                   <a:srgbClr val="303437"/>
@@ -5461,7 +5429,6 @@
               <a:buClr>
                 <a:schemeClr val="lt1"/>
               </a:buClr>
-              <a:buSzPts val="2800"/>
               <a:buNone/>
               <a:defRPr b="1" lang="ja-JP">
                 <a:solidFill>
@@ -5482,7 +5449,6 @@
               <a:buClr>
                 <a:schemeClr val="lt1"/>
               </a:buClr>
-              <a:buSzPts val="3200"/>
               <a:buNone/>
               <a:defRPr sz="3200" b="1" lang="ja-JP">
                 <a:solidFill>
@@ -5503,7 +5469,6 @@
               <a:buClr>
                 <a:schemeClr val="lt1"/>
               </a:buClr>
-              <a:buSzPts val="3200"/>
               <a:buNone/>
               <a:defRPr sz="3200" b="1" lang="ja-JP">
                 <a:solidFill>
@@ -5524,7 +5489,6 @@
               <a:buClr>
                 <a:schemeClr val="lt1"/>
               </a:buClr>
-              <a:buSzPts val="3200"/>
               <a:buNone/>
               <a:defRPr sz="3200" b="1" lang="ja-JP">
                 <a:solidFill>
@@ -5545,7 +5509,6 @@
               <a:buClr>
                 <a:schemeClr val="lt1"/>
               </a:buClr>
-              <a:buSzPts val="3200"/>
               <a:buNone/>
               <a:defRPr sz="3200" b="1" lang="ja-JP">
                 <a:solidFill>
@@ -5566,7 +5529,6 @@
               <a:buClr>
                 <a:schemeClr val="lt1"/>
               </a:buClr>
-              <a:buSzPts val="3200"/>
               <a:buNone/>
               <a:defRPr sz="3200" b="1" lang="ja-JP">
                 <a:solidFill>
@@ -5587,7 +5549,6 @@
               <a:buClr>
                 <a:schemeClr val="lt1"/>
               </a:buClr>
-              <a:buSzPts val="3200"/>
               <a:buNone/>
               <a:defRPr sz="3200" b="1" lang="ja-JP">
                 <a:solidFill>
@@ -5608,7 +5569,6 @@
               <a:buClr>
                 <a:schemeClr val="lt1"/>
               </a:buClr>
-              <a:buSzPts val="3200"/>
               <a:buNone/>
               <a:defRPr sz="3200" b="1" lang="ja-JP">
                 <a:solidFill>
@@ -5629,7 +5589,6 @@
               <a:buClr>
                 <a:schemeClr val="lt1"/>
               </a:buClr>
-              <a:buSzPts val="3200"/>
               <a:buNone/>
               <a:defRPr sz="3200" b="1" lang="ja-JP">
                 <a:solidFill>
@@ -5764,7 +5723,6 @@
               <a:buClr>
                 <a:schemeClr val="dk1"/>
               </a:buClr>
-              <a:buSzPts val="2800"/>
               <a:buNone/>
               <a:defRPr sz="2800" lang="ja-JP">
                 <a:solidFill>
@@ -5785,7 +5743,6 @@
               <a:buClr>
                 <a:schemeClr val="dk1"/>
               </a:buClr>
-              <a:buSzPts val="2800"/>
               <a:buNone/>
               <a:defRPr sz="2800" lang="ja-JP">
                 <a:solidFill>
@@ -5806,7 +5763,6 @@
               <a:buClr>
                 <a:schemeClr val="dk1"/>
               </a:buClr>
-              <a:buSzPts val="2800"/>
               <a:buNone/>
               <a:defRPr sz="2800" lang="ja-JP">
                 <a:solidFill>
@@ -5827,7 +5783,6 @@
               <a:buClr>
                 <a:schemeClr val="dk1"/>
               </a:buClr>
-              <a:buSzPts val="2800"/>
               <a:buNone/>
               <a:defRPr sz="2800" lang="ja-JP">
                 <a:solidFill>
@@ -5848,7 +5803,6 @@
               <a:buClr>
                 <a:schemeClr val="dk1"/>
               </a:buClr>
-              <a:buSzPts val="2800"/>
               <a:buNone/>
               <a:defRPr sz="2800" lang="ja-JP">
                 <a:solidFill>
@@ -5869,7 +5823,6 @@
               <a:buClr>
                 <a:schemeClr val="dk1"/>
               </a:buClr>
-              <a:buSzPts val="2800"/>
               <a:buNone/>
               <a:defRPr sz="2800" lang="ja-JP">
                 <a:solidFill>
@@ -5890,7 +5843,6 @@
               <a:buClr>
                 <a:schemeClr val="dk1"/>
               </a:buClr>
-              <a:buSzPts val="2800"/>
               <a:buNone/>
               <a:defRPr sz="2800" lang="ja-JP">
                 <a:solidFill>
@@ -5911,7 +5863,6 @@
               <a:buClr>
                 <a:schemeClr val="dk1"/>
               </a:buClr>
-              <a:buSzPts val="2800"/>
               <a:buNone/>
               <a:defRPr sz="2800" lang="ja-JP">
                 <a:solidFill>
@@ -5932,7 +5883,6 @@
               <a:buClr>
                 <a:schemeClr val="dk1"/>
               </a:buClr>
-              <a:buSzPts val="2800"/>
               <a:buNone/>
               <a:defRPr sz="2800" lang="ja-JP">
                 <a:solidFill>
@@ -5994,8 +5944,9 @@
               <a:buClr>
                 <a:schemeClr val="dk2"/>
               </a:buClr>
-              <a:buSzPts val="1800"/>
-              <a:buChar char="•"/>
+              <a:buSzPct val="73889"/>
+              <a:buFont typeface="Noto Sans CJK JP"/>
+              <a:buChar char="●"/>
               <a:defRPr sz="1800" lang="ja-JP">
                 <a:solidFill>
                   <a:schemeClr val="dk2"/>
@@ -6018,7 +5969,8 @@
               <a:buClr>
                 <a:schemeClr val="dk2"/>
               </a:buClr>
-              <a:buSzPts val="1400"/>
+              <a:buSzPct val="66500"/>
+              <a:buFont typeface="Noto Sans CJK JP"/>
               <a:buChar char="○"/>
               <a:defRPr lang="ja-JP">
                 <a:solidFill>
@@ -6042,8 +5994,9 @@
               <a:buClr>
                 <a:schemeClr val="dk2"/>
               </a:buClr>
-              <a:buSzPts val="1400"/>
-              <a:buChar char="■"/>
+              <a:buSzPct val="66500"/>
+              <a:buFont typeface="Noto Sans CJK JP"/>
+              <a:buChar char="○"/>
               <a:defRPr lang="ja-JP">
                 <a:solidFill>
                   <a:schemeClr val="dk2"/>
@@ -6066,8 +6019,9 @@
               <a:buClr>
                 <a:schemeClr val="dk2"/>
               </a:buClr>
-              <a:buSzPts val="1400"/>
-              <a:buChar char="•"/>
+              <a:buSzPct val="66500"/>
+              <a:buFont typeface="Noto Sans CJK JP"/>
+              <a:buChar char="○"/>
               <a:defRPr lang="ja-JP">
                 <a:solidFill>
                   <a:schemeClr val="dk2"/>
@@ -6090,7 +6044,8 @@
               <a:buClr>
                 <a:schemeClr val="dk2"/>
               </a:buClr>
-              <a:buSzPts val="1400"/>
+              <a:buSzPct val="66500"/>
+              <a:buFont typeface="Noto Sans CJK JP"/>
               <a:buChar char="○"/>
               <a:defRPr lang="ja-JP">
                 <a:solidFill>
@@ -6114,8 +6069,9 @@
               <a:buClr>
                 <a:schemeClr val="dk2"/>
               </a:buClr>
-              <a:buSzPts val="1400"/>
-              <a:buChar char="■"/>
+              <a:buSzPct val="66500"/>
+              <a:buFont typeface="Noto Sans CJK JP"/>
+              <a:buChar char="○"/>
               <a:defRPr lang="ja-JP">
                 <a:solidFill>
                   <a:schemeClr val="dk2"/>
@@ -6138,8 +6094,9 @@
               <a:buClr>
                 <a:schemeClr val="dk2"/>
               </a:buClr>
-              <a:buSzPts val="1400"/>
-              <a:buChar char="•"/>
+              <a:buSzPct val="66500"/>
+              <a:buFont typeface="Noto Sans CJK JP"/>
+              <a:buChar char="○"/>
               <a:defRPr lang="ja-JP">
                 <a:solidFill>
                   <a:schemeClr val="dk2"/>
@@ -6162,7 +6119,8 @@
               <a:buClr>
                 <a:schemeClr val="dk2"/>
               </a:buClr>
-              <a:buSzPts val="1400"/>
+              <a:buSzPct val="66500"/>
+              <a:buFont typeface="Noto Sans CJK JP"/>
               <a:buChar char="○"/>
               <a:defRPr lang="ja-JP">
                 <a:solidFill>
@@ -6186,8 +6144,9 @@
               <a:buClr>
                 <a:schemeClr val="dk2"/>
               </a:buClr>
-              <a:buSzPts val="1400"/>
-              <a:buChar char="■"/>
+              <a:buSzPct val="66500"/>
+              <a:buFont typeface="Noto Sans CJK JP"/>
+              <a:buChar char="○"/>
               <a:defRPr lang="ja-JP">
                 <a:solidFill>
                   <a:schemeClr val="dk2"/>
@@ -6617,7 +6576,8 @@
         <a:buClr>
           <a:srgbClr val="303437"/>
         </a:buClr>
-        <a:buSzPts val="2000"/>
+        <a:buSzPct val="66500"/>
+        <a:buFont typeface="Noto Sans CJK JP"/>
         <a:buChar char="●"/>
         <a:defRPr sz="2000" lang="ja-JP">
           <a:solidFill>
@@ -6638,7 +6598,8 @@
         <a:buClr>
           <a:srgbClr val="303437"/>
         </a:buClr>
-        <a:buSzPts val="2000"/>
+        <a:buSzPct val="66500"/>
+        <a:buFont typeface="Noto Sans CJK JP"/>
         <a:buChar char="○"/>
         <a:defRPr sz="2000" lang="ja-JP">
           <a:solidFill>
@@ -6659,8 +6620,9 @@
         <a:buClr>
           <a:srgbClr val="303437"/>
         </a:buClr>
-        <a:buSzPts val="2000"/>
-        <a:buChar char="■"/>
+        <a:buSzPct val="66500"/>
+        <a:buFont typeface="Noto Sans CJK JP"/>
+        <a:buChar char="○"/>
         <a:defRPr sz="2000" lang="ja-JP">
           <a:solidFill>
             <a:srgbClr val="303437"/>
@@ -6680,7 +6642,8 @@
         <a:buClr>
           <a:srgbClr val="303437"/>
         </a:buClr>
-        <a:buSzPts val="2200"/>
+        <a:buSzPct val="60455"/>
+        <a:buFont typeface="Noto Sans CJK JP"/>
         <a:buChar char="●"/>
         <a:defRPr sz="2200" lang="ja-JP">
           <a:solidFill>
@@ -6701,7 +6664,8 @@
         <a:buClr>
           <a:srgbClr val="303437"/>
         </a:buClr>
-        <a:buSzPts val="2000"/>
+        <a:buSzPct val="66500"/>
+        <a:buFont typeface="Noto Sans CJK JP"/>
         <a:buChar char="○"/>
         <a:defRPr sz="2000" lang="ja-JP">
           <a:solidFill>
@@ -6722,8 +6686,9 @@
         <a:buClr>
           <a:srgbClr val="303437"/>
         </a:buClr>
-        <a:buSzPts val="2000"/>
-        <a:buChar char="■"/>
+        <a:buSzPct val="66500"/>
+        <a:buFont typeface="Noto Sans CJK JP"/>
+        <a:buChar char="○"/>
         <a:defRPr sz="2000" lang="ja-JP">
           <a:solidFill>
             <a:srgbClr val="303437"/>
@@ -6743,7 +6708,8 @@
         <a:buClr>
           <a:srgbClr val="303437"/>
         </a:buClr>
-        <a:buSzPts val="2000"/>
+        <a:buSzPct val="66500"/>
+        <a:buFont typeface="Noto Sans CJK JP"/>
         <a:buChar char="●"/>
         <a:defRPr sz="2000" lang="ja-JP">
           <a:solidFill>
@@ -6764,7 +6730,8 @@
         <a:buClr>
           <a:srgbClr val="303437"/>
         </a:buClr>
-        <a:buSzPts val="2000"/>
+        <a:buSzPct val="66500"/>
+        <a:buFont typeface="Noto Sans CJK JP"/>
         <a:buChar char="○"/>
         <a:defRPr sz="2000" lang="ja-JP">
           <a:solidFill>
@@ -6785,8 +6752,9 @@
         <a:buClr>
           <a:srgbClr val="303437"/>
         </a:buClr>
-        <a:buSzPts val="2000"/>
-        <a:buChar char="■"/>
+        <a:buSzPct val="66500"/>
+        <a:buFont typeface="Noto Sans CJK JP"/>
+        <a:buChar char="○"/>
         <a:defRPr sz="2000" lang="ja-JP">
           <a:solidFill>
             <a:srgbClr val="303437"/>
@@ -7507,16 +7475,17 @@
           <a:lstStyle/>
           <a:p>
             <a:pPr algn="l" lvl="0" marL="457200" indent="-355600">
-              <a:buSzPts val="2000"/>
+              <a:buSzPct val="60455"/>
+              <a:buFont typeface="Noto Sans CJK JP"/>
               <a:buChar char="●"/>
-              <a:defRPr sz="2100" b="0" lang="ja-JP">
-                <a:latin typeface="Noto Sans"/>
-                <a:ea typeface="Noto Sans CJK JP"/>
-                <a:cs typeface="Noto Sans"/>
-              </a:defRPr>
-            </a:pPr>
-            <a:r>
-              <a:rPr sz="2100" lang="ja-JP">
+              <a:defRPr sz="2200" b="0" lang="ja-JP">
+                <a:latin typeface="Noto Sans"/>
+                <a:ea typeface="Noto Sans CJK JP"/>
+                <a:cs typeface="Noto Sans"/>
+              </a:defRPr>
+            </a:pPr>
+            <a:r>
+              <a:rPr sz="2200" lang="ja-JP">
                 <a:solidFill>
                   <a:srgbClr val="303437"/>
                 </a:solidFill>
@@ -7527,7 +7496,7 @@
               <a:t>英語の概念を階層化したWordNetを利用する </a:t>
             </a:r>
             <a:r>
-              <a:rPr sz="2100" lang="ja-JP">
+              <a:rPr sz="2200" lang="ja-JP">
                 <a:solidFill>
                   <a:srgbClr val="303437"/>
                 </a:solidFill>
@@ -7538,7 +7507,7 @@
               <a:t>[1]</a:t>
             </a:r>
             <a:r>
-              <a:rPr sz="2100" lang="ja-JP">
+              <a:rPr sz="2200" lang="ja-JP">
                 <a:solidFill>
                   <a:srgbClr val="303437"/>
                 </a:solidFill>
@@ -7548,7 +7517,7 @@
               </a:rPr>
               <a:t>。</a:t>
             </a:r>
-            <a:endParaRPr sz="2100" lang="ja-JP">
+            <a:endParaRPr sz="2200" lang="ja-JP">
               <a:latin typeface="Noto Sans"/>
               <a:ea typeface="Noto Sans CJK JP"/>
               <a:cs typeface="Noto Sans"/>
@@ -7556,16 +7525,17 @@
           </a:p>
           <a:p>
             <a:pPr algn="l" lvl="0" marL="457200" indent="-355600">
-              <a:buSzPts val="2000"/>
+              <a:buSzPct val="60455"/>
+              <a:buFont typeface="Noto Sans CJK JP"/>
               <a:buChar char="●"/>
-              <a:defRPr sz="2100" lang="ja-JP">
-                <a:latin typeface="Noto Sans"/>
-                <a:ea typeface="Noto Sans CJK JP"/>
-                <a:cs typeface="Noto Sans"/>
-              </a:defRPr>
-            </a:pPr>
-            <a:r>
-              <a:rPr sz="2100" lang="ja-JP">
+              <a:defRPr sz="2200" lang="ja-JP">
+                <a:latin typeface="Noto Sans"/>
+                <a:ea typeface="Noto Sans CJK JP"/>
+                <a:cs typeface="Noto Sans"/>
+              </a:defRPr>
+            </a:pPr>
+            <a:r>
+              <a:rPr sz="2200" lang="ja-JP">
                 <a:solidFill>
                   <a:srgbClr val="303437"/>
                 </a:solidFill>
@@ -7575,7 +7545,7 @@
               </a:rPr>
               <a:t>同じ概念を表す語の集合であるsynsetがカテゴリの単位となる。</a:t>
             </a:r>
-            <a:endParaRPr sz="2100" lang="ja-JP">
+            <a:endParaRPr sz="2200" lang="ja-JP">
               <a:latin typeface="Noto Sans"/>
               <a:ea typeface="Noto Sans CJK JP"/>
               <a:cs typeface="Noto Sans"/>
@@ -7583,16 +7553,17 @@
           </a:p>
           <a:p>
             <a:pPr algn="l" lvl="1" marL="914400" indent="-355600">
-              <a:buSzPts val="2000"/>
+              <a:buSzPct val="60455"/>
+              <a:buFont typeface="Noto Sans CJK JP"/>
               <a:buChar char="○"/>
-              <a:defRPr sz="2100" lang="ja-JP">
-                <a:latin typeface="Noto Sans"/>
-                <a:ea typeface="Noto Sans CJK JP"/>
-                <a:cs typeface="Noto Sans"/>
-              </a:defRPr>
-            </a:pPr>
-            <a:r>
-              <a:rPr sz="2100" lang="ja-JP">
+              <a:defRPr sz="2200" lang="ja-JP">
+                <a:latin typeface="Noto Sans"/>
+                <a:ea typeface="Noto Sans CJK JP"/>
+                <a:cs typeface="Noto Sans"/>
+              </a:defRPr>
+            </a:pPr>
+            <a:r>
+              <a:rPr sz="2200" lang="ja-JP">
                 <a:solidFill>
                   <a:srgbClr val="303437"/>
                 </a:solidFill>
@@ -7602,7 +7573,7 @@
               </a:rPr>
               <a:t>tenchとTinca tincaは同じ淡水魚のカテゴリを表す。</a:t>
             </a:r>
-            <a:endParaRPr sz="2100" lang="ja-JP">
+            <a:endParaRPr sz="2200" lang="ja-JP">
               <a:latin typeface="Noto Sans"/>
               <a:ea typeface="Noto Sans CJK JP"/>
               <a:cs typeface="Noto Sans"/>
@@ -7610,16 +7581,17 @@
           </a:p>
           <a:p>
             <a:pPr algn="l" lvl="0" marL="457200" indent="-355600">
-              <a:buSzPts val="2000"/>
+              <a:buSzPct val="60455"/>
+              <a:buFont typeface="Noto Sans CJK JP"/>
               <a:buChar char="●"/>
-              <a:defRPr sz="2100" lang="ja-JP">
-                <a:latin typeface="Noto Sans"/>
-                <a:ea typeface="Noto Sans CJK JP"/>
-                <a:cs typeface="Noto Sans"/>
-              </a:defRPr>
-            </a:pPr>
-            <a:r>
-              <a:rPr sz="2100" lang="ja-JP">
+              <a:defRPr sz="2200" lang="ja-JP">
+                <a:latin typeface="Noto Sans"/>
+                <a:ea typeface="Noto Sans CJK JP"/>
+                <a:cs typeface="Noto Sans"/>
+              </a:defRPr>
+            </a:pPr>
+            <a:r>
+              <a:rPr sz="2200" lang="ja-JP">
                 <a:solidFill>
                   <a:srgbClr val="303437"/>
                 </a:solidFill>
@@ -7629,7 +7601,7 @@
               </a:rPr>
               <a:t>カテゴリにはn01440764のようなWordNet IDがある。</a:t>
             </a:r>
-            <a:endParaRPr sz="2100" lang="ja-JP">
+            <a:endParaRPr sz="2200" lang="ja-JP">
               <a:latin typeface="Noto Sans"/>
               <a:ea typeface="Noto Sans CJK JP"/>
               <a:cs typeface="Noto Sans"/>
@@ -7637,16 +7609,17 @@
           </a:p>
           <a:p>
             <a:pPr algn="l" lvl="0" marL="457200" indent="-355600">
-              <a:buSzPts val="2000"/>
+              <a:buSzPct val="60455"/>
+              <a:buFont typeface="Noto Sans CJK JP"/>
               <a:buChar char="●"/>
-              <a:defRPr sz="2100" lang="ja-JP">
-                <a:latin typeface="Noto Sans"/>
-                <a:ea typeface="Noto Sans CJK JP"/>
-                <a:cs typeface="Noto Sans"/>
-              </a:defRPr>
-            </a:pPr>
-            <a:r>
-              <a:rPr sz="2100" lang="ja-JP">
+              <a:defRPr sz="2200" lang="ja-JP">
+                <a:latin typeface="Noto Sans"/>
+                <a:ea typeface="Noto Sans CJK JP"/>
+                <a:cs typeface="Noto Sans"/>
+              </a:defRPr>
+            </a:pPr>
+            <a:r>
+              <a:rPr sz="2200" lang="ja-JP">
                 <a:solidFill>
                   <a:srgbClr val="303437"/>
                 </a:solidFill>
@@ -7657,7 +7630,7 @@
               <a:t>ImageNet-1kには120種類の犬も含まれる </a:t>
             </a:r>
             <a:r>
-              <a:rPr sz="2100" lang="ja-JP">
+              <a:rPr sz="2200" lang="ja-JP">
                 <a:solidFill>
                   <a:srgbClr val="303437"/>
                 </a:solidFill>
@@ -7668,7 +7641,7 @@
               <a:t>[2]</a:t>
             </a:r>
             <a:r>
-              <a:rPr sz="2100" lang="ja-JP">
+              <a:rPr sz="2200" lang="ja-JP">
                 <a:solidFill>
                   <a:srgbClr val="303437"/>
                 </a:solidFill>
@@ -7678,7 +7651,7 @@
               </a:rPr>
               <a:t>。</a:t>
             </a:r>
-            <a:endParaRPr sz="2100" lang="ja-JP">
+            <a:endParaRPr sz="2200" lang="ja-JP">
               <a:latin typeface="Noto Sans"/>
               <a:ea typeface="Noto Sans CJK JP"/>
               <a:cs typeface="Noto Sans"/>
@@ -7955,7 +7928,8 @@
           <a:lstStyle/>
           <a:p>
             <a:pPr algn="l" lvl="0" marL="457200" indent="-355600">
-              <a:buSzPts val="2000"/>
+              <a:buSzPct val="60455"/>
+              <a:buFont typeface="Noto Sans CJK JP"/>
               <a:buChar char="●"/>
               <a:defRPr sz="2200" b="0" lang="ja-JP">
                 <a:latin typeface="Noto Sans"/>
@@ -8004,7 +7978,8 @@
           </a:p>
           <a:p>
             <a:pPr algn="l" lvl="0" marL="457200" indent="-355600">
-              <a:buSzPts val="2000"/>
+              <a:buSzPct val="60455"/>
+              <a:buFont typeface="Noto Sans CJK JP"/>
               <a:buChar char="●"/>
               <a:defRPr sz="2200" lang="ja-JP">
                 <a:latin typeface="Noto Sans"/>
@@ -8031,7 +8006,8 @@
           </a:p>
           <a:p>
             <a:pPr algn="l" lvl="1" marL="914400" indent="-355600">
-              <a:buSzPts val="2000"/>
+              <a:buSzPct val="60455"/>
+              <a:buFont typeface="Noto Sans CJK JP"/>
               <a:buChar char="○"/>
               <a:defRPr sz="2200" lang="ja-JP">
                 <a:latin typeface="Noto Sans"/>
@@ -8058,7 +8034,8 @@
           </a:p>
           <a:p>
             <a:pPr algn="l" lvl="0" marL="457200" indent="-355600">
-              <a:buSzPts val="2000"/>
+              <a:buSzPct val="60455"/>
+              <a:buFont typeface="Noto Sans CJK JP"/>
               <a:buChar char="●"/>
               <a:defRPr sz="2200" lang="ja-JP">
                 <a:latin typeface="Noto Sans"/>
@@ -8085,7 +8062,8 @@
           </a:p>
           <a:p>
             <a:pPr algn="l" lvl="0" marL="457200" indent="-355600">
-              <a:buSzPts val="2000"/>
+              <a:buSzPct val="60455"/>
+              <a:buFont typeface="Noto Sans CJK JP"/>
               <a:buChar char="●"/>
               <a:defRPr sz="2200" lang="ja-JP">
                 <a:latin typeface="Noto Sans"/>
@@ -8335,16 +8313,17 @@
           <a:lstStyle/>
           <a:p>
             <a:pPr algn="l" lvl="0" marL="457200" indent="-355600">
-              <a:buSzPts val="2000"/>
+              <a:buSzPct val="55417"/>
+              <a:buFont typeface="Noto Sans CJK JP"/>
               <a:buChar char="●"/>
-              <a:defRPr sz="2200" b="0" lang="ja-JP">
-                <a:latin typeface="Noto Sans"/>
-                <a:ea typeface="Noto Sans CJK JP"/>
-                <a:cs typeface="Noto Sans"/>
-              </a:defRPr>
-            </a:pPr>
-            <a:r>
-              <a:rPr sz="2200" lang="ja-JP">
+              <a:defRPr sz="2400" b="0" lang="ja-JP">
+                <a:latin typeface="Noto Sans"/>
+                <a:ea typeface="Noto Sans CJK JP"/>
+                <a:cs typeface="Noto Sans"/>
+              </a:defRPr>
+            </a:pPr>
+            <a:r>
+              <a:rPr sz="2400" lang="ja-JP">
                 <a:solidFill>
                   <a:srgbClr val="303437"/>
                 </a:solidFill>
@@ -8355,7 +8334,7 @@
               <a:t>有償作業のAmazon Mechanical Turkを使った </a:t>
             </a:r>
             <a:r>
-              <a:rPr sz="2200" lang="ja-JP">
+              <a:rPr sz="2400" lang="ja-JP">
                 <a:solidFill>
                   <a:srgbClr val="303437"/>
                 </a:solidFill>
@@ -8366,7 +8345,7 @@
               <a:t>[1]</a:t>
             </a:r>
             <a:r>
-              <a:rPr sz="2200" lang="ja-JP">
+              <a:rPr sz="2400" lang="ja-JP">
                 <a:solidFill>
                   <a:srgbClr val="303437"/>
                 </a:solidFill>
@@ -8376,7 +8355,7 @@
               </a:rPr>
               <a:t>。</a:t>
             </a:r>
-            <a:endParaRPr sz="2200" lang="ja-JP">
+            <a:endParaRPr sz="2400" lang="ja-JP">
               <a:latin typeface="Noto Sans"/>
               <a:ea typeface="Noto Sans CJK JP"/>
               <a:cs typeface="Noto Sans"/>
@@ -8384,16 +8363,17 @@
           </a:p>
           <a:p>
             <a:pPr algn="l" lvl="0" marL="457200" indent="-355600">
-              <a:buSzPts val="2000"/>
+              <a:buSzPct val="55417"/>
+              <a:buFont typeface="Noto Sans CJK JP"/>
               <a:buChar char="●"/>
-              <a:defRPr sz="2200" lang="ja-JP">
-                <a:latin typeface="Noto Sans"/>
-                <a:ea typeface="Noto Sans CJK JP"/>
-                <a:cs typeface="Noto Sans"/>
-              </a:defRPr>
-            </a:pPr>
-            <a:r>
-              <a:rPr sz="2200" lang="ja-JP">
+              <a:defRPr sz="2400" lang="ja-JP">
+                <a:latin typeface="Noto Sans"/>
+                <a:ea typeface="Noto Sans CJK JP"/>
+                <a:cs typeface="Noto Sans"/>
+              </a:defRPr>
+            </a:pPr>
+            <a:r>
+              <a:rPr sz="2400" lang="ja-JP">
                 <a:solidFill>
                   <a:srgbClr val="303437"/>
                 </a:solidFill>
@@ -8403,7 +8383,7 @@
               </a:rPr>
               <a:t>候補画像とカテゴリの定義を作業者に提示した。</a:t>
             </a:r>
-            <a:endParaRPr sz="2200" lang="ja-JP">
+            <a:endParaRPr sz="2400" lang="ja-JP">
               <a:latin typeface="Noto Sans"/>
               <a:ea typeface="Noto Sans CJK JP"/>
               <a:cs typeface="Noto Sans"/>
@@ -8411,16 +8391,17 @@
           </a:p>
           <a:p>
             <a:pPr algn="l" lvl="0" marL="457200" indent="-355600">
-              <a:buSzPts val="2000"/>
+              <a:buSzPct val="55417"/>
+              <a:buFont typeface="Noto Sans CJK JP"/>
               <a:buChar char="●"/>
-              <a:defRPr sz="2200" lang="ja-JP">
-                <a:latin typeface="Noto Sans"/>
-                <a:ea typeface="Noto Sans CJK JP"/>
-                <a:cs typeface="Noto Sans"/>
-              </a:defRPr>
-            </a:pPr>
-            <a:r>
-              <a:rPr sz="2200" lang="ja-JP">
+              <a:defRPr sz="2400" lang="ja-JP">
+                <a:latin typeface="Noto Sans"/>
+                <a:ea typeface="Noto Sans CJK JP"/>
+                <a:cs typeface="Noto Sans"/>
+              </a:defRPr>
+            </a:pPr>
+            <a:r>
+              <a:rPr sz="2400" lang="ja-JP">
                 <a:solidFill>
                   <a:srgbClr val="303437"/>
                 </a:solidFill>
@@ -8430,7 +8411,7 @@
               </a:rPr>
               <a:t>対象物を含む画像を選ぶよう指示した。</a:t>
             </a:r>
-            <a:endParaRPr sz="2200" lang="ja-JP">
+            <a:endParaRPr sz="2400" lang="ja-JP">
               <a:latin typeface="Noto Sans"/>
               <a:ea typeface="Noto Sans CJK JP"/>
               <a:cs typeface="Noto Sans"/>
@@ -8438,16 +8419,17 @@
           </a:p>
           <a:p>
             <a:pPr algn="l" lvl="1" marL="914400" indent="-355600">
-              <a:buSzPts val="2000"/>
+              <a:buSzPct val="55417"/>
+              <a:buFont typeface="Noto Sans CJK JP"/>
               <a:buChar char="○"/>
-              <a:defRPr sz="2200" lang="ja-JP">
-                <a:latin typeface="Noto Sans"/>
-                <a:ea typeface="Noto Sans CJK JP"/>
-                <a:cs typeface="Noto Sans"/>
-              </a:defRPr>
-            </a:pPr>
-            <a:r>
-              <a:rPr sz="2200" lang="ja-JP">
+              <a:defRPr sz="2400" lang="ja-JP">
+                <a:latin typeface="Noto Sans"/>
+                <a:ea typeface="Noto Sans CJK JP"/>
+                <a:cs typeface="Noto Sans"/>
+              </a:defRPr>
+            </a:pPr>
+            <a:r>
+              <a:rPr sz="2400" lang="ja-JP">
                 <a:solidFill>
                   <a:srgbClr val="303437"/>
                 </a:solidFill>
@@ -8457,7 +8439,7 @@
               </a:rPr>
               <a:t>遮蔽・複数物体・混雑した背景も対象に含めた。</a:t>
             </a:r>
-            <a:endParaRPr sz="2200" lang="ja-JP">
+            <a:endParaRPr sz="2400" lang="ja-JP">
               <a:latin typeface="Noto Sans"/>
               <a:ea typeface="Noto Sans CJK JP"/>
               <a:cs typeface="Noto Sans"/>
@@ -8465,16 +8447,17 @@
           </a:p>
           <a:p>
             <a:pPr algn="l" lvl="0" marL="457200" indent="-355600">
-              <a:buSzPts val="2000"/>
+              <a:buSzPct val="55417"/>
+              <a:buFont typeface="Noto Sans CJK JP"/>
               <a:buChar char="●"/>
-              <a:defRPr sz="2200" lang="ja-JP">
-                <a:latin typeface="Noto Sans"/>
-                <a:ea typeface="Noto Sans CJK JP"/>
-                <a:cs typeface="Noto Sans"/>
-              </a:defRPr>
-            </a:pPr>
-            <a:r>
-              <a:rPr sz="2200" lang="ja-JP">
+              <a:defRPr sz="2400" lang="ja-JP">
+                <a:latin typeface="Noto Sans"/>
+                <a:ea typeface="Noto Sans CJK JP"/>
+                <a:cs typeface="Noto Sans"/>
+              </a:defRPr>
+            </a:pPr>
+            <a:r>
+              <a:rPr sz="2400" lang="ja-JP">
                 <a:solidFill>
                   <a:srgbClr val="303437"/>
                 </a:solidFill>
@@ -8484,7 +8467,7 @@
               </a:rPr>
               <a:t>見やすい単独物体だけに限定しなかった。</a:t>
             </a:r>
-            <a:endParaRPr sz="2200" lang="ja-JP">
+            <a:endParaRPr sz="2400" lang="ja-JP">
               <a:latin typeface="Noto Sans"/>
               <a:ea typeface="Noto Sans CJK JP"/>
               <a:cs typeface="Noto Sans"/>
@@ -8715,7 +8698,8 @@
           <a:lstStyle/>
           <a:p>
             <a:pPr algn="l" lvl="0" marL="457200" indent="-355600">
-              <a:buSzPts val="2000"/>
+              <a:buSzPct val="60455"/>
+              <a:buFont typeface="Noto Sans CJK JP"/>
               <a:buChar char="●"/>
               <a:defRPr sz="2200" b="0" lang="ja-JP">
                 <a:latin typeface="Noto Sans"/>
@@ -8764,7 +8748,8 @@
           </a:p>
           <a:p>
             <a:pPr algn="l" lvl="0" marL="457200" indent="-355600">
-              <a:buSzPts val="2000"/>
+              <a:buSzPct val="60455"/>
+              <a:buFont typeface="Noto Sans CJK JP"/>
               <a:buChar char="●"/>
               <a:defRPr sz="2200" lang="ja-JP">
                 <a:latin typeface="Noto Sans"/>
@@ -8791,7 +8776,8 @@
           </a:p>
           <a:p>
             <a:pPr algn="l" lvl="0" marL="457200" indent="-355600">
-              <a:buSzPts val="2000"/>
+              <a:buSzPct val="60455"/>
+              <a:buFont typeface="Noto Sans CJK JP"/>
               <a:buChar char="●"/>
               <a:defRPr sz="2200" lang="ja-JP">
                 <a:latin typeface="Noto Sans"/>
@@ -8818,7 +8804,8 @@
           </a:p>
           <a:p>
             <a:pPr algn="l" lvl="1" marL="914400" indent="-355600">
-              <a:buSzPts val="2000"/>
+              <a:buSzPct val="60455"/>
+              <a:buFont typeface="Noto Sans CJK JP"/>
               <a:buChar char="○"/>
               <a:defRPr sz="2200" lang="ja-JP">
                 <a:latin typeface="Noto Sans"/>
@@ -9832,7 +9819,7 @@
               </a:defRPr>
             </a:pPr>
             <a:r>
-              <a:rPr sz="1600" lang="ja-JP">
+              <a:rPr sz="1900" lang="ja-JP">
                 <a:solidFill>
                   <a:srgbClr val="303437"/>
                 </a:solidFill>
@@ -10112,7 +10099,7 @@
               </a:defRPr>
             </a:pPr>
             <a:r>
-              <a:rPr sz="1700" lang="ja-JP">
+              <a:rPr sz="2000" lang="ja-JP">
                 <a:solidFill>
                   <a:srgbClr val="303437"/>
                 </a:solidFill>
@@ -10320,7 +10307,7 @@
         </p:nvSpPr>
         <p:spPr>
           <a:xfrm>
-            <a:off x="594360" y="4169663"/>
+            <a:off x="594360" y="3991863"/>
             <a:ext cx="7955279" cy="484632"/>
           </a:xfrm>
           <a:prstGeom prst="rect">
@@ -10352,7 +10339,7 @@
               </a:defRPr>
             </a:pPr>
             <a:r>
-              <a:rPr sz="1700" lang="ja-JP">
+              <a:rPr sz="2000" lang="ja-JP">
                 <a:solidFill>
                   <a:srgbClr val="303437"/>
                 </a:solidFill>
@@ -11089,7 +11076,8 @@
           <a:lstStyle/>
           <a:p>
             <a:pPr algn="l" lvl="0" marL="457200" indent="-355600">
-              <a:buSzPts val="2000"/>
+              <a:buSzPct val="78235"/>
+              <a:buFont typeface="Noto Sans CJK JP"/>
               <a:buChar char="●"/>
               <a:defRPr sz="1700" lang="ja-JP">
                 <a:latin typeface="Noto Sans"/>
@@ -11116,7 +11104,8 @@
           </a:p>
           <a:p>
             <a:pPr algn="l" lvl="0" marL="457200" indent="-355600">
-              <a:buSzPts val="2000"/>
+              <a:buSzPct val="78235"/>
+              <a:buFont typeface="Noto Sans CJK JP"/>
               <a:buChar char="●"/>
               <a:defRPr sz="1700" lang="ja-JP">
                 <a:latin typeface="Noto Sans"/>
@@ -11782,16 +11771,17 @@
           <a:lstStyle/>
           <a:p>
             <a:pPr algn="l" lvl="0" marL="457200" indent="-355600">
-              <a:buSzPts val="2000"/>
+              <a:buSzPct val="57826"/>
+              <a:buFont typeface="Noto Sans CJK JP"/>
               <a:buChar char="●"/>
-              <a:defRPr sz="2200" b="0" lang="ja-JP">
-                <a:latin typeface="Noto Sans"/>
-                <a:ea typeface="Noto Sans CJK JP"/>
-                <a:cs typeface="Noto Sans"/>
-              </a:defRPr>
-            </a:pPr>
-            <a:r>
-              <a:rPr sz="2200" lang="ja-JP">
+              <a:defRPr sz="2300" b="0" lang="ja-JP">
+                <a:latin typeface="Noto Sans"/>
+                <a:ea typeface="Noto Sans CJK JP"/>
+                <a:cs typeface="Noto Sans"/>
+              </a:defRPr>
+            </a:pPr>
+            <a:r>
+              <a:rPr sz="2300" lang="ja-JP">
                 <a:solidFill>
                   <a:srgbClr val="303437"/>
                 </a:solidFill>
@@ -11801,7 +11791,7 @@
               </a:rPr>
               <a:t>Top-1は最上位の予測が正解と一致した割合である。</a:t>
             </a:r>
-            <a:endParaRPr sz="2200" lang="ja-JP">
+            <a:endParaRPr sz="2300" lang="ja-JP">
               <a:latin typeface="Noto Sans"/>
               <a:ea typeface="Noto Sans CJK JP"/>
               <a:cs typeface="Noto Sans"/>
@@ -11809,16 +11799,17 @@
           </a:p>
           <a:p>
             <a:pPr algn="l" lvl="0" marL="457200" indent="-355600">
-              <a:buSzPts val="2000"/>
+              <a:buSzPct val="57826"/>
+              <a:buFont typeface="Noto Sans CJK JP"/>
               <a:buChar char="●"/>
-              <a:defRPr sz="2200" lang="ja-JP">
-                <a:latin typeface="Noto Sans"/>
-                <a:ea typeface="Noto Sans CJK JP"/>
-                <a:cs typeface="Noto Sans"/>
-              </a:defRPr>
-            </a:pPr>
-            <a:r>
-              <a:rPr sz="2200" lang="ja-JP">
+              <a:defRPr sz="2300" lang="ja-JP">
+                <a:latin typeface="Noto Sans"/>
+                <a:ea typeface="Noto Sans CJK JP"/>
+                <a:cs typeface="Noto Sans"/>
+              </a:defRPr>
+            </a:pPr>
+            <a:r>
+              <a:rPr sz="2300" lang="ja-JP">
                 <a:solidFill>
                   <a:srgbClr val="303437"/>
                 </a:solidFill>
@@ -11829,7 +11820,7 @@
               <a:t>Top-5は上位5予測に正解が含まれた割合である </a:t>
             </a:r>
             <a:r>
-              <a:rPr sz="2200" lang="ja-JP">
+              <a:rPr sz="2300" lang="ja-JP">
                 <a:solidFill>
                   <a:srgbClr val="303437"/>
                 </a:solidFill>
@@ -11840,7 +11831,7 @@
               <a:t>[1]</a:t>
             </a:r>
             <a:r>
-              <a:rPr sz="2200" lang="ja-JP">
+              <a:rPr sz="2300" lang="ja-JP">
                 <a:solidFill>
                   <a:srgbClr val="303437"/>
                 </a:solidFill>
@@ -11850,7 +11841,7 @@
               </a:rPr>
               <a:t>。</a:t>
             </a:r>
-            <a:endParaRPr sz="2200" lang="ja-JP">
+            <a:endParaRPr sz="2300" lang="ja-JP">
               <a:latin typeface="Noto Sans"/>
               <a:ea typeface="Noto Sans CJK JP"/>
               <a:cs typeface="Noto Sans"/>
@@ -11858,16 +11849,17 @@
           </a:p>
           <a:p>
             <a:pPr algn="l" lvl="1" marL="914400" indent="-355600">
-              <a:buSzPts val="2000"/>
+              <a:buSzPct val="57826"/>
+              <a:buFont typeface="Noto Sans CJK JP"/>
               <a:buChar char="○"/>
-              <a:defRPr sz="2200" lang="ja-JP">
-                <a:latin typeface="Noto Sans"/>
-                <a:ea typeface="Noto Sans CJK JP"/>
-                <a:cs typeface="Noto Sans"/>
-              </a:defRPr>
-            </a:pPr>
-            <a:r>
-              <a:rPr sz="2200" lang="ja-JP">
+              <a:defRPr sz="2300" lang="ja-JP">
+                <a:latin typeface="Noto Sans"/>
+                <a:ea typeface="Noto Sans CJK JP"/>
+                <a:cs typeface="Noto Sans"/>
+              </a:defRPr>
+            </a:pPr>
+            <a:r>
+              <a:rPr sz="2300" lang="ja-JP">
                 <a:solidFill>
                   <a:srgbClr val="303437"/>
                 </a:solidFill>
@@ -11877,7 +11869,7 @@
               </a:rPr>
               <a:t>正解がtenchで2位なら、Top-1は0、Top-5は1となる。</a:t>
             </a:r>
-            <a:endParaRPr sz="2200" lang="ja-JP">
+            <a:endParaRPr sz="2300" lang="ja-JP">
               <a:latin typeface="Noto Sans"/>
               <a:ea typeface="Noto Sans CJK JP"/>
               <a:cs typeface="Noto Sans"/>
@@ -11885,16 +11877,17 @@
           </a:p>
           <a:p>
             <a:pPr algn="l" lvl="0" marL="457200" indent="-355600">
-              <a:buSzPts val="2000"/>
+              <a:buSzPct val="57826"/>
+              <a:buFont typeface="Noto Sans CJK JP"/>
               <a:buChar char="●"/>
-              <a:defRPr sz="2200" lang="ja-JP">
-                <a:latin typeface="Noto Sans"/>
-                <a:ea typeface="Noto Sans CJK JP"/>
-                <a:cs typeface="Noto Sans"/>
-              </a:defRPr>
-            </a:pPr>
-            <a:r>
-              <a:rPr sz="2200" lang="ja-JP">
+              <a:defRPr sz="2300" lang="ja-JP">
+                <a:latin typeface="Noto Sans"/>
+                <a:ea typeface="Noto Sans CJK JP"/>
+                <a:cs typeface="Noto Sans"/>
+              </a:defRPr>
+            </a:pPr>
+            <a:r>
+              <a:rPr sz="2300" lang="ja-JP">
                 <a:solidFill>
                   <a:srgbClr val="303437"/>
                 </a:solidFill>
@@ -11904,7 +11897,7 @@
               </a:rPr>
               <a:t>画像ごとの0・1を平均し、正解率を百分率で示す。</a:t>
             </a:r>
-            <a:endParaRPr sz="2200" lang="ja-JP">
+            <a:endParaRPr sz="2300" lang="ja-JP">
               <a:latin typeface="Noto Sans"/>
               <a:ea typeface="Noto Sans CJK JP"/>
               <a:cs typeface="Noto Sans"/>
@@ -11912,16 +11905,17 @@
           </a:p>
           <a:p>
             <a:pPr algn="l" lvl="0" marL="457200" indent="-355600">
-              <a:buSzPts val="2000"/>
+              <a:buSzPct val="57826"/>
+              <a:buFont typeface="Noto Sans CJK JP"/>
               <a:buChar char="●"/>
-              <a:defRPr sz="2200" lang="ja-JP">
-                <a:latin typeface="Noto Sans"/>
-                <a:ea typeface="Noto Sans CJK JP"/>
-                <a:cs typeface="Noto Sans"/>
-              </a:defRPr>
-            </a:pPr>
-            <a:r>
-              <a:rPr sz="2200" lang="ja-JP">
+              <a:defRPr sz="2300" lang="ja-JP">
+                <a:latin typeface="Noto Sans"/>
+                <a:ea typeface="Noto Sans CJK JP"/>
+                <a:cs typeface="Noto Sans"/>
+              </a:defRPr>
+            </a:pPr>
+            <a:r>
+              <a:rPr sz="2300" lang="ja-JP">
                 <a:solidFill>
                   <a:srgbClr val="303437"/>
                 </a:solidFill>
@@ -11931,7 +11925,7 @@
               </a:rPr>
               <a:t>誤り率は100%から正解率を引く。大会では誤り率も使った。</a:t>
             </a:r>
-            <a:endParaRPr sz="2200" lang="ja-JP">
+            <a:endParaRPr sz="2300" lang="ja-JP">
               <a:latin typeface="Noto Sans"/>
               <a:ea typeface="Noto Sans CJK JP"/>
               <a:cs typeface="Noto Sans"/>
@@ -12926,7 +12920,7 @@
               </a:defRPr>
             </a:pPr>
             <a:r>
-              <a:rPr sz="1600" lang="ja-JP">
+              <a:rPr sz="1900" lang="ja-JP">
                 <a:solidFill>
                   <a:srgbClr val="303437"/>
                 </a:solidFill>
@@ -13932,7 +13926,7 @@
               </a:defRPr>
             </a:pPr>
             <a:r>
-              <a:rPr sz="1600" lang="ja-JP">
+              <a:rPr sz="1900" lang="ja-JP">
                 <a:solidFill>
                   <a:srgbClr val="303437"/>
                 </a:solidFill>
@@ -14937,7 +14931,7 @@
               </a:defRPr>
             </a:pPr>
             <a:r>
-              <a:rPr sz="1600" lang="ja-JP">
+              <a:rPr sz="1900" lang="ja-JP">
                 <a:solidFill>
                   <a:srgbClr val="303437"/>
                 </a:solidFill>
@@ -15271,16 +15265,17 @@
           <a:lstStyle/>
           <a:p>
             <a:pPr algn="l" lvl="0" marL="457200" indent="-355600">
-              <a:buSzPts val="2000"/>
+              <a:buSzPct val="60455"/>
+              <a:buFont typeface="Noto Sans CJK JP"/>
               <a:buChar char="●"/>
-              <a:defRPr sz="2100" b="0" lang="ja-JP">
-                <a:latin typeface="Noto Sans"/>
-                <a:ea typeface="Noto Sans CJK JP"/>
-                <a:cs typeface="Noto Sans"/>
-              </a:defRPr>
-            </a:pPr>
-            <a:r>
-              <a:rPr sz="2100" lang="ja-JP">
+              <a:defRPr sz="2200" b="0" lang="ja-JP">
+                <a:latin typeface="Noto Sans"/>
+                <a:ea typeface="Noto Sans CJK JP"/>
+                <a:cs typeface="Noto Sans"/>
+              </a:defRPr>
+            </a:pPr>
+            <a:r>
+              <a:rPr sz="2200" lang="ja-JP">
                 <a:solidFill>
                   <a:srgbClr val="303437"/>
                 </a:solidFill>
@@ -15290,7 +15285,7 @@
               </a:rPr>
               <a:t>1,000クラス分類は、画像の意味全体を説明しない。</a:t>
             </a:r>
-            <a:endParaRPr sz="2100" lang="ja-JP">
+            <a:endParaRPr sz="2200" lang="ja-JP">
               <a:latin typeface="Noto Sans"/>
               <a:ea typeface="Noto Sans CJK JP"/>
               <a:cs typeface="Noto Sans"/>
@@ -15298,16 +15293,17 @@
           </a:p>
           <a:p>
             <a:pPr algn="l" lvl="0" marL="457200" indent="-355600">
-              <a:buSzPts val="2000"/>
+              <a:buSzPct val="60455"/>
+              <a:buFont typeface="Noto Sans CJK JP"/>
               <a:buChar char="●"/>
-              <a:defRPr sz="2100" lang="ja-JP">
-                <a:latin typeface="Noto Sans"/>
-                <a:ea typeface="Noto Sans CJK JP"/>
-                <a:cs typeface="Noto Sans"/>
-              </a:defRPr>
-            </a:pPr>
-            <a:r>
-              <a:rPr sz="2100" lang="ja-JP">
+              <a:defRPr sz="2200" lang="ja-JP">
+                <a:latin typeface="Noto Sans"/>
+                <a:ea typeface="Noto Sans CJK JP"/>
+                <a:cs typeface="Noto Sans"/>
+              </a:defRPr>
+            </a:pPr>
+            <a:r>
+              <a:rPr sz="2200" lang="ja-JP">
                 <a:solidFill>
                   <a:srgbClr val="303437"/>
                 </a:solidFill>
@@ -15317,7 +15313,7 @@
               </a:rPr>
               <a:t>対象物より背景の手がかりを使う可能性がある。</a:t>
             </a:r>
-            <a:endParaRPr sz="2100" lang="ja-JP">
+            <a:endParaRPr sz="2200" lang="ja-JP">
               <a:latin typeface="Noto Sans"/>
               <a:ea typeface="Noto Sans CJK JP"/>
               <a:cs typeface="Noto Sans"/>
@@ -15325,16 +15321,17 @@
           </a:p>
           <a:p>
             <a:pPr algn="l" lvl="0" marL="457200" indent="-355600">
-              <a:buSzPts val="2000"/>
+              <a:buSzPct val="60455"/>
+              <a:buFont typeface="Noto Sans CJK JP"/>
               <a:buChar char="●"/>
-              <a:defRPr sz="2100" lang="ja-JP">
-                <a:latin typeface="Noto Sans"/>
-                <a:ea typeface="Noto Sans CJK JP"/>
-                <a:cs typeface="Noto Sans"/>
-              </a:defRPr>
-            </a:pPr>
-            <a:r>
-              <a:rPr sz="2100" lang="ja-JP">
+              <a:defRPr sz="2200" lang="ja-JP">
+                <a:latin typeface="Noto Sans"/>
+                <a:ea typeface="Noto Sans CJK JP"/>
+                <a:cs typeface="Noto Sans"/>
+              </a:defRPr>
+            </a:pPr>
+            <a:r>
+              <a:rPr sz="2200" lang="ja-JP">
                 <a:solidFill>
                   <a:srgbClr val="303437"/>
                 </a:solidFill>
@@ -15345,7 +15342,7 @@
               <a:t>複数物体が写っても、通常の正解は1クラスである </a:t>
             </a:r>
             <a:r>
-              <a:rPr sz="2100" lang="ja-JP">
+              <a:rPr sz="2200" lang="ja-JP">
                 <a:solidFill>
                   <a:srgbClr val="303437"/>
                 </a:solidFill>
@@ -15356,7 +15353,7 @@
               <a:t>[1]</a:t>
             </a:r>
             <a:r>
-              <a:rPr sz="2100" lang="ja-JP">
+              <a:rPr sz="2200" lang="ja-JP">
                 <a:solidFill>
                   <a:srgbClr val="303437"/>
                 </a:solidFill>
@@ -15366,7 +15363,7 @@
               </a:rPr>
               <a:t>。</a:t>
             </a:r>
-            <a:endParaRPr sz="2100" lang="ja-JP">
+            <a:endParaRPr sz="2200" lang="ja-JP">
               <a:latin typeface="Noto Sans"/>
               <a:ea typeface="Noto Sans CJK JP"/>
               <a:cs typeface="Noto Sans"/>
@@ -15374,16 +15371,17 @@
           </a:p>
           <a:p>
             <a:pPr algn="l" lvl="0" marL="457200" indent="-355600">
-              <a:buSzPts val="2000"/>
+              <a:buSzPct val="60455"/>
+              <a:buFont typeface="Noto Sans CJK JP"/>
               <a:buChar char="●"/>
-              <a:defRPr sz="2100" lang="ja-JP">
-                <a:latin typeface="Noto Sans"/>
-                <a:ea typeface="Noto Sans CJK JP"/>
-                <a:cs typeface="Noto Sans"/>
-              </a:defRPr>
-            </a:pPr>
-            <a:r>
-              <a:rPr sz="2100" lang="ja-JP">
+              <a:defRPr sz="2200" lang="ja-JP">
+                <a:latin typeface="Noto Sans"/>
+                <a:ea typeface="Noto Sans CJK JP"/>
+                <a:cs typeface="Noto Sans"/>
+              </a:defRPr>
+            </a:pPr>
+            <a:r>
+              <a:rPr sz="2200" lang="ja-JP">
                 <a:solidFill>
                   <a:srgbClr val="303437"/>
                 </a:solidFill>
@@ -15394,7 +15392,7 @@
               <a:t>そこでImageNet-ReaLは正解ラベルを見直した </a:t>
             </a:r>
             <a:r>
-              <a:rPr sz="2100" lang="ja-JP">
+              <a:rPr sz="2200" lang="ja-JP">
                 <a:solidFill>
                   <a:srgbClr val="303437"/>
                 </a:solidFill>
@@ -15405,7 +15403,7 @@
               <a:t>[2]</a:t>
             </a:r>
             <a:r>
-              <a:rPr sz="2100" lang="ja-JP">
+              <a:rPr sz="2200" lang="ja-JP">
                 <a:solidFill>
                   <a:srgbClr val="303437"/>
                 </a:solidFill>
@@ -15415,7 +15413,7 @@
               </a:rPr>
               <a:t>。</a:t>
             </a:r>
-            <a:endParaRPr sz="2100" lang="ja-JP">
+            <a:endParaRPr sz="2200" lang="ja-JP">
               <a:latin typeface="Noto Sans"/>
               <a:ea typeface="Noto Sans CJK JP"/>
               <a:cs typeface="Noto Sans"/>
@@ -15423,16 +15421,17 @@
           </a:p>
           <a:p>
             <a:pPr algn="l" lvl="1" marL="914400" indent="-355600">
-              <a:buSzPts val="2000"/>
+              <a:buSzPct val="60455"/>
+              <a:buFont typeface="Noto Sans CJK JP"/>
               <a:buChar char="○"/>
-              <a:defRPr sz="2100" lang="ja-JP">
-                <a:latin typeface="Noto Sans"/>
-                <a:ea typeface="Noto Sans CJK JP"/>
-                <a:cs typeface="Noto Sans"/>
-              </a:defRPr>
-            </a:pPr>
-            <a:r>
-              <a:rPr sz="2100" lang="ja-JP">
+              <a:defRPr sz="2200" lang="ja-JP">
+                <a:latin typeface="Noto Sans"/>
+                <a:ea typeface="Noto Sans CJK JP"/>
+                <a:cs typeface="Noto Sans"/>
+              </a:defRPr>
+            </a:pPr>
+            <a:r>
+              <a:rPr sz="2200" lang="ja-JP">
                 <a:solidFill>
                   <a:srgbClr val="303437"/>
                 </a:solidFill>
@@ -15442,7 +15441,7 @@
               </a:rPr>
               <a:t>既存の検証画像に、複数の妥当なラベルを付け直す。</a:t>
             </a:r>
-            <a:endParaRPr sz="2100" lang="ja-JP">
+            <a:endParaRPr sz="2200" lang="ja-JP">
               <a:latin typeface="Noto Sans"/>
               <a:ea typeface="Noto Sans CJK JP"/>
               <a:cs typeface="Noto Sans"/>
@@ -15450,16 +15449,17 @@
           </a:p>
           <a:p>
             <a:pPr algn="l" lvl="0" marL="457200" indent="-355600">
-              <a:buSzPts val="2000"/>
+              <a:buSzPct val="60455"/>
+              <a:buFont typeface="Noto Sans CJK JP"/>
               <a:buChar char="●"/>
-              <a:defRPr sz="2100" lang="ja-JP">
-                <a:latin typeface="Noto Sans"/>
-                <a:ea typeface="Noto Sans CJK JP"/>
-                <a:cs typeface="Noto Sans"/>
-              </a:defRPr>
-            </a:pPr>
-            <a:r>
-              <a:rPr sz="2100" lang="ja-JP">
+              <a:defRPr sz="2200" lang="ja-JP">
+                <a:latin typeface="Noto Sans"/>
+                <a:ea typeface="Noto Sans CJK JP"/>
+                <a:cs typeface="Noto Sans"/>
+              </a:defRPr>
+            </a:pPr>
+            <a:r>
+              <a:rPr sz="2200" lang="ja-JP">
                 <a:solidFill>
                   <a:srgbClr val="303437"/>
                 </a:solidFill>
@@ -15469,7 +15469,7 @@
               </a:rPr>
               <a:t>別の画像集合や撮影条件では、成績が変わる。</a:t>
             </a:r>
-            <a:endParaRPr sz="2100" lang="ja-JP">
+            <a:endParaRPr sz="2200" lang="ja-JP">
               <a:latin typeface="Noto Sans"/>
               <a:ea typeface="Noto Sans CJK JP"/>
               <a:cs typeface="Noto Sans"/>
@@ -15746,7 +15746,8 @@
           <a:lstStyle/>
           <a:p>
             <a:pPr algn="l" lvl="0" marL="457200" indent="-355600">
-              <a:buSzPts val="2000"/>
+              <a:buSzPct val="63333"/>
+              <a:buFont typeface="Noto Sans CJK JP"/>
               <a:buChar char="●"/>
               <a:defRPr sz="2100" b="0" lang="ja-JP">
                 <a:latin typeface="Noto Sans"/>
@@ -15795,7 +15796,8 @@
           </a:p>
           <a:p>
             <a:pPr algn="l" lvl="0" marL="457200" indent="-355600">
-              <a:buSzPts val="2000"/>
+              <a:buSzPct val="63333"/>
+              <a:buFont typeface="Noto Sans CJK JP"/>
               <a:buChar char="●"/>
               <a:defRPr sz="2100" lang="ja-JP">
                 <a:latin typeface="Noto Sans"/>
@@ -15822,7 +15824,8 @@
           </a:p>
           <a:p>
             <a:pPr algn="l" lvl="0" marL="457200" indent="-355600">
-              <a:buSzPts val="2000"/>
+              <a:buSzPct val="63333"/>
+              <a:buFont typeface="Noto Sans CJK JP"/>
               <a:buChar char="●"/>
               <a:defRPr sz="2100" lang="ja-JP">
                 <a:latin typeface="Noto Sans"/>
@@ -15849,7 +15852,8 @@
           </a:p>
           <a:p>
             <a:pPr algn="l" lvl="0" marL="457200" indent="-355600">
-              <a:buSzPts val="2000"/>
+              <a:buSzPct val="63333"/>
+              <a:buFont typeface="Noto Sans CJK JP"/>
               <a:buChar char="●"/>
               <a:defRPr sz="2100" lang="ja-JP">
                 <a:latin typeface="Noto Sans"/>
@@ -15876,7 +15880,8 @@
           </a:p>
           <a:p>
             <a:pPr algn="l" lvl="0" marL="457200" indent="-355600">
-              <a:buSzPts val="2000"/>
+              <a:buSzPct val="63333"/>
+              <a:buFont typeface="Noto Sans CJK JP"/>
               <a:buChar char="●"/>
               <a:defRPr sz="2100" lang="ja-JP">
                 <a:latin typeface="Noto Sans"/>
@@ -16126,7 +16131,8 @@
           <a:lstStyle/>
           <a:p>
             <a:pPr algn="l" lvl="0" marL="457200" indent="-355600">
-              <a:buSzPts val="2000"/>
+              <a:buSzPct val="63333"/>
+              <a:buFont typeface="Noto Sans CJK JP"/>
               <a:buChar char="●"/>
               <a:defRPr sz="2100" b="0" lang="ja-JP">
                 <a:latin typeface="Noto Sans"/>
@@ -16175,7 +16181,8 @@
           </a:p>
           <a:p>
             <a:pPr algn="l" lvl="1" marL="914400" indent="-355600">
-              <a:buSzPts val="2000"/>
+              <a:buSzPct val="63333"/>
+              <a:buFont typeface="Noto Sans CJK JP"/>
               <a:buChar char="○"/>
               <a:defRPr sz="2100" lang="ja-JP">
                 <a:latin typeface="Noto Sans"/>
@@ -16202,7 +16209,8 @@
           </a:p>
           <a:p>
             <a:pPr algn="l" lvl="0" marL="457200" indent="-355600">
-              <a:buSzPts val="2000"/>
+              <a:buSzPct val="63333"/>
+              <a:buFont typeface="Noto Sans CJK JP"/>
               <a:buChar char="●"/>
               <a:defRPr sz="2100" lang="ja-JP">
                 <a:latin typeface="Noto Sans"/>
@@ -16251,7 +16259,8 @@
           </a:p>
           <a:p>
             <a:pPr algn="l" lvl="0" marL="457200" indent="-355600">
-              <a:buSzPts val="2000"/>
+              <a:buSzPct val="63333"/>
+              <a:buFont typeface="Noto Sans CJK JP"/>
               <a:buChar char="●"/>
               <a:defRPr sz="2100" lang="ja-JP">
                 <a:latin typeface="Noto Sans"/>
@@ -16278,7 +16287,8 @@
           </a:p>
           <a:p>
             <a:pPr algn="l" lvl="0" marL="457200" indent="-355600">
-              <a:buSzPts val="2000"/>
+              <a:buSzPct val="63333"/>
+              <a:buFont typeface="Noto Sans CJK JP"/>
               <a:buChar char="●"/>
               <a:defRPr sz="2100" lang="ja-JP">
                 <a:latin typeface="Noto Sans"/>
@@ -16689,16 +16699,17 @@
           <a:lstStyle/>
           <a:p>
             <a:pPr algn="l" lvl="0" marL="457200" indent="-355600">
-              <a:buSzPts val="2000"/>
+              <a:buSzPct val="55417"/>
+              <a:buFont typeface="Noto Sans CJK JP"/>
               <a:buChar char="●"/>
-              <a:defRPr sz="2200" b="0" lang="ja-JP">
-                <a:latin typeface="Noto Sans"/>
-                <a:ea typeface="Noto Sans CJK JP"/>
-                <a:cs typeface="Noto Sans"/>
-              </a:defRPr>
-            </a:pPr>
-            <a:r>
-              <a:rPr sz="2200" lang="ja-JP">
+              <a:defRPr sz="2400" b="0" lang="ja-JP">
+                <a:latin typeface="Noto Sans"/>
+                <a:ea typeface="Noto Sans CJK JP"/>
+                <a:cs typeface="Noto Sans"/>
+              </a:defRPr>
+            </a:pPr>
+            <a:r>
+              <a:rPr sz="2400" lang="ja-JP">
                 <a:solidFill>
                   <a:srgbClr val="303437"/>
                 </a:solidFill>
@@ -16709,7 +16720,7 @@
               <a:t>画像認識大会ILSVRCの2012年・1,000クラス分類用データは、Kaggleで入手できる </a:t>
             </a:r>
             <a:r>
-              <a:rPr sz="2200" lang="ja-JP">
+              <a:rPr sz="2400" lang="ja-JP">
                 <a:solidFill>
                   <a:srgbClr val="303437"/>
                 </a:solidFill>
@@ -16720,7 +16731,7 @@
               <a:t>[1]</a:t>
             </a:r>
             <a:r>
-              <a:rPr sz="2200" lang="ja-JP">
+              <a:rPr sz="2400" lang="ja-JP">
                 <a:solidFill>
                   <a:srgbClr val="303437"/>
                 </a:solidFill>
@@ -16730,7 +16741,7 @@
               </a:rPr>
               <a:t>。</a:t>
             </a:r>
-            <a:endParaRPr sz="2200" lang="ja-JP">
+            <a:endParaRPr sz="2400" lang="ja-JP">
               <a:latin typeface="Noto Sans"/>
               <a:ea typeface="Noto Sans CJK JP"/>
               <a:cs typeface="Noto Sans"/>
@@ -16738,16 +16749,17 @@
           </a:p>
           <a:p>
             <a:pPr algn="l" lvl="0" marL="457200" indent="-355600">
-              <a:buSzPts val="2000"/>
+              <a:buSzPct val="55417"/>
+              <a:buFont typeface="Noto Sans CJK JP"/>
               <a:buChar char="●"/>
-              <a:defRPr sz="2200" lang="ja-JP">
-                <a:latin typeface="Noto Sans"/>
-                <a:ea typeface="Noto Sans CJK JP"/>
-                <a:cs typeface="Noto Sans"/>
-              </a:defRPr>
-            </a:pPr>
-            <a:r>
-              <a:rPr sz="2200" lang="ja-JP">
+              <a:defRPr sz="2400" lang="ja-JP">
+                <a:latin typeface="Noto Sans"/>
+                <a:ea typeface="Noto Sans CJK JP"/>
+                <a:cs typeface="Noto Sans"/>
+              </a:defRPr>
+            </a:pPr>
+            <a:r>
+              <a:rPr sz="2400" lang="ja-JP">
                 <a:solidFill>
                   <a:srgbClr val="303437"/>
                 </a:solidFill>
@@ -16757,7 +16769,7 @@
               </a:rPr>
               <a:t>ImageNet全体とその他のサブセットには、ログインと利用条件への同意が必要となる。</a:t>
             </a:r>
-            <a:endParaRPr sz="2200" lang="ja-JP">
+            <a:endParaRPr sz="2400" lang="ja-JP">
               <a:latin typeface="Noto Sans"/>
               <a:ea typeface="Noto Sans CJK JP"/>
               <a:cs typeface="Noto Sans"/>
@@ -16765,16 +16777,17 @@
           </a:p>
           <a:p>
             <a:pPr algn="l" lvl="0" marL="457200" indent="-355600">
-              <a:buSzPts val="2000"/>
+              <a:buSzPct val="55417"/>
+              <a:buFont typeface="Noto Sans CJK JP"/>
               <a:buChar char="●"/>
-              <a:defRPr sz="2200" lang="ja-JP">
-                <a:latin typeface="Noto Sans"/>
-                <a:ea typeface="Noto Sans CJK JP"/>
-                <a:cs typeface="Noto Sans"/>
-              </a:defRPr>
-            </a:pPr>
-            <a:r>
-              <a:rPr sz="2200" lang="ja-JP">
+              <a:defRPr sz="2400" lang="ja-JP">
+                <a:latin typeface="Noto Sans"/>
+                <a:ea typeface="Noto Sans CJK JP"/>
+                <a:cs typeface="Noto Sans"/>
+              </a:defRPr>
+            </a:pPr>
+            <a:r>
+              <a:rPr sz="2400" lang="ja-JP">
                 <a:solidFill>
                   <a:srgbClr val="303437"/>
                 </a:solidFill>
@@ -16784,7 +16797,7 @@
               </a:rPr>
               <a:t>入手する版、ラベルとクラス順序、利用条件を確認する。</a:t>
             </a:r>
-            <a:endParaRPr sz="2200" lang="ja-JP">
+            <a:endParaRPr sz="2400" lang="ja-JP">
               <a:latin typeface="Noto Sans"/>
               <a:ea typeface="Noto Sans CJK JP"/>
               <a:cs typeface="Noto Sans"/>
@@ -16792,16 +16805,17 @@
           </a:p>
           <a:p>
             <a:pPr algn="l" lvl="0" marL="457200" indent="-355600">
-              <a:buSzPts val="2000"/>
+              <a:buSzPct val="55417"/>
+              <a:buFont typeface="Noto Sans CJK JP"/>
               <a:buChar char="●"/>
-              <a:defRPr sz="2200" lang="ja-JP">
-                <a:latin typeface="Noto Sans"/>
-                <a:ea typeface="Noto Sans CJK JP"/>
-                <a:cs typeface="Noto Sans"/>
-              </a:defRPr>
-            </a:pPr>
-            <a:r>
-              <a:rPr sz="2200" lang="ja-JP">
+              <a:defRPr sz="2400" lang="ja-JP">
+                <a:latin typeface="Noto Sans"/>
+                <a:ea typeface="Noto Sans CJK JP"/>
+                <a:cs typeface="Noto Sans"/>
+              </a:defRPr>
+            </a:pPr>
+            <a:r>
+              <a:rPr sz="2400" lang="ja-JP">
                 <a:solidFill>
                   <a:srgbClr val="303437"/>
                 </a:solidFill>
@@ -16812,7 +16826,7 @@
               <a:t>小規模な10クラス版Imagenetteも使える </a:t>
             </a:r>
             <a:r>
-              <a:rPr sz="2200" lang="ja-JP">
+              <a:rPr sz="2400" lang="ja-JP">
                 <a:solidFill>
                   <a:srgbClr val="303437"/>
                 </a:solidFill>
@@ -16823,7 +16837,7 @@
               <a:t>[2]</a:t>
             </a:r>
             <a:r>
-              <a:rPr sz="2200" lang="ja-JP">
+              <a:rPr sz="2400" lang="ja-JP">
                 <a:solidFill>
                   <a:srgbClr val="303437"/>
                 </a:solidFill>
@@ -16833,7 +16847,7 @@
               </a:rPr>
               <a:t>。</a:t>
             </a:r>
-            <a:endParaRPr sz="2200" lang="ja-JP">
+            <a:endParaRPr sz="2400" lang="ja-JP">
               <a:latin typeface="Noto Sans"/>
               <a:ea typeface="Noto Sans CJK JP"/>
               <a:cs typeface="Noto Sans"/>
@@ -17188,7 +17202,7 @@
         </p:nvSpPr>
         <p:spPr>
           <a:xfrm>
-            <a:off x="594360" y="1490472"/>
+            <a:off x="594360" y="1371600"/>
             <a:ext cx="7955279" cy="3090672"/>
           </a:xfrm>
           <a:prstGeom prst="rect">
@@ -17203,16 +17217,17 @@
           <a:lstStyle/>
           <a:p>
             <a:pPr algn="l" lvl="0" marL="457200" indent="-355600">
-              <a:buSzPts val="2000"/>
+              <a:buSzPct val="55417"/>
+              <a:buFont typeface="Noto Sans CJK JP"/>
               <a:buChar char="●"/>
-              <a:defRPr sz="2500" b="0" lang="ja-JP">
-                <a:latin typeface="Noto Sans"/>
-                <a:ea typeface="Noto Sans CJK JP"/>
-                <a:cs typeface="Noto Sans"/>
-              </a:defRPr>
-            </a:pPr>
-            <a:r>
-              <a:rPr sz="2500" lang="ja-JP">
+              <a:defRPr sz="2400" b="0" lang="ja-JP">
+                <a:latin typeface="Noto Sans"/>
+                <a:ea typeface="Noto Sans CJK JP"/>
+                <a:cs typeface="Noto Sans"/>
+              </a:defRPr>
+            </a:pPr>
+            <a:r>
+              <a:rPr sz="2400" lang="ja-JP">
                 <a:solidFill>
                   <a:srgbClr val="303437"/>
                 </a:solidFill>
@@ -17222,7 +17237,7 @@
               </a:rPr>
               <a:t>ImageNetは物体認識用の画像データベースである。</a:t>
             </a:r>
-            <a:endParaRPr sz="2500" lang="ja-JP">
+            <a:endParaRPr sz="2400" lang="ja-JP">
               <a:latin typeface="Noto Sans"/>
               <a:ea typeface="Noto Sans CJK JP"/>
               <a:cs typeface="Noto Sans"/>
@@ -17230,16 +17245,17 @@
           </a:p>
           <a:p>
             <a:pPr algn="l" lvl="0" marL="457200" indent="-355600">
-              <a:buSzPts val="2000"/>
+              <a:buSzPct val="55417"/>
+              <a:buFont typeface="Noto Sans CJK JP"/>
               <a:buChar char="●"/>
-              <a:defRPr sz="2500" lang="ja-JP">
-                <a:latin typeface="Noto Sans"/>
-                <a:ea typeface="Noto Sans CJK JP"/>
-                <a:cs typeface="Noto Sans"/>
-              </a:defRPr>
-            </a:pPr>
-            <a:r>
-              <a:rPr sz="2500" lang="ja-JP">
+              <a:defRPr sz="2400" lang="ja-JP">
+                <a:latin typeface="Noto Sans"/>
+                <a:ea typeface="Noto Sans CJK JP"/>
+                <a:cs typeface="Noto Sans"/>
+              </a:defRPr>
+            </a:pPr>
+            <a:r>
+              <a:rPr sz="2400" lang="ja-JP">
                 <a:solidFill>
                   <a:srgbClr val="303437"/>
                 </a:solidFill>
@@ -17249,7 +17265,7 @@
               </a:rPr>
               <a:t>2009年に発表され、多数の画像を人手で確認した。</a:t>
             </a:r>
-            <a:endParaRPr sz="2500" lang="ja-JP">
+            <a:endParaRPr sz="2400" lang="ja-JP">
               <a:latin typeface="Noto Sans"/>
               <a:ea typeface="Noto Sans CJK JP"/>
               <a:cs typeface="Noto Sans"/>
@@ -17257,16 +17273,17 @@
           </a:p>
           <a:p>
             <a:pPr algn="l" lvl="0" marL="457200" indent="-355600">
-              <a:buSzPts val="2000"/>
+              <a:buSzPct val="55417"/>
+              <a:buFont typeface="Noto Sans CJK JP"/>
               <a:buChar char="●"/>
-              <a:defRPr sz="2500" lang="ja-JP">
-                <a:latin typeface="Noto Sans"/>
-                <a:ea typeface="Noto Sans CJK JP"/>
-                <a:cs typeface="Noto Sans"/>
-              </a:defRPr>
-            </a:pPr>
-            <a:r>
-              <a:rPr sz="2500" lang="ja-JP">
+              <a:defRPr sz="2400" lang="ja-JP">
+                <a:latin typeface="Noto Sans"/>
+                <a:ea typeface="Noto Sans CJK JP"/>
+                <a:cs typeface="Noto Sans"/>
+              </a:defRPr>
+            </a:pPr>
+            <a:r>
+              <a:rPr sz="2400" lang="ja-JP">
                 <a:solidFill>
                   <a:srgbClr val="303437"/>
                 </a:solidFill>
@@ -17276,7 +17293,7 @@
               </a:rPr>
               <a:t>ImageNet-1kはILSVRCの1,000クラス分類用である。</a:t>
             </a:r>
-            <a:endParaRPr sz="2500" lang="ja-JP">
+            <a:endParaRPr sz="2400" lang="ja-JP">
               <a:latin typeface="Noto Sans"/>
               <a:ea typeface="Noto Sans CJK JP"/>
               <a:cs typeface="Noto Sans"/>
@@ -17284,16 +17301,17 @@
           </a:p>
           <a:p>
             <a:pPr algn="l" lvl="0" marL="457200" indent="-355600">
-              <a:buSzPts val="2000"/>
+              <a:buSzPct val="55417"/>
+              <a:buFont typeface="Noto Sans CJK JP"/>
               <a:buChar char="●"/>
-              <a:defRPr sz="2500" lang="ja-JP">
-                <a:latin typeface="Noto Sans"/>
-                <a:ea typeface="Noto Sans CJK JP"/>
-                <a:cs typeface="Noto Sans"/>
-              </a:defRPr>
-            </a:pPr>
-            <a:r>
-              <a:rPr sz="2500" lang="ja-JP">
+              <a:defRPr sz="2400" lang="ja-JP">
+                <a:latin typeface="Noto Sans"/>
+                <a:ea typeface="Noto Sans CJK JP"/>
+                <a:cs typeface="Noto Sans"/>
+              </a:defRPr>
+            </a:pPr>
+            <a:r>
+              <a:rPr sz="2400" lang="ja-JP">
                 <a:solidFill>
                   <a:srgbClr val="303437"/>
                 </a:solidFill>
@@ -17303,7 +17321,7 @@
               </a:rPr>
               <a:t>Top-1・Top-5と、学習・評価条件を区別する。</a:t>
             </a:r>
-            <a:endParaRPr sz="2500" lang="ja-JP">
+            <a:endParaRPr sz="2400" lang="ja-JP">
               <a:latin typeface="Noto Sans"/>
               <a:ea typeface="Noto Sans CJK JP"/>
               <a:cs typeface="Noto Sans"/>
@@ -17311,16 +17329,17 @@
           </a:p>
           <a:p>
             <a:pPr algn="l" lvl="0" marL="457200" indent="-355600">
-              <a:buSzPts val="2000"/>
+              <a:buSzPct val="55417"/>
+              <a:buFont typeface="Noto Sans CJK JP"/>
               <a:buChar char="●"/>
-              <a:defRPr sz="2500" lang="ja-JP">
-                <a:latin typeface="Noto Sans"/>
-                <a:ea typeface="Noto Sans CJK JP"/>
-                <a:cs typeface="Noto Sans"/>
-              </a:defRPr>
-            </a:pPr>
-            <a:r>
-              <a:rPr sz="2500" lang="ja-JP">
+              <a:defRPr sz="2400" lang="ja-JP">
+                <a:latin typeface="Noto Sans"/>
+                <a:ea typeface="Noto Sans CJK JP"/>
+                <a:cs typeface="Noto Sans"/>
+              </a:defRPr>
+            </a:pPr>
+            <a:r>
+              <a:rPr sz="2400" lang="ja-JP">
                 <a:solidFill>
                   <a:srgbClr val="303437"/>
                 </a:solidFill>
@@ -17330,7 +17349,7 @@
               </a:rPr>
               <a:t>現在は特徴評価にも使い、汎化は別画像で調べる。</a:t>
             </a:r>
-            <a:endParaRPr sz="2500" lang="ja-JP">
+            <a:endParaRPr sz="2400" lang="ja-JP">
               <a:latin typeface="Noto Sans"/>
               <a:ea typeface="Noto Sans CJK JP"/>
               <a:cs typeface="Noto Sans"/>
@@ -17475,8 +17494,8 @@
         </p:nvSpPr>
         <p:spPr>
           <a:xfrm>
-            <a:off x="594360" y="1444752"/>
-            <a:ext cx="7955279" cy="3337560"/>
+            <a:off x="594360" y="1353312"/>
+            <a:ext cx="7955279" cy="3291840"/>
           </a:xfrm>
           <a:prstGeom prst="rect">
             <a:avLst/>
@@ -17491,13 +17510,13 @@
           <a:p>
             <a:pPr algn="l" marL="533400" indent="-381000">
               <a:lnSpc>
-                <a:spcPct val="110000"/>
-              </a:lnSpc>
-              <a:spcBef>
-                <a:spcPts val="0"/>
-              </a:spcBef>
-              <a:spcAft>
-                <a:spcPts val="800"/>
+                <a:spcPct val="105000"/>
+              </a:lnSpc>
+              <a:spcBef>
+                <a:spcPts val="0"/>
+              </a:spcBef>
+              <a:spcAft>
+                <a:spcPts val="0"/>
               </a:spcAft>
               <a:buAutoNum type="arabicPeriod" startAt="1"/>
               <a:defRPr sz="2500" lang="ja-JP">
@@ -17526,13 +17545,13 @@
           <a:p>
             <a:pPr marL="533400" indent="-381000">
               <a:lnSpc>
-                <a:spcPct val="110000"/>
-              </a:lnSpc>
-              <a:spcBef>
-                <a:spcPts val="0"/>
-              </a:spcBef>
-              <a:spcAft>
-                <a:spcPts val="800"/>
+                <a:spcPct val="105000"/>
+              </a:lnSpc>
+              <a:spcBef>
+                <a:spcPts val="0"/>
+              </a:spcBef>
+              <a:spcAft>
+                <a:spcPts val="0"/>
               </a:spcAft>
               <a:buAutoNum type="arabicPeriod" startAt="2"/>
               <a:defRPr sz="2500" lang="ja-JP">
@@ -17556,13 +17575,13 @@
           <a:p>
             <a:pPr marL="533400" indent="-381000">
               <a:lnSpc>
-                <a:spcPct val="110000"/>
-              </a:lnSpc>
-              <a:spcBef>
-                <a:spcPts val="0"/>
-              </a:spcBef>
-              <a:spcAft>
-                <a:spcPts val="800"/>
+                <a:spcPct val="105000"/>
+              </a:lnSpc>
+              <a:spcBef>
+                <a:spcPts val="0"/>
+              </a:spcBef>
+              <a:spcAft>
+                <a:spcPts val="0"/>
               </a:spcAft>
               <a:buAutoNum type="arabicPeriod" startAt="3"/>
               <a:defRPr sz="2500" lang="ja-JP">
@@ -17586,13 +17605,13 @@
           <a:p>
             <a:pPr marL="533400" indent="-381000">
               <a:lnSpc>
-                <a:spcPct val="110000"/>
-              </a:lnSpc>
-              <a:spcBef>
-                <a:spcPts val="0"/>
-              </a:spcBef>
-              <a:spcAft>
-                <a:spcPts val="800"/>
+                <a:spcPct val="105000"/>
+              </a:lnSpc>
+              <a:spcBef>
+                <a:spcPts val="0"/>
+              </a:spcBef>
+              <a:spcAft>
+                <a:spcPts val="0"/>
               </a:spcAft>
               <a:buAutoNum type="arabicPeriod" startAt="4"/>
               <a:defRPr sz="2500" lang="ja-JP">
@@ -17616,13 +17635,13 @@
           <a:p>
             <a:pPr marL="533400" indent="-381000">
               <a:lnSpc>
-                <a:spcPct val="110000"/>
-              </a:lnSpc>
-              <a:spcBef>
-                <a:spcPts val="0"/>
-              </a:spcBef>
-              <a:spcAft>
-                <a:spcPts val="800"/>
+                <a:spcPct val="105000"/>
+              </a:lnSpc>
+              <a:spcBef>
+                <a:spcPts val="0"/>
+              </a:spcBef>
+              <a:spcAft>
+                <a:spcPts val="0"/>
               </a:spcAft>
               <a:buAutoNum type="arabicPeriod" startAt="5"/>
               <a:defRPr sz="2500" lang="ja-JP">
@@ -17646,13 +17665,13 @@
           <a:p>
             <a:pPr marL="533400" indent="-381000">
               <a:lnSpc>
-                <a:spcPct val="110000"/>
-              </a:lnSpc>
-              <a:spcBef>
-                <a:spcPts val="0"/>
-              </a:spcBef>
-              <a:spcAft>
-                <a:spcPts val="800"/>
+                <a:spcPct val="105000"/>
+              </a:lnSpc>
+              <a:spcBef>
+                <a:spcPts val="0"/>
+              </a:spcBef>
+              <a:spcAft>
+                <a:spcPts val="0"/>
               </a:spcAft>
               <a:buAutoNum type="arabicPeriod" startAt="6"/>
               <a:defRPr sz="2500" lang="ja-JP">
@@ -17676,13 +17695,13 @@
           <a:p>
             <a:pPr marL="533400" indent="-381000">
               <a:lnSpc>
-                <a:spcPct val="110000"/>
-              </a:lnSpc>
-              <a:spcBef>
-                <a:spcPts val="0"/>
-              </a:spcBef>
-              <a:spcAft>
-                <a:spcPts val="800"/>
+                <a:spcPct val="105000"/>
+              </a:lnSpc>
+              <a:spcBef>
+                <a:spcPts val="0"/>
+              </a:spcBef>
+              <a:spcAft>
+                <a:spcPts val="0"/>
               </a:spcAft>
               <a:buAutoNum type="arabicPeriod" startAt="7"/>
               <a:defRPr sz="2500" lang="ja-JP">
@@ -17859,7 +17878,8 @@
           <a:lstStyle/>
           <a:p>
             <a:pPr algn="l" lvl="0" marL="457200" indent="-355600">
-              <a:buSzPts val="2000"/>
+              <a:buSzPct val="57826"/>
+              <a:buFont typeface="Noto Sans CJK JP"/>
               <a:buChar char="●"/>
               <a:defRPr sz="2300" b="0" lang="ja-JP">
                 <a:latin typeface="Noto Sans"/>
@@ -17878,7 +17898,7 @@
               </a:rPr>
               <a:t>原著は2009年のCVPRで発表された [1]。</a:t>
             </a:r>
-            <a:endParaRPr sz="1900" lang="ja-JP">
+            <a:endParaRPr sz="2300" lang="ja-JP">
               <a:latin typeface="Noto Sans"/>
               <a:ea typeface="Noto Sans CJK JP"/>
               <a:cs typeface="Noto Sans"/>
@@ -17886,7 +17906,8 @@
           </a:p>
           <a:p>
             <a:pPr lvl="0" marL="457200" indent="-355600">
-              <a:buSzPts val="2000"/>
+              <a:buSzPct val="57826"/>
+              <a:buFont typeface="Noto Sans CJK JP"/>
               <a:buChar char="●"/>
               <a:defRPr sz="2300" lang="ja-JP">
                 <a:latin typeface="Noto Sans"/>
@@ -17908,7 +17929,8 @@
           </a:p>
           <a:p>
             <a:pPr lvl="0" marL="457200" indent="-355600">
-              <a:buSzPts val="2000"/>
+              <a:buSzPct val="57826"/>
+              <a:buFont typeface="Noto Sans CJK JP"/>
               <a:buChar char="●"/>
               <a:defRPr sz="2300" lang="ja-JP">
                 <a:latin typeface="Noto Sans"/>
@@ -17930,7 +17952,8 @@
           </a:p>
           <a:p>
             <a:pPr lvl="0" marL="457200" indent="-355600">
-              <a:buSzPts val="2000"/>
+              <a:buSzPct val="57826"/>
+              <a:buFont typeface="Noto Sans CJK JP"/>
               <a:buChar char="●"/>
               <a:defRPr sz="2300" lang="ja-JP">
                 <a:latin typeface="Noto Sans"/>
@@ -19476,8 +19499,8 @@
         </p:nvSpPr>
         <p:spPr>
           <a:xfrm>
-            <a:off x="502920" y="4744720"/>
-            <a:ext cx="8183879" cy="339343"/>
+            <a:off x="502920" y="4876495"/>
+            <a:ext cx="8183879" cy="207568"/>
           </a:xfrm>
           <a:prstGeom prst="rect">
             <a:avLst/>
@@ -19516,8 +19539,7 @@
                 <a:ea typeface="Noto Sans CJK JP"/>
                 <a:cs typeface="Noto Sans"/>
               </a:rPr>
-              <a:t>[1] ILSVRC 2012公式devkit. https://image-net.org/challenges/LSVRC/2012/
-日本語名は英語ラベルの訳。</a:t>
+              <a:t>[1] ILSVRC 2012公式devkit. https://image-net.org/challenges/LSVRC/2012/ 日本語名は英語ラベルの訳。</a:t>
             </a:r>
             <a:endParaRPr sz="850" lang="ja-JP">
               <a:latin typeface="Noto Sans"/>
@@ -19535,7 +19557,7 @@
         </p:nvSpPr>
         <p:spPr>
           <a:xfrm>
-            <a:off x="594360" y="4315968"/>
+            <a:off x="594360" y="4398264"/>
             <a:ext cx="7955279" cy="283464"/>
           </a:xfrm>
           <a:prstGeom prst="rect">
@@ -19567,7 +19589,7 @@
               </a:defRPr>
             </a:pPr>
             <a:r>
-              <a:rPr sz="1700" lang="ja-JP">
+              <a:rPr sz="1800" lang="ja-JP">
                 <a:solidFill>
                   <a:srgbClr val="303437"/>
                 </a:solidFill>
@@ -20989,8 +21011,8 @@
         </p:nvSpPr>
         <p:spPr>
           <a:xfrm>
-            <a:off x="502920" y="4744720"/>
-            <a:ext cx="8183879" cy="339343"/>
+            <a:off x="502920" y="4876495"/>
+            <a:ext cx="8183879" cy="207568"/>
           </a:xfrm>
           <a:prstGeom prst="rect">
             <a:avLst/>
@@ -21029,8 +21051,7 @@
                 <a:ea typeface="Noto Sans CJK JP"/>
                 <a:cs typeface="Noto Sans"/>
               </a:rPr>
-              <a:t>[1] ILSVRC 2012公式devkit. https://image-net.org/challenges/LSVRC/2012/
-日本語名は英語ラベルの訳。</a:t>
+              <a:t>[1] ILSVRC 2012公式devkit. https://image-net.org/challenges/LSVRC/2012/ 日本語名は英語ラベルの訳。</a:t>
             </a:r>
             <a:endParaRPr sz="850" lang="ja-JP">
               <a:latin typeface="Noto Sans"/>
@@ -21048,7 +21069,7 @@
         </p:nvSpPr>
         <p:spPr>
           <a:xfrm>
-            <a:off x="594360" y="4315968"/>
+            <a:off x="594360" y="4398264"/>
             <a:ext cx="7955279" cy="283464"/>
           </a:xfrm>
           <a:prstGeom prst="rect">
@@ -21080,7 +21101,7 @@
               </a:defRPr>
             </a:pPr>
             <a:r>
-              <a:rPr sz="1700" lang="ja-JP">
+              <a:rPr sz="1800" lang="ja-JP">
                 <a:solidFill>
                   <a:srgbClr val="303437"/>
                 </a:solidFill>
@@ -22502,8 +22523,8 @@
         </p:nvSpPr>
         <p:spPr>
           <a:xfrm>
-            <a:off x="502920" y="4744720"/>
-            <a:ext cx="8183879" cy="339343"/>
+            <a:off x="502920" y="4876495"/>
+            <a:ext cx="8183879" cy="207568"/>
           </a:xfrm>
           <a:prstGeom prst="rect">
             <a:avLst/>
@@ -22542,8 +22563,7 @@
                 <a:ea typeface="Noto Sans CJK JP"/>
                 <a:cs typeface="Noto Sans"/>
               </a:rPr>
-              <a:t>[1] ILSVRC 2012公式devkit. https://image-net.org/challenges/LSVRC/2012/
-日本語名は英語ラベルの訳。</a:t>
+              <a:t>[1] ILSVRC 2012公式devkit. https://image-net.org/challenges/LSVRC/2012/ 日本語名は英語ラベルの訳。</a:t>
             </a:r>
             <a:endParaRPr sz="850" lang="ja-JP">
               <a:latin typeface="Noto Sans"/>
@@ -22561,7 +22581,7 @@
         </p:nvSpPr>
         <p:spPr>
           <a:xfrm>
-            <a:off x="594360" y="4315968"/>
+            <a:off x="594360" y="4398264"/>
             <a:ext cx="7955279" cy="283464"/>
           </a:xfrm>
           <a:prstGeom prst="rect">
@@ -22593,7 +22613,7 @@
               </a:defRPr>
             </a:pPr>
             <a:r>
-              <a:rPr sz="1700" lang="ja-JP">
+              <a:rPr sz="1800" lang="ja-JP">
                 <a:solidFill>
                   <a:srgbClr val="303437"/>
                 </a:solidFill>
@@ -24015,8 +24035,8 @@
         </p:nvSpPr>
         <p:spPr>
           <a:xfrm>
-            <a:off x="502920" y="4744720"/>
-            <a:ext cx="8183879" cy="339343"/>
+            <a:off x="502920" y="4876495"/>
+            <a:ext cx="8183879" cy="207568"/>
           </a:xfrm>
           <a:prstGeom prst="rect">
             <a:avLst/>
@@ -24055,8 +24075,7 @@
                 <a:ea typeface="Noto Sans CJK JP"/>
                 <a:cs typeface="Noto Sans"/>
               </a:rPr>
-              <a:t>[1] ILSVRC 2012公式devkit. https://image-net.org/challenges/LSVRC/2012/
-日本語名は英語ラベルの訳。</a:t>
+              <a:t>[1] ILSVRC 2012公式devkit. https://image-net.org/challenges/LSVRC/2012/ 日本語名は英語ラベルの訳。</a:t>
             </a:r>
             <a:endParaRPr sz="850" lang="ja-JP">
               <a:latin typeface="Noto Sans"/>
@@ -24074,7 +24093,7 @@
         </p:nvSpPr>
         <p:spPr>
           <a:xfrm>
-            <a:off x="594360" y="4315968"/>
+            <a:off x="594360" y="4398264"/>
             <a:ext cx="7955279" cy="283464"/>
           </a:xfrm>
           <a:prstGeom prst="rect">
@@ -24106,7 +24125,7 @@
               </a:defRPr>
             </a:pPr>
             <a:r>
-              <a:rPr sz="1700" lang="ja-JP">
+              <a:rPr sz="1800" lang="ja-JP">
                 <a:solidFill>
                   <a:srgbClr val="303437"/>
                 </a:solidFill>
@@ -25528,8 +25547,8 @@
         </p:nvSpPr>
         <p:spPr>
           <a:xfrm>
-            <a:off x="502920" y="4744720"/>
-            <a:ext cx="8183879" cy="339343"/>
+            <a:off x="502920" y="4876495"/>
+            <a:ext cx="8183879" cy="207568"/>
           </a:xfrm>
           <a:prstGeom prst="rect">
             <a:avLst/>
@@ -25568,8 +25587,7 @@
                 <a:ea typeface="Noto Sans CJK JP"/>
                 <a:cs typeface="Noto Sans"/>
               </a:rPr>
-              <a:t>[1] ILSVRC 2012公式devkit. https://image-net.org/challenges/LSVRC/2012/
-日本語名は英語ラベルの訳。</a:t>
+              <a:t>[1] ILSVRC 2012公式devkit. https://image-net.org/challenges/LSVRC/2012/ 日本語名は英語ラベルの訳。</a:t>
             </a:r>
             <a:endParaRPr sz="850" lang="ja-JP">
               <a:latin typeface="Noto Sans"/>
@@ -25587,7 +25605,7 @@
         </p:nvSpPr>
         <p:spPr>
           <a:xfrm>
-            <a:off x="594360" y="4315968"/>
+            <a:off x="594360" y="4398264"/>
             <a:ext cx="7955279" cy="283464"/>
           </a:xfrm>
           <a:prstGeom prst="rect">
@@ -25619,7 +25637,7 @@
               </a:defRPr>
             </a:pPr>
             <a:r>
-              <a:rPr sz="1700" lang="ja-JP">
+              <a:rPr sz="1800" lang="ja-JP">
                 <a:solidFill>
                   <a:srgbClr val="303437"/>
                 </a:solidFill>
@@ -30651,7 +30669,7 @@
               </a:defRPr>
             </a:pPr>
             <a:r>
-              <a:rPr sz="1600" b="0" lang="ja-JP">
+              <a:rPr sz="1900" b="0" lang="ja-JP">
                 <a:solidFill>
                   <a:srgbClr val="303437"/>
                 </a:solidFill>
@@ -30685,7 +30703,7 @@
               </a:defRPr>
             </a:pPr>
             <a:r>
-              <a:rPr sz="1600" b="0" lang="ja-JP">
+              <a:rPr sz="1900" b="0" lang="ja-JP">
                 <a:solidFill>
                   <a:srgbClr val="303437"/>
                 </a:solidFill>
@@ -31241,7 +31259,8 @@
           <a:lstStyle/>
           <a:p>
             <a:pPr algn="l" lvl="0" marL="457200" indent="-355600">
-              <a:buSzPts val="2000"/>
+              <a:buSzPct val="63333"/>
+              <a:buFont typeface="Noto Sans CJK JP"/>
               <a:buChar char="●"/>
               <a:defRPr sz="2100" b="0" lang="ja-JP">
                 <a:latin typeface="Noto Sans"/>
@@ -31268,7 +31287,8 @@
           </a:p>
           <a:p>
             <a:pPr algn="l" lvl="0" marL="457200" indent="-355600">
-              <a:buSzPts val="2000"/>
+              <a:buSzPct val="63333"/>
+              <a:buFont typeface="Noto Sans CJK JP"/>
               <a:buChar char="●"/>
               <a:defRPr sz="2100" lang="ja-JP">
                 <a:latin typeface="Noto Sans"/>
@@ -31317,7 +31337,8 @@
           </a:p>
           <a:p>
             <a:pPr algn="l" lvl="0" marL="457200" indent="-355600">
-              <a:buSzPts val="2000"/>
+              <a:buSzPct val="63333"/>
+              <a:buFont typeface="Noto Sans CJK JP"/>
               <a:buChar char="●"/>
               <a:defRPr sz="2100" lang="ja-JP">
                 <a:latin typeface="Noto Sans"/>
@@ -31366,7 +31387,8 @@
           </a:p>
           <a:p>
             <a:pPr algn="l" lvl="0" marL="457200" indent="-355600">
-              <a:buSzPts val="2000"/>
+              <a:buSzPct val="63333"/>
+              <a:buFont typeface="Noto Sans CJK JP"/>
               <a:buChar char="●"/>
               <a:defRPr sz="2100" lang="ja-JP">
                 <a:latin typeface="Noto Sans"/>
@@ -31393,7 +31415,8 @@
           </a:p>
           <a:p>
             <a:pPr algn="l" lvl="1" marL="914400" indent="-355600">
-              <a:buSzPts val="2000"/>
+              <a:buSzPct val="63333"/>
+              <a:buFont typeface="Noto Sans CJK JP"/>
               <a:buChar char="○"/>
               <a:defRPr sz="2100" lang="ja-JP">
                 <a:latin typeface="Noto Sans"/>
@@ -31985,7 +32008,8 @@
           <a:lstStyle/>
           <a:p>
             <a:pPr algn="l" lvl="0" marL="457200" indent="-355600">
-              <a:buSzPts val="2000"/>
+              <a:buSzPct val="55417"/>
+              <a:buFont typeface="Noto Sans CJK JP"/>
               <a:buChar char="●"/>
               <a:defRPr sz="2400" b="0" lang="ja-JP">
                 <a:latin typeface="Noto Sans"/>
@@ -32004,7 +32028,7 @@
               </a:rPr>
               <a:t>ImageNet-1kの学習用は約128万枚ある。そこで、画像サイズの実測には10クラス・13,394枚のImagenetteを使う [1, 2]。</a:t>
             </a:r>
-            <a:endParaRPr sz="2100" lang="ja-JP">
+            <a:endParaRPr sz="2400" lang="ja-JP">
               <a:latin typeface="Noto Sans"/>
               <a:ea typeface="Noto Sans CJK JP"/>
               <a:cs typeface="Noto Sans"/>
@@ -32012,7 +32036,8 @@
           </a:p>
           <a:p>
             <a:pPr lvl="0" marL="457200" indent="-355600">
-              <a:buSzPts val="2000"/>
+              <a:buSzPct val="55417"/>
+              <a:buFont typeface="Noto Sans CJK JP"/>
               <a:buChar char="●"/>
               <a:defRPr sz="2400" lang="ja-JP">
                 <a:latin typeface="Noto Sans"/>
@@ -32034,7 +32059,8 @@
           </a:p>
           <a:p>
             <a:pPr lvl="0" marL="457200" indent="-355600">
-              <a:buSzPts val="2000"/>
+              <a:buSzPct val="55417"/>
+              <a:buFont typeface="Noto Sans CJK JP"/>
               <a:buChar char="●"/>
               <a:defRPr sz="2400" lang="ja-JP">
                 <a:latin typeface="Noto Sans"/>
@@ -33698,7 +33724,7 @@
         <p:spPr>
           <a:xfrm>
             <a:off x="594360" y="4315968"/>
-            <a:ext cx="7955279" cy="336295"/>
+            <a:ext cx="7955279" cy="349885"/>
           </a:xfrm>
           <a:prstGeom prst="rect">
             <a:avLst/>
@@ -33729,7 +33755,7 @@
               </a:defRPr>
             </a:pPr>
             <a:r>
-              <a:rPr sz="1600" lang="ja-JP">
+              <a:rPr sz="1900" lang="ja-JP">
                 <a:solidFill>
                   <a:srgbClr val="303437"/>
                 </a:solidFill>
@@ -35399,7 +35425,7 @@
         <p:spPr>
           <a:xfrm>
             <a:off x="594360" y="4315968"/>
-            <a:ext cx="7955279" cy="336295"/>
+            <a:ext cx="7955279" cy="349885"/>
           </a:xfrm>
           <a:prstGeom prst="rect">
             <a:avLst/>
@@ -35430,7 +35456,7 @@
               </a:defRPr>
             </a:pPr>
             <a:r>
-              <a:rPr sz="1600" lang="ja-JP">
+              <a:rPr sz="1900" lang="ja-JP">
                 <a:solidFill>
                   <a:srgbClr val="303437"/>
                 </a:solidFill>
@@ -35679,7 +35705,7 @@
         </p:nvSpPr>
         <p:spPr>
           <a:xfrm>
-            <a:off x="594360" y="4169663"/>
+            <a:off x="594360" y="3991863"/>
             <a:ext cx="7955279" cy="484632"/>
           </a:xfrm>
           <a:prstGeom prst="rect">
@@ -35711,7 +35737,7 @@
               </a:defRPr>
             </a:pPr>
             <a:r>
-              <a:rPr sz="1700" lang="ja-JP">
+              <a:rPr sz="2000" lang="ja-JP">
                 <a:solidFill>
                   <a:srgbClr val="303437"/>
                 </a:solidFill>
@@ -37402,7 +37428,7 @@
               </a:defRPr>
             </a:pPr>
             <a:r>
-              <a:rPr sz="1600" lang="ja-JP">
+              <a:rPr sz="1900" lang="ja-JP">
                 <a:solidFill>
                   <a:srgbClr val="303437"/>
                 </a:solidFill>
@@ -39180,7 +39206,7 @@
               </a:defRPr>
             </a:pPr>
             <a:r>
-              <a:rPr sz="1600" lang="ja-JP">
+              <a:rPr sz="1900" lang="ja-JP">
                 <a:solidFill>
                   <a:srgbClr val="303437"/>
                 </a:solidFill>
@@ -40186,7 +40212,7 @@
               </a:defRPr>
             </a:pPr>
             <a:r>
-              <a:rPr sz="1600" lang="ja-JP">
+              <a:rPr sz="1900" lang="ja-JP">
                 <a:solidFill>
                   <a:srgbClr val="303437"/>
                 </a:solidFill>
@@ -41812,7 +41838,7 @@
               </a:defRPr>
             </a:pPr>
             <a:r>
-              <a:rPr sz="1600" lang="ja-JP">
+              <a:rPr sz="1900" lang="ja-JP">
                 <a:solidFill>
                   <a:srgbClr val="303437"/>
                 </a:solidFill>
@@ -42054,16 +42080,17 @@
           <a:lstStyle/>
           <a:p>
             <a:pPr algn="l" lvl="0" marL="457200" indent="-355600">
-              <a:buSzPts val="2000"/>
+              <a:buSzPct val="60455"/>
+              <a:buFont typeface="Noto Sans CJK JP"/>
               <a:buChar char="●"/>
-              <a:defRPr sz="2100" b="0" lang="ja-JP">
-                <a:latin typeface="Noto Sans"/>
-                <a:ea typeface="Noto Sans CJK JP"/>
-                <a:cs typeface="Noto Sans"/>
-              </a:defRPr>
-            </a:pPr>
-            <a:r>
-              <a:rPr sz="2100" lang="ja-JP">
+              <a:defRPr sz="2200" b="0" lang="ja-JP">
+                <a:latin typeface="Noto Sans"/>
+                <a:ea typeface="Noto Sans CJK JP"/>
+                <a:cs typeface="Noto Sans"/>
+              </a:defRPr>
+            </a:pPr>
+            <a:r>
+              <a:rPr sz="2200" lang="ja-JP">
                 <a:solidFill>
                   <a:srgbClr val="303437"/>
                 </a:solidFill>
@@ -42074,7 +42101,7 @@
               <a:t>2021年に、ImageNet全体のperson下位カテゴリ2,702種類を除去した </a:t>
             </a:r>
             <a:r>
-              <a:rPr sz="2100" lang="ja-JP">
+              <a:rPr sz="2200" lang="ja-JP">
                 <a:solidFill>
                   <a:srgbClr val="303437"/>
                 </a:solidFill>
@@ -42085,7 +42112,7 @@
               <a:t>[1]</a:t>
             </a:r>
             <a:r>
-              <a:rPr sz="2100" lang="ja-JP">
+              <a:rPr sz="2200" lang="ja-JP">
                 <a:solidFill>
                   <a:srgbClr val="303437"/>
                 </a:solidFill>
@@ -42095,7 +42122,7 @@
               </a:rPr>
               <a:t>。</a:t>
             </a:r>
-            <a:endParaRPr sz="2100" lang="ja-JP">
+            <a:endParaRPr sz="2200" lang="ja-JP">
               <a:latin typeface="Noto Sans"/>
               <a:ea typeface="Noto Sans CJK JP"/>
               <a:cs typeface="Noto Sans"/>
@@ -42103,16 +42130,17 @@
           </a:p>
           <a:p>
             <a:pPr algn="l" lvl="0" marL="457200" indent="-355600">
-              <a:buSzPts val="2000"/>
+              <a:buSzPct val="60455"/>
+              <a:buFont typeface="Noto Sans CJK JP"/>
               <a:buChar char="●"/>
-              <a:defRPr sz="2100" lang="ja-JP">
-                <a:latin typeface="Noto Sans"/>
-                <a:ea typeface="Noto Sans CJK JP"/>
-                <a:cs typeface="Noto Sans"/>
-              </a:defRPr>
-            </a:pPr>
-            <a:r>
-              <a:rPr sz="2100" lang="ja-JP">
+              <a:defRPr sz="2200" lang="ja-JP">
+                <a:latin typeface="Noto Sans"/>
+                <a:ea typeface="Noto Sans CJK JP"/>
+                <a:cs typeface="Noto Sans"/>
+              </a:defRPr>
+            </a:pPr>
+            <a:r>
+              <a:rPr sz="2200" lang="ja-JP">
                 <a:solidFill>
                   <a:srgbClr val="303437"/>
                 </a:solidFill>
@@ -42122,7 +42150,7 @@
               </a:rPr>
               <a:t>この更新は、ILSVRCの1,000カテゴリには影響しない。</a:t>
             </a:r>
-            <a:endParaRPr sz="2100" lang="ja-JP">
+            <a:endParaRPr sz="2200" lang="ja-JP">
               <a:latin typeface="Noto Sans"/>
               <a:ea typeface="Noto Sans CJK JP"/>
               <a:cs typeface="Noto Sans"/>
@@ -42130,16 +42158,17 @@
           </a:p>
           <a:p>
             <a:pPr algn="l" lvl="0" marL="457200" indent="-355600">
-              <a:buSzPts val="2000"/>
+              <a:buSzPct val="60455"/>
+              <a:buFont typeface="Noto Sans CJK JP"/>
               <a:buChar char="●"/>
-              <a:defRPr sz="2100" lang="ja-JP">
-                <a:latin typeface="Noto Sans"/>
-                <a:ea typeface="Noto Sans CJK JP"/>
-                <a:cs typeface="Noto Sans"/>
-              </a:defRPr>
-            </a:pPr>
-            <a:r>
-              <a:rPr sz="2100" lang="ja-JP">
+              <a:defRPr sz="2200" lang="ja-JP">
+                <a:latin typeface="Noto Sans"/>
+                <a:ea typeface="Noto Sans CJK JP"/>
+                <a:cs typeface="Noto Sans"/>
+              </a:defRPr>
+            </a:pPr>
+            <a:r>
+              <a:rPr sz="2200" lang="ja-JP">
                 <a:solidFill>
                   <a:srgbClr val="303437"/>
                 </a:solidFill>
@@ -42149,7 +42178,7 @@
               </a:rPr>
               <a:t>ただし物体の画像にも偶然写り込む人物がいる。</a:t>
             </a:r>
-            <a:endParaRPr sz="2100" lang="ja-JP">
+            <a:endParaRPr sz="2200" lang="ja-JP">
               <a:latin typeface="Noto Sans"/>
               <a:ea typeface="Noto Sans CJK JP"/>
               <a:cs typeface="Noto Sans"/>
@@ -42157,16 +42186,17 @@
           </a:p>
           <a:p>
             <a:pPr algn="l" lvl="0" marL="457200" indent="-355600">
-              <a:buSzPts val="2000"/>
+              <a:buSzPct val="60455"/>
+              <a:buFont typeface="Noto Sans CJK JP"/>
               <a:buChar char="●"/>
-              <a:defRPr sz="2100" lang="ja-JP">
-                <a:latin typeface="Noto Sans"/>
-                <a:ea typeface="Noto Sans CJK JP"/>
-                <a:cs typeface="Noto Sans"/>
-              </a:defRPr>
-            </a:pPr>
-            <a:r>
-              <a:rPr sz="2100" lang="ja-JP">
+              <a:defRPr sz="2200" lang="ja-JP">
+                <a:latin typeface="Noto Sans"/>
+                <a:ea typeface="Noto Sans CJK JP"/>
+                <a:cs typeface="Noto Sans"/>
+              </a:defRPr>
+            </a:pPr>
+            <a:r>
+              <a:rPr sz="2200" lang="ja-JP">
                 <a:solidFill>
                   <a:srgbClr val="303437"/>
                 </a:solidFill>
@@ -42176,7 +42206,7 @@
               </a:rPr>
               <a:t>そこで顔を注釈し、顔をぼかした、ILSVRC大会の1,000クラス分類用データを検討した。</a:t>
             </a:r>
-            <a:endParaRPr sz="2100" lang="ja-JP">
+            <a:endParaRPr sz="2200" lang="ja-JP">
               <a:latin typeface="Noto Sans"/>
               <a:ea typeface="Noto Sans CJK JP"/>
               <a:cs typeface="Noto Sans"/>
@@ -42184,16 +42214,17 @@
           </a:p>
           <a:p>
             <a:pPr algn="l" lvl="0" marL="457200" indent="-355600">
-              <a:buSzPts val="2000"/>
+              <a:buSzPct val="60455"/>
+              <a:buFont typeface="Noto Sans CJK JP"/>
               <a:buChar char="●"/>
-              <a:defRPr sz="2100" lang="ja-JP">
-                <a:latin typeface="Noto Sans"/>
-                <a:ea typeface="Noto Sans CJK JP"/>
-                <a:cs typeface="Noto Sans"/>
-              </a:defRPr>
-            </a:pPr>
-            <a:r>
-              <a:rPr sz="2100" lang="ja-JP">
+              <a:defRPr sz="2200" lang="ja-JP">
+                <a:latin typeface="Noto Sans"/>
+                <a:ea typeface="Noto Sans CJK JP"/>
+                <a:cs typeface="Noto Sans"/>
+              </a:defRPr>
+            </a:pPr>
+            <a:r>
+              <a:rPr sz="2200" lang="ja-JP">
                 <a:solidFill>
                   <a:srgbClr val="303437"/>
                 </a:solidFill>
@@ -42203,7 +42234,7 @@
               </a:rPr>
               <a:t>公式トップの1,420万枚という表示だけで、更新後の収録範囲を判断しない。</a:t>
             </a:r>
-            <a:endParaRPr sz="2100" lang="ja-JP">
+            <a:endParaRPr sz="2200" lang="ja-JP">
               <a:latin typeface="Noto Sans"/>
               <a:ea typeface="Noto Sans CJK JP"/>
               <a:cs typeface="Noto Sans"/>
@@ -42822,7 +42853,7 @@
               </a:defRPr>
             </a:pPr>
             <a:r>
-              <a:rPr sz="1700" lang="ja-JP">
+              <a:rPr sz="2000" lang="ja-JP">
                 <a:solidFill>
                   <a:srgbClr val="303437"/>
                 </a:solidFill>
@@ -43547,7 +43578,7 @@
               </a:defRPr>
             </a:pPr>
             <a:r>
-              <a:rPr sz="1600" lang="ja-JP">
+              <a:rPr sz="1900" lang="ja-JP">
                 <a:solidFill>
                   <a:srgbClr val="303437"/>
                 </a:solidFill>
@@ -44116,7 +44147,7 @@
               </a:defRPr>
             </a:pPr>
             <a:r>
-              <a:rPr sz="1700" lang="ja-JP">
+              <a:rPr sz="2000" lang="ja-JP">
                 <a:solidFill>
                   <a:srgbClr val="303437"/>
                 </a:solidFill>
@@ -44241,39 +44272,10 @@
           <a:bodyPr wrap="square" lIns="0" rIns="0" tIns="0" bIns="0" anchor="t"/>
           <a:lstStyle/>
           <a:p>
-            <a:pPr algn="l" marL="0" indent="0">
-              <a:lnSpc>
-                <a:spcPct val="110000"/>
-              </a:lnSpc>
-              <a:spcBef>
-                <a:spcPts val="0"/>
-              </a:spcBef>
-              <a:spcAft>
-                <a:spcPts val="600"/>
-              </a:spcAft>
-              <a:buNone/>
-              <a:defRPr sz="2800" b="1" lang="ja-JP">
-                <a:latin typeface="Noto Sans"/>
-                <a:ea typeface="Noto Sans CJK JP"/>
-                <a:cs typeface="Noto Sans"/>
-              </a:defRPr>
-            </a:pPr>
-            <a:r>
-              <a:rPr sz="2800" lang="ja-JP" b="1">
-                <a:solidFill>
-                  <a:srgbClr val="303437"/>
-                </a:solidFill>
-                <a:latin typeface="Noto Sans"/>
-                <a:ea typeface="Noto Sans CJK JP"/>
-                <a:cs typeface="Noto Sans"/>
-              </a:rPr>
-              <a:t>参考文献と参照した内容</a:t>
-            </a:r>
-            <a:endParaRPr sz="2800" lang="ja-JP">
-              <a:latin typeface="Noto Sans"/>
-              <a:ea typeface="Noto Sans CJK JP"/>
-              <a:cs typeface="Noto Sans"/>
-            </a:endParaRPr>
+            <a:r>
+              <a:rPr sz="2800"/>
+              <a:t>読後の学習・研究に向けて</a:t>
+            </a:r>
           </a:p>
         </p:txBody>
       </p:sp>
@@ -44297,39 +44299,10 @@
           <a:bodyPr wrap="square" lIns="0" rIns="0" tIns="0" bIns="0" anchor="ctr"/>
           <a:lstStyle/>
           <a:p>
-            <a:pPr algn="l" marL="0" indent="0">
-              <a:lnSpc>
-                <a:spcPct val="110000"/>
-              </a:lnSpc>
-              <a:spcBef>
-                <a:spcPts val="0"/>
-              </a:spcBef>
-              <a:spcAft>
-                <a:spcPts val="0"/>
-              </a:spcAft>
-              <a:buNone/>
-              <a:defRPr sz="1400" b="1" lang="ja-JP">
-                <a:latin typeface="Noto Sans"/>
-                <a:ea typeface="Noto Sans CJK JP"/>
-                <a:cs typeface="Noto Sans"/>
-              </a:defRPr>
-            </a:pPr>
-            <a:r>
-              <a:rPr sz="1400" lang="ja-JP" b="1">
-                <a:solidFill>
-                  <a:srgbClr val="FFFEF8"/>
-                </a:solidFill>
-                <a:latin typeface="Noto Sans"/>
-                <a:ea typeface="Noto Sans CJK JP"/>
-                <a:cs typeface="Noto Sans"/>
-              </a:rPr>
-              <a:t>Appendix: 7 入手コードと参考文献</a:t>
-            </a:r>
-            <a:endParaRPr sz="1400" lang="ja-JP">
-              <a:latin typeface="Noto Sans"/>
-              <a:ea typeface="Noto Sans CJK JP"/>
-              <a:cs typeface="Noto Sans"/>
-            </a:endParaRPr>
+            <a:r>
+              <a:rPr sz="1400"/>
+              <a:t>Appendix: 7 参考文献・基礎を学ぶ</a:t>
+            </a:r>
           </a:p>
         </p:txBody>
       </p:sp>
@@ -44341,8 +44314,8 @@
         </p:nvSpPr>
         <p:spPr>
           <a:xfrm>
-            <a:off x="594360" y="1280160"/>
-            <a:ext cx="7955279" cy="320040"/>
+            <a:off x="594360" y="1353312"/>
+            <a:ext cx="7955279" cy="365760"/>
           </a:xfrm>
           <a:prstGeom prst="rect">
             <a:avLst/>
@@ -44350,36 +44323,29 @@
           <a:noFill/>
         </p:spPr>
         <p:txBody>
-          <a:bodyPr wrap="square" lIns="0" rIns="0" tIns="0" bIns="0" anchor="t">
+          <a:bodyPr wrap="square" lIns="0" rIns="0" tIns="0" bIns="0">
             <a:spAutoFit/>
           </a:bodyPr>
           <a:lstStyle/>
           <a:p>
-            <a:pPr algn="l" marL="0" indent="0">
-              <a:lnSpc>
-                <a:spcPct val="110000"/>
-              </a:lnSpc>
-              <a:spcBef>
-                <a:spcPts val="0"/>
-              </a:spcBef>
-              <a:spcAft>
-                <a:spcPts val="600"/>
-              </a:spcAft>
-              <a:buNone/>
-              <a:defRPr sz="1900" lang="ja-JP">
-                <a:latin typeface="Noto Sans"/>
-                <a:ea typeface="Noto Sans CJK JP"/>
-                <a:cs typeface="Noto Sans"/>
-              </a:defRPr>
-            </a:pPr>
-            <a:r>
-              <a:rPr sz="1900" lang="ja-JP">
+            <a:pPr>
+              <a:lnSpc>
+                <a:spcPct val="108000"/>
+              </a:lnSpc>
+              <a:spcBef>
+                <a:spcPts val="0"/>
+              </a:spcBef>
+              <a:spcAft>
+                <a:spcPts val="0"/>
+              </a:spcAft>
+            </a:pPr>
+            <a:r>
+              <a:rPr sz="2100" b="1" lang="ja-JP">
                 <a:solidFill>
                   <a:srgbClr val="303437"/>
                 </a:solidFill>
                 <a:latin typeface="Noto Sans"/>
                 <a:ea typeface="Noto Sans CJK JP"/>
-                <a:cs typeface="Noto Sans"/>
               </a:rPr>
               <a:t>Deng et al. (2009). ImageNet. CVPR.</a:t>
             </a:r>
@@ -44394,8 +44360,8 @@
         </p:nvSpPr>
         <p:spPr>
           <a:xfrm>
-            <a:off x="594360" y="1600200"/>
-            <a:ext cx="7955279" cy="292608"/>
+            <a:off x="594360" y="1746504"/>
+            <a:ext cx="7955279" cy="438912"/>
           </a:xfrm>
           <a:prstGeom prst="rect">
             <a:avLst/>
@@ -44403,38 +44369,31 @@
           <a:noFill/>
         </p:spPr>
         <p:txBody>
-          <a:bodyPr wrap="square" lIns="0" rIns="0" tIns="0" bIns="0" anchor="t">
+          <a:bodyPr wrap="square" lIns="0" rIns="0" tIns="0" bIns="0">
             <a:spAutoFit/>
           </a:bodyPr>
           <a:lstStyle/>
           <a:p>
-            <a:pPr algn="l" marL="0" indent="0">
-              <a:lnSpc>
-                <a:spcPct val="110000"/>
-              </a:lnSpc>
-              <a:spcBef>
-                <a:spcPts val="0"/>
-              </a:spcBef>
-              <a:spcAft>
-                <a:spcPts val="600"/>
-              </a:spcAft>
-              <a:buNone/>
-              <a:defRPr sz="1700" lang="ja-JP">
-                <a:latin typeface="Noto Sans"/>
-                <a:ea typeface="Noto Sans CJK JP"/>
-                <a:cs typeface="Noto Sans"/>
-              </a:defRPr>
-            </a:pPr>
-            <a:r>
-              <a:rPr sz="1700" lang="ja-JP">
-                <a:solidFill>
-                  <a:srgbClr val="626669"/>
-                </a:solidFill>
-                <a:latin typeface="Noto Sans"/>
-                <a:ea typeface="Noto Sans CJK JP"/>
-                <a:cs typeface="Noto Sans"/>
-              </a:rPr>
-              <a:t>大規模画像データベースの目的、階層、収集方法を示す原著。</a:t>
+            <a:pPr>
+              <a:lnSpc>
+                <a:spcPct val="108000"/>
+              </a:lnSpc>
+              <a:spcBef>
+                <a:spcPts val="0"/>
+              </a:spcBef>
+              <a:spcAft>
+                <a:spcPts val="0"/>
+              </a:spcAft>
+            </a:pPr>
+            <a:r>
+              <a:rPr sz="2000" b="0" lang="ja-JP">
+                <a:solidFill>
+                  <a:srgbClr val="303437"/>
+                </a:solidFill>
+                <a:latin typeface="Noto Sans"/>
+                <a:ea typeface="Noto Sans CJK JP"/>
+              </a:rPr>
+              <a:t>まず、画像の収集・注釈とWordNetによる階層設計を学ぶ。</a:t>
             </a:r>
           </a:p>
         </p:txBody>
@@ -44447,8 +44406,8 @@
         </p:nvSpPr>
         <p:spPr>
           <a:xfrm>
-            <a:off x="594360" y="2011680"/>
-            <a:ext cx="7955279" cy="256032"/>
+            <a:off x="594360" y="2221991"/>
+            <a:ext cx="7955279" cy="228600"/>
           </a:xfrm>
           <a:prstGeom prst="rect">
             <a:avLst/>
@@ -44456,36 +44415,30 @@
           <a:noFill/>
         </p:spPr>
         <p:txBody>
-          <a:bodyPr wrap="square" lIns="0" rIns="0" tIns="0" bIns="0" anchor="t">
+          <a:bodyPr wrap="square" lIns="0" rIns="0" tIns="0" bIns="0">
             <a:spAutoFit/>
           </a:bodyPr>
           <a:lstStyle/>
           <a:p>
-            <a:pPr algn="l" marL="0" indent="0">
-              <a:lnSpc>
-                <a:spcPct val="110000"/>
-              </a:lnSpc>
-              <a:spcBef>
-                <a:spcPts val="0"/>
-              </a:spcBef>
-              <a:spcAft>
-                <a:spcPts val="0"/>
-              </a:spcAft>
-              <a:buNone/>
-              <a:defRPr sz="850" lang="ja-JP">
-                <a:latin typeface="Noto Sans"/>
-                <a:ea typeface="Noto Sans CJK JP"/>
-                <a:cs typeface="Noto Sans"/>
-              </a:defRPr>
-            </a:pPr>
-            <a:r>
-              <a:rPr sz="850" lang="ja-JP">
+            <a:pPr>
+              <a:lnSpc>
+                <a:spcPct val="108000"/>
+              </a:lnSpc>
+              <a:spcBef>
+                <a:spcPts val="0"/>
+              </a:spcBef>
+              <a:spcAft>
+                <a:spcPts val="0"/>
+              </a:spcAft>
+            </a:pPr>
+            <a:r>
+              <a:rPr sz="1050" b="0" lang="ja-JP">
                 <a:solidFill>
                   <a:srgbClr val="626669"/>
                 </a:solidFill>
                 <a:latin typeface="Noto Sans"/>
                 <a:ea typeface="Noto Sans CJK JP"/>
-                <a:cs typeface="Noto Sans"/>
+                <a:hlinkClick r:id="rId2"/>
               </a:rPr>
               <a:t>https://image-net.org/static_files/papers/imagenet_cvpr09.pdf</a:t>
             </a:r>
@@ -44500,8 +44453,8 @@
         </p:nvSpPr>
         <p:spPr>
           <a:xfrm>
-            <a:off x="594360" y="2194560"/>
-            <a:ext cx="7955279" cy="320040"/>
+            <a:off x="594360" y="2487168"/>
+            <a:ext cx="7955279" cy="365760"/>
           </a:xfrm>
           <a:prstGeom prst="rect">
             <a:avLst/>
@@ -44509,36 +44462,29 @@
           <a:noFill/>
         </p:spPr>
         <p:txBody>
-          <a:bodyPr wrap="square" lIns="0" rIns="0" tIns="0" bIns="0" anchor="t">
+          <a:bodyPr wrap="square" lIns="0" rIns="0" tIns="0" bIns="0">
             <a:spAutoFit/>
           </a:bodyPr>
           <a:lstStyle/>
           <a:p>
-            <a:pPr algn="l" marL="0" indent="0">
-              <a:lnSpc>
-                <a:spcPct val="110000"/>
-              </a:lnSpc>
-              <a:spcBef>
-                <a:spcPts val="0"/>
-              </a:spcBef>
-              <a:spcAft>
-                <a:spcPts val="600"/>
-              </a:spcAft>
-              <a:buNone/>
-              <a:defRPr sz="1900" lang="ja-JP">
-                <a:latin typeface="Noto Sans"/>
-                <a:ea typeface="Noto Sans CJK JP"/>
-                <a:cs typeface="Noto Sans"/>
-              </a:defRPr>
-            </a:pPr>
-            <a:r>
-              <a:rPr sz="1900" lang="ja-JP">
+            <a:pPr>
+              <a:lnSpc>
+                <a:spcPct val="108000"/>
+              </a:lnSpc>
+              <a:spcBef>
+                <a:spcPts val="0"/>
+              </a:spcBef>
+              <a:spcAft>
+                <a:spcPts val="0"/>
+              </a:spcAft>
+            </a:pPr>
+            <a:r>
+              <a:rPr sz="2100" b="1" lang="ja-JP">
                 <a:solidFill>
                   <a:srgbClr val="303437"/>
                 </a:solidFill>
                 <a:latin typeface="Noto Sans"/>
                 <a:ea typeface="Noto Sans CJK JP"/>
-                <a:cs typeface="Noto Sans"/>
               </a:rPr>
               <a:t>Russakovsky et al. (2015). ILSVRC. IJCV.</a:t>
             </a:r>
@@ -44553,8 +44499,8 @@
         </p:nvSpPr>
         <p:spPr>
           <a:xfrm>
-            <a:off x="594360" y="2514600"/>
-            <a:ext cx="7955279" cy="292608"/>
+            <a:off x="594360" y="2880360"/>
+            <a:ext cx="7955279" cy="438912"/>
           </a:xfrm>
           <a:prstGeom prst="rect">
             <a:avLst/>
@@ -44562,38 +44508,31 @@
           <a:noFill/>
         </p:spPr>
         <p:txBody>
-          <a:bodyPr wrap="square" lIns="0" rIns="0" tIns="0" bIns="0" anchor="t">
+          <a:bodyPr wrap="square" lIns="0" rIns="0" tIns="0" bIns="0">
             <a:spAutoFit/>
           </a:bodyPr>
           <a:lstStyle/>
           <a:p>
-            <a:pPr algn="l" marL="0" indent="0">
-              <a:lnSpc>
-                <a:spcPct val="110000"/>
-              </a:lnSpc>
-              <a:spcBef>
-                <a:spcPts val="0"/>
-              </a:spcBef>
-              <a:spcAft>
-                <a:spcPts val="600"/>
-              </a:spcAft>
-              <a:buNone/>
-              <a:defRPr sz="1700" lang="ja-JP">
-                <a:latin typeface="Noto Sans"/>
-                <a:ea typeface="Noto Sans CJK JP"/>
-                <a:cs typeface="Noto Sans"/>
-              </a:defRPr>
-            </a:pPr>
-            <a:r>
-              <a:rPr sz="1700" lang="ja-JP">
-                <a:solidFill>
-                  <a:srgbClr val="626669"/>
-                </a:solidFill>
-                <a:latin typeface="Noto Sans"/>
-                <a:ea typeface="Noto Sans CJK JP"/>
-                <a:cs typeface="Noto Sans"/>
-              </a:rPr>
-              <a:t>ImageNetを使う大会の課題、規模、評価法、初期の性能。</a:t>
+            <a:pPr>
+              <a:lnSpc>
+                <a:spcPct val="108000"/>
+              </a:lnSpc>
+              <a:spcBef>
+                <a:spcPts val="0"/>
+              </a:spcBef>
+              <a:spcAft>
+                <a:spcPts val="0"/>
+              </a:spcAft>
+            </a:pPr>
+            <a:r>
+              <a:rPr sz="2000" b="0" lang="ja-JP">
+                <a:solidFill>
+                  <a:srgbClr val="303437"/>
+                </a:solidFill>
+                <a:latin typeface="Noto Sans"/>
+                <a:ea typeface="Noto Sans CJK JP"/>
+              </a:rPr>
+              <a:t>分類・検出・位置推定の課題と、評価手順の違いを整理する。</a:t>
             </a:r>
           </a:p>
         </p:txBody>
@@ -44606,8 +44545,8 @@
         </p:nvSpPr>
         <p:spPr>
           <a:xfrm>
-            <a:off x="594360" y="2926080"/>
-            <a:ext cx="7955279" cy="256032"/>
+            <a:off x="594360" y="3355848"/>
+            <a:ext cx="7955279" cy="228600"/>
           </a:xfrm>
           <a:prstGeom prst="rect">
             <a:avLst/>
@@ -44615,36 +44554,30 @@
           <a:noFill/>
         </p:spPr>
         <p:txBody>
-          <a:bodyPr wrap="square" lIns="0" rIns="0" tIns="0" bIns="0" anchor="t">
+          <a:bodyPr wrap="square" lIns="0" rIns="0" tIns="0" bIns="0">
             <a:spAutoFit/>
           </a:bodyPr>
           <a:lstStyle/>
           <a:p>
-            <a:pPr algn="l" marL="0" indent="0">
-              <a:lnSpc>
-                <a:spcPct val="110000"/>
-              </a:lnSpc>
-              <a:spcBef>
-                <a:spcPts val="0"/>
-              </a:spcBef>
-              <a:spcAft>
-                <a:spcPts val="0"/>
-              </a:spcAft>
-              <a:buNone/>
-              <a:defRPr sz="850" lang="ja-JP">
-                <a:latin typeface="Noto Sans"/>
-                <a:ea typeface="Noto Sans CJK JP"/>
-                <a:cs typeface="Noto Sans"/>
-              </a:defRPr>
-            </a:pPr>
-            <a:r>
-              <a:rPr sz="850" lang="ja-JP">
+            <a:pPr>
+              <a:lnSpc>
+                <a:spcPct val="108000"/>
+              </a:lnSpc>
+              <a:spcBef>
+                <a:spcPts val="0"/>
+              </a:spcBef>
+              <a:spcAft>
+                <a:spcPts val="0"/>
+              </a:spcAft>
+            </a:pPr>
+            <a:r>
+              <a:rPr sz="1050" b="0" lang="ja-JP">
                 <a:solidFill>
                   <a:srgbClr val="626669"/>
                 </a:solidFill>
                 <a:latin typeface="Noto Sans"/>
                 <a:ea typeface="Noto Sans CJK JP"/>
-                <a:cs typeface="Noto Sans"/>
+                <a:hlinkClick r:id="rId3"/>
               </a:rPr>
               <a:t>https://arxiv.org/abs/1409.0575</a:t>
             </a:r>
@@ -44659,8 +44592,8 @@
         </p:nvSpPr>
         <p:spPr>
           <a:xfrm>
-            <a:off x="594360" y="3108960"/>
-            <a:ext cx="7955279" cy="320040"/>
+            <a:off x="594360" y="3621024"/>
+            <a:ext cx="7955279" cy="365760"/>
           </a:xfrm>
           <a:prstGeom prst="rect">
             <a:avLst/>
@@ -44668,38 +44601,31 @@
           <a:noFill/>
         </p:spPr>
         <p:txBody>
-          <a:bodyPr wrap="square" lIns="0" rIns="0" tIns="0" bIns="0" anchor="t">
+          <a:bodyPr wrap="square" lIns="0" rIns="0" tIns="0" bIns="0">
             <a:spAutoFit/>
           </a:bodyPr>
           <a:lstStyle/>
           <a:p>
-            <a:pPr algn="l" marL="0" indent="0">
-              <a:lnSpc>
-                <a:spcPct val="110000"/>
-              </a:lnSpc>
-              <a:spcBef>
-                <a:spcPts val="0"/>
-              </a:spcBef>
-              <a:spcAft>
-                <a:spcPts val="600"/>
-              </a:spcAft>
-              <a:buNone/>
-              <a:defRPr sz="1900" lang="ja-JP">
-                <a:latin typeface="Noto Sans"/>
-                <a:ea typeface="Noto Sans CJK JP"/>
-                <a:cs typeface="Noto Sans"/>
-              </a:defRPr>
-            </a:pPr>
-            <a:r>
-              <a:rPr sz="1900" lang="ja-JP">
+            <a:pPr>
+              <a:lnSpc>
+                <a:spcPct val="108000"/>
+              </a:lnSpc>
+              <a:spcBef>
+                <a:spcPts val="0"/>
+              </a:spcBef>
+              <a:spcAft>
+                <a:spcPts val="0"/>
+              </a:spcAft>
+            </a:pPr>
+            <a:r>
+              <a:rPr sz="2100" b="1" lang="ja-JP">
                 <a:solidFill>
                   <a:srgbClr val="303437"/>
                 </a:solidFill>
                 <a:latin typeface="Noto Sans"/>
                 <a:ea typeface="Noto Sans CJK JP"/>
-                <a:cs typeface="Noto Sans"/>
-              </a:rPr>
-              <a:t>ImageNet公式サイトとDownload</a:t>
+              </a:rPr>
+              <a:t>He et al. (2016). Deep Residual Learning. CVPR.</a:t>
             </a:r>
           </a:p>
         </p:txBody>
@@ -44712,8 +44638,8 @@
         </p:nvSpPr>
         <p:spPr>
           <a:xfrm>
-            <a:off x="594360" y="3429000"/>
-            <a:ext cx="7955279" cy="292608"/>
+            <a:off x="594360" y="4014215"/>
+            <a:ext cx="7955279" cy="438912"/>
           </a:xfrm>
           <a:prstGeom prst="rect">
             <a:avLst/>
@@ -44721,38 +44647,31 @@
           <a:noFill/>
         </p:spPr>
         <p:txBody>
-          <a:bodyPr wrap="square" lIns="0" rIns="0" tIns="0" bIns="0" anchor="t">
+          <a:bodyPr wrap="square" lIns="0" rIns="0" tIns="0" bIns="0">
             <a:spAutoFit/>
           </a:bodyPr>
           <a:lstStyle/>
           <a:p>
-            <a:pPr algn="l" marL="0" indent="0">
-              <a:lnSpc>
-                <a:spcPct val="110000"/>
-              </a:lnSpc>
-              <a:spcBef>
-                <a:spcPts val="0"/>
-              </a:spcBef>
-              <a:spcAft>
-                <a:spcPts val="600"/>
-              </a:spcAft>
-              <a:buNone/>
-              <a:defRPr sz="1700" lang="ja-JP">
-                <a:latin typeface="Noto Sans"/>
-                <a:ea typeface="Noto Sans CJK JP"/>
-                <a:cs typeface="Noto Sans"/>
-              </a:defRPr>
-            </a:pPr>
-            <a:r>
-              <a:rPr sz="1700" lang="ja-JP">
-                <a:solidFill>
-                  <a:srgbClr val="626669"/>
-                </a:solidFill>
-                <a:latin typeface="Noto Sans"/>
-                <a:ea typeface="Noto Sans CJK JP"/>
-                <a:cs typeface="Noto Sans"/>
-              </a:rPr>
-              <a:t>データの種類、入手先、利用条件の案内。</a:t>
+            <a:pPr>
+              <a:lnSpc>
+                <a:spcPct val="108000"/>
+              </a:lnSpc>
+              <a:spcBef>
+                <a:spcPts val="0"/>
+              </a:spcBef>
+              <a:spcAft>
+                <a:spcPts val="0"/>
+              </a:spcAft>
+            </a:pPr>
+            <a:r>
+              <a:rPr sz="2000" b="0" lang="ja-JP">
+                <a:solidFill>
+                  <a:srgbClr val="303437"/>
+                </a:solidFill>
+                <a:latin typeface="Noto Sans"/>
+                <a:ea typeface="Noto Sans CJK JP"/>
+              </a:rPr>
+              <a:t>残差接続が深い画像認識モデルの学習をどう支えるかを読む。</a:t>
             </a:r>
           </a:p>
         </p:txBody>
@@ -44765,8 +44684,8 @@
         </p:nvSpPr>
         <p:spPr>
           <a:xfrm>
-            <a:off x="594360" y="3840480"/>
-            <a:ext cx="7955279" cy="256032"/>
+            <a:off x="594360" y="4489704"/>
+            <a:ext cx="7955279" cy="228600"/>
           </a:xfrm>
           <a:prstGeom prst="rect">
             <a:avLst/>
@@ -44774,197 +44693,32 @@
           <a:noFill/>
         </p:spPr>
         <p:txBody>
-          <a:bodyPr wrap="square" lIns="0" rIns="0" tIns="0" bIns="0" anchor="t">
+          <a:bodyPr wrap="square" lIns="0" rIns="0" tIns="0" bIns="0">
             <a:spAutoFit/>
           </a:bodyPr>
           <a:lstStyle/>
           <a:p>
-            <a:pPr algn="l" marL="0" indent="0">
-              <a:lnSpc>
-                <a:spcPct val="110000"/>
-              </a:lnSpc>
-              <a:spcBef>
-                <a:spcPts val="0"/>
-              </a:spcBef>
-              <a:spcAft>
-                <a:spcPts val="0"/>
-              </a:spcAft>
-              <a:buNone/>
-              <a:defRPr sz="850" lang="ja-JP">
-                <a:latin typeface="Noto Sans"/>
-                <a:ea typeface="Noto Sans CJK JP"/>
-                <a:cs typeface="Noto Sans"/>
-              </a:defRPr>
-            </a:pPr>
-            <a:r>
-              <a:rPr sz="850" lang="ja-JP">
+            <a:pPr>
+              <a:lnSpc>
+                <a:spcPct val="108000"/>
+              </a:lnSpc>
+              <a:spcBef>
+                <a:spcPts val="0"/>
+              </a:spcBef>
+              <a:spcAft>
+                <a:spcPts val="0"/>
+              </a:spcAft>
+            </a:pPr>
+            <a:r>
+              <a:rPr sz="1050" b="0" lang="ja-JP">
                 <a:solidFill>
                   <a:srgbClr val="626669"/>
                 </a:solidFill>
                 <a:latin typeface="Noto Sans"/>
                 <a:ea typeface="Noto Sans CJK JP"/>
-                <a:cs typeface="Noto Sans"/>
-              </a:rPr>
-              <a:t>https://www.image-net.org/download.php</a:t>
-            </a:r>
-          </a:p>
-        </p:txBody>
-      </p:sp>
-      <p:sp>
-        <p:nvSpPr>
-          <p:cNvPr id="13" name="TextBox 12"/>
-          <p:cNvSpPr txBox="1"/>
-          <p:nvPr/>
-        </p:nvSpPr>
-        <p:spPr>
-          <a:xfrm>
-            <a:off x="594360" y="4023360"/>
-            <a:ext cx="7955279" cy="320040"/>
-          </a:xfrm>
-          <a:prstGeom prst="rect">
-            <a:avLst/>
-          </a:prstGeom>
-          <a:noFill/>
-        </p:spPr>
-        <p:txBody>
-          <a:bodyPr wrap="square" lIns="0" rIns="0" tIns="0" bIns="0" anchor="t">
-            <a:spAutoFit/>
-          </a:bodyPr>
-          <a:lstStyle/>
-          <a:p>
-            <a:pPr algn="l" marL="0" indent="0">
-              <a:lnSpc>
-                <a:spcPct val="110000"/>
-              </a:lnSpc>
-              <a:spcBef>
-                <a:spcPts val="0"/>
-              </a:spcBef>
-              <a:spcAft>
-                <a:spcPts val="600"/>
-              </a:spcAft>
-              <a:buNone/>
-              <a:defRPr sz="1900" lang="ja-JP">
-                <a:latin typeface="Noto Sans"/>
-                <a:ea typeface="Noto Sans CJK JP"/>
-                <a:cs typeface="Noto Sans"/>
-              </a:defRPr>
-            </a:pPr>
-            <a:r>
-              <a:rPr sz="1900" lang="ja-JP">
-                <a:solidFill>
-                  <a:srgbClr val="303437"/>
-                </a:solidFill>
-                <a:latin typeface="Noto Sans"/>
-                <a:ea typeface="Noto Sans CJK JP"/>
-                <a:cs typeface="Noto Sans"/>
-              </a:rPr>
-              <a:t>ImageNetの2021年の更新</a:t>
-            </a:r>
-          </a:p>
-        </p:txBody>
-      </p:sp>
-      <p:sp>
-        <p:nvSpPr>
-          <p:cNvPr id="14" name="TextBox 13"/>
-          <p:cNvSpPr txBox="1"/>
-          <p:nvPr/>
-        </p:nvSpPr>
-        <p:spPr>
-          <a:xfrm>
-            <a:off x="594360" y="4343400"/>
-            <a:ext cx="7955279" cy="292608"/>
-          </a:xfrm>
-          <a:prstGeom prst="rect">
-            <a:avLst/>
-          </a:prstGeom>
-          <a:noFill/>
-        </p:spPr>
-        <p:txBody>
-          <a:bodyPr wrap="square" lIns="0" rIns="0" tIns="0" bIns="0" anchor="t">
-            <a:spAutoFit/>
-          </a:bodyPr>
-          <a:lstStyle/>
-          <a:p>
-            <a:pPr algn="l" marL="0" indent="0">
-              <a:lnSpc>
-                <a:spcPct val="110000"/>
-              </a:lnSpc>
-              <a:spcBef>
-                <a:spcPts val="0"/>
-              </a:spcBef>
-              <a:spcAft>
-                <a:spcPts val="600"/>
-              </a:spcAft>
-              <a:buNone/>
-              <a:defRPr sz="1700" lang="ja-JP">
-                <a:latin typeface="Noto Sans"/>
-                <a:ea typeface="Noto Sans CJK JP"/>
-                <a:cs typeface="Noto Sans"/>
-              </a:defRPr>
-            </a:pPr>
-            <a:r>
-              <a:rPr sz="1700" lang="ja-JP">
-                <a:solidFill>
-                  <a:srgbClr val="626669"/>
-                </a:solidFill>
-                <a:latin typeface="Noto Sans"/>
-                <a:ea typeface="Noto Sans CJK JP"/>
-                <a:cs typeface="Noto Sans"/>
-              </a:rPr>
-              <a:t>person配下のカテゴリに関するプライバシー対応の根拠。</a:t>
-            </a:r>
-          </a:p>
-        </p:txBody>
-      </p:sp>
-      <p:sp>
-        <p:nvSpPr>
-          <p:cNvPr id="15" name="TextBox 14"/>
-          <p:cNvSpPr txBox="1"/>
-          <p:nvPr/>
-        </p:nvSpPr>
-        <p:spPr>
-          <a:xfrm>
-            <a:off x="594360" y="4754880"/>
-            <a:ext cx="7955279" cy="256032"/>
-          </a:xfrm>
-          <a:prstGeom prst="rect">
-            <a:avLst/>
-          </a:prstGeom>
-          <a:noFill/>
-        </p:spPr>
-        <p:txBody>
-          <a:bodyPr wrap="square" lIns="0" rIns="0" tIns="0" bIns="0" anchor="t">
-            <a:spAutoFit/>
-          </a:bodyPr>
-          <a:lstStyle/>
-          <a:p>
-            <a:pPr algn="l" marL="0" indent="0">
-              <a:lnSpc>
-                <a:spcPct val="110000"/>
-              </a:lnSpc>
-              <a:spcBef>
-                <a:spcPts val="0"/>
-              </a:spcBef>
-              <a:spcAft>
-                <a:spcPts val="0"/>
-              </a:spcAft>
-              <a:buNone/>
-              <a:defRPr sz="850" lang="ja-JP">
-                <a:latin typeface="Noto Sans"/>
-                <a:ea typeface="Noto Sans CJK JP"/>
-                <a:cs typeface="Noto Sans"/>
-              </a:defRPr>
-            </a:pPr>
-            <a:r>
-              <a:rPr sz="850" lang="ja-JP">
-                <a:solidFill>
-                  <a:srgbClr val="626669"/>
-                </a:solidFill>
-                <a:latin typeface="Noto Sans"/>
-                <a:ea typeface="Noto Sans CJK JP"/>
-                <a:cs typeface="Noto Sans"/>
-              </a:rPr>
-              <a:t>https://www.image-net.org/update-mar-11-2021.php</a:t>
+                <a:hlinkClick r:id="rId4"/>
+              </a:rPr>
+              <a:t>https://arxiv.org/abs/1512.03385</a:t>
             </a:r>
           </a:p>
         </p:txBody>
@@ -45007,39 +44761,10 @@
           <a:bodyPr wrap="square" lIns="0" rIns="0" tIns="0" bIns="0" anchor="t"/>
           <a:lstStyle/>
           <a:p>
-            <a:pPr algn="l" marL="0" indent="0">
-              <a:lnSpc>
-                <a:spcPct val="110000"/>
-              </a:lnSpc>
-              <a:spcBef>
-                <a:spcPts val="0"/>
-              </a:spcBef>
-              <a:spcAft>
-                <a:spcPts val="600"/>
-              </a:spcAft>
-              <a:buNone/>
-              <a:defRPr sz="2800" b="1" lang="ja-JP">
-                <a:latin typeface="Noto Sans"/>
-                <a:ea typeface="Noto Sans CJK JP"/>
-                <a:cs typeface="Noto Sans"/>
-              </a:defRPr>
-            </a:pPr>
-            <a:r>
-              <a:rPr sz="2800" lang="ja-JP" b="1">
-                <a:solidFill>
-                  <a:srgbClr val="303437"/>
-                </a:solidFill>
-                <a:latin typeface="Noto Sans"/>
-                <a:ea typeface="Noto Sans CJK JP"/>
-                <a:cs typeface="Noto Sans"/>
-              </a:rPr>
-              <a:t>参考文献と参照した内容</a:t>
-            </a:r>
-            <a:endParaRPr sz="2800" lang="ja-JP">
-              <a:latin typeface="Noto Sans"/>
-              <a:ea typeface="Noto Sans CJK JP"/>
-              <a:cs typeface="Noto Sans"/>
-            </a:endParaRPr>
+            <a:r>
+              <a:rPr sz="2800"/>
+              <a:t>読後の学習・研究に向けて</a:t>
+            </a:r>
           </a:p>
         </p:txBody>
       </p:sp>
@@ -45063,39 +44788,10 @@
           <a:bodyPr wrap="square" lIns="0" rIns="0" tIns="0" bIns="0" anchor="ctr"/>
           <a:lstStyle/>
           <a:p>
-            <a:pPr algn="l" marL="0" indent="0">
-              <a:lnSpc>
-                <a:spcPct val="110000"/>
-              </a:lnSpc>
-              <a:spcBef>
-                <a:spcPts val="0"/>
-              </a:spcBef>
-              <a:spcAft>
-                <a:spcPts val="0"/>
-              </a:spcAft>
-              <a:buNone/>
-              <a:defRPr sz="1400" b="1" lang="ja-JP">
-                <a:latin typeface="Noto Sans"/>
-                <a:ea typeface="Noto Sans CJK JP"/>
-                <a:cs typeface="Noto Sans"/>
-              </a:defRPr>
-            </a:pPr>
-            <a:r>
-              <a:rPr sz="1400" lang="ja-JP" b="1">
-                <a:solidFill>
-                  <a:srgbClr val="FFFEF8"/>
-                </a:solidFill>
-                <a:latin typeface="Noto Sans"/>
-                <a:ea typeface="Noto Sans CJK JP"/>
-                <a:cs typeface="Noto Sans"/>
-              </a:rPr>
-              <a:t>Appendix: 7 入手コードと参考文献</a:t>
-            </a:r>
-            <a:endParaRPr sz="1400" lang="ja-JP">
-              <a:latin typeface="Noto Sans"/>
-              <a:ea typeface="Noto Sans CJK JP"/>
-              <a:cs typeface="Noto Sans"/>
-            </a:endParaRPr>
+            <a:r>
+              <a:rPr sz="1400"/>
+              <a:t>Appendix: 7 参考文献・実装を試す</a:t>
+            </a:r>
           </a:p>
         </p:txBody>
       </p:sp>
@@ -45107,8 +44803,8 @@
         </p:nvSpPr>
         <p:spPr>
           <a:xfrm>
-            <a:off x="594360" y="1280160"/>
-            <a:ext cx="7955279" cy="320040"/>
+            <a:off x="594360" y="1353312"/>
+            <a:ext cx="7955279" cy="365760"/>
           </a:xfrm>
           <a:prstGeom prst="rect">
             <a:avLst/>
@@ -45116,38 +44812,31 @@
           <a:noFill/>
         </p:spPr>
         <p:txBody>
-          <a:bodyPr wrap="square" lIns="0" rIns="0" tIns="0" bIns="0" anchor="t">
+          <a:bodyPr wrap="square" lIns="0" rIns="0" tIns="0" bIns="0">
             <a:spAutoFit/>
           </a:bodyPr>
           <a:lstStyle/>
           <a:p>
-            <a:pPr algn="l" marL="0" indent="0">
-              <a:lnSpc>
-                <a:spcPct val="110000"/>
-              </a:lnSpc>
-              <a:spcBef>
-                <a:spcPts val="0"/>
-              </a:spcBef>
-              <a:spcAft>
-                <a:spcPts val="600"/>
-              </a:spcAft>
-              <a:buNone/>
-              <a:defRPr sz="1900" lang="ja-JP">
-                <a:latin typeface="Noto Sans"/>
-                <a:ea typeface="Noto Sans CJK JP"/>
-                <a:cs typeface="Noto Sans"/>
-              </a:defRPr>
-            </a:pPr>
-            <a:r>
-              <a:rPr sz="1900" lang="ja-JP">
+            <a:pPr>
+              <a:lnSpc>
+                <a:spcPct val="108000"/>
+              </a:lnSpc>
+              <a:spcBef>
+                <a:spcPts val="0"/>
+              </a:spcBef>
+              <a:spcAft>
+                <a:spcPts val="0"/>
+              </a:spcAft>
+            </a:pPr>
+            <a:r>
+              <a:rPr sz="2100" b="1" lang="ja-JP">
                 <a:solidFill>
                   <a:srgbClr val="303437"/>
                 </a:solidFill>
                 <a:latin typeface="Noto Sans"/>
                 <a:ea typeface="Noto Sans CJK JP"/>
-                <a:cs typeface="Noto Sans"/>
-              </a:rPr>
-              <a:t>Imagenetteの公開リポジトリ</a:t>
+              </a:rPr>
+              <a:t>PyTorch公式・転移学習チュートリアル</a:t>
             </a:r>
           </a:p>
         </p:txBody>
@@ -45160,8 +44849,8 @@
         </p:nvSpPr>
         <p:spPr>
           <a:xfrm>
-            <a:off x="594360" y="1600200"/>
-            <a:ext cx="7955279" cy="292608"/>
+            <a:off x="594360" y="1746504"/>
+            <a:ext cx="7955279" cy="438912"/>
           </a:xfrm>
           <a:prstGeom prst="rect">
             <a:avLst/>
@@ -45169,38 +44858,31 @@
           <a:noFill/>
         </p:spPr>
         <p:txBody>
-          <a:bodyPr wrap="square" lIns="0" rIns="0" tIns="0" bIns="0" anchor="t">
+          <a:bodyPr wrap="square" lIns="0" rIns="0" tIns="0" bIns="0">
             <a:spAutoFit/>
           </a:bodyPr>
           <a:lstStyle/>
           <a:p>
-            <a:pPr algn="l" marL="0" indent="0">
-              <a:lnSpc>
-                <a:spcPct val="110000"/>
-              </a:lnSpc>
-              <a:spcBef>
-                <a:spcPts val="0"/>
-              </a:spcBef>
-              <a:spcAft>
-                <a:spcPts val="600"/>
-              </a:spcAft>
-              <a:buNone/>
-              <a:defRPr sz="1700" lang="ja-JP">
-                <a:latin typeface="Noto Sans"/>
-                <a:ea typeface="Noto Sans CJK JP"/>
-                <a:cs typeface="Noto Sans"/>
-              </a:defRPr>
-            </a:pPr>
-            <a:r>
-              <a:rPr sz="1700" lang="ja-JP">
-                <a:solidFill>
-                  <a:srgbClr val="626669"/>
-                </a:solidFill>
-                <a:latin typeface="Noto Sans"/>
-                <a:ea typeface="Noto Sans CJK JP"/>
-                <a:cs typeface="Noto Sans"/>
-              </a:rPr>
-              <a:t>10クラスの画像例と、画像サイズの実測に使った配布元。</a:t>
+            <a:pPr>
+              <a:lnSpc>
+                <a:spcPct val="108000"/>
+              </a:lnSpc>
+              <a:spcBef>
+                <a:spcPts val="0"/>
+              </a:spcBef>
+              <a:spcAft>
+                <a:spcPts val="0"/>
+              </a:spcAft>
+            </a:pPr>
+            <a:r>
+              <a:rPr sz="2000" b="0" lang="ja-JP">
+                <a:solidFill>
+                  <a:srgbClr val="303437"/>
+                </a:solidFill>
+                <a:latin typeface="Noto Sans"/>
+                <a:ea typeface="Noto Sans CJK JP"/>
+              </a:rPr>
+              <a:t>事前学習済みモデルを使い、微調整と特徴抽出を実装する。</a:t>
             </a:r>
           </a:p>
         </p:txBody>
@@ -45213,8 +44895,8 @@
         </p:nvSpPr>
         <p:spPr>
           <a:xfrm>
-            <a:off x="594360" y="2011680"/>
-            <a:ext cx="7955279" cy="256032"/>
+            <a:off x="594360" y="2221991"/>
+            <a:ext cx="7955279" cy="228600"/>
           </a:xfrm>
           <a:prstGeom prst="rect">
             <a:avLst/>
@@ -45222,38 +44904,32 @@
           <a:noFill/>
         </p:spPr>
         <p:txBody>
-          <a:bodyPr wrap="square" lIns="0" rIns="0" tIns="0" bIns="0" anchor="t">
+          <a:bodyPr wrap="square" lIns="0" rIns="0" tIns="0" bIns="0">
             <a:spAutoFit/>
           </a:bodyPr>
           <a:lstStyle/>
           <a:p>
-            <a:pPr algn="l" marL="0" indent="0">
-              <a:lnSpc>
-                <a:spcPct val="110000"/>
-              </a:lnSpc>
-              <a:spcBef>
-                <a:spcPts val="0"/>
-              </a:spcBef>
-              <a:spcAft>
-                <a:spcPts val="0"/>
-              </a:spcAft>
-              <a:buNone/>
-              <a:defRPr sz="850" lang="ja-JP">
-                <a:latin typeface="Noto Sans"/>
-                <a:ea typeface="Noto Sans CJK JP"/>
-                <a:cs typeface="Noto Sans"/>
-              </a:defRPr>
-            </a:pPr>
-            <a:r>
-              <a:rPr sz="850" lang="ja-JP">
+            <a:pPr>
+              <a:lnSpc>
+                <a:spcPct val="108000"/>
+              </a:lnSpc>
+              <a:spcBef>
+                <a:spcPts val="0"/>
+              </a:spcBef>
+              <a:spcAft>
+                <a:spcPts val="0"/>
+              </a:spcAft>
+            </a:pPr>
+            <a:r>
+              <a:rPr sz="1050" b="0" lang="ja-JP">
                 <a:solidFill>
                   <a:srgbClr val="626669"/>
                 </a:solidFill>
                 <a:latin typeface="Noto Sans"/>
                 <a:ea typeface="Noto Sans CJK JP"/>
-                <a:cs typeface="Noto Sans"/>
-              </a:rPr>
-              <a:t>https://github.com/fastai/imagenette</a:t>
+                <a:hlinkClick r:id="rId2"/>
+              </a:rPr>
+              <a:t>https://github.com/pytorch/tutorials/blob/main/beginner_source/transfer_learning_tutorial.py</a:t>
             </a:r>
           </a:p>
         </p:txBody>
@@ -45266,8 +44942,8 @@
         </p:nvSpPr>
         <p:spPr>
           <a:xfrm>
-            <a:off x="594360" y="2194560"/>
-            <a:ext cx="7955279" cy="320040"/>
+            <a:off x="594360" y="2487168"/>
+            <a:ext cx="7955279" cy="365760"/>
           </a:xfrm>
           <a:prstGeom prst="rect">
             <a:avLst/>
@@ -45275,38 +44951,31 @@
           <a:noFill/>
         </p:spPr>
         <p:txBody>
-          <a:bodyPr wrap="square" lIns="0" rIns="0" tIns="0" bIns="0" anchor="t">
+          <a:bodyPr wrap="square" lIns="0" rIns="0" tIns="0" bIns="0">
             <a:spAutoFit/>
           </a:bodyPr>
           <a:lstStyle/>
           <a:p>
-            <a:pPr algn="l" marL="0" indent="0">
-              <a:lnSpc>
-                <a:spcPct val="110000"/>
-              </a:lnSpc>
-              <a:spcBef>
-                <a:spcPts val="0"/>
-              </a:spcBef>
-              <a:spcAft>
-                <a:spcPts val="600"/>
-              </a:spcAft>
-              <a:buNone/>
-              <a:defRPr sz="1900" lang="ja-JP">
-                <a:latin typeface="Noto Sans"/>
-                <a:ea typeface="Noto Sans CJK JP"/>
-                <a:cs typeface="Noto Sans"/>
-              </a:defRPr>
-            </a:pPr>
-            <a:r>
-              <a:rPr sz="1900" lang="ja-JP">
+            <a:pPr>
+              <a:lnSpc>
+                <a:spcPct val="108000"/>
+              </a:lnSpc>
+              <a:spcBef>
+                <a:spcPts val="0"/>
+              </a:spcBef>
+              <a:spcAft>
+                <a:spcPts val="0"/>
+              </a:spcAft>
+            </a:pPr>
+            <a:r>
+              <a:rPr sz="2100" b="1" lang="ja-JP">
                 <a:solidFill>
                   <a:srgbClr val="303437"/>
                 </a:solidFill>
                 <a:latin typeface="Noto Sans"/>
                 <a:ea typeface="Noto Sans CJK JP"/>
-                <a:cs typeface="Noto Sans"/>
-              </a:rPr>
-              <a:t>ILSVRC 2012公式devkit</a:t>
+              </a:rPr>
+              <a:t>Torchvision公式・モデルと学習済み重み</a:t>
             </a:r>
           </a:p>
         </p:txBody>
@@ -45319,8 +44988,8 @@
         </p:nvSpPr>
         <p:spPr>
           <a:xfrm>
-            <a:off x="594360" y="2514600"/>
-            <a:ext cx="7955279" cy="292608"/>
+            <a:off x="594360" y="2880360"/>
+            <a:ext cx="7955279" cy="438912"/>
           </a:xfrm>
           <a:prstGeom prst="rect">
             <a:avLst/>
@@ -45328,38 +44997,31 @@
           <a:noFill/>
         </p:spPr>
         <p:txBody>
-          <a:bodyPr wrap="square" lIns="0" rIns="0" tIns="0" bIns="0" anchor="t">
+          <a:bodyPr wrap="square" lIns="0" rIns="0" tIns="0" bIns="0">
             <a:spAutoFit/>
           </a:bodyPr>
           <a:lstStyle/>
           <a:p>
-            <a:pPr algn="l" marL="0" indent="0">
-              <a:lnSpc>
-                <a:spcPct val="110000"/>
-              </a:lnSpc>
-              <a:spcBef>
-                <a:spcPts val="0"/>
-              </a:spcBef>
-              <a:spcAft>
-                <a:spcPts val="600"/>
-              </a:spcAft>
-              <a:buNone/>
-              <a:defRPr sz="1700" lang="ja-JP">
-                <a:latin typeface="Noto Sans"/>
-                <a:ea typeface="Noto Sans CJK JP"/>
-                <a:cs typeface="Noto Sans"/>
-              </a:defRPr>
-            </a:pPr>
-            <a:r>
-              <a:rPr sz="1700" lang="ja-JP">
-                <a:solidFill>
-                  <a:srgbClr val="626669"/>
-                </a:solidFill>
-                <a:latin typeface="Noto Sans"/>
-                <a:ea typeface="Noto Sans CJK JP"/>
-                <a:cs typeface="Noto Sans"/>
-              </a:rPr>
-              <a:t>1,000クラスの定義と学習画像数の全件集計に使用。</a:t>
+            <a:pPr>
+              <a:lnSpc>
+                <a:spcPct val="108000"/>
+              </a:lnSpc>
+              <a:spcBef>
+                <a:spcPts val="0"/>
+              </a:spcBef>
+              <a:spcAft>
+                <a:spcPts val="0"/>
+              </a:spcAft>
+            </a:pPr>
+            <a:r>
+              <a:rPr sz="2000" b="0" lang="ja-JP">
+                <a:solidFill>
+                  <a:srgbClr val="303437"/>
+                </a:solidFill>
+                <a:latin typeface="Noto Sans"/>
+                <a:ea typeface="Noto Sans CJK JP"/>
+              </a:rPr>
+              <a:t>重みごとの前処理・クラス定義を確認し、推論を再現する。</a:t>
             </a:r>
           </a:p>
         </p:txBody>
@@ -45372,8 +45034,8 @@
         </p:nvSpPr>
         <p:spPr>
           <a:xfrm>
-            <a:off x="594360" y="2926080"/>
-            <a:ext cx="7955279" cy="256032"/>
+            <a:off x="594360" y="3355848"/>
+            <a:ext cx="7955279" cy="228600"/>
           </a:xfrm>
           <a:prstGeom prst="rect">
             <a:avLst/>
@@ -45381,38 +45043,32 @@
           <a:noFill/>
         </p:spPr>
         <p:txBody>
-          <a:bodyPr wrap="square" lIns="0" rIns="0" tIns="0" bIns="0" anchor="t">
+          <a:bodyPr wrap="square" lIns="0" rIns="0" tIns="0" bIns="0">
             <a:spAutoFit/>
           </a:bodyPr>
           <a:lstStyle/>
           <a:p>
-            <a:pPr algn="l" marL="0" indent="0">
-              <a:lnSpc>
-                <a:spcPct val="110000"/>
-              </a:lnSpc>
-              <a:spcBef>
-                <a:spcPts val="0"/>
-              </a:spcBef>
-              <a:spcAft>
-                <a:spcPts val="0"/>
-              </a:spcAft>
-              <a:buNone/>
-              <a:defRPr sz="850" lang="ja-JP">
-                <a:latin typeface="Noto Sans"/>
-                <a:ea typeface="Noto Sans CJK JP"/>
-                <a:cs typeface="Noto Sans"/>
-              </a:defRPr>
-            </a:pPr>
-            <a:r>
-              <a:rPr sz="850" lang="ja-JP">
+            <a:pPr>
+              <a:lnSpc>
+                <a:spcPct val="108000"/>
+              </a:lnSpc>
+              <a:spcBef>
+                <a:spcPts val="0"/>
+              </a:spcBef>
+              <a:spcAft>
+                <a:spcPts val="0"/>
+              </a:spcAft>
+            </a:pPr>
+            <a:r>
+              <a:rPr sz="1050" b="0" lang="ja-JP">
                 <a:solidFill>
                   <a:srgbClr val="626669"/>
                 </a:solidFill>
                 <a:latin typeface="Noto Sans"/>
                 <a:ea typeface="Noto Sans CJK JP"/>
-                <a:cs typeface="Noto Sans"/>
-              </a:rPr>
-              <a:t>https://image-net.org/data/ILSVRC/2012/ILSVRC2012_devkit_t12.tar.gz</a:t>
+                <a:hlinkClick r:id="rId3"/>
+              </a:rPr>
+              <a:t>https://github.com/pytorch/vision/tree/main/docs/source/models</a:t>
             </a:r>
           </a:p>
         </p:txBody>
@@ -45425,8 +45081,8 @@
         </p:nvSpPr>
         <p:spPr>
           <a:xfrm>
-            <a:off x="594360" y="3108960"/>
-            <a:ext cx="7955279" cy="320040"/>
+            <a:off x="594360" y="3621024"/>
+            <a:ext cx="7955279" cy="365760"/>
           </a:xfrm>
           <a:prstGeom prst="rect">
             <a:avLst/>
@@ -45434,38 +45090,31 @@
           <a:noFill/>
         </p:spPr>
         <p:txBody>
-          <a:bodyPr wrap="square" lIns="0" rIns="0" tIns="0" bIns="0" anchor="t">
+          <a:bodyPr wrap="square" lIns="0" rIns="0" tIns="0" bIns="0">
             <a:spAutoFit/>
           </a:bodyPr>
           <a:lstStyle/>
           <a:p>
-            <a:pPr algn="l" marL="0" indent="0">
-              <a:lnSpc>
-                <a:spcPct val="110000"/>
-              </a:lnSpc>
-              <a:spcBef>
-                <a:spcPts val="0"/>
-              </a:spcBef>
-              <a:spcAft>
-                <a:spcPts val="600"/>
-              </a:spcAft>
-              <a:buNone/>
-              <a:defRPr sz="1900" lang="ja-JP">
-                <a:latin typeface="Noto Sans"/>
-                <a:ea typeface="Noto Sans CJK JP"/>
-                <a:cs typeface="Noto Sans"/>
-              </a:defRPr>
-            </a:pPr>
-            <a:r>
-              <a:rPr sz="1900" lang="ja-JP">
+            <a:pPr>
+              <a:lnSpc>
+                <a:spcPct val="108000"/>
+              </a:lnSpc>
+              <a:spcBef>
+                <a:spcPts val="0"/>
+              </a:spcBef>
+              <a:spcAft>
+                <a:spcPts val="0"/>
+              </a:spcAft>
+            </a:pPr>
+            <a:r>
+              <a:rPr sz="2100" b="1" lang="ja-JP">
                 <a:solidFill>
                   <a:srgbClr val="303437"/>
                 </a:solidFill>
                 <a:latin typeface="Noto Sans"/>
                 <a:ea typeface="Noto Sans CJK JP"/>
-                <a:cs typeface="Noto Sans"/>
-              </a:rPr>
-              <a:t>He et al. (2016). Deep Residual Learning. CVPR.</a:t>
+              </a:rPr>
+              <a:t>fastai. Imagenette.</a:t>
             </a:r>
           </a:p>
         </p:txBody>
@@ -45478,8 +45127,8 @@
         </p:nvSpPr>
         <p:spPr>
           <a:xfrm>
-            <a:off x="594360" y="3429000"/>
-            <a:ext cx="7955279" cy="292608"/>
+            <a:off x="594360" y="4014215"/>
+            <a:ext cx="7955279" cy="438912"/>
           </a:xfrm>
           <a:prstGeom prst="rect">
             <a:avLst/>
@@ -45487,38 +45136,31 @@
           <a:noFill/>
         </p:spPr>
         <p:txBody>
-          <a:bodyPr wrap="square" lIns="0" rIns="0" tIns="0" bIns="0" anchor="t">
+          <a:bodyPr wrap="square" lIns="0" rIns="0" tIns="0" bIns="0">
             <a:spAutoFit/>
           </a:bodyPr>
           <a:lstStyle/>
           <a:p>
-            <a:pPr algn="l" marL="0" indent="0">
-              <a:lnSpc>
-                <a:spcPct val="110000"/>
-              </a:lnSpc>
-              <a:spcBef>
-                <a:spcPts val="0"/>
-              </a:spcBef>
-              <a:spcAft>
-                <a:spcPts val="600"/>
-              </a:spcAft>
-              <a:buNone/>
-              <a:defRPr sz="1700" lang="ja-JP">
-                <a:latin typeface="Noto Sans"/>
-                <a:ea typeface="Noto Sans CJK JP"/>
-                <a:cs typeface="Noto Sans"/>
-              </a:defRPr>
-            </a:pPr>
-            <a:r>
-              <a:rPr sz="1700" lang="ja-JP">
-                <a:solidFill>
-                  <a:srgbClr val="626669"/>
-                </a:solidFill>
-                <a:latin typeface="Noto Sans"/>
-                <a:ea typeface="Noto Sans CJK JP"/>
-                <a:cs typeface="Noto Sans"/>
-              </a:rPr>
-              <a:t>ResNetのImageNet分類性能を示す原著。</a:t>
+            <a:pPr>
+              <a:lnSpc>
+                <a:spcPct val="108000"/>
+              </a:lnSpc>
+              <a:spcBef>
+                <a:spcPts val="0"/>
+              </a:spcBef>
+              <a:spcAft>
+                <a:spcPts val="0"/>
+              </a:spcAft>
+            </a:pPr>
+            <a:r>
+              <a:rPr sz="2000" b="0" lang="ja-JP">
+                <a:solidFill>
+                  <a:srgbClr val="303437"/>
+                </a:solidFill>
+                <a:latin typeface="Noto Sans"/>
+                <a:ea typeface="Noto Sans CJK JP"/>
+              </a:rPr>
+              <a:t>10クラスの小規模データで、学習条件を素早く試す。</a:t>
             </a:r>
           </a:p>
         </p:txBody>
@@ -45531,8 +45173,8 @@
         </p:nvSpPr>
         <p:spPr>
           <a:xfrm>
-            <a:off x="594360" y="3840480"/>
-            <a:ext cx="7955279" cy="256032"/>
+            <a:off x="594360" y="4489704"/>
+            <a:ext cx="7955279" cy="228600"/>
           </a:xfrm>
           <a:prstGeom prst="rect">
             <a:avLst/>
@@ -45540,197 +45182,32 @@
           <a:noFill/>
         </p:spPr>
         <p:txBody>
-          <a:bodyPr wrap="square" lIns="0" rIns="0" tIns="0" bIns="0" anchor="t">
+          <a:bodyPr wrap="square" lIns="0" rIns="0" tIns="0" bIns="0">
             <a:spAutoFit/>
           </a:bodyPr>
           <a:lstStyle/>
           <a:p>
-            <a:pPr algn="l" marL="0" indent="0">
-              <a:lnSpc>
-                <a:spcPct val="110000"/>
-              </a:lnSpc>
-              <a:spcBef>
-                <a:spcPts val="0"/>
-              </a:spcBef>
-              <a:spcAft>
-                <a:spcPts val="0"/>
-              </a:spcAft>
-              <a:buNone/>
-              <a:defRPr sz="850" lang="ja-JP">
-                <a:latin typeface="Noto Sans"/>
-                <a:ea typeface="Noto Sans CJK JP"/>
-                <a:cs typeface="Noto Sans"/>
-              </a:defRPr>
-            </a:pPr>
-            <a:r>
-              <a:rPr sz="850" lang="ja-JP">
+            <a:pPr>
+              <a:lnSpc>
+                <a:spcPct val="108000"/>
+              </a:lnSpc>
+              <a:spcBef>
+                <a:spcPts val="0"/>
+              </a:spcBef>
+              <a:spcAft>
+                <a:spcPts val="0"/>
+              </a:spcAft>
+            </a:pPr>
+            <a:r>
+              <a:rPr sz="1050" b="0" lang="ja-JP">
                 <a:solidFill>
                   <a:srgbClr val="626669"/>
                 </a:solidFill>
                 <a:latin typeface="Noto Sans"/>
                 <a:ea typeface="Noto Sans CJK JP"/>
-                <a:cs typeface="Noto Sans"/>
-              </a:rPr>
-              <a:t>https://arxiv.org/abs/1512.03385</a:t>
-            </a:r>
-          </a:p>
-        </p:txBody>
-      </p:sp>
-      <p:sp>
-        <p:nvSpPr>
-          <p:cNvPr id="13" name="TextBox 12"/>
-          <p:cNvSpPr txBox="1"/>
-          <p:nvPr/>
-        </p:nvSpPr>
-        <p:spPr>
-          <a:xfrm>
-            <a:off x="594360" y="4023360"/>
-            <a:ext cx="7955279" cy="320040"/>
-          </a:xfrm>
-          <a:prstGeom prst="rect">
-            <a:avLst/>
-          </a:prstGeom>
-          <a:noFill/>
-        </p:spPr>
-        <p:txBody>
-          <a:bodyPr wrap="square" lIns="0" rIns="0" tIns="0" bIns="0" anchor="t">
-            <a:spAutoFit/>
-          </a:bodyPr>
-          <a:lstStyle/>
-          <a:p>
-            <a:pPr algn="l" marL="0" indent="0">
-              <a:lnSpc>
-                <a:spcPct val="110000"/>
-              </a:lnSpc>
-              <a:spcBef>
-                <a:spcPts val="0"/>
-              </a:spcBef>
-              <a:spcAft>
-                <a:spcPts val="600"/>
-              </a:spcAft>
-              <a:buNone/>
-              <a:defRPr sz="1900" lang="ja-JP">
-                <a:latin typeface="Noto Sans"/>
-                <a:ea typeface="Noto Sans CJK JP"/>
-                <a:cs typeface="Noto Sans"/>
-              </a:defRPr>
-            </a:pPr>
-            <a:r>
-              <a:rPr sz="1900" lang="ja-JP">
-                <a:solidFill>
-                  <a:srgbClr val="303437"/>
-                </a:solidFill>
-                <a:latin typeface="Noto Sans"/>
-                <a:ea typeface="Noto Sans CJK JP"/>
-                <a:cs typeface="Noto Sans"/>
-              </a:rPr>
-              <a:t>Siméoni et al. (2025). DINOv3.</a:t>
-            </a:r>
-          </a:p>
-        </p:txBody>
-      </p:sp>
-      <p:sp>
-        <p:nvSpPr>
-          <p:cNvPr id="14" name="TextBox 13"/>
-          <p:cNvSpPr txBox="1"/>
-          <p:nvPr/>
-        </p:nvSpPr>
-        <p:spPr>
-          <a:xfrm>
-            <a:off x="594360" y="4343400"/>
-            <a:ext cx="7955279" cy="292608"/>
-          </a:xfrm>
-          <a:prstGeom prst="rect">
-            <a:avLst/>
-          </a:prstGeom>
-          <a:noFill/>
-        </p:spPr>
-        <p:txBody>
-          <a:bodyPr wrap="square" lIns="0" rIns="0" tIns="0" bIns="0" anchor="t">
-            <a:spAutoFit/>
-          </a:bodyPr>
-          <a:lstStyle/>
-          <a:p>
-            <a:pPr algn="l" marL="0" indent="0">
-              <a:lnSpc>
-                <a:spcPct val="110000"/>
-              </a:lnSpc>
-              <a:spcBef>
-                <a:spcPts val="0"/>
-              </a:spcBef>
-              <a:spcAft>
-                <a:spcPts val="600"/>
-              </a:spcAft>
-              <a:buNone/>
-              <a:defRPr sz="1700" lang="ja-JP">
-                <a:latin typeface="Noto Sans"/>
-                <a:ea typeface="Noto Sans CJK JP"/>
-                <a:cs typeface="Noto Sans"/>
-              </a:defRPr>
-            </a:pPr>
-            <a:r>
-              <a:rPr sz="1700" lang="ja-JP">
-                <a:solidFill>
-                  <a:srgbClr val="626669"/>
-                </a:solidFill>
-                <a:latin typeface="Noto Sans"/>
-                <a:ea typeface="Noto Sans CJK JP"/>
-                <a:cs typeface="Noto Sans"/>
-              </a:rPr>
-              <a:t>近年の画像特徴の評価と線形分類性能の比較。</a:t>
-            </a:r>
-          </a:p>
-        </p:txBody>
-      </p:sp>
-      <p:sp>
-        <p:nvSpPr>
-          <p:cNvPr id="15" name="TextBox 14"/>
-          <p:cNvSpPr txBox="1"/>
-          <p:nvPr/>
-        </p:nvSpPr>
-        <p:spPr>
-          <a:xfrm>
-            <a:off x="594360" y="4754880"/>
-            <a:ext cx="7955279" cy="256032"/>
-          </a:xfrm>
-          <a:prstGeom prst="rect">
-            <a:avLst/>
-          </a:prstGeom>
-          <a:noFill/>
-        </p:spPr>
-        <p:txBody>
-          <a:bodyPr wrap="square" lIns="0" rIns="0" tIns="0" bIns="0" anchor="t">
-            <a:spAutoFit/>
-          </a:bodyPr>
-          <a:lstStyle/>
-          <a:p>
-            <a:pPr algn="l" marL="0" indent="0">
-              <a:lnSpc>
-                <a:spcPct val="110000"/>
-              </a:lnSpc>
-              <a:spcBef>
-                <a:spcPts val="0"/>
-              </a:spcBef>
-              <a:spcAft>
-                <a:spcPts val="0"/>
-              </a:spcAft>
-              <a:buNone/>
-              <a:defRPr sz="850" lang="ja-JP">
-                <a:latin typeface="Noto Sans"/>
-                <a:ea typeface="Noto Sans CJK JP"/>
-                <a:cs typeface="Noto Sans"/>
-              </a:defRPr>
-            </a:pPr>
-            <a:r>
-              <a:rPr sz="850" lang="ja-JP">
-                <a:solidFill>
-                  <a:srgbClr val="626669"/>
-                </a:solidFill>
-                <a:latin typeface="Noto Sans"/>
-                <a:ea typeface="Noto Sans CJK JP"/>
-                <a:cs typeface="Noto Sans"/>
-              </a:rPr>
-              <a:t>https://arxiv.org/abs/2508.10104</a:t>
+                <a:hlinkClick r:id="rId4"/>
+              </a:rPr>
+              <a:t>https://github.com/fastai/imagenette</a:t>
             </a:r>
           </a:p>
         </p:txBody>
@@ -45768,33 +45245,9 @@
           <a:bodyPr wrap="square" lIns="0" rIns="0" tIns="0" bIns="0" anchor="t"/>
           <a:lstStyle/>
           <a:p>
-            <a:pPr algn="l" marL="0" indent="0">
-              <a:lnSpc>
-                <a:spcPct val="110000"/>
-              </a:lnSpc>
-              <a:spcBef>
-                <a:spcPts val="0"/>
-              </a:spcBef>
-              <a:spcAft>
-                <a:spcPts val="600"/>
-              </a:spcAft>
-              <a:buNone/>
-              <a:defRPr sz="2800" lang="ja-JP">
-                <a:latin typeface="Noto Sans"/>
-                <a:ea typeface="Noto Sans CJK JP"/>
-                <a:cs typeface="Noto Sans"/>
-              </a:defRPr>
-            </a:pPr>
-            <a:r>
-              <a:rPr sz="2800" lang="ja-JP" b="1">
-                <a:solidFill>
-                  <a:srgbClr val="303437"/>
-                </a:solidFill>
-                <a:latin typeface="Noto Sans"/>
-                <a:ea typeface="Noto Sans CJK JP"/>
-                <a:cs typeface="Noto Sans"/>
-              </a:rPr>
-              <a:t>参考文献と参照した内容</a:t>
+            <a:r>
+              <a:rPr sz="2800"/>
+              <a:t>読後の学習・研究に向けて</a:t>
             </a:r>
           </a:p>
         </p:txBody>
@@ -45814,33 +45267,9 @@
           <a:bodyPr wrap="square" lIns="0" rIns="0" tIns="0" bIns="0" anchor="ctr"/>
           <a:lstStyle/>
           <a:p>
-            <a:pPr algn="l" marL="0" indent="0">
-              <a:lnSpc>
-                <a:spcPct val="110000"/>
-              </a:lnSpc>
-              <a:spcBef>
-                <a:spcPts val="0"/>
-              </a:spcBef>
-              <a:spcAft>
-                <a:spcPts val="0"/>
-              </a:spcAft>
-              <a:buNone/>
-              <a:defRPr sz="1400" lang="ja-JP">
-                <a:latin typeface="Noto Sans"/>
-                <a:ea typeface="Noto Sans CJK JP"/>
-                <a:cs typeface="Noto Sans"/>
-              </a:defRPr>
-            </a:pPr>
-            <a:r>
-              <a:rPr sz="1400" lang="ja-JP" b="1">
-                <a:solidFill>
-                  <a:srgbClr val="FFFEF8"/>
-                </a:solidFill>
-                <a:latin typeface="Noto Sans"/>
-                <a:ea typeface="Noto Sans CJK JP"/>
-                <a:cs typeface="Noto Sans"/>
-              </a:rPr>
-              <a:t>Appendix: 7 入手コードと参考文献</a:t>
+            <a:r>
+              <a:rPr sz="1400"/>
+              <a:t>Appendix: 7 参考文献・評価と限界を調べる</a:t>
             </a:r>
           </a:p>
         </p:txBody>
@@ -45853,8 +45282,8 @@
         </p:nvSpPr>
         <p:spPr>
           <a:xfrm>
-            <a:off x="594360" y="1280160"/>
-            <a:ext cx="7955279" cy="320040"/>
+            <a:off x="594360" y="1353312"/>
+            <a:ext cx="7955279" cy="365760"/>
           </a:xfrm>
           <a:prstGeom prst="rect">
             <a:avLst/>
@@ -45862,38 +45291,31 @@
           <a:noFill/>
         </p:spPr>
         <p:txBody>
-          <a:bodyPr wrap="square" lIns="0" rIns="0" tIns="0" bIns="0" anchor="t">
+          <a:bodyPr wrap="square" lIns="0" rIns="0" tIns="0" bIns="0">
             <a:spAutoFit/>
           </a:bodyPr>
           <a:lstStyle/>
           <a:p>
-            <a:pPr algn="l" marL="0" indent="0">
-              <a:lnSpc>
-                <a:spcPct val="110000"/>
-              </a:lnSpc>
-              <a:spcBef>
-                <a:spcPts val="0"/>
-              </a:spcBef>
-              <a:spcAft>
-                <a:spcPts val="600"/>
-              </a:spcAft>
-              <a:buNone/>
-              <a:defRPr sz="1900" lang="ja-JP">
-                <a:latin typeface="Noto Sans"/>
-                <a:ea typeface="Noto Sans CJK JP"/>
-                <a:cs typeface="Noto Sans"/>
-              </a:defRPr>
-            </a:pPr>
-            <a:r>
-              <a:rPr sz="1900" lang="ja-JP">
+            <a:pPr>
+              <a:lnSpc>
+                <a:spcPct val="108000"/>
+              </a:lnSpc>
+              <a:spcBef>
+                <a:spcPts val="0"/>
+              </a:spcBef>
+              <a:spcAft>
+                <a:spcPts val="0"/>
+              </a:spcAft>
+            </a:pPr>
+            <a:r>
+              <a:rPr sz="2100" b="1" lang="ja-JP">
                 <a:solidFill>
                   <a:srgbClr val="303437"/>
                 </a:solidFill>
                 <a:latin typeface="Noto Sans"/>
                 <a:ea typeface="Noto Sans CJK JP"/>
-                <a:cs typeface="Noto Sans"/>
-              </a:rPr>
-              <a:t>Beyer et al. (2020). Are we done with ImageNet?</a:t>
+              </a:rPr>
+              <a:t>Recht et al. (2019). ImageNetV2. ICML.</a:t>
             </a:r>
           </a:p>
         </p:txBody>
@@ -45906,8 +45328,8 @@
         </p:nvSpPr>
         <p:spPr>
           <a:xfrm>
-            <a:off x="594360" y="1600200"/>
-            <a:ext cx="7955279" cy="292608"/>
+            <a:off x="594360" y="1746504"/>
+            <a:ext cx="7955279" cy="438912"/>
           </a:xfrm>
           <a:prstGeom prst="rect">
             <a:avLst/>
@@ -45915,38 +45337,31 @@
           <a:noFill/>
         </p:spPr>
         <p:txBody>
-          <a:bodyPr wrap="square" lIns="0" rIns="0" tIns="0" bIns="0" anchor="t">
+          <a:bodyPr wrap="square" lIns="0" rIns="0" tIns="0" bIns="0">
             <a:spAutoFit/>
           </a:bodyPr>
           <a:lstStyle/>
           <a:p>
-            <a:pPr algn="l" marL="0" indent="0">
-              <a:lnSpc>
-                <a:spcPct val="110000"/>
-              </a:lnSpc>
-              <a:spcBef>
-                <a:spcPts val="0"/>
-              </a:spcBef>
-              <a:spcAft>
-                <a:spcPts val="600"/>
-              </a:spcAft>
-              <a:buNone/>
-              <a:defRPr sz="1700" lang="ja-JP">
-                <a:latin typeface="Noto Sans"/>
-                <a:ea typeface="Noto Sans CJK JP"/>
-                <a:cs typeface="Noto Sans"/>
-              </a:defRPr>
-            </a:pPr>
-            <a:r>
-              <a:rPr sz="1700" lang="ja-JP">
-                <a:solidFill>
-                  <a:srgbClr val="626669"/>
-                </a:solidFill>
-                <a:latin typeface="Noto Sans"/>
-                <a:ea typeface="Noto Sans CJK JP"/>
-                <a:cs typeface="Noto Sans"/>
-              </a:rPr>
-              <a:t>複数の物体に対応して検証ラベルを見直したReaLの根拠。</a:t>
+            <a:pPr>
+              <a:lnSpc>
+                <a:spcPct val="108000"/>
+              </a:lnSpc>
+              <a:spcBef>
+                <a:spcPts val="0"/>
+              </a:spcBef>
+              <a:spcAft>
+                <a:spcPts val="0"/>
+              </a:spcAft>
+            </a:pPr>
+            <a:r>
+              <a:rPr sz="2000" b="0" lang="ja-JP">
+                <a:solidFill>
+                  <a:srgbClr val="303437"/>
+                </a:solidFill>
+                <a:latin typeface="Noto Sans"/>
+                <a:ea typeface="Noto Sans CJK JP"/>
+              </a:rPr>
+              <a:t>画像を新たに集め直した評価から、汎化性能を調べる。</a:t>
             </a:r>
           </a:p>
         </p:txBody>
@@ -45959,8 +45374,8 @@
         </p:nvSpPr>
         <p:spPr>
           <a:xfrm>
-            <a:off x="594360" y="2011680"/>
-            <a:ext cx="7955279" cy="256032"/>
+            <a:off x="594360" y="2221991"/>
+            <a:ext cx="7955279" cy="228600"/>
           </a:xfrm>
           <a:prstGeom prst="rect">
             <a:avLst/>
@@ -45968,38 +45383,32 @@
           <a:noFill/>
         </p:spPr>
         <p:txBody>
-          <a:bodyPr wrap="square" lIns="0" rIns="0" tIns="0" bIns="0" anchor="t">
+          <a:bodyPr wrap="square" lIns="0" rIns="0" tIns="0" bIns="0">
             <a:spAutoFit/>
           </a:bodyPr>
           <a:lstStyle/>
           <a:p>
-            <a:pPr algn="l" marL="0" indent="0">
-              <a:lnSpc>
-                <a:spcPct val="110000"/>
-              </a:lnSpc>
-              <a:spcBef>
-                <a:spcPts val="0"/>
-              </a:spcBef>
-              <a:spcAft>
-                <a:spcPts val="0"/>
-              </a:spcAft>
-              <a:buNone/>
-              <a:defRPr sz="850" lang="ja-JP">
-                <a:latin typeface="Noto Sans"/>
-                <a:ea typeface="Noto Sans CJK JP"/>
-                <a:cs typeface="Noto Sans"/>
-              </a:defRPr>
-            </a:pPr>
-            <a:r>
-              <a:rPr sz="850" lang="ja-JP">
+            <a:pPr>
+              <a:lnSpc>
+                <a:spcPct val="108000"/>
+              </a:lnSpc>
+              <a:spcBef>
+                <a:spcPts val="0"/>
+              </a:spcBef>
+              <a:spcAft>
+                <a:spcPts val="0"/>
+              </a:spcAft>
+            </a:pPr>
+            <a:r>
+              <a:rPr sz="1050" b="0" lang="ja-JP">
                 <a:solidFill>
                   <a:srgbClr val="626669"/>
                 </a:solidFill>
                 <a:latin typeface="Noto Sans"/>
                 <a:ea typeface="Noto Sans CJK JP"/>
-                <a:cs typeface="Noto Sans"/>
-              </a:rPr>
-              <a:t>https://arxiv.org/abs/2006.07159</a:t>
+                <a:hlinkClick r:id="rId2"/>
+              </a:rPr>
+              <a:t>https://arxiv.org/abs/1902.10811</a:t>
             </a:r>
           </a:p>
         </p:txBody>
@@ -46012,8 +45421,8 @@
         </p:nvSpPr>
         <p:spPr>
           <a:xfrm>
-            <a:off x="594360" y="2194560"/>
-            <a:ext cx="7955279" cy="320040"/>
+            <a:off x="594360" y="2487168"/>
+            <a:ext cx="7955279" cy="365760"/>
           </a:xfrm>
           <a:prstGeom prst="rect">
             <a:avLst/>
@@ -46021,38 +45430,31 @@
           <a:noFill/>
         </p:spPr>
         <p:txBody>
-          <a:bodyPr wrap="square" lIns="0" rIns="0" tIns="0" bIns="0" anchor="t">
+          <a:bodyPr wrap="square" lIns="0" rIns="0" tIns="0" bIns="0">
             <a:spAutoFit/>
           </a:bodyPr>
           <a:lstStyle/>
           <a:p>
-            <a:pPr algn="l" marL="0" indent="0">
-              <a:lnSpc>
-                <a:spcPct val="110000"/>
-              </a:lnSpc>
-              <a:spcBef>
-                <a:spcPts val="0"/>
-              </a:spcBef>
-              <a:spcAft>
-                <a:spcPts val="600"/>
-              </a:spcAft>
-              <a:buNone/>
-              <a:defRPr sz="1900" lang="ja-JP">
-                <a:latin typeface="Noto Sans"/>
-                <a:ea typeface="Noto Sans CJK JP"/>
-                <a:cs typeface="Noto Sans"/>
-              </a:defRPr>
-            </a:pPr>
-            <a:r>
-              <a:rPr sz="1900" lang="ja-JP">
+            <a:pPr>
+              <a:lnSpc>
+                <a:spcPct val="108000"/>
+              </a:lnSpc>
+              <a:spcBef>
+                <a:spcPts val="0"/>
+              </a:spcBef>
+              <a:spcAft>
+                <a:spcPts val="0"/>
+              </a:spcAft>
+            </a:pPr>
+            <a:r>
+              <a:rPr sz="2100" b="1" lang="ja-JP">
                 <a:solidFill>
                   <a:srgbClr val="303437"/>
                 </a:solidFill>
                 <a:latin typeface="Noto Sans"/>
                 <a:ea typeface="Noto Sans CJK JP"/>
-                <a:cs typeface="Noto Sans"/>
-              </a:rPr>
-              <a:t>Recht et al. (2019). ImageNetV2. ICML.</a:t>
+              </a:rPr>
+              <a:t>Beyer et al. (2020). Are we done with ImageNet?</a:t>
             </a:r>
           </a:p>
         </p:txBody>
@@ -46065,8 +45467,8 @@
         </p:nvSpPr>
         <p:spPr>
           <a:xfrm>
-            <a:off x="594360" y="2514600"/>
-            <a:ext cx="7955279" cy="292608"/>
+            <a:off x="594360" y="2880360"/>
+            <a:ext cx="7955279" cy="438912"/>
           </a:xfrm>
           <a:prstGeom prst="rect">
             <a:avLst/>
@@ -46074,38 +45476,31 @@
           <a:noFill/>
         </p:spPr>
         <p:txBody>
-          <a:bodyPr wrap="square" lIns="0" rIns="0" tIns="0" bIns="0" anchor="t">
+          <a:bodyPr wrap="square" lIns="0" rIns="0" tIns="0" bIns="0">
             <a:spAutoFit/>
           </a:bodyPr>
           <a:lstStyle/>
           <a:p>
-            <a:pPr algn="l" marL="0" indent="0">
-              <a:lnSpc>
-                <a:spcPct val="110000"/>
-              </a:lnSpc>
-              <a:spcBef>
-                <a:spcPts val="0"/>
-              </a:spcBef>
-              <a:spcAft>
-                <a:spcPts val="600"/>
-              </a:spcAft>
-              <a:buNone/>
-              <a:defRPr sz="1700" lang="ja-JP">
-                <a:latin typeface="Noto Sans"/>
-                <a:ea typeface="Noto Sans CJK JP"/>
-                <a:cs typeface="Noto Sans"/>
-              </a:defRPr>
-            </a:pPr>
-            <a:r>
-              <a:rPr sz="1700" lang="ja-JP">
-                <a:solidFill>
-                  <a:srgbClr val="626669"/>
-                </a:solidFill>
-                <a:latin typeface="Noto Sans"/>
-                <a:ea typeface="Noto Sans CJK JP"/>
-                <a:cs typeface="Noto Sans"/>
-              </a:rPr>
-              <a:t>新しい画像集合で分類性能の汎化を調べる後続評価。</a:t>
+            <a:pPr>
+              <a:lnSpc>
+                <a:spcPct val="108000"/>
+              </a:lnSpc>
+              <a:spcBef>
+                <a:spcPts val="0"/>
+              </a:spcBef>
+              <a:spcAft>
+                <a:spcPts val="0"/>
+              </a:spcAft>
+            </a:pPr>
+            <a:r>
+              <a:rPr sz="2000" b="0" lang="ja-JP">
+                <a:solidFill>
+                  <a:srgbClr val="303437"/>
+                </a:solidFill>
+                <a:latin typeface="Noto Sans"/>
+                <a:ea typeface="Noto Sans CJK JP"/>
+              </a:rPr>
+              <a:t>複数の正解を許すReaLラベルで、評価の曖昧さを考える。</a:t>
             </a:r>
           </a:p>
         </p:txBody>
@@ -46118,8 +45513,8 @@
         </p:nvSpPr>
         <p:spPr>
           <a:xfrm>
-            <a:off x="594360" y="2926080"/>
-            <a:ext cx="7955279" cy="256032"/>
+            <a:off x="594360" y="3355848"/>
+            <a:ext cx="7955279" cy="228600"/>
           </a:xfrm>
           <a:prstGeom prst="rect">
             <a:avLst/>
@@ -46127,38 +45522,32 @@
           <a:noFill/>
         </p:spPr>
         <p:txBody>
-          <a:bodyPr wrap="square" lIns="0" rIns="0" tIns="0" bIns="0" anchor="t">
+          <a:bodyPr wrap="square" lIns="0" rIns="0" tIns="0" bIns="0">
             <a:spAutoFit/>
           </a:bodyPr>
           <a:lstStyle/>
           <a:p>
-            <a:pPr algn="l" marL="0" indent="0">
-              <a:lnSpc>
-                <a:spcPct val="110000"/>
-              </a:lnSpc>
-              <a:spcBef>
-                <a:spcPts val="0"/>
-              </a:spcBef>
-              <a:spcAft>
-                <a:spcPts val="0"/>
-              </a:spcAft>
-              <a:buNone/>
-              <a:defRPr sz="850" lang="ja-JP">
-                <a:latin typeface="Noto Sans"/>
-                <a:ea typeface="Noto Sans CJK JP"/>
-                <a:cs typeface="Noto Sans"/>
-              </a:defRPr>
-            </a:pPr>
-            <a:r>
-              <a:rPr sz="850" lang="ja-JP">
+            <a:pPr>
+              <a:lnSpc>
+                <a:spcPct val="108000"/>
+              </a:lnSpc>
+              <a:spcBef>
+                <a:spcPts val="0"/>
+              </a:spcBef>
+              <a:spcAft>
+                <a:spcPts val="0"/>
+              </a:spcAft>
+            </a:pPr>
+            <a:r>
+              <a:rPr sz="1050" b="0" lang="ja-JP">
                 <a:solidFill>
                   <a:srgbClr val="626669"/>
                 </a:solidFill>
                 <a:latin typeface="Noto Sans"/>
                 <a:ea typeface="Noto Sans CJK JP"/>
-                <a:cs typeface="Noto Sans"/>
-              </a:rPr>
-              <a:t>https://github.com/modestyachts/ImageNetV2</a:t>
+                <a:hlinkClick r:id="rId3"/>
+              </a:rPr>
+              <a:t>https://arxiv.org/abs/2006.07159</a:t>
             </a:r>
           </a:p>
         </p:txBody>
@@ -46171,8 +45560,8 @@
         </p:nvSpPr>
         <p:spPr>
           <a:xfrm>
-            <a:off x="594360" y="3108960"/>
-            <a:ext cx="7955279" cy="320040"/>
+            <a:off x="594360" y="3621024"/>
+            <a:ext cx="7955279" cy="365760"/>
           </a:xfrm>
           <a:prstGeom prst="rect">
             <a:avLst/>
@@ -46180,38 +45569,31 @@
           <a:noFill/>
         </p:spPr>
         <p:txBody>
-          <a:bodyPr wrap="square" lIns="0" rIns="0" tIns="0" bIns="0" anchor="t">
+          <a:bodyPr wrap="square" lIns="0" rIns="0" tIns="0" bIns="0">
             <a:spAutoFit/>
           </a:bodyPr>
           <a:lstStyle/>
           <a:p>
-            <a:pPr algn="l" marL="0" indent="0">
-              <a:lnSpc>
-                <a:spcPct val="110000"/>
-              </a:lnSpc>
-              <a:spcBef>
-                <a:spcPts val="0"/>
-              </a:spcBef>
-              <a:spcAft>
-                <a:spcPts val="600"/>
-              </a:spcAft>
-              <a:buNone/>
-              <a:defRPr sz="1900" lang="ja-JP">
-                <a:latin typeface="Noto Sans"/>
-                <a:ea typeface="Noto Sans CJK JP"/>
-                <a:cs typeface="Noto Sans"/>
-              </a:defRPr>
-            </a:pPr>
-            <a:r>
-              <a:rPr sz="1900" lang="ja-JP">
+            <a:pPr>
+              <a:lnSpc>
+                <a:spcPct val="108000"/>
+              </a:lnSpc>
+              <a:spcBef>
+                <a:spcPts val="0"/>
+              </a:spcBef>
+              <a:spcAft>
+                <a:spcPts val="0"/>
+              </a:spcAft>
+            </a:pPr>
+            <a:r>
+              <a:rPr sz="2100" b="1" lang="ja-JP">
                 <a:solidFill>
                   <a:srgbClr val="303437"/>
                 </a:solidFill>
                 <a:latin typeface="Noto Sans"/>
                 <a:ea typeface="Noto Sans CJK JP"/>
-                <a:cs typeface="Noto Sans"/>
-              </a:rPr>
-              <a:t>Torchvisionのモデルと公開重み</a:t>
+              </a:rPr>
+              <a:t>Hendrycks &amp; Dietterich (2019). ImageNet-C. ICLR.</a:t>
             </a:r>
           </a:p>
         </p:txBody>
@@ -46224,8 +45606,8 @@
         </p:nvSpPr>
         <p:spPr>
           <a:xfrm>
-            <a:off x="594360" y="3429000"/>
-            <a:ext cx="7955279" cy="292608"/>
+            <a:off x="594360" y="4014215"/>
+            <a:ext cx="7955279" cy="438912"/>
           </a:xfrm>
           <a:prstGeom prst="rect">
             <a:avLst/>
@@ -46233,38 +45615,31 @@
           <a:noFill/>
         </p:spPr>
         <p:txBody>
-          <a:bodyPr wrap="square" lIns="0" rIns="0" tIns="0" bIns="0" anchor="t">
+          <a:bodyPr wrap="square" lIns="0" rIns="0" tIns="0" bIns="0">
             <a:spAutoFit/>
           </a:bodyPr>
           <a:lstStyle/>
           <a:p>
-            <a:pPr algn="l" marL="0" indent="0">
-              <a:lnSpc>
-                <a:spcPct val="110000"/>
-              </a:lnSpc>
-              <a:spcBef>
-                <a:spcPts val="0"/>
-              </a:spcBef>
-              <a:spcAft>
-                <a:spcPts val="600"/>
-              </a:spcAft>
-              <a:buNone/>
-              <a:defRPr sz="1700" lang="ja-JP">
-                <a:latin typeface="Noto Sans"/>
-                <a:ea typeface="Noto Sans CJK JP"/>
-                <a:cs typeface="Noto Sans"/>
-              </a:defRPr>
-            </a:pPr>
-            <a:r>
-              <a:rPr sz="1700" lang="ja-JP">
-                <a:solidFill>
-                  <a:srgbClr val="626669"/>
-                </a:solidFill>
-                <a:latin typeface="Noto Sans"/>
-                <a:ea typeface="Noto Sans CJK JP"/>
-                <a:cs typeface="Noto Sans"/>
-              </a:rPr>
-              <a:t>公開重みの性能と前処理条件を比較するための実装。</a:t>
+            <a:pPr>
+              <a:lnSpc>
+                <a:spcPct val="108000"/>
+              </a:lnSpc>
+              <a:spcBef>
+                <a:spcPts val="0"/>
+              </a:spcBef>
+              <a:spcAft>
+                <a:spcPts val="0"/>
+              </a:spcAft>
+            </a:pPr>
+            <a:r>
+              <a:rPr sz="2000" b="0" lang="ja-JP">
+                <a:solidFill>
+                  <a:srgbClr val="303437"/>
+                </a:solidFill>
+                <a:latin typeface="Noto Sans"/>
+                <a:ea typeface="Noto Sans CJK JP"/>
+              </a:rPr>
+              <a:t>汚損・ぼけ・天候変化への頑健性を、分類精度と分けて評価する。</a:t>
             </a:r>
           </a:p>
         </p:txBody>
@@ -46277,8 +45652,8 @@
         </p:nvSpPr>
         <p:spPr>
           <a:xfrm>
-            <a:off x="594360" y="3840480"/>
-            <a:ext cx="7955279" cy="256032"/>
+            <a:off x="594360" y="4489704"/>
+            <a:ext cx="7955279" cy="228600"/>
           </a:xfrm>
           <a:prstGeom prst="rect">
             <a:avLst/>
@@ -46286,197 +45661,32 @@
           <a:noFill/>
         </p:spPr>
         <p:txBody>
-          <a:bodyPr wrap="square" lIns="0" rIns="0" tIns="0" bIns="0" anchor="t">
+          <a:bodyPr wrap="square" lIns="0" rIns="0" tIns="0" bIns="0">
             <a:spAutoFit/>
           </a:bodyPr>
           <a:lstStyle/>
           <a:p>
-            <a:pPr algn="l" marL="0" indent="0">
-              <a:lnSpc>
-                <a:spcPct val="110000"/>
-              </a:lnSpc>
-              <a:spcBef>
-                <a:spcPts val="0"/>
-              </a:spcBef>
-              <a:spcAft>
-                <a:spcPts val="0"/>
-              </a:spcAft>
-              <a:buNone/>
-              <a:defRPr sz="850" lang="ja-JP">
-                <a:latin typeface="Noto Sans"/>
-                <a:ea typeface="Noto Sans CJK JP"/>
-                <a:cs typeface="Noto Sans"/>
-              </a:defRPr>
-            </a:pPr>
-            <a:r>
-              <a:rPr sz="850" lang="ja-JP">
+            <a:pPr>
+              <a:lnSpc>
+                <a:spcPct val="108000"/>
+              </a:lnSpc>
+              <a:spcBef>
+                <a:spcPts val="0"/>
+              </a:spcBef>
+              <a:spcAft>
+                <a:spcPts val="0"/>
+              </a:spcAft>
+            </a:pPr>
+            <a:r>
+              <a:rPr sz="1050" b="0" lang="ja-JP">
                 <a:solidFill>
                   <a:srgbClr val="626669"/>
                 </a:solidFill>
                 <a:latin typeface="Noto Sans"/>
                 <a:ea typeface="Noto Sans CJK JP"/>
-                <a:cs typeface="Noto Sans"/>
-              </a:rPr>
-              <a:t>https://github.com/pytorch/vision/tree/main/torchvision/models</a:t>
-            </a:r>
-          </a:p>
-        </p:txBody>
-      </p:sp>
-      <p:sp>
-        <p:nvSpPr>
-          <p:cNvPr id="13" name="TextBox 12"/>
-          <p:cNvSpPr txBox="1"/>
-          <p:nvPr/>
-        </p:nvSpPr>
-        <p:spPr>
-          <a:xfrm>
-            <a:off x="594360" y="4023360"/>
-            <a:ext cx="7955279" cy="320040"/>
-          </a:xfrm>
-          <a:prstGeom prst="rect">
-            <a:avLst/>
-          </a:prstGeom>
-          <a:noFill/>
-        </p:spPr>
-        <p:txBody>
-          <a:bodyPr wrap="square" lIns="0" rIns="0" tIns="0" bIns="0" anchor="t">
-            <a:spAutoFit/>
-          </a:bodyPr>
-          <a:lstStyle/>
-          <a:p>
-            <a:pPr algn="l" marL="0" indent="0">
-              <a:lnSpc>
-                <a:spcPct val="110000"/>
-              </a:lnSpc>
-              <a:spcBef>
-                <a:spcPts val="0"/>
-              </a:spcBef>
-              <a:spcAft>
-                <a:spcPts val="600"/>
-              </a:spcAft>
-              <a:buNone/>
-              <a:defRPr sz="1900" lang="ja-JP">
-                <a:latin typeface="Noto Sans"/>
-                <a:ea typeface="Noto Sans CJK JP"/>
-                <a:cs typeface="Noto Sans"/>
-              </a:defRPr>
-            </a:pPr>
-            <a:r>
-              <a:rPr sz="1900" lang="ja-JP">
-                <a:solidFill>
-                  <a:srgbClr val="303437"/>
-                </a:solidFill>
-                <a:latin typeface="Noto Sans"/>
-                <a:ea typeface="Noto Sans CJK JP"/>
-                <a:cs typeface="Noto Sans"/>
-              </a:rPr>
-              <a:t>ImageNetカテゴリ別の画像例</a:t>
-            </a:r>
-          </a:p>
-        </p:txBody>
-      </p:sp>
-      <p:sp>
-        <p:nvSpPr>
-          <p:cNvPr id="14" name="TextBox 13"/>
-          <p:cNvSpPr txBox="1"/>
-          <p:nvPr/>
-        </p:nvSpPr>
-        <p:spPr>
-          <a:xfrm>
-            <a:off x="594360" y="4343400"/>
-            <a:ext cx="7955279" cy="292608"/>
-          </a:xfrm>
-          <a:prstGeom prst="rect">
-            <a:avLst/>
-          </a:prstGeom>
-          <a:noFill/>
-        </p:spPr>
-        <p:txBody>
-          <a:bodyPr wrap="square" lIns="0" rIns="0" tIns="0" bIns="0" anchor="t">
-            <a:spAutoFit/>
-          </a:bodyPr>
-          <a:lstStyle/>
-          <a:p>
-            <a:pPr algn="l" marL="0" indent="0">
-              <a:lnSpc>
-                <a:spcPct val="110000"/>
-              </a:lnSpc>
-              <a:spcBef>
-                <a:spcPts val="0"/>
-              </a:spcBef>
-              <a:spcAft>
-                <a:spcPts val="600"/>
-              </a:spcAft>
-              <a:buNone/>
-              <a:defRPr sz="1700" lang="ja-JP">
-                <a:latin typeface="Noto Sans"/>
-                <a:ea typeface="Noto Sans CJK JP"/>
-                <a:cs typeface="Noto Sans"/>
-              </a:defRPr>
-            </a:pPr>
-            <a:r>
-              <a:rPr sz="1700" lang="ja-JP">
-                <a:solidFill>
-                  <a:srgbClr val="626669"/>
-                </a:solidFill>
-                <a:latin typeface="Noto Sans"/>
-                <a:ea typeface="Noto Sans CJK JP"/>
-                <a:cs typeface="Noto Sans"/>
-              </a:rPr>
-              <a:t>Imagenetteにないカテゴリの画像例の取得元。</a:t>
-            </a:r>
-          </a:p>
-        </p:txBody>
-      </p:sp>
-      <p:sp>
-        <p:nvSpPr>
-          <p:cNvPr id="15" name="TextBox 14"/>
-          <p:cNvSpPr txBox="1"/>
-          <p:nvPr/>
-        </p:nvSpPr>
-        <p:spPr>
-          <a:xfrm>
-            <a:off x="594360" y="4754880"/>
-            <a:ext cx="7955279" cy="256032"/>
-          </a:xfrm>
-          <a:prstGeom prst="rect">
-            <a:avLst/>
-          </a:prstGeom>
-          <a:noFill/>
-        </p:spPr>
-        <p:txBody>
-          <a:bodyPr wrap="square" lIns="0" rIns="0" tIns="0" bIns="0" anchor="t">
-            <a:spAutoFit/>
-          </a:bodyPr>
-          <a:lstStyle/>
-          <a:p>
-            <a:pPr algn="l" marL="0" indent="0">
-              <a:lnSpc>
-                <a:spcPct val="110000"/>
-              </a:lnSpc>
-              <a:spcBef>
-                <a:spcPts val="0"/>
-              </a:spcBef>
-              <a:spcAft>
-                <a:spcPts val="0"/>
-              </a:spcAft>
-              <a:buNone/>
-              <a:defRPr sz="850" lang="ja-JP">
-                <a:latin typeface="Noto Sans"/>
-                <a:ea typeface="Noto Sans CJK JP"/>
-                <a:cs typeface="Noto Sans"/>
-              </a:defRPr>
-            </a:pPr>
-            <a:r>
-              <a:rPr sz="850" lang="ja-JP">
-                <a:solidFill>
-                  <a:srgbClr val="626669"/>
-                </a:solidFill>
-                <a:latin typeface="Noto Sans"/>
-                <a:ea typeface="Noto Sans CJK JP"/>
-                <a:cs typeface="Noto Sans"/>
-              </a:rPr>
-              <a:t>https://github.com/EliSchwartz/imagenet-sample-images</a:t>
+                <a:hlinkClick r:id="rId4"/>
+              </a:rPr>
+              <a:t>https://arxiv.org/abs/1903.12261</a:t>
             </a:r>
           </a:p>
         </p:txBody>
@@ -48414,16 +47624,17 @@
           <a:lstStyle/>
           <a:p>
             <a:pPr algn="l" lvl="0" marL="457200" indent="-355600">
-              <a:buSzPts val="2000"/>
+              <a:buSzPct val="55417"/>
+              <a:buFont typeface="Noto Sans CJK JP"/>
               <a:buChar char="●"/>
-              <a:defRPr sz="2300" b="0" lang="ja-JP">
-                <a:latin typeface="Noto Sans"/>
-                <a:ea typeface="Noto Sans CJK JP"/>
-                <a:cs typeface="Noto Sans"/>
-              </a:defRPr>
-            </a:pPr>
-            <a:r>
-              <a:rPr sz="2300" lang="ja-JP">
+              <a:defRPr sz="2400" b="0" lang="ja-JP">
+                <a:latin typeface="Noto Sans"/>
+                <a:ea typeface="Noto Sans CJK JP"/>
+                <a:cs typeface="Noto Sans"/>
+              </a:defRPr>
+            </a:pPr>
+            <a:r>
+              <a:rPr sz="2400" lang="ja-JP">
                 <a:solidFill>
                   <a:srgbClr val="303437"/>
                 </a:solidFill>
@@ -48434,7 +47645,7 @@
               <a:t>当時は学習に使える注釈画像が不足していた </a:t>
             </a:r>
             <a:r>
-              <a:rPr sz="2300" lang="ja-JP">
+              <a:rPr sz="2400" lang="ja-JP">
                 <a:solidFill>
                   <a:srgbClr val="303437"/>
                 </a:solidFill>
@@ -48445,7 +47656,7 @@
               <a:t>[1]</a:t>
             </a:r>
             <a:r>
-              <a:rPr sz="2300" lang="ja-JP">
+              <a:rPr sz="2400" lang="ja-JP">
                 <a:solidFill>
                   <a:srgbClr val="303437"/>
                 </a:solidFill>
@@ -48455,7 +47666,7 @@
               </a:rPr>
               <a:t>。</a:t>
             </a:r>
-            <a:endParaRPr sz="2300" lang="ja-JP">
+            <a:endParaRPr sz="2400" lang="ja-JP">
               <a:latin typeface="Noto Sans"/>
               <a:ea typeface="Noto Sans CJK JP"/>
               <a:cs typeface="Noto Sans"/>
@@ -48463,16 +47674,17 @@
           </a:p>
           <a:p>
             <a:pPr algn="l" lvl="0" marL="457200" indent="-355600">
-              <a:buSzPts val="2000"/>
+              <a:buSzPct val="55417"/>
+              <a:buFont typeface="Noto Sans CJK JP"/>
               <a:buChar char="●"/>
-              <a:defRPr sz="2300" lang="ja-JP">
-                <a:latin typeface="Noto Sans"/>
-                <a:ea typeface="Noto Sans CJK JP"/>
-                <a:cs typeface="Noto Sans"/>
-              </a:defRPr>
-            </a:pPr>
-            <a:r>
-              <a:rPr sz="2300" lang="ja-JP">
+              <a:defRPr sz="2400" lang="ja-JP">
+                <a:latin typeface="Noto Sans"/>
+                <a:ea typeface="Noto Sans CJK JP"/>
+                <a:cs typeface="Noto Sans"/>
+              </a:defRPr>
+            </a:pPr>
+            <a:r>
+              <a:rPr sz="2400" lang="ja-JP">
                 <a:solidFill>
                   <a:srgbClr val="303437"/>
                 </a:solidFill>
@@ -48483,7 +47695,7 @@
               <a:t>画像分類用のCaltech 101は101クラスだった </a:t>
             </a:r>
             <a:r>
-              <a:rPr sz="2300" lang="ja-JP">
+              <a:rPr sz="2400" lang="ja-JP">
                 <a:solidFill>
                   <a:srgbClr val="303437"/>
                 </a:solidFill>
@@ -48494,7 +47706,7 @@
               <a:t>[2]</a:t>
             </a:r>
             <a:r>
-              <a:rPr sz="2300" lang="ja-JP">
+              <a:rPr sz="2400" lang="ja-JP">
                 <a:solidFill>
                   <a:srgbClr val="303437"/>
                 </a:solidFill>
@@ -48504,7 +47716,7 @@
               </a:rPr>
               <a:t>。</a:t>
             </a:r>
-            <a:endParaRPr sz="2300" lang="ja-JP">
+            <a:endParaRPr sz="2400" lang="ja-JP">
               <a:latin typeface="Noto Sans"/>
               <a:ea typeface="Noto Sans CJK JP"/>
               <a:cs typeface="Noto Sans"/>
@@ -48512,16 +47724,17 @@
           </a:p>
           <a:p>
             <a:pPr algn="l" lvl="0" marL="457200" indent="-355600">
-              <a:buSzPts val="2000"/>
+              <a:buSzPct val="55417"/>
+              <a:buFont typeface="Noto Sans CJK JP"/>
               <a:buChar char="●"/>
-              <a:defRPr sz="2300" lang="ja-JP">
-                <a:latin typeface="Noto Sans"/>
-                <a:ea typeface="Noto Sans CJK JP"/>
-                <a:cs typeface="Noto Sans"/>
-              </a:defRPr>
-            </a:pPr>
-            <a:r>
-              <a:rPr sz="2300" lang="ja-JP">
+              <a:defRPr sz="2400" lang="ja-JP">
+                <a:latin typeface="Noto Sans"/>
+                <a:ea typeface="Noto Sans CJK JP"/>
+                <a:cs typeface="Noto Sans"/>
+              </a:defRPr>
+            </a:pPr>
+            <a:r>
+              <a:rPr sz="2400" lang="ja-JP">
                 <a:solidFill>
                   <a:srgbClr val="303437"/>
                 </a:solidFill>
@@ -48531,7 +47744,7 @@
               </a:rPr>
               <a:t>それに対し、2009年のImageNetは約320万枚・5,247カテゴリだった。</a:t>
             </a:r>
-            <a:endParaRPr sz="2300" lang="ja-JP">
+            <a:endParaRPr sz="2400" lang="ja-JP">
               <a:latin typeface="Noto Sans"/>
               <a:ea typeface="Noto Sans CJK JP"/>
               <a:cs typeface="Noto Sans"/>
@@ -48539,16 +47752,17 @@
           </a:p>
           <a:p>
             <a:pPr algn="l" lvl="0" marL="457200" indent="-355600">
-              <a:buSzPts val="2000"/>
+              <a:buSzPct val="55417"/>
+              <a:buFont typeface="Noto Sans CJK JP"/>
               <a:buChar char="●"/>
-              <a:defRPr sz="2300" lang="ja-JP">
-                <a:latin typeface="Noto Sans"/>
-                <a:ea typeface="Noto Sans CJK JP"/>
-                <a:cs typeface="Noto Sans"/>
-              </a:defRPr>
-            </a:pPr>
-            <a:r>
-              <a:rPr sz="2300" lang="ja-JP">
+              <a:defRPr sz="2400" lang="ja-JP">
+                <a:latin typeface="Noto Sans"/>
+                <a:ea typeface="Noto Sans CJK JP"/>
+                <a:cs typeface="Noto Sans"/>
+              </a:defRPr>
+            </a:pPr>
+            <a:r>
+              <a:rPr sz="2400" lang="ja-JP">
                 <a:solidFill>
                   <a:srgbClr val="303437"/>
                 </a:solidFill>
@@ -48558,7 +47772,7 @@
               </a:rPr>
               <a:t>原著は、規模・多様性・正確さ・階層構造を特徴とした。</a:t>
             </a:r>
-            <a:endParaRPr sz="2300" lang="ja-JP">
+            <a:endParaRPr sz="2400" lang="ja-JP">
               <a:latin typeface="Noto Sans"/>
               <a:ea typeface="Noto Sans CJK JP"/>
               <a:cs typeface="Noto Sans"/>

--- a/slides/datasets-in-10-minutes-imagenet.pptx
+++ b/slides/datasets-in-10-minutes-imagenet.pptx
@@ -69,9 +69,11 @@
     <p:sldId id="303" r:id="rId54"/>
     <p:sldId id="304" r:id="rId55"/>
     <p:sldId id="305" r:id="rId56"/>
-    <p:sldId id="306" r:id="rId57"/>
-    <p:sldId id="307" r:id="rId58"/>
-    <p:sldId id="322" r:id="rId72"/>
+    <p:sldId id="322" r:id="rId58"/>
+    <p:sldId id="323" r:id="rId57"/>
+    <p:sldId id="324" r:id="rId72"/>
+    <p:sldId id="325" r:id="rId73"/>
+    <p:sldId id="326" r:id="rId74"/>
   </p:sldIdLst>
   <p:sldSz cx="9144000" cy="5143500" type="screen16x9"/>
   <p:notesSz cx="6858000" cy="9144000"/>
@@ -44262,19 +44264,16 @@
             <p:ph type="title"/>
           </p:nvPr>
         </p:nvSpPr>
-        <p:spPr>
-          <a:xfrm>
-            <a:off x="468172" y="650138"/>
-            <a:ext cx="8206740" cy="616305"/>
-          </a:xfrm>
-        </p:spPr>
-        <p:txBody>
-          <a:bodyPr wrap="square" lIns="0" rIns="0" tIns="0" bIns="0" anchor="t"/>
+        <p:spPr/>
+        <p:txBody>
+          <a:bodyPr/>
           <a:lstStyle/>
           <a:p>
             <a:r>
-              <a:rPr sz="2800"/>
-              <a:t>読後の学習・研究に向けて</a:t>
+              <a:rPr sz="2800">
+                <a:latin typeface="Noto Sans"/>
+              </a:rPr>
+              <a:t>参考文献</a:t>
             </a:r>
           </a:p>
         </p:txBody>
@@ -44289,19 +44288,20 @@
             <p:ph type="title" idx="2"/>
           </p:nvPr>
         </p:nvSpPr>
-        <p:spPr>
-          <a:xfrm>
-            <a:off x="75895" y="0"/>
-            <a:ext cx="8115300" cy="480060"/>
-          </a:xfrm>
-        </p:spPr>
-        <p:txBody>
-          <a:bodyPr wrap="square" lIns="0" rIns="0" tIns="0" bIns="0" anchor="ctr"/>
+        <p:spPr/>
+        <p:txBody>
+          <a:bodyPr/>
           <a:lstStyle/>
           <a:p>
             <a:r>
-              <a:rPr sz="1400"/>
-              <a:t>Appendix: 7 参考文献・基礎を学ぶ</a:t>
+              <a:rPr sz="1400" b="1">
+                <a:solidFill>
+                  <a:srgbClr val="FFFEF8"/>
+                </a:solidFill>
+                <a:latin typeface="Noto Sans"/>
+                <a:ea typeface="Noto Sans CJK JP"/>
+              </a:rPr>
+              <a:t>Appendix: 7 参考文献</a:t>
             </a:r>
           </a:p>
         </p:txBody>
@@ -44314,8 +44314,8 @@
         </p:nvSpPr>
         <p:spPr>
           <a:xfrm>
-            <a:off x="594360" y="1353312"/>
-            <a:ext cx="7955279" cy="365760"/>
+            <a:off x="594360" y="1325058"/>
+            <a:ext cx="7955279" cy="455512"/>
           </a:xfrm>
           <a:prstGeom prst="rect">
             <a:avLst/>
@@ -44323,31 +44323,32 @@
           <a:noFill/>
         </p:spPr>
         <p:txBody>
-          <a:bodyPr wrap="square" lIns="0" rIns="0" tIns="0" bIns="0">
+          <a:bodyPr wrap="square" anchor="t" lIns="0" rIns="0" tIns="0" bIns="0">
             <a:spAutoFit/>
           </a:bodyPr>
           <a:lstStyle/>
           <a:p>
             <a:pPr>
               <a:lnSpc>
-                <a:spcPct val="108000"/>
-              </a:lnSpc>
-              <a:spcBef>
-                <a:spcPts val="0"/>
-              </a:spcBef>
-              <a:spcAft>
-                <a:spcPts val="0"/>
-              </a:spcAft>
-            </a:pPr>
-            <a:r>
-              <a:rPr sz="2100" b="1" lang="ja-JP">
+                <a:spcPct val="100000"/>
+              </a:lnSpc>
+              <a:spcBef>
+                <a:spcPts val="0"/>
+              </a:spcBef>
+              <a:spcAft>
+                <a:spcPts val="0"/>
+              </a:spcAft>
+              <a:buNone/>
+            </a:pPr>
+            <a:r>
+              <a:rPr sz="1900" b="1" lang="ja-JP">
                 <a:solidFill>
                   <a:srgbClr val="303437"/>
                 </a:solidFill>
                 <a:latin typeface="Noto Sans"/>
                 <a:ea typeface="Noto Sans CJK JP"/>
               </a:rPr>
-              <a:t>Deng et al. (2009). ImageNet. CVPR.</a:t>
+              <a:t>ImageNet: A Large-Scale Hierarchical Image Database</a:t>
             </a:r>
           </a:p>
         </p:txBody>
@@ -44360,8 +44361,8 @@
         </p:nvSpPr>
         <p:spPr>
           <a:xfrm>
-            <a:off x="594360" y="1746504"/>
-            <a:ext cx="7955279" cy="438912"/>
+            <a:off x="594360" y="1711857"/>
+            <a:ext cx="7955279" cy="360393"/>
           </a:xfrm>
           <a:prstGeom prst="rect">
             <a:avLst/>
@@ -44369,31 +44370,32 @@
           <a:noFill/>
         </p:spPr>
         <p:txBody>
-          <a:bodyPr wrap="square" lIns="0" rIns="0" tIns="0" bIns="0">
+          <a:bodyPr wrap="square" anchor="t" lIns="0" rIns="0" tIns="0" bIns="0">
             <a:spAutoFit/>
           </a:bodyPr>
           <a:lstStyle/>
           <a:p>
             <a:pPr>
               <a:lnSpc>
-                <a:spcPct val="108000"/>
-              </a:lnSpc>
-              <a:spcBef>
-                <a:spcPts val="0"/>
-              </a:spcBef>
-              <a:spcAft>
-                <a:spcPts val="0"/>
-              </a:spcAft>
-            </a:pPr>
-            <a:r>
-              <a:rPr sz="2000" b="0" lang="ja-JP">
+                <a:spcPct val="100000"/>
+              </a:lnSpc>
+              <a:spcBef>
+                <a:spcPts val="0"/>
+              </a:spcBef>
+              <a:spcAft>
+                <a:spcPts val="0"/>
+              </a:spcAft>
+              <a:buNone/>
+            </a:pPr>
+            <a:r>
+              <a:rPr sz="1350" b="0" lang="ja-JP">
                 <a:solidFill>
                   <a:srgbClr val="303437"/>
                 </a:solidFill>
                 <a:latin typeface="Noto Sans"/>
                 <a:ea typeface="Noto Sans CJK JP"/>
               </a:rPr>
-              <a:t>まず、画像の収集・注釈とWordNetによる階層設計を学ぶ。</a:t>
+              <a:t>Deng, J., Dong, W., Socher, R., Li, L.-J., Li, K., &amp; Fei-Fei, L. (2009). CVPR, pp. 248–255.</a:t>
             </a:r>
           </a:p>
         </p:txBody>
@@ -44406,8 +44408,8 @@
         </p:nvSpPr>
         <p:spPr>
           <a:xfrm>
-            <a:off x="594360" y="2221991"/>
-            <a:ext cx="7955279" cy="228600"/>
+            <a:off x="594360" y="2059475"/>
+            <a:ext cx="7955279" cy="732332"/>
           </a:xfrm>
           <a:prstGeom prst="rect">
             <a:avLst/>
@@ -44415,32 +44417,32 @@
           <a:noFill/>
         </p:spPr>
         <p:txBody>
-          <a:bodyPr wrap="square" lIns="0" rIns="0" tIns="0" bIns="0">
+          <a:bodyPr wrap="square" anchor="t" lIns="0" rIns="0" tIns="0" bIns="0">
             <a:spAutoFit/>
           </a:bodyPr>
           <a:lstStyle/>
           <a:p>
             <a:pPr>
               <a:lnSpc>
-                <a:spcPct val="108000"/>
-              </a:lnSpc>
-              <a:spcBef>
-                <a:spcPts val="0"/>
-              </a:spcBef>
-              <a:spcAft>
-                <a:spcPts val="0"/>
-              </a:spcAft>
-            </a:pPr>
-            <a:r>
-              <a:rPr sz="1050" b="0" lang="ja-JP">
-                <a:solidFill>
-                  <a:srgbClr val="626669"/>
-                </a:solidFill>
-                <a:latin typeface="Noto Sans"/>
-                <a:ea typeface="Noto Sans CJK JP"/>
-                <a:hlinkClick r:id="rId2"/>
-              </a:rPr>
-              <a:t>https://image-net.org/static_files/papers/imagenet_cvpr09.pdf</a:t>
+                <a:spcPct val="100000"/>
+              </a:lnSpc>
+              <a:spcBef>
+                <a:spcPts val="0"/>
+              </a:spcBef>
+              <a:spcAft>
+                <a:spcPts val="0"/>
+              </a:spcAft>
+              <a:buNone/>
+            </a:pPr>
+            <a:r>
+              <a:rPr sz="1800" b="0" lang="ja-JP">
+                <a:solidFill>
+                  <a:srgbClr val="303437"/>
+                </a:solidFill>
+                <a:latin typeface="Noto Sans"/>
+                <a:ea typeface="Noto Sans CJK JP"/>
+              </a:rPr>
+              <a:t>ImageNetの原著論文。WordNet階層に沿う画像収集と人手による注釈を報告する。</a:t>
             </a:r>
           </a:p>
         </p:txBody>
@@ -44453,8 +44455,8 @@
         </p:nvSpPr>
         <p:spPr>
           <a:xfrm>
-            <a:off x="594360" y="2487168"/>
-            <a:ext cx="7955279" cy="365760"/>
+            <a:off x="594360" y="2700922"/>
+            <a:ext cx="7955279" cy="308415"/>
           </a:xfrm>
           <a:prstGeom prst="rect">
             <a:avLst/>
@@ -44462,31 +44464,33 @@
           <a:noFill/>
         </p:spPr>
         <p:txBody>
-          <a:bodyPr wrap="square" lIns="0" rIns="0" tIns="0" bIns="0">
+          <a:bodyPr wrap="square" anchor="t" lIns="0" rIns="0" tIns="0" bIns="0">
             <a:spAutoFit/>
           </a:bodyPr>
           <a:lstStyle/>
           <a:p>
             <a:pPr>
               <a:lnSpc>
-                <a:spcPct val="108000"/>
-              </a:lnSpc>
-              <a:spcBef>
-                <a:spcPts val="0"/>
-              </a:spcBef>
-              <a:spcAft>
-                <a:spcPts val="0"/>
-              </a:spcAft>
-            </a:pPr>
-            <a:r>
-              <a:rPr sz="2100" b="1" lang="ja-JP">
-                <a:solidFill>
-                  <a:srgbClr val="303437"/>
-                </a:solidFill>
-                <a:latin typeface="Noto Sans"/>
-                <a:ea typeface="Noto Sans CJK JP"/>
-              </a:rPr>
-              <a:t>Russakovsky et al. (2015). ILSVRC. IJCV.</a:t>
+                <a:spcPct val="100000"/>
+              </a:lnSpc>
+              <a:spcBef>
+                <a:spcPts val="0"/>
+              </a:spcBef>
+              <a:spcAft>
+                <a:spcPts val="0"/>
+              </a:spcAft>
+              <a:buNone/>
+            </a:pPr>
+            <a:r>
+              <a:rPr sz="1050" b="0" lang="ja-JP">
+                <a:solidFill>
+                  <a:srgbClr val="626669"/>
+                </a:solidFill>
+                <a:latin typeface="Noto Sans"/>
+                <a:ea typeface="Noto Sans CJK JP"/>
+                <a:hlinkClick r:id="rId2"/>
+              </a:rPr>
+              <a:t>https://image-net.org/static_files/papers/imagenet_cvpr09.pdf</a:t>
             </a:r>
           </a:p>
         </p:txBody>
@@ -44499,8 +44503,8 @@
         </p:nvSpPr>
         <p:spPr>
           <a:xfrm>
-            <a:off x="594360" y="2880360"/>
-            <a:ext cx="7955279" cy="438912"/>
+            <a:off x="594360" y="3118211"/>
+            <a:ext cx="7955279" cy="455512"/>
           </a:xfrm>
           <a:prstGeom prst="rect">
             <a:avLst/>
@@ -44508,31 +44512,32 @@
           <a:noFill/>
         </p:spPr>
         <p:txBody>
-          <a:bodyPr wrap="square" lIns="0" rIns="0" tIns="0" bIns="0">
+          <a:bodyPr wrap="square" anchor="t" lIns="0" rIns="0" tIns="0" bIns="0">
             <a:spAutoFit/>
           </a:bodyPr>
           <a:lstStyle/>
           <a:p>
             <a:pPr>
               <a:lnSpc>
-                <a:spcPct val="108000"/>
-              </a:lnSpc>
-              <a:spcBef>
-                <a:spcPts val="0"/>
-              </a:spcBef>
-              <a:spcAft>
-                <a:spcPts val="0"/>
-              </a:spcAft>
-            </a:pPr>
-            <a:r>
-              <a:rPr sz="2000" b="0" lang="ja-JP">
+                <a:spcPct val="100000"/>
+              </a:lnSpc>
+              <a:spcBef>
+                <a:spcPts val="0"/>
+              </a:spcBef>
+              <a:spcAft>
+                <a:spcPts val="0"/>
+              </a:spcAft>
+              <a:buNone/>
+            </a:pPr>
+            <a:r>
+              <a:rPr sz="1900" b="1" lang="ja-JP">
                 <a:solidFill>
                   <a:srgbClr val="303437"/>
                 </a:solidFill>
                 <a:latin typeface="Noto Sans"/>
                 <a:ea typeface="Noto Sans CJK JP"/>
               </a:rPr>
-              <a:t>分類・検出・位置推定の課題と、評価手順の違いを整理する。</a:t>
+              <a:t>ImageNet Large Scale Visual Recognition Challenge</a:t>
             </a:r>
           </a:p>
         </p:txBody>
@@ -44545,8 +44550,8 @@
         </p:nvSpPr>
         <p:spPr>
           <a:xfrm>
-            <a:off x="594360" y="3355848"/>
-            <a:ext cx="7955279" cy="228600"/>
+            <a:off x="594360" y="3505011"/>
+            <a:ext cx="7955279" cy="360393"/>
           </a:xfrm>
           <a:prstGeom prst="rect">
             <a:avLst/>
@@ -44554,32 +44559,32 @@
           <a:noFill/>
         </p:spPr>
         <p:txBody>
-          <a:bodyPr wrap="square" lIns="0" rIns="0" tIns="0" bIns="0">
+          <a:bodyPr wrap="square" anchor="t" lIns="0" rIns="0" tIns="0" bIns="0">
             <a:spAutoFit/>
           </a:bodyPr>
           <a:lstStyle/>
           <a:p>
             <a:pPr>
               <a:lnSpc>
-                <a:spcPct val="108000"/>
-              </a:lnSpc>
-              <a:spcBef>
-                <a:spcPts val="0"/>
-              </a:spcBef>
-              <a:spcAft>
-                <a:spcPts val="0"/>
-              </a:spcAft>
-            </a:pPr>
-            <a:r>
-              <a:rPr sz="1050" b="0" lang="ja-JP">
-                <a:solidFill>
-                  <a:srgbClr val="626669"/>
-                </a:solidFill>
-                <a:latin typeface="Noto Sans"/>
-                <a:ea typeface="Noto Sans CJK JP"/>
-                <a:hlinkClick r:id="rId3"/>
-              </a:rPr>
-              <a:t>https://arxiv.org/abs/1409.0575</a:t>
+                <a:spcPct val="100000"/>
+              </a:lnSpc>
+              <a:spcBef>
+                <a:spcPts val="0"/>
+              </a:spcBef>
+              <a:spcAft>
+                <a:spcPts val="0"/>
+              </a:spcAft>
+              <a:buNone/>
+            </a:pPr>
+            <a:r>
+              <a:rPr sz="1350" b="0" lang="ja-JP">
+                <a:solidFill>
+                  <a:srgbClr val="303437"/>
+                </a:solidFill>
+                <a:latin typeface="Noto Sans"/>
+                <a:ea typeface="Noto Sans CJK JP"/>
+              </a:rPr>
+              <a:t>Russakovsky, O., et al. (2015). International Journal of Computer Vision, 115, pp. 211–252.</a:t>
             </a:r>
           </a:p>
         </p:txBody>
@@ -44592,8 +44597,8 @@
         </p:nvSpPr>
         <p:spPr>
           <a:xfrm>
-            <a:off x="594360" y="3621024"/>
-            <a:ext cx="7955279" cy="365760"/>
+            <a:off x="594360" y="3852629"/>
+            <a:ext cx="7955279" cy="732332"/>
           </a:xfrm>
           <a:prstGeom prst="rect">
             <a:avLst/>
@@ -44601,31 +44606,32 @@
           <a:noFill/>
         </p:spPr>
         <p:txBody>
-          <a:bodyPr wrap="square" lIns="0" rIns="0" tIns="0" bIns="0">
+          <a:bodyPr wrap="square" anchor="t" lIns="0" rIns="0" tIns="0" bIns="0">
             <a:spAutoFit/>
           </a:bodyPr>
           <a:lstStyle/>
           <a:p>
             <a:pPr>
               <a:lnSpc>
-                <a:spcPct val="108000"/>
-              </a:lnSpc>
-              <a:spcBef>
-                <a:spcPts val="0"/>
-              </a:spcBef>
-              <a:spcAft>
-                <a:spcPts val="0"/>
-              </a:spcAft>
-            </a:pPr>
-            <a:r>
-              <a:rPr sz="2100" b="1" lang="ja-JP">
+                <a:spcPct val="100000"/>
+              </a:lnSpc>
+              <a:spcBef>
+                <a:spcPts val="0"/>
+              </a:spcBef>
+              <a:spcAft>
+                <a:spcPts val="0"/>
+              </a:spcAft>
+              <a:buNone/>
+            </a:pPr>
+            <a:r>
+              <a:rPr sz="1800" b="0" lang="ja-JP">
                 <a:solidFill>
                   <a:srgbClr val="303437"/>
                 </a:solidFill>
                 <a:latin typeface="Noto Sans"/>
                 <a:ea typeface="Noto Sans CJK JP"/>
               </a:rPr>
-              <a:t>He et al. (2016). Deep Residual Learning. CVPR.</a:t>
+              <a:t>ILSVRCの総括論文。画像分類・検出・位置推定の課題と評価結果をまとめている。</a:t>
             </a:r>
           </a:p>
         </p:txBody>
@@ -44638,8 +44644,8 @@
         </p:nvSpPr>
         <p:spPr>
           <a:xfrm>
-            <a:off x="594360" y="4014215"/>
-            <a:ext cx="7955279" cy="438912"/>
+            <a:off x="594360" y="4494076"/>
+            <a:ext cx="7955279" cy="308415"/>
           </a:xfrm>
           <a:prstGeom prst="rect">
             <a:avLst/>
@@ -44647,67 +44653,22 @@
           <a:noFill/>
         </p:spPr>
         <p:txBody>
-          <a:bodyPr wrap="square" lIns="0" rIns="0" tIns="0" bIns="0">
+          <a:bodyPr wrap="square" anchor="t" lIns="0" rIns="0" tIns="0" bIns="0">
             <a:spAutoFit/>
           </a:bodyPr>
           <a:lstStyle/>
           <a:p>
             <a:pPr>
               <a:lnSpc>
-                <a:spcPct val="108000"/>
-              </a:lnSpc>
-              <a:spcBef>
-                <a:spcPts val="0"/>
-              </a:spcBef>
-              <a:spcAft>
-                <a:spcPts val="0"/>
-              </a:spcAft>
-            </a:pPr>
-            <a:r>
-              <a:rPr sz="2000" b="0" lang="ja-JP">
-                <a:solidFill>
-                  <a:srgbClr val="303437"/>
-                </a:solidFill>
-                <a:latin typeface="Noto Sans"/>
-                <a:ea typeface="Noto Sans CJK JP"/>
-              </a:rPr>
-              <a:t>残差接続が深い画像認識モデルの学習をどう支えるかを読む。</a:t>
-            </a:r>
-          </a:p>
-        </p:txBody>
-      </p:sp>
-      <p:sp>
-        <p:nvSpPr>
-          <p:cNvPr id="12" name="TextBox 11"/>
-          <p:cNvSpPr txBox="1"/>
-          <p:nvPr/>
-        </p:nvSpPr>
-        <p:spPr>
-          <a:xfrm>
-            <a:off x="594360" y="4489704"/>
-            <a:ext cx="7955279" cy="228600"/>
-          </a:xfrm>
-          <a:prstGeom prst="rect">
-            <a:avLst/>
-          </a:prstGeom>
-          <a:noFill/>
-        </p:spPr>
-        <p:txBody>
-          <a:bodyPr wrap="square" lIns="0" rIns="0" tIns="0" bIns="0">
-            <a:spAutoFit/>
-          </a:bodyPr>
-          <a:lstStyle/>
-          <a:p>
-            <a:pPr>
-              <a:lnSpc>
-                <a:spcPct val="108000"/>
-              </a:lnSpc>
-              <a:spcBef>
-                <a:spcPts val="0"/>
-              </a:spcBef>
-              <a:spcAft>
-                <a:spcPts val="0"/>
-              </a:spcAft>
+                <a:spcPct val="100000"/>
+              </a:lnSpc>
+              <a:spcBef>
+                <a:spcPts val="0"/>
+              </a:spcBef>
+              <a:spcAft>
+                <a:spcPts val="0"/>
+              </a:spcAft>
+              <a:buNone/>
             </a:pPr>
             <a:r>
               <a:rPr sz="1050" b="0" lang="ja-JP">
@@ -44716,9 +44677,9 @@
                 </a:solidFill>
                 <a:latin typeface="Noto Sans"/>
                 <a:ea typeface="Noto Sans CJK JP"/>
-                <a:hlinkClick r:id="rId4"/>
-              </a:rPr>
-              <a:t>https://arxiv.org/abs/1512.03385</a:t>
+                <a:hlinkClick r:id="rId3"/>
+              </a:rPr>
+              <a:t>https://arxiv.org/abs/1409.0575</a:t>
             </a:r>
           </a:p>
         </p:txBody>
@@ -44751,19 +44712,16 @@
             <p:ph type="title"/>
           </p:nvPr>
         </p:nvSpPr>
-        <p:spPr>
-          <a:xfrm>
-            <a:off x="468172" y="650138"/>
-            <a:ext cx="8206740" cy="616305"/>
-          </a:xfrm>
-        </p:spPr>
-        <p:txBody>
-          <a:bodyPr wrap="square" lIns="0" rIns="0" tIns="0" bIns="0" anchor="t"/>
+        <p:spPr/>
+        <p:txBody>
+          <a:bodyPr/>
           <a:lstStyle/>
           <a:p>
             <a:r>
-              <a:rPr sz="2800"/>
-              <a:t>読後の学習・研究に向けて</a:t>
+              <a:rPr sz="2800">
+                <a:latin typeface="Noto Sans"/>
+              </a:rPr>
+              <a:t>参考文献</a:t>
             </a:r>
           </a:p>
         </p:txBody>
@@ -44778,19 +44736,20 @@
             <p:ph type="title" idx="2"/>
           </p:nvPr>
         </p:nvSpPr>
-        <p:spPr>
-          <a:xfrm>
-            <a:off x="75895" y="0"/>
-            <a:ext cx="8115300" cy="480060"/>
-          </a:xfrm>
-        </p:spPr>
-        <p:txBody>
-          <a:bodyPr wrap="square" lIns="0" rIns="0" tIns="0" bIns="0" anchor="ctr"/>
+        <p:spPr/>
+        <p:txBody>
+          <a:bodyPr/>
           <a:lstStyle/>
           <a:p>
             <a:r>
-              <a:rPr sz="1400"/>
-              <a:t>Appendix: 7 参考文献・実装を試す</a:t>
+              <a:rPr sz="1400" b="1">
+                <a:solidFill>
+                  <a:srgbClr val="FFFEF8"/>
+                </a:solidFill>
+                <a:latin typeface="Noto Sans"/>
+                <a:ea typeface="Noto Sans CJK JP"/>
+              </a:rPr>
+              <a:t>Appendix: 7 参考文献</a:t>
             </a:r>
           </a:p>
         </p:txBody>
@@ -44803,8 +44762,8 @@
         </p:nvSpPr>
         <p:spPr>
           <a:xfrm>
-            <a:off x="594360" y="1353312"/>
-            <a:ext cx="7955279" cy="365760"/>
+            <a:off x="594360" y="1325058"/>
+            <a:ext cx="7955279" cy="455512"/>
           </a:xfrm>
           <a:prstGeom prst="rect">
             <a:avLst/>
@@ -44812,31 +44771,32 @@
           <a:noFill/>
         </p:spPr>
         <p:txBody>
-          <a:bodyPr wrap="square" lIns="0" rIns="0" tIns="0" bIns="0">
+          <a:bodyPr wrap="square" anchor="t" lIns="0" rIns="0" tIns="0" bIns="0">
             <a:spAutoFit/>
           </a:bodyPr>
           <a:lstStyle/>
           <a:p>
             <a:pPr>
               <a:lnSpc>
-                <a:spcPct val="108000"/>
-              </a:lnSpc>
-              <a:spcBef>
-                <a:spcPts val="0"/>
-              </a:spcBef>
-              <a:spcAft>
-                <a:spcPts val="0"/>
-              </a:spcAft>
-            </a:pPr>
-            <a:r>
-              <a:rPr sz="2100" b="1" lang="ja-JP">
+                <a:spcPct val="100000"/>
+              </a:lnSpc>
+              <a:spcBef>
+                <a:spcPts val="0"/>
+              </a:spcBef>
+              <a:spcAft>
+                <a:spcPts val="0"/>
+              </a:spcAft>
+              <a:buNone/>
+            </a:pPr>
+            <a:r>
+              <a:rPr sz="1900" b="1" lang="ja-JP">
                 <a:solidFill>
                   <a:srgbClr val="303437"/>
                 </a:solidFill>
                 <a:latin typeface="Noto Sans"/>
                 <a:ea typeface="Noto Sans CJK JP"/>
               </a:rPr>
-              <a:t>PyTorch公式・転移学習チュートリアル</a:t>
+              <a:t>Deep Residual Learning for Image Recognition</a:t>
             </a:r>
           </a:p>
         </p:txBody>
@@ -44849,8 +44809,8 @@
         </p:nvSpPr>
         <p:spPr>
           <a:xfrm>
-            <a:off x="594360" y="1746504"/>
-            <a:ext cx="7955279" cy="438912"/>
+            <a:off x="594360" y="1711857"/>
+            <a:ext cx="7955279" cy="360393"/>
           </a:xfrm>
           <a:prstGeom prst="rect">
             <a:avLst/>
@@ -44858,31 +44818,32 @@
           <a:noFill/>
         </p:spPr>
         <p:txBody>
-          <a:bodyPr wrap="square" lIns="0" rIns="0" tIns="0" bIns="0">
+          <a:bodyPr wrap="square" anchor="t" lIns="0" rIns="0" tIns="0" bIns="0">
             <a:spAutoFit/>
           </a:bodyPr>
           <a:lstStyle/>
           <a:p>
             <a:pPr>
               <a:lnSpc>
-                <a:spcPct val="108000"/>
-              </a:lnSpc>
-              <a:spcBef>
-                <a:spcPts val="0"/>
-              </a:spcBef>
-              <a:spcAft>
-                <a:spcPts val="0"/>
-              </a:spcAft>
-            </a:pPr>
-            <a:r>
-              <a:rPr sz="2000" b="0" lang="ja-JP">
+                <a:spcPct val="100000"/>
+              </a:lnSpc>
+              <a:spcBef>
+                <a:spcPts val="0"/>
+              </a:spcBef>
+              <a:spcAft>
+                <a:spcPts val="0"/>
+              </a:spcAft>
+              <a:buNone/>
+            </a:pPr>
+            <a:r>
+              <a:rPr sz="1350" b="0" lang="ja-JP">
                 <a:solidFill>
                   <a:srgbClr val="303437"/>
                 </a:solidFill>
                 <a:latin typeface="Noto Sans"/>
                 <a:ea typeface="Noto Sans CJK JP"/>
               </a:rPr>
-              <a:t>事前学習済みモデルを使い、微調整と特徴抽出を実装する。</a:t>
+              <a:t>He, K., Zhang, X., Ren, S., &amp; Sun, J. (2016). CVPR, pp. 770–778.</a:t>
             </a:r>
           </a:p>
         </p:txBody>
@@ -44895,8 +44856,8 @@
         </p:nvSpPr>
         <p:spPr>
           <a:xfrm>
-            <a:off x="594360" y="2221991"/>
-            <a:ext cx="7955279" cy="228600"/>
+            <a:off x="594360" y="2059475"/>
+            <a:ext cx="7955279" cy="732332"/>
           </a:xfrm>
           <a:prstGeom prst="rect">
             <a:avLst/>
@@ -44904,32 +44865,32 @@
           <a:noFill/>
         </p:spPr>
         <p:txBody>
-          <a:bodyPr wrap="square" lIns="0" rIns="0" tIns="0" bIns="0">
+          <a:bodyPr wrap="square" anchor="t" lIns="0" rIns="0" tIns="0" bIns="0">
             <a:spAutoFit/>
           </a:bodyPr>
           <a:lstStyle/>
           <a:p>
             <a:pPr>
               <a:lnSpc>
-                <a:spcPct val="108000"/>
-              </a:lnSpc>
-              <a:spcBef>
-                <a:spcPts val="0"/>
-              </a:spcBef>
-              <a:spcAft>
-                <a:spcPts val="0"/>
-              </a:spcAft>
-            </a:pPr>
-            <a:r>
-              <a:rPr sz="1050" b="0" lang="ja-JP">
-                <a:solidFill>
-                  <a:srgbClr val="626669"/>
-                </a:solidFill>
-                <a:latin typeface="Noto Sans"/>
-                <a:ea typeface="Noto Sans CJK JP"/>
-                <a:hlinkClick r:id="rId2"/>
-              </a:rPr>
-              <a:t>https://github.com/pytorch/tutorials/blob/main/beginner_source/transfer_learning_tutorial.py</a:t>
+                <a:spcPct val="100000"/>
+              </a:lnSpc>
+              <a:spcBef>
+                <a:spcPts val="0"/>
+              </a:spcBef>
+              <a:spcAft>
+                <a:spcPts val="0"/>
+              </a:spcAft>
+              <a:buNone/>
+            </a:pPr>
+            <a:r>
+              <a:rPr sz="1800" b="0" lang="ja-JP">
+                <a:solidFill>
+                  <a:srgbClr val="303437"/>
+                </a:solidFill>
+                <a:latin typeface="Noto Sans"/>
+                <a:ea typeface="Noto Sans CJK JP"/>
+              </a:rPr>
+              <a:t>ResNetの原著論文。残差接続による深いネットワークの学習とImageNet評価を示す。</a:t>
             </a:r>
           </a:p>
         </p:txBody>
@@ -44942,8 +44903,8 @@
         </p:nvSpPr>
         <p:spPr>
           <a:xfrm>
-            <a:off x="594360" y="2487168"/>
-            <a:ext cx="7955279" cy="365760"/>
+            <a:off x="594360" y="2700922"/>
+            <a:ext cx="7955279" cy="308415"/>
           </a:xfrm>
           <a:prstGeom prst="rect">
             <a:avLst/>
@@ -44951,31 +44912,33 @@
           <a:noFill/>
         </p:spPr>
         <p:txBody>
-          <a:bodyPr wrap="square" lIns="0" rIns="0" tIns="0" bIns="0">
+          <a:bodyPr wrap="square" anchor="t" lIns="0" rIns="0" tIns="0" bIns="0">
             <a:spAutoFit/>
           </a:bodyPr>
           <a:lstStyle/>
           <a:p>
             <a:pPr>
               <a:lnSpc>
-                <a:spcPct val="108000"/>
-              </a:lnSpc>
-              <a:spcBef>
-                <a:spcPts val="0"/>
-              </a:spcBef>
-              <a:spcAft>
-                <a:spcPts val="0"/>
-              </a:spcAft>
-            </a:pPr>
-            <a:r>
-              <a:rPr sz="2100" b="1" lang="ja-JP">
-                <a:solidFill>
-                  <a:srgbClr val="303437"/>
-                </a:solidFill>
-                <a:latin typeface="Noto Sans"/>
-                <a:ea typeface="Noto Sans CJK JP"/>
-              </a:rPr>
-              <a:t>Torchvision公式・モデルと学習済み重み</a:t>
+                <a:spcPct val="100000"/>
+              </a:lnSpc>
+              <a:spcBef>
+                <a:spcPts val="0"/>
+              </a:spcBef>
+              <a:spcAft>
+                <a:spcPts val="0"/>
+              </a:spcAft>
+              <a:buNone/>
+            </a:pPr>
+            <a:r>
+              <a:rPr sz="1050" b="0" lang="ja-JP">
+                <a:solidFill>
+                  <a:srgbClr val="626669"/>
+                </a:solidFill>
+                <a:latin typeface="Noto Sans"/>
+                <a:ea typeface="Noto Sans CJK JP"/>
+                <a:hlinkClick r:id="rId2"/>
+              </a:rPr>
+              <a:t>https://arxiv.org/abs/1512.03385</a:t>
             </a:r>
           </a:p>
         </p:txBody>
@@ -44988,8 +44951,8 @@
         </p:nvSpPr>
         <p:spPr>
           <a:xfrm>
-            <a:off x="594360" y="2880360"/>
-            <a:ext cx="7955279" cy="438912"/>
+            <a:off x="594360" y="3118211"/>
+            <a:ext cx="7955279" cy="455512"/>
           </a:xfrm>
           <a:prstGeom prst="rect">
             <a:avLst/>
@@ -44997,31 +44960,32 @@
           <a:noFill/>
         </p:spPr>
         <p:txBody>
-          <a:bodyPr wrap="square" lIns="0" rIns="0" tIns="0" bIns="0">
+          <a:bodyPr wrap="square" anchor="t" lIns="0" rIns="0" tIns="0" bIns="0">
             <a:spAutoFit/>
           </a:bodyPr>
           <a:lstStyle/>
           <a:p>
             <a:pPr>
               <a:lnSpc>
-                <a:spcPct val="108000"/>
-              </a:lnSpc>
-              <a:spcBef>
-                <a:spcPts val="0"/>
-              </a:spcBef>
-              <a:spcAft>
-                <a:spcPts val="0"/>
-              </a:spcAft>
-            </a:pPr>
-            <a:r>
-              <a:rPr sz="2000" b="0" lang="ja-JP">
+                <a:spcPct val="100000"/>
+              </a:lnSpc>
+              <a:spcBef>
+                <a:spcPts val="0"/>
+              </a:spcBef>
+              <a:spcAft>
+                <a:spcPts val="0"/>
+              </a:spcAft>
+              <a:buNone/>
+            </a:pPr>
+            <a:r>
+              <a:rPr sz="1900" b="1" lang="ja-JP">
                 <a:solidFill>
                   <a:srgbClr val="303437"/>
                 </a:solidFill>
                 <a:latin typeface="Noto Sans"/>
                 <a:ea typeface="Noto Sans CJK JP"/>
               </a:rPr>
-              <a:t>重みごとの前処理・クラス定義を確認し、推論を再現する。</a:t>
+              <a:t>Transfer Learning for Computer Vision Tutorial</a:t>
             </a:r>
           </a:p>
         </p:txBody>
@@ -45034,8 +44998,8 @@
         </p:nvSpPr>
         <p:spPr>
           <a:xfrm>
-            <a:off x="594360" y="3355848"/>
-            <a:ext cx="7955279" cy="228600"/>
+            <a:off x="594360" y="3520605"/>
+            <a:ext cx="7955279" cy="375987"/>
           </a:xfrm>
           <a:prstGeom prst="rect">
             <a:avLst/>
@@ -45043,32 +45007,32 @@
           <a:noFill/>
         </p:spPr>
         <p:txBody>
-          <a:bodyPr wrap="square" lIns="0" rIns="0" tIns="0" bIns="0">
+          <a:bodyPr wrap="square" anchor="t" lIns="0" rIns="0" tIns="0" bIns="0">
             <a:spAutoFit/>
           </a:bodyPr>
           <a:lstStyle/>
           <a:p>
             <a:pPr>
               <a:lnSpc>
-                <a:spcPct val="108000"/>
-              </a:lnSpc>
-              <a:spcBef>
-                <a:spcPts val="0"/>
-              </a:spcBef>
-              <a:spcAft>
-                <a:spcPts val="0"/>
-              </a:spcAft>
-            </a:pPr>
-            <a:r>
-              <a:rPr sz="1050" b="0" lang="ja-JP">
-                <a:solidFill>
-                  <a:srgbClr val="626669"/>
-                </a:solidFill>
-                <a:latin typeface="Noto Sans"/>
-                <a:ea typeface="Noto Sans CJK JP"/>
-                <a:hlinkClick r:id="rId3"/>
-              </a:rPr>
-              <a:t>https://github.com/pytorch/vision/tree/main/docs/source/models</a:t>
+                <a:spcPct val="100000"/>
+              </a:lnSpc>
+              <a:spcBef>
+                <a:spcPts val="0"/>
+              </a:spcBef>
+              <a:spcAft>
+                <a:spcPts val="0"/>
+              </a:spcAft>
+              <a:buNone/>
+            </a:pPr>
+            <a:r>
+              <a:rPr sz="1350" b="0" lang="ja-JP">
+                <a:solidFill>
+                  <a:srgbClr val="303437"/>
+                </a:solidFill>
+                <a:latin typeface="Noto Sans"/>
+                <a:ea typeface="Noto Sans CJK JP"/>
+              </a:rPr>
+              <a:t>Chilamkurthy, S. (n.d.). PyTorch Tutorials. 参照 2026-10-15.</a:t>
             </a:r>
           </a:p>
         </p:txBody>
@@ -45081,8 +45045,8 @@
         </p:nvSpPr>
         <p:spPr>
           <a:xfrm>
-            <a:off x="594360" y="3621024"/>
-            <a:ext cx="7955279" cy="365760"/>
+            <a:off x="594360" y="3868223"/>
+            <a:ext cx="7955279" cy="732332"/>
           </a:xfrm>
           <a:prstGeom prst="rect">
             <a:avLst/>
@@ -45090,31 +45054,32 @@
           <a:noFill/>
         </p:spPr>
         <p:txBody>
-          <a:bodyPr wrap="square" lIns="0" rIns="0" tIns="0" bIns="0">
+          <a:bodyPr wrap="square" anchor="t" lIns="0" rIns="0" tIns="0" bIns="0">
             <a:spAutoFit/>
           </a:bodyPr>
           <a:lstStyle/>
           <a:p>
             <a:pPr>
               <a:lnSpc>
-                <a:spcPct val="108000"/>
-              </a:lnSpc>
-              <a:spcBef>
-                <a:spcPts val="0"/>
-              </a:spcBef>
-              <a:spcAft>
-                <a:spcPts val="0"/>
-              </a:spcAft>
-            </a:pPr>
-            <a:r>
-              <a:rPr sz="2100" b="1" lang="ja-JP">
+                <a:spcPct val="100000"/>
+              </a:lnSpc>
+              <a:spcBef>
+                <a:spcPts val="0"/>
+              </a:spcBef>
+              <a:spcAft>
+                <a:spcPts val="0"/>
+              </a:spcAft>
+              <a:buNone/>
+            </a:pPr>
+            <a:r>
+              <a:rPr sz="1800" b="0" lang="ja-JP">
                 <a:solidFill>
                   <a:srgbClr val="303437"/>
                 </a:solidFill>
                 <a:latin typeface="Noto Sans"/>
                 <a:ea typeface="Noto Sans CJK JP"/>
               </a:rPr>
-              <a:t>fastai. Imagenette.</a:t>
+              <a:t>PyTorchの公式教材。事前学習済みモデルの微調整と固定特徴による分類を実装している。</a:t>
             </a:r>
           </a:p>
         </p:txBody>
@@ -45127,8 +45092,8 @@
         </p:nvSpPr>
         <p:spPr>
           <a:xfrm>
-            <a:off x="594360" y="4014215"/>
-            <a:ext cx="7955279" cy="438912"/>
+            <a:off x="594360" y="4509670"/>
+            <a:ext cx="7955279" cy="308415"/>
           </a:xfrm>
           <a:prstGeom prst="rect">
             <a:avLst/>
@@ -45136,67 +45101,22 @@
           <a:noFill/>
         </p:spPr>
         <p:txBody>
-          <a:bodyPr wrap="square" lIns="0" rIns="0" tIns="0" bIns="0">
+          <a:bodyPr wrap="square" anchor="t" lIns="0" rIns="0" tIns="0" bIns="0">
             <a:spAutoFit/>
           </a:bodyPr>
           <a:lstStyle/>
           <a:p>
             <a:pPr>
               <a:lnSpc>
-                <a:spcPct val="108000"/>
-              </a:lnSpc>
-              <a:spcBef>
-                <a:spcPts val="0"/>
-              </a:spcBef>
-              <a:spcAft>
-                <a:spcPts val="0"/>
-              </a:spcAft>
-            </a:pPr>
-            <a:r>
-              <a:rPr sz="2000" b="0" lang="ja-JP">
-                <a:solidFill>
-                  <a:srgbClr val="303437"/>
-                </a:solidFill>
-                <a:latin typeface="Noto Sans"/>
-                <a:ea typeface="Noto Sans CJK JP"/>
-              </a:rPr>
-              <a:t>10クラスの小規模データで、学習条件を素早く試す。</a:t>
-            </a:r>
-          </a:p>
-        </p:txBody>
-      </p:sp>
-      <p:sp>
-        <p:nvSpPr>
-          <p:cNvPr id="12" name="TextBox 11"/>
-          <p:cNvSpPr txBox="1"/>
-          <p:nvPr/>
-        </p:nvSpPr>
-        <p:spPr>
-          <a:xfrm>
-            <a:off x="594360" y="4489704"/>
-            <a:ext cx="7955279" cy="228600"/>
-          </a:xfrm>
-          <a:prstGeom prst="rect">
-            <a:avLst/>
-          </a:prstGeom>
-          <a:noFill/>
-        </p:spPr>
-        <p:txBody>
-          <a:bodyPr wrap="square" lIns="0" rIns="0" tIns="0" bIns="0">
-            <a:spAutoFit/>
-          </a:bodyPr>
-          <a:lstStyle/>
-          <a:p>
-            <a:pPr>
-              <a:lnSpc>
-                <a:spcPct val="108000"/>
-              </a:lnSpc>
-              <a:spcBef>
-                <a:spcPts val="0"/>
-              </a:spcBef>
-              <a:spcAft>
-                <a:spcPts val="0"/>
-              </a:spcAft>
+                <a:spcPct val="100000"/>
+              </a:lnSpc>
+              <a:spcBef>
+                <a:spcPts val="0"/>
+              </a:spcBef>
+              <a:spcAft>
+                <a:spcPts val="0"/>
+              </a:spcAft>
+              <a:buNone/>
             </a:pPr>
             <a:r>
               <a:rPr sz="1050" b="0" lang="ja-JP">
@@ -45205,9 +45125,9 @@
                 </a:solidFill>
                 <a:latin typeface="Noto Sans"/>
                 <a:ea typeface="Noto Sans CJK JP"/>
-                <a:hlinkClick r:id="rId4"/>
-              </a:rPr>
-              <a:t>https://github.com/fastai/imagenette</a:t>
+                <a:hlinkClick r:id="rId3"/>
+              </a:rPr>
+              <a:t>https://github.com/pytorch/tutorials/blob/main/beginner_source/transfer_learning_tutorial.py</a:t>
             </a:r>
           </a:p>
         </p:txBody>
@@ -45242,12 +45162,14 @@
         </p:nvSpPr>
         <p:spPr/>
         <p:txBody>
-          <a:bodyPr wrap="square" lIns="0" rIns="0" tIns="0" bIns="0" anchor="t"/>
+          <a:bodyPr/>
           <a:lstStyle/>
           <a:p>
             <a:r>
-              <a:rPr sz="2800"/>
-              <a:t>読後の学習・研究に向けて</a:t>
+              <a:rPr sz="2800">
+                <a:latin typeface="Noto Sans"/>
+              </a:rPr>
+              <a:t>参考文献</a:t>
             </a:r>
           </a:p>
         </p:txBody>
@@ -45264,12 +45186,18 @@
         </p:nvSpPr>
         <p:spPr/>
         <p:txBody>
-          <a:bodyPr wrap="square" lIns="0" rIns="0" tIns="0" bIns="0" anchor="ctr"/>
+          <a:bodyPr/>
           <a:lstStyle/>
           <a:p>
             <a:r>
-              <a:rPr sz="1400"/>
-              <a:t>Appendix: 7 参考文献・評価と限界を調べる</a:t>
+              <a:rPr sz="1400" b="1">
+                <a:solidFill>
+                  <a:srgbClr val="FFFEF8"/>
+                </a:solidFill>
+                <a:latin typeface="Noto Sans"/>
+                <a:ea typeface="Noto Sans CJK JP"/>
+              </a:rPr>
+              <a:t>Appendix: 7 参考文献</a:t>
             </a:r>
           </a:p>
         </p:txBody>
@@ -45282,8 +45210,8 @@
         </p:nvSpPr>
         <p:spPr>
           <a:xfrm>
-            <a:off x="594360" y="1353312"/>
-            <a:ext cx="7955279" cy="365760"/>
+            <a:off x="594360" y="1325058"/>
+            <a:ext cx="7955279" cy="455512"/>
           </a:xfrm>
           <a:prstGeom prst="rect">
             <a:avLst/>
@@ -45291,31 +45219,32 @@
           <a:noFill/>
         </p:spPr>
         <p:txBody>
-          <a:bodyPr wrap="square" lIns="0" rIns="0" tIns="0" bIns="0">
+          <a:bodyPr wrap="square" anchor="t" lIns="0" rIns="0" tIns="0" bIns="0">
             <a:spAutoFit/>
           </a:bodyPr>
           <a:lstStyle/>
           <a:p>
             <a:pPr>
               <a:lnSpc>
-                <a:spcPct val="108000"/>
-              </a:lnSpc>
-              <a:spcBef>
-                <a:spcPts val="0"/>
-              </a:spcBef>
-              <a:spcAft>
-                <a:spcPts val="0"/>
-              </a:spcAft>
-            </a:pPr>
-            <a:r>
-              <a:rPr sz="2100" b="1" lang="ja-JP">
+                <a:spcPct val="100000"/>
+              </a:lnSpc>
+              <a:spcBef>
+                <a:spcPts val="0"/>
+              </a:spcBef>
+              <a:spcAft>
+                <a:spcPts val="0"/>
+              </a:spcAft>
+              <a:buNone/>
+            </a:pPr>
+            <a:r>
+              <a:rPr sz="1900" b="1" lang="ja-JP">
                 <a:solidFill>
                   <a:srgbClr val="303437"/>
                 </a:solidFill>
                 <a:latin typeface="Noto Sans"/>
                 <a:ea typeface="Noto Sans CJK JP"/>
               </a:rPr>
-              <a:t>Recht et al. (2019). ImageNetV2. ICML.</a:t>
+              <a:t>Models and pre-trained weights</a:t>
             </a:r>
           </a:p>
         </p:txBody>
@@ -45328,8 +45257,8 @@
         </p:nvSpPr>
         <p:spPr>
           <a:xfrm>
-            <a:off x="594360" y="1746504"/>
-            <a:ext cx="7955279" cy="438912"/>
+            <a:off x="594360" y="1727451"/>
+            <a:ext cx="7955279" cy="375987"/>
           </a:xfrm>
           <a:prstGeom prst="rect">
             <a:avLst/>
@@ -45337,31 +45266,32 @@
           <a:noFill/>
         </p:spPr>
         <p:txBody>
-          <a:bodyPr wrap="square" lIns="0" rIns="0" tIns="0" bIns="0">
+          <a:bodyPr wrap="square" anchor="t" lIns="0" rIns="0" tIns="0" bIns="0">
             <a:spAutoFit/>
           </a:bodyPr>
           <a:lstStyle/>
           <a:p>
             <a:pPr>
               <a:lnSpc>
-                <a:spcPct val="108000"/>
-              </a:lnSpc>
-              <a:spcBef>
-                <a:spcPts val="0"/>
-              </a:spcBef>
-              <a:spcAft>
-                <a:spcPts val="0"/>
-              </a:spcAft>
-            </a:pPr>
-            <a:r>
-              <a:rPr sz="2000" b="0" lang="ja-JP">
+                <a:spcPct val="100000"/>
+              </a:lnSpc>
+              <a:spcBef>
+                <a:spcPts val="0"/>
+              </a:spcBef>
+              <a:spcAft>
+                <a:spcPts val="0"/>
+              </a:spcAft>
+              <a:buNone/>
+            </a:pPr>
+            <a:r>
+              <a:rPr sz="1350" b="0" lang="ja-JP">
                 <a:solidFill>
                   <a:srgbClr val="303437"/>
                 </a:solidFill>
                 <a:latin typeface="Noto Sans"/>
                 <a:ea typeface="Noto Sans CJK JP"/>
               </a:rPr>
-              <a:t>画像を新たに集め直した評価から、汎化性能を調べる。</a:t>
+              <a:t>Torchvision contributors (n.d.). Torchvision documentation. 参照 2026-10-15.</a:t>
             </a:r>
           </a:p>
         </p:txBody>
@@ -45374,8 +45304,8 @@
         </p:nvSpPr>
         <p:spPr>
           <a:xfrm>
-            <a:off x="594360" y="2221991"/>
-            <a:ext cx="7955279" cy="228600"/>
+            <a:off x="594360" y="2075069"/>
+            <a:ext cx="7955279" cy="732332"/>
           </a:xfrm>
           <a:prstGeom prst="rect">
             <a:avLst/>
@@ -45383,32 +45313,32 @@
           <a:noFill/>
         </p:spPr>
         <p:txBody>
-          <a:bodyPr wrap="square" lIns="0" rIns="0" tIns="0" bIns="0">
+          <a:bodyPr wrap="square" anchor="t" lIns="0" rIns="0" tIns="0" bIns="0">
             <a:spAutoFit/>
           </a:bodyPr>
           <a:lstStyle/>
           <a:p>
             <a:pPr>
               <a:lnSpc>
-                <a:spcPct val="108000"/>
-              </a:lnSpc>
-              <a:spcBef>
-                <a:spcPts val="0"/>
-              </a:spcBef>
-              <a:spcAft>
-                <a:spcPts val="0"/>
-              </a:spcAft>
-            </a:pPr>
-            <a:r>
-              <a:rPr sz="1050" b="0" lang="ja-JP">
-                <a:solidFill>
-                  <a:srgbClr val="626669"/>
-                </a:solidFill>
-                <a:latin typeface="Noto Sans"/>
-                <a:ea typeface="Noto Sans CJK JP"/>
-                <a:hlinkClick r:id="rId2"/>
-              </a:rPr>
-              <a:t>https://arxiv.org/abs/1902.10811</a:t>
+                <a:spcPct val="100000"/>
+              </a:lnSpc>
+              <a:spcBef>
+                <a:spcPts val="0"/>
+              </a:spcBef>
+              <a:spcAft>
+                <a:spcPts val="0"/>
+              </a:spcAft>
+              <a:buNone/>
+            </a:pPr>
+            <a:r>
+              <a:rPr sz="1800" b="0" lang="ja-JP">
+                <a:solidFill>
+                  <a:srgbClr val="303437"/>
+                </a:solidFill>
+                <a:latin typeface="Noto Sans"/>
+                <a:ea typeface="Noto Sans CJK JP"/>
+              </a:rPr>
+              <a:t>Torchvisionの公式リファレンス。公開重みの評価値・クラス定義・前処理を記載する。</a:t>
             </a:r>
           </a:p>
         </p:txBody>
@@ -45421,8 +45351,8 @@
         </p:nvSpPr>
         <p:spPr>
           <a:xfrm>
-            <a:off x="594360" y="2487168"/>
-            <a:ext cx="7955279" cy="365760"/>
+            <a:off x="594360" y="2716516"/>
+            <a:ext cx="7955279" cy="308415"/>
           </a:xfrm>
           <a:prstGeom prst="rect">
             <a:avLst/>
@@ -45430,31 +45360,33 @@
           <a:noFill/>
         </p:spPr>
         <p:txBody>
-          <a:bodyPr wrap="square" lIns="0" rIns="0" tIns="0" bIns="0">
+          <a:bodyPr wrap="square" anchor="t" lIns="0" rIns="0" tIns="0" bIns="0">
             <a:spAutoFit/>
           </a:bodyPr>
           <a:lstStyle/>
           <a:p>
             <a:pPr>
               <a:lnSpc>
-                <a:spcPct val="108000"/>
-              </a:lnSpc>
-              <a:spcBef>
-                <a:spcPts val="0"/>
-              </a:spcBef>
-              <a:spcAft>
-                <a:spcPts val="0"/>
-              </a:spcAft>
-            </a:pPr>
-            <a:r>
-              <a:rPr sz="2100" b="1" lang="ja-JP">
-                <a:solidFill>
-                  <a:srgbClr val="303437"/>
-                </a:solidFill>
-                <a:latin typeface="Noto Sans"/>
-                <a:ea typeface="Noto Sans CJK JP"/>
-              </a:rPr>
-              <a:t>Beyer et al. (2020). Are we done with ImageNet?</a:t>
+                <a:spcPct val="100000"/>
+              </a:lnSpc>
+              <a:spcBef>
+                <a:spcPts val="0"/>
+              </a:spcBef>
+              <a:spcAft>
+                <a:spcPts val="0"/>
+              </a:spcAft>
+              <a:buNone/>
+            </a:pPr>
+            <a:r>
+              <a:rPr sz="1050" b="0" lang="ja-JP">
+                <a:solidFill>
+                  <a:srgbClr val="626669"/>
+                </a:solidFill>
+                <a:latin typeface="Noto Sans"/>
+                <a:ea typeface="Noto Sans CJK JP"/>
+                <a:hlinkClick r:id="rId2"/>
+              </a:rPr>
+              <a:t>https://github.com/pytorch/vision/blob/main/docs/source/models.rst</a:t>
             </a:r>
           </a:p>
         </p:txBody>
@@ -45467,8 +45399,8 @@
         </p:nvSpPr>
         <p:spPr>
           <a:xfrm>
-            <a:off x="594360" y="2880360"/>
-            <a:ext cx="7955279" cy="438912"/>
+            <a:off x="594360" y="3133806"/>
+            <a:ext cx="7955279" cy="455512"/>
           </a:xfrm>
           <a:prstGeom prst="rect">
             <a:avLst/>
@@ -45476,31 +45408,32 @@
           <a:noFill/>
         </p:spPr>
         <p:txBody>
-          <a:bodyPr wrap="square" lIns="0" rIns="0" tIns="0" bIns="0">
+          <a:bodyPr wrap="square" anchor="t" lIns="0" rIns="0" tIns="0" bIns="0">
             <a:spAutoFit/>
           </a:bodyPr>
           <a:lstStyle/>
           <a:p>
             <a:pPr>
               <a:lnSpc>
-                <a:spcPct val="108000"/>
-              </a:lnSpc>
-              <a:spcBef>
-                <a:spcPts val="0"/>
-              </a:spcBef>
-              <a:spcAft>
-                <a:spcPts val="0"/>
-              </a:spcAft>
-            </a:pPr>
-            <a:r>
-              <a:rPr sz="2000" b="0" lang="ja-JP">
+                <a:spcPct val="100000"/>
+              </a:lnSpc>
+              <a:spcBef>
+                <a:spcPts val="0"/>
+              </a:spcBef>
+              <a:spcAft>
+                <a:spcPts val="0"/>
+              </a:spcAft>
+              <a:buNone/>
+            </a:pPr>
+            <a:r>
+              <a:rPr sz="1900" b="1" lang="ja-JP">
                 <a:solidFill>
                   <a:srgbClr val="303437"/>
                 </a:solidFill>
                 <a:latin typeface="Noto Sans"/>
                 <a:ea typeface="Noto Sans CJK JP"/>
               </a:rPr>
-              <a:t>複数の正解を許すReaLラベルで、評価の曖昧さを考える。</a:t>
+              <a:t>Imagenette</a:t>
             </a:r>
           </a:p>
         </p:txBody>
@@ -45513,8 +45446,8 @@
         </p:nvSpPr>
         <p:spPr>
           <a:xfrm>
-            <a:off x="594360" y="3355848"/>
-            <a:ext cx="7955279" cy="228600"/>
+            <a:off x="594360" y="3536199"/>
+            <a:ext cx="7955279" cy="375987"/>
           </a:xfrm>
           <a:prstGeom prst="rect">
             <a:avLst/>
@@ -45522,32 +45455,32 @@
           <a:noFill/>
         </p:spPr>
         <p:txBody>
-          <a:bodyPr wrap="square" lIns="0" rIns="0" tIns="0" bIns="0">
+          <a:bodyPr wrap="square" anchor="t" lIns="0" rIns="0" tIns="0" bIns="0">
             <a:spAutoFit/>
           </a:bodyPr>
           <a:lstStyle/>
           <a:p>
             <a:pPr>
               <a:lnSpc>
-                <a:spcPct val="108000"/>
-              </a:lnSpc>
-              <a:spcBef>
-                <a:spcPts val="0"/>
-              </a:spcBef>
-              <a:spcAft>
-                <a:spcPts val="0"/>
-              </a:spcAft>
-            </a:pPr>
-            <a:r>
-              <a:rPr sz="1050" b="0" lang="ja-JP">
-                <a:solidFill>
-                  <a:srgbClr val="626669"/>
-                </a:solidFill>
-                <a:latin typeface="Noto Sans"/>
-                <a:ea typeface="Noto Sans CJK JP"/>
-                <a:hlinkClick r:id="rId3"/>
-              </a:rPr>
-              <a:t>https://arxiv.org/abs/2006.07159</a:t>
+                <a:spcPct val="100000"/>
+              </a:lnSpc>
+              <a:spcBef>
+                <a:spcPts val="0"/>
+              </a:spcBef>
+              <a:spcAft>
+                <a:spcPts val="0"/>
+              </a:spcAft>
+              <a:buNone/>
+            </a:pPr>
+            <a:r>
+              <a:rPr sz="1350" b="0" lang="ja-JP">
+                <a:solidFill>
+                  <a:srgbClr val="303437"/>
+                </a:solidFill>
+                <a:latin typeface="Noto Sans"/>
+                <a:ea typeface="Noto Sans CJK JP"/>
+              </a:rPr>
+              <a:t>fastai (n.d.). GitHub repository. 参照 2026-10-15.</a:t>
             </a:r>
           </a:p>
         </p:txBody>
@@ -45560,8 +45493,8 @@
         </p:nvSpPr>
         <p:spPr>
           <a:xfrm>
-            <a:off x="594360" y="3621024"/>
-            <a:ext cx="7955279" cy="365760"/>
+            <a:off x="594360" y="3883817"/>
+            <a:ext cx="7955279" cy="732332"/>
           </a:xfrm>
           <a:prstGeom prst="rect">
             <a:avLst/>
@@ -45569,31 +45502,32 @@
           <a:noFill/>
         </p:spPr>
         <p:txBody>
-          <a:bodyPr wrap="square" lIns="0" rIns="0" tIns="0" bIns="0">
+          <a:bodyPr wrap="square" anchor="t" lIns="0" rIns="0" tIns="0" bIns="0">
             <a:spAutoFit/>
           </a:bodyPr>
           <a:lstStyle/>
           <a:p>
             <a:pPr>
               <a:lnSpc>
-                <a:spcPct val="108000"/>
-              </a:lnSpc>
-              <a:spcBef>
-                <a:spcPts val="0"/>
-              </a:spcBef>
-              <a:spcAft>
-                <a:spcPts val="0"/>
-              </a:spcAft>
-            </a:pPr>
-            <a:r>
-              <a:rPr sz="2100" b="1" lang="ja-JP">
+                <a:spcPct val="100000"/>
+              </a:lnSpc>
+              <a:spcBef>
+                <a:spcPts val="0"/>
+              </a:spcBef>
+              <a:spcAft>
+                <a:spcPts val="0"/>
+              </a:spcAft>
+              <a:buNone/>
+            </a:pPr>
+            <a:r>
+              <a:rPr sz="1800" b="0" lang="ja-JP">
                 <a:solidFill>
                   <a:srgbClr val="303437"/>
                 </a:solidFill>
                 <a:latin typeface="Noto Sans"/>
                 <a:ea typeface="Noto Sans CJK JP"/>
               </a:rPr>
-              <a:t>Hendrycks &amp; Dietterich (2019). ImageNet-C. ICLR.</a:t>
+              <a:t>ImageNetの10クラスを抜き出した小規模データセット。配布物とベンチマークを公開する。</a:t>
             </a:r>
           </a:p>
         </p:txBody>
@@ -45606,8 +45540,8 @@
         </p:nvSpPr>
         <p:spPr>
           <a:xfrm>
-            <a:off x="594360" y="4014215"/>
-            <a:ext cx="7955279" cy="438912"/>
+            <a:off x="594360" y="4525264"/>
+            <a:ext cx="7955279" cy="308415"/>
           </a:xfrm>
           <a:prstGeom prst="rect">
             <a:avLst/>
@@ -45615,45 +45549,117 @@
           <a:noFill/>
         </p:spPr>
         <p:txBody>
-          <a:bodyPr wrap="square" lIns="0" rIns="0" tIns="0" bIns="0">
+          <a:bodyPr wrap="square" anchor="t" lIns="0" rIns="0" tIns="0" bIns="0">
             <a:spAutoFit/>
           </a:bodyPr>
           <a:lstStyle/>
           <a:p>
             <a:pPr>
               <a:lnSpc>
-                <a:spcPct val="108000"/>
-              </a:lnSpc>
-              <a:spcBef>
-                <a:spcPts val="0"/>
-              </a:spcBef>
-              <a:spcAft>
-                <a:spcPts val="0"/>
-              </a:spcAft>
-            </a:pPr>
-            <a:r>
-              <a:rPr sz="2000" b="0" lang="ja-JP">
-                <a:solidFill>
-                  <a:srgbClr val="303437"/>
-                </a:solidFill>
-                <a:latin typeface="Noto Sans"/>
-                <a:ea typeface="Noto Sans CJK JP"/>
-              </a:rPr>
-              <a:t>汚損・ぼけ・天候変化への頑健性を、分類精度と分けて評価する。</a:t>
-            </a:r>
-          </a:p>
-        </p:txBody>
-      </p:sp>
-      <p:sp>
-        <p:nvSpPr>
-          <p:cNvPr id="12" name="TextBox 11"/>
+                <a:spcPct val="100000"/>
+              </a:lnSpc>
+              <a:spcBef>
+                <a:spcPts val="0"/>
+              </a:spcBef>
+              <a:spcAft>
+                <a:spcPts val="0"/>
+              </a:spcAft>
+              <a:buNone/>
+            </a:pPr>
+            <a:r>
+              <a:rPr sz="1050" b="0" lang="ja-JP">
+                <a:solidFill>
+                  <a:srgbClr val="626669"/>
+                </a:solidFill>
+                <a:latin typeface="Noto Sans"/>
+                <a:ea typeface="Noto Sans CJK JP"/>
+                <a:hlinkClick r:id="rId3"/>
+              </a:rPr>
+              <a:t>https://github.com/fastai/imagenette</a:t>
+            </a:r>
+          </a:p>
+        </p:txBody>
+      </p:sp>
+    </p:spTree>
+  </p:cSld>
+  <p:clrMapOvr>
+    <a:masterClrMapping/>
+  </p:clrMapOvr>
+</p:sld>
+</file>
+
+<file path=ppt/slides/slide68.xml><?xml version="1.0" encoding="utf-8"?>
+<p:sld xmlns:a="http://schemas.openxmlformats.org/drawingml/2006/main" xmlns:p="http://schemas.openxmlformats.org/presentationml/2006/main" xmlns:r="http://schemas.openxmlformats.org/officeDocument/2006/relationships">
+  <p:cSld>
+    <p:spTree>
+      <p:nvGrpSpPr>
+        <p:cNvPr id="1" name=""/>
+        <p:cNvGrpSpPr/>
+        <p:nvPr/>
+      </p:nvGrpSpPr>
+      <p:grpSpPr/>
+      <p:sp>
+        <p:nvSpPr>
+          <p:cNvPr id="2" name="Title 1"/>
+          <p:cNvSpPr>
+            <a:spLocks noGrp="1"/>
+          </p:cNvSpPr>
+          <p:nvPr>
+            <p:ph type="title"/>
+          </p:nvPr>
+        </p:nvSpPr>
+        <p:spPr/>
+        <p:txBody>
+          <a:bodyPr/>
+          <a:lstStyle/>
+          <a:p>
+            <a:r>
+              <a:rPr sz="2800">
+                <a:latin typeface="Noto Sans"/>
+              </a:rPr>
+              <a:t>参考文献</a:t>
+            </a:r>
+          </a:p>
+        </p:txBody>
+      </p:sp>
+      <p:sp>
+        <p:nvSpPr>
+          <p:cNvPr id="3" name="Title 2"/>
+          <p:cNvSpPr>
+            <a:spLocks noGrp="1"/>
+          </p:cNvSpPr>
+          <p:nvPr>
+            <p:ph type="title" idx="2"/>
+          </p:nvPr>
+        </p:nvSpPr>
+        <p:spPr/>
+        <p:txBody>
+          <a:bodyPr/>
+          <a:lstStyle/>
+          <a:p>
+            <a:r>
+              <a:rPr sz="1400" b="1">
+                <a:solidFill>
+                  <a:srgbClr val="FFFEF8"/>
+                </a:solidFill>
+                <a:latin typeface="Noto Sans"/>
+                <a:ea typeface="Noto Sans CJK JP"/>
+              </a:rPr>
+              <a:t>Appendix: 7 参考文献</a:t>
+            </a:r>
+          </a:p>
+        </p:txBody>
+      </p:sp>
+      <p:sp>
+        <p:nvSpPr>
+          <p:cNvPr id="4" name="TextBox 3"/>
           <p:cNvSpPr txBox="1"/>
           <p:nvPr/>
         </p:nvSpPr>
         <p:spPr>
           <a:xfrm>
-            <a:off x="594360" y="4489704"/>
-            <a:ext cx="7955279" cy="228600"/>
+            <a:off x="594360" y="1325058"/>
+            <a:ext cx="7955279" cy="455512"/>
           </a:xfrm>
           <a:prstGeom prst="rect">
             <a:avLst/>
@@ -45661,21 +45667,163 @@
           <a:noFill/>
         </p:spPr>
         <p:txBody>
-          <a:bodyPr wrap="square" lIns="0" rIns="0" tIns="0" bIns="0">
+          <a:bodyPr wrap="square" anchor="t" lIns="0" rIns="0" tIns="0" bIns="0">
             <a:spAutoFit/>
           </a:bodyPr>
           <a:lstStyle/>
           <a:p>
             <a:pPr>
               <a:lnSpc>
-                <a:spcPct val="108000"/>
-              </a:lnSpc>
-              <a:spcBef>
-                <a:spcPts val="0"/>
-              </a:spcBef>
-              <a:spcAft>
-                <a:spcPts val="0"/>
-              </a:spcAft>
+                <a:spcPct val="100000"/>
+              </a:lnSpc>
+              <a:spcBef>
+                <a:spcPts val="0"/>
+              </a:spcBef>
+              <a:spcAft>
+                <a:spcPts val="0"/>
+              </a:spcAft>
+              <a:buNone/>
+            </a:pPr>
+            <a:r>
+              <a:rPr sz="1900" b="1" lang="ja-JP">
+                <a:solidFill>
+                  <a:srgbClr val="303437"/>
+                </a:solidFill>
+                <a:latin typeface="Noto Sans"/>
+                <a:ea typeface="Noto Sans CJK JP"/>
+              </a:rPr>
+              <a:t>Do ImageNet Classifiers Generalize to ImageNet?</a:t>
+            </a:r>
+          </a:p>
+        </p:txBody>
+      </p:sp>
+      <p:sp>
+        <p:nvSpPr>
+          <p:cNvPr id="5" name="TextBox 4"/>
+          <p:cNvSpPr txBox="1"/>
+          <p:nvPr/>
+        </p:nvSpPr>
+        <p:spPr>
+          <a:xfrm>
+            <a:off x="594360" y="1711857"/>
+            <a:ext cx="7955279" cy="565955"/>
+          </a:xfrm>
+          <a:prstGeom prst="rect">
+            <a:avLst/>
+          </a:prstGeom>
+          <a:noFill/>
+        </p:spPr>
+        <p:txBody>
+          <a:bodyPr wrap="square" anchor="t" lIns="0" rIns="0" tIns="0" bIns="0">
+            <a:spAutoFit/>
+          </a:bodyPr>
+          <a:lstStyle/>
+          <a:p>
+            <a:pPr>
+              <a:lnSpc>
+                <a:spcPct val="100000"/>
+              </a:lnSpc>
+              <a:spcBef>
+                <a:spcPts val="0"/>
+              </a:spcBef>
+              <a:spcAft>
+                <a:spcPts val="0"/>
+              </a:spcAft>
+              <a:buNone/>
+            </a:pPr>
+            <a:r>
+              <a:rPr sz="1350" b="0" lang="ja-JP">
+                <a:solidFill>
+                  <a:srgbClr val="303437"/>
+                </a:solidFill>
+                <a:latin typeface="Noto Sans"/>
+                <a:ea typeface="Noto Sans CJK JP"/>
+              </a:rPr>
+              <a:t>Recht, B., Roelofs, R., Schmidt, L., &amp; Shankar, V. (2019). ICML, Proceedings of Machine Learning Research, 97.</a:t>
+            </a:r>
+          </a:p>
+        </p:txBody>
+      </p:sp>
+      <p:sp>
+        <p:nvSpPr>
+          <p:cNvPr id="6" name="TextBox 5"/>
+          <p:cNvSpPr txBox="1"/>
+          <p:nvPr/>
+        </p:nvSpPr>
+        <p:spPr>
+          <a:xfrm>
+            <a:off x="594360" y="2265037"/>
+            <a:ext cx="7955279" cy="732332"/>
+          </a:xfrm>
+          <a:prstGeom prst="rect">
+            <a:avLst/>
+          </a:prstGeom>
+          <a:noFill/>
+        </p:spPr>
+        <p:txBody>
+          <a:bodyPr wrap="square" anchor="t" lIns="0" rIns="0" tIns="0" bIns="0">
+            <a:spAutoFit/>
+          </a:bodyPr>
+          <a:lstStyle/>
+          <a:p>
+            <a:pPr>
+              <a:lnSpc>
+                <a:spcPct val="100000"/>
+              </a:lnSpc>
+              <a:spcBef>
+                <a:spcPts val="0"/>
+              </a:spcBef>
+              <a:spcAft>
+                <a:spcPts val="0"/>
+              </a:spcAft>
+              <a:buNone/>
+            </a:pPr>
+            <a:r>
+              <a:rPr sz="1800" b="0" lang="ja-JP">
+                <a:solidFill>
+                  <a:srgbClr val="303437"/>
+                </a:solidFill>
+                <a:latin typeface="Noto Sans"/>
+                <a:ea typeface="Noto Sans CJK JP"/>
+              </a:rPr>
+              <a:t>ImageNetV2の原著論文。新たに収集した画像で既存分類器の汎化性能を検証する。</a:t>
+            </a:r>
+          </a:p>
+        </p:txBody>
+      </p:sp>
+      <p:sp>
+        <p:nvSpPr>
+          <p:cNvPr id="7" name="TextBox 6"/>
+          <p:cNvSpPr txBox="1"/>
+          <p:nvPr/>
+        </p:nvSpPr>
+        <p:spPr>
+          <a:xfrm>
+            <a:off x="594360" y="2906484"/>
+            <a:ext cx="7955279" cy="308415"/>
+          </a:xfrm>
+          <a:prstGeom prst="rect">
+            <a:avLst/>
+          </a:prstGeom>
+          <a:noFill/>
+        </p:spPr>
+        <p:txBody>
+          <a:bodyPr wrap="square" anchor="t" lIns="0" rIns="0" tIns="0" bIns="0">
+            <a:spAutoFit/>
+          </a:bodyPr>
+          <a:lstStyle/>
+          <a:p>
+            <a:pPr>
+              <a:lnSpc>
+                <a:spcPct val="100000"/>
+              </a:lnSpc>
+              <a:spcBef>
+                <a:spcPts val="0"/>
+              </a:spcBef>
+              <a:spcAft>
+                <a:spcPts val="0"/>
+              </a:spcAft>
+              <a:buNone/>
             </a:pPr>
             <a:r>
               <a:rPr sz="1050" b="0" lang="ja-JP">
@@ -45684,7 +45832,455 @@
                 </a:solidFill>
                 <a:latin typeface="Noto Sans"/>
                 <a:ea typeface="Noto Sans CJK JP"/>
-                <a:hlinkClick r:id="rId4"/>
+                <a:hlinkClick r:id="rId2"/>
+              </a:rPr>
+              <a:t>https://arxiv.org/abs/1902.10811</a:t>
+            </a:r>
+          </a:p>
+        </p:txBody>
+      </p:sp>
+      <p:sp>
+        <p:nvSpPr>
+          <p:cNvPr id="8" name="TextBox 7"/>
+          <p:cNvSpPr txBox="1"/>
+          <p:nvPr/>
+        </p:nvSpPr>
+        <p:spPr>
+          <a:xfrm>
+            <a:off x="594360" y="3323774"/>
+            <a:ext cx="7955279" cy="455512"/>
+          </a:xfrm>
+          <a:prstGeom prst="rect">
+            <a:avLst/>
+          </a:prstGeom>
+          <a:noFill/>
+        </p:spPr>
+        <p:txBody>
+          <a:bodyPr wrap="square" anchor="t" lIns="0" rIns="0" tIns="0" bIns="0">
+            <a:spAutoFit/>
+          </a:bodyPr>
+          <a:lstStyle/>
+          <a:p>
+            <a:pPr>
+              <a:lnSpc>
+                <a:spcPct val="100000"/>
+              </a:lnSpc>
+              <a:spcBef>
+                <a:spcPts val="0"/>
+              </a:spcBef>
+              <a:spcAft>
+                <a:spcPts val="0"/>
+              </a:spcAft>
+              <a:buNone/>
+            </a:pPr>
+            <a:r>
+              <a:rPr sz="1900" b="1" lang="ja-JP">
+                <a:solidFill>
+                  <a:srgbClr val="303437"/>
+                </a:solidFill>
+                <a:latin typeface="Noto Sans"/>
+                <a:ea typeface="Noto Sans CJK JP"/>
+              </a:rPr>
+              <a:t>Are we done with ImageNet?</a:t>
+            </a:r>
+          </a:p>
+        </p:txBody>
+      </p:sp>
+      <p:sp>
+        <p:nvSpPr>
+          <p:cNvPr id="9" name="TextBox 8"/>
+          <p:cNvSpPr txBox="1"/>
+          <p:nvPr/>
+        </p:nvSpPr>
+        <p:spPr>
+          <a:xfrm>
+            <a:off x="594360" y="3710573"/>
+            <a:ext cx="7955279" cy="360393"/>
+          </a:xfrm>
+          <a:prstGeom prst="rect">
+            <a:avLst/>
+          </a:prstGeom>
+          <a:noFill/>
+        </p:spPr>
+        <p:txBody>
+          <a:bodyPr wrap="square" anchor="t" lIns="0" rIns="0" tIns="0" bIns="0">
+            <a:spAutoFit/>
+          </a:bodyPr>
+          <a:lstStyle/>
+          <a:p>
+            <a:pPr>
+              <a:lnSpc>
+                <a:spcPct val="100000"/>
+              </a:lnSpc>
+              <a:spcBef>
+                <a:spcPts val="0"/>
+              </a:spcBef>
+              <a:spcAft>
+                <a:spcPts val="0"/>
+              </a:spcAft>
+              <a:buNone/>
+            </a:pPr>
+            <a:r>
+              <a:rPr sz="1350" b="0" lang="ja-JP">
+                <a:solidFill>
+                  <a:srgbClr val="303437"/>
+                </a:solidFill>
+                <a:latin typeface="Noto Sans"/>
+                <a:ea typeface="Noto Sans CJK JP"/>
+              </a:rPr>
+              <a:t>Beyer, L., Hénaff, O. J., Kolesnikov, A., Zhai, X., &amp; van den Oord, A. (2020). arXiv:2006.07159.</a:t>
+            </a:r>
+          </a:p>
+        </p:txBody>
+      </p:sp>
+      <p:sp>
+        <p:nvSpPr>
+          <p:cNvPr id="10" name="TextBox 9"/>
+          <p:cNvSpPr txBox="1"/>
+          <p:nvPr/>
+        </p:nvSpPr>
+        <p:spPr>
+          <a:xfrm>
+            <a:off x="594360" y="4058191"/>
+            <a:ext cx="7955279" cy="732332"/>
+          </a:xfrm>
+          <a:prstGeom prst="rect">
+            <a:avLst/>
+          </a:prstGeom>
+          <a:noFill/>
+        </p:spPr>
+        <p:txBody>
+          <a:bodyPr wrap="square" anchor="t" lIns="0" rIns="0" tIns="0" bIns="0">
+            <a:spAutoFit/>
+          </a:bodyPr>
+          <a:lstStyle/>
+          <a:p>
+            <a:pPr>
+              <a:lnSpc>
+                <a:spcPct val="100000"/>
+              </a:lnSpc>
+              <a:spcBef>
+                <a:spcPts val="0"/>
+              </a:spcBef>
+              <a:spcAft>
+                <a:spcPts val="0"/>
+              </a:spcAft>
+              <a:buNone/>
+            </a:pPr>
+            <a:r>
+              <a:rPr sz="1800" b="0" lang="ja-JP">
+                <a:solidFill>
+                  <a:srgbClr val="303437"/>
+                </a:solidFill>
+                <a:latin typeface="Noto Sans"/>
+                <a:ea typeface="Noto Sans CJK JP"/>
+              </a:rPr>
+              <a:t>検証画像の正解を再注釈した研究。複数の物体を正解とするReaLラベルを提案する。</a:t>
+            </a:r>
+          </a:p>
+        </p:txBody>
+      </p:sp>
+      <p:sp>
+        <p:nvSpPr>
+          <p:cNvPr id="11" name="TextBox 10"/>
+          <p:cNvSpPr txBox="1"/>
+          <p:nvPr/>
+        </p:nvSpPr>
+        <p:spPr>
+          <a:xfrm>
+            <a:off x="594360" y="4699638"/>
+            <a:ext cx="7955279" cy="308415"/>
+          </a:xfrm>
+          <a:prstGeom prst="rect">
+            <a:avLst/>
+          </a:prstGeom>
+          <a:noFill/>
+        </p:spPr>
+        <p:txBody>
+          <a:bodyPr wrap="square" anchor="t" lIns="0" rIns="0" tIns="0" bIns="0">
+            <a:spAutoFit/>
+          </a:bodyPr>
+          <a:lstStyle/>
+          <a:p>
+            <a:pPr>
+              <a:lnSpc>
+                <a:spcPct val="100000"/>
+              </a:lnSpc>
+              <a:spcBef>
+                <a:spcPts val="0"/>
+              </a:spcBef>
+              <a:spcAft>
+                <a:spcPts val="0"/>
+              </a:spcAft>
+              <a:buNone/>
+            </a:pPr>
+            <a:r>
+              <a:rPr sz="1050" b="0" lang="ja-JP">
+                <a:solidFill>
+                  <a:srgbClr val="626669"/>
+                </a:solidFill>
+                <a:latin typeface="Noto Sans"/>
+                <a:ea typeface="Noto Sans CJK JP"/>
+                <a:hlinkClick r:id="rId3"/>
+              </a:rPr>
+              <a:t>https://arxiv.org/abs/2006.07159</a:t>
+            </a:r>
+          </a:p>
+        </p:txBody>
+      </p:sp>
+    </p:spTree>
+  </p:cSld>
+  <p:clrMapOvr>
+    <a:masterClrMapping/>
+  </p:clrMapOvr>
+</p:sld>
+</file>
+
+<file path=ppt/slides/slide69.xml><?xml version="1.0" encoding="utf-8"?>
+<p:sld xmlns:a="http://schemas.openxmlformats.org/drawingml/2006/main" xmlns:p="http://schemas.openxmlformats.org/presentationml/2006/main" xmlns:r="http://schemas.openxmlformats.org/officeDocument/2006/relationships">
+  <p:cSld>
+    <p:spTree>
+      <p:nvGrpSpPr>
+        <p:cNvPr id="1" name=""/>
+        <p:cNvGrpSpPr/>
+        <p:nvPr/>
+      </p:nvGrpSpPr>
+      <p:grpSpPr/>
+      <p:sp>
+        <p:nvSpPr>
+          <p:cNvPr id="2" name="Title 1"/>
+          <p:cNvSpPr>
+            <a:spLocks noGrp="1"/>
+          </p:cNvSpPr>
+          <p:nvPr>
+            <p:ph type="title"/>
+          </p:nvPr>
+        </p:nvSpPr>
+        <p:spPr/>
+        <p:txBody>
+          <a:bodyPr/>
+          <a:lstStyle/>
+          <a:p>
+            <a:r>
+              <a:rPr sz="2800">
+                <a:latin typeface="Noto Sans"/>
+              </a:rPr>
+              <a:t>参考文献</a:t>
+            </a:r>
+          </a:p>
+        </p:txBody>
+      </p:sp>
+      <p:sp>
+        <p:nvSpPr>
+          <p:cNvPr id="3" name="Title 2"/>
+          <p:cNvSpPr>
+            <a:spLocks noGrp="1"/>
+          </p:cNvSpPr>
+          <p:nvPr>
+            <p:ph type="title" idx="2"/>
+          </p:nvPr>
+        </p:nvSpPr>
+        <p:spPr/>
+        <p:txBody>
+          <a:bodyPr/>
+          <a:lstStyle/>
+          <a:p>
+            <a:r>
+              <a:rPr sz="1400" b="1">
+                <a:solidFill>
+                  <a:srgbClr val="FFFEF8"/>
+                </a:solidFill>
+                <a:latin typeface="Noto Sans"/>
+                <a:ea typeface="Noto Sans CJK JP"/>
+              </a:rPr>
+              <a:t>Appendix: 7 参考文献</a:t>
+            </a:r>
+          </a:p>
+        </p:txBody>
+      </p:sp>
+      <p:sp>
+        <p:nvSpPr>
+          <p:cNvPr id="4" name="TextBox 3"/>
+          <p:cNvSpPr txBox="1"/>
+          <p:nvPr/>
+        </p:nvSpPr>
+        <p:spPr>
+          <a:xfrm>
+            <a:off x="594360" y="1327691"/>
+            <a:ext cx="7955279" cy="842643"/>
+          </a:xfrm>
+          <a:prstGeom prst="rect">
+            <a:avLst/>
+          </a:prstGeom>
+          <a:noFill/>
+        </p:spPr>
+        <p:txBody>
+          <a:bodyPr wrap="square" anchor="t" lIns="0" rIns="0" tIns="0" bIns="0">
+            <a:spAutoFit/>
+          </a:bodyPr>
+          <a:lstStyle/>
+          <a:p>
+            <a:pPr>
+              <a:lnSpc>
+                <a:spcPct val="100000"/>
+              </a:lnSpc>
+              <a:spcBef>
+                <a:spcPts val="0"/>
+              </a:spcBef>
+              <a:spcAft>
+                <a:spcPts val="0"/>
+              </a:spcAft>
+              <a:buNone/>
+            </a:pPr>
+            <a:r>
+              <a:rPr sz="2200" b="1" lang="ja-JP">
+                <a:solidFill>
+                  <a:srgbClr val="303437"/>
+                </a:solidFill>
+                <a:latin typeface="Noto Sans"/>
+                <a:ea typeface="Noto Sans CJK JP"/>
+              </a:rPr>
+              <a:t>Benchmarking Neural Network Robustness to Common Corruptions and Perturbations</a:t>
+            </a:r>
+          </a:p>
+        </p:txBody>
+      </p:sp>
+      <p:sp>
+        <p:nvSpPr>
+          <p:cNvPr id="5" name="TextBox 4"/>
+          <p:cNvSpPr txBox="1"/>
+          <p:nvPr/>
+        </p:nvSpPr>
+        <p:spPr>
+          <a:xfrm>
+            <a:off x="594360" y="2100753"/>
+            <a:ext cx="7955279" cy="395213"/>
+          </a:xfrm>
+          <a:prstGeom prst="rect">
+            <a:avLst/>
+          </a:prstGeom>
+          <a:noFill/>
+        </p:spPr>
+        <p:txBody>
+          <a:bodyPr wrap="square" anchor="t" lIns="0" rIns="0" tIns="0" bIns="0">
+            <a:spAutoFit/>
+          </a:bodyPr>
+          <a:lstStyle/>
+          <a:p>
+            <a:pPr>
+              <a:lnSpc>
+                <a:spcPct val="100000"/>
+              </a:lnSpc>
+              <a:spcBef>
+                <a:spcPts val="0"/>
+              </a:spcBef>
+              <a:spcAft>
+                <a:spcPts val="0"/>
+              </a:spcAft>
+              <a:buNone/>
+            </a:pPr>
+            <a:r>
+              <a:rPr sz="1550" b="0" lang="ja-JP">
+                <a:solidFill>
+                  <a:srgbClr val="303437"/>
+                </a:solidFill>
+                <a:latin typeface="Noto Sans"/>
+                <a:ea typeface="Noto Sans CJK JP"/>
+              </a:rPr>
+              <a:t>Hendrycks, D., &amp; Dietterich, T. (2019). ICLR.</a:t>
+            </a:r>
+          </a:p>
+        </p:txBody>
+      </p:sp>
+      <p:sp>
+        <p:nvSpPr>
+          <p:cNvPr id="6" name="TextBox 5"/>
+          <p:cNvSpPr txBox="1"/>
+          <p:nvPr/>
+        </p:nvSpPr>
+        <p:spPr>
+          <a:xfrm>
+            <a:off x="594360" y="2485529"/>
+            <a:ext cx="7955279" cy="799958"/>
+          </a:xfrm>
+          <a:prstGeom prst="rect">
+            <a:avLst/>
+          </a:prstGeom>
+          <a:noFill/>
+        </p:spPr>
+        <p:txBody>
+          <a:bodyPr wrap="square" anchor="t" lIns="0" rIns="0" tIns="0" bIns="0">
+            <a:spAutoFit/>
+          </a:bodyPr>
+          <a:lstStyle/>
+          <a:p>
+            <a:pPr>
+              <a:lnSpc>
+                <a:spcPct val="100000"/>
+              </a:lnSpc>
+              <a:spcBef>
+                <a:spcPts val="0"/>
+              </a:spcBef>
+              <a:spcAft>
+                <a:spcPts val="0"/>
+              </a:spcAft>
+              <a:buNone/>
+            </a:pPr>
+            <a:r>
+              <a:rPr sz="2000" b="0" lang="ja-JP">
+                <a:solidFill>
+                  <a:srgbClr val="303437"/>
+                </a:solidFill>
+                <a:latin typeface="Noto Sans"/>
+                <a:ea typeface="Noto Sans CJK JP"/>
+              </a:rPr>
+              <a:t>ImageNet-CとImageNet-Pの提案論文。汚損や連続的な変化に対する頑健性を評価する。</a:t>
+            </a:r>
+          </a:p>
+        </p:txBody>
+      </p:sp>
+      <p:sp>
+        <p:nvSpPr>
+          <p:cNvPr id="7" name="TextBox 6"/>
+          <p:cNvSpPr txBox="1"/>
+          <p:nvPr/>
+        </p:nvSpPr>
+        <p:spPr>
+          <a:xfrm>
+            <a:off x="594360" y="3190946"/>
+            <a:ext cx="7955279" cy="317236"/>
+          </a:xfrm>
+          <a:prstGeom prst="rect">
+            <a:avLst/>
+          </a:prstGeom>
+          <a:noFill/>
+        </p:spPr>
+        <p:txBody>
+          <a:bodyPr wrap="square" anchor="t" lIns="0" rIns="0" tIns="0" bIns="0">
+            <a:spAutoFit/>
+          </a:bodyPr>
+          <a:lstStyle/>
+          <a:p>
+            <a:pPr>
+              <a:lnSpc>
+                <a:spcPct val="100000"/>
+              </a:lnSpc>
+              <a:spcBef>
+                <a:spcPts val="0"/>
+              </a:spcBef>
+              <a:spcAft>
+                <a:spcPts val="0"/>
+              </a:spcAft>
+              <a:buNone/>
+            </a:pPr>
+            <a:r>
+              <a:rPr sz="1100" b="0" lang="ja-JP">
+                <a:solidFill>
+                  <a:srgbClr val="626669"/>
+                </a:solidFill>
+                <a:latin typeface="Noto Sans"/>
+                <a:ea typeface="Noto Sans CJK JP"/>
+                <a:hlinkClick r:id="rId2"/>
               </a:rPr>
               <a:t>https://arxiv.org/abs/1903.12261</a:t>
             </a:r>

--- a/slides/datasets-in-10-minutes-imagenet.pptx
+++ b/slides/datasets-in-10-minutes-imagenet.pptx
@@ -7342,7 +7342,7 @@
                 <a:ea typeface="Noto Sans CJK JP"/>
                 <a:cs typeface="Noto Sans"/>
               </a:rPr>
-              <a:t>1 ImageNet-1kの画像分類とカテゴリ</a:t>
+              <a:t>1. ImageNet-1kの画像分類とカテゴリ</a:t>
             </a:r>
             <a:endParaRPr sz="1400" lang="ja-JP">
               <a:latin typeface="Noto Sans"/>
@@ -7845,7 +7845,7 @@
                 <a:ea typeface="Noto Sans CJK JP"/>
                 <a:cs typeface="Noto Sans"/>
               </a:rPr>
-              <a:t>1 ImageNet-1kの画像分類とカテゴリ</a:t>
+              <a:t>1. ImageNet-1kの画像分類とカテゴリ</a:t>
             </a:r>
             <a:endParaRPr sz="1400" lang="ja-JP">
               <a:latin typeface="Noto Sans"/>
@@ -8176,7 +8176,7 @@
                 <a:ea typeface="Noto Sans CJK JP"/>
                 <a:cs typeface="Noto Sans"/>
               </a:rPr>
-              <a:t>2 ImageNetの収集方法と画像数</a:t>
+              <a:t>2. ImageNetの収集方法と画像数</a:t>
             </a:r>
             <a:endParaRPr sz="4000" lang="ja-JP">
               <a:latin typeface="Noto Sans"/>
@@ -8221,7 +8221,7 @@
                 <a:ea typeface="Noto Sans CJK JP"/>
                 <a:cs typeface="Noto Sans"/>
               </a:rPr>
-              <a:t>2 ImageNetの収集方法と画像数</a:t>
+              <a:t>2. ImageNetの収集方法と画像数</a:t>
             </a:r>
           </a:p>
         </p:txBody>
@@ -8332,7 +8332,7 @@
                 <a:ea typeface="Noto Sans CJK JP"/>
                 <a:cs typeface="Noto Sans"/>
               </a:rPr>
-              <a:t>2 ImageNetの収集方法と画像数</a:t>
+              <a:t>2. ImageNetの収集方法と画像数</a:t>
             </a:r>
           </a:p>
         </p:txBody>
@@ -8706,7 +8706,7 @@
                 <a:ea typeface="Noto Sans CJK JP"/>
                 <a:cs typeface="Noto Sans"/>
               </a:rPr>
-              <a:t>2 ImageNetの収集方法と画像数</a:t>
+              <a:t>2. ImageNetの収集方法と画像数</a:t>
             </a:r>
             <a:endParaRPr sz="1400" lang="ja-JP">
               <a:latin typeface="Noto Sans"/>
@@ -9082,7 +9082,7 @@
                 <a:ea typeface="Noto Sans CJK JP"/>
                 <a:cs typeface="Noto Sans"/>
               </a:rPr>
-              <a:t>2 ImageNetの収集方法と画像数</a:t>
+              <a:t>2. ImageNetの収集方法と画像数</a:t>
             </a:r>
             <a:endParaRPr sz="1400" lang="ja-JP">
               <a:latin typeface="Noto Sans"/>
@@ -9515,7 +9515,7 @@
                 <a:ea typeface="Noto Sans CJK JP"/>
                 <a:cs typeface="Noto Sans"/>
               </a:rPr>
-              <a:t>2 ImageNetの収集方法と画像数</a:t>
+              <a:t>2. ImageNetの収集方法と画像数</a:t>
             </a:r>
             <a:endParaRPr sz="1400" lang="ja-JP">
               <a:latin typeface="Noto Sans"/>
@@ -9948,7 +9948,7 @@
                 <a:ea typeface="Noto Sans CJK JP"/>
                 <a:cs typeface="Noto Sans"/>
               </a:rPr>
-              <a:t>2 ImageNetの収集方法と画像数</a:t>
+              <a:t>2. ImageNetの収集方法と画像数</a:t>
             </a:r>
             <a:endParaRPr sz="1400" lang="ja-JP">
               <a:latin typeface="Noto Sans"/>
@@ -10353,7 +10353,7 @@
                 <a:ea typeface="Noto Sans CJK JP"/>
                 <a:cs typeface="Noto Sans"/>
               </a:rPr>
-              <a:t>2 ImageNetの収集方法と画像数</a:t>
+              <a:t>2. ImageNetの収集方法と画像数</a:t>
             </a:r>
             <a:endParaRPr sz="1400" lang="ja-JP">
               <a:latin typeface="Noto Sans"/>
@@ -11425,7 +11425,7 @@
                 <a:ea typeface="Noto Sans CJK JP"/>
                 <a:cs typeface="Noto Sans"/>
               </a:rPr>
-              <a:t>2 ImageNetの収集方法と画像数</a:t>
+              <a:t>2. ImageNetの収集方法と画像数</a:t>
             </a:r>
             <a:endParaRPr sz="1400" lang="ja-JP">
               <a:latin typeface="Noto Sans"/>
@@ -12123,7 +12123,7 @@
                 <a:ea typeface="Noto Sans CJK JP"/>
                 <a:cs typeface="Noto Sans"/>
               </a:rPr>
-              <a:t>2 ImageNetの収集方法と画像数</a:t>
+              <a:t>2. ImageNetの収集方法と画像数</a:t>
             </a:r>
           </a:p>
         </p:txBody>
@@ -12500,7 +12500,7 @@
                 <a:ea typeface="Noto Sans CJK JP"/>
                 <a:cs typeface="Noto Sans"/>
               </a:rPr>
-              <a:t>2 ImageNetの収集方法と画像数</a:t>
+              <a:t>2. ImageNetの収集方法と画像数</a:t>
             </a:r>
             <a:endParaRPr sz="1400" lang="ja-JP">
               <a:latin typeface="Noto Sans"/>
@@ -12764,7 +12764,7 @@
                 <a:ea typeface="Noto Sans CJK JP"/>
                 <a:cs typeface="Noto Sans"/>
               </a:rPr>
-              <a:t>2 ImageNetの収集方法と画像数</a:t>
+              <a:t>2. ImageNetの収集方法と画像数</a:t>
             </a:r>
           </a:p>
         </p:txBody>
@@ -13033,7 +13033,7 @@
                 <a:ea typeface="Noto Sans CJK JP"/>
                 <a:cs typeface="Noto Sans"/>
               </a:rPr>
-              <a:t>2 ImageNetの収集方法と画像数</a:t>
+              <a:t>2. ImageNetの収集方法と画像数</a:t>
             </a:r>
             <a:endParaRPr sz="1400" lang="ja-JP">
               <a:latin typeface="Noto Sans"/>
@@ -13760,7 +13760,7 @@
                 <a:ea typeface="Noto Sans CJK JP"/>
                 <a:cs typeface="Noto Sans"/>
               </a:rPr>
-              <a:t>3 画像分類の評価指標とモデル性能</a:t>
+              <a:t>3. 画像分類の評価指標とモデル性能</a:t>
             </a:r>
             <a:endParaRPr sz="4000" lang="ja-JP">
               <a:latin typeface="Noto Sans"/>
@@ -13805,7 +13805,7 @@
                 <a:ea typeface="Noto Sans CJK JP"/>
                 <a:cs typeface="Noto Sans"/>
               </a:rPr>
-              <a:t>3 画像分類の評価指標とモデル性能</a:t>
+              <a:t>3. 画像分類の評価指標とモデル性能</a:t>
             </a:r>
           </a:p>
         </p:txBody>
@@ -13930,7 +13930,7 @@
                 <a:ea typeface="Noto Sans CJK JP"/>
                 <a:cs typeface="Noto Sans"/>
               </a:rPr>
-              <a:t>3 画像分類の評価指標とモデル性能</a:t>
+              <a:t>3. 画像分類の評価指標とモデル性能</a:t>
             </a:r>
             <a:endParaRPr sz="1400" lang="ja-JP">
               <a:latin typeface="Noto Sans"/>
@@ -14954,7 +14954,7 @@
                 <a:ea typeface="Noto Sans CJK JP"/>
                 <a:cs typeface="Noto Sans"/>
               </a:rPr>
-              <a:t>3 画像分類の評価指標とモデル性能</a:t>
+              <a:t>3. 画像分類の評価指標とモデル性能</a:t>
             </a:r>
             <a:endParaRPr sz="1400" lang="ja-JP">
               <a:latin typeface="Noto Sans"/>
@@ -15317,7 +15317,7 @@
                 <a:ea typeface="Noto Sans CJK JP"/>
                 <a:cs typeface="Noto Sans"/>
               </a:rPr>
-              <a:t>3 画像分類の評価指標とモデル性能</a:t>
+              <a:t>3. 画像分類の評価指標とモデル性能</a:t>
             </a:r>
           </a:p>
         </p:txBody>
@@ -15688,7 +15688,7 @@
                 <a:ea typeface="Noto Sans CJK JP"/>
                 <a:cs typeface="Noto Sans"/>
               </a:rPr>
-              <a:t>3 画像分類の評価指標とモデル性能</a:t>
+              <a:t>3. 画像分類の評価指標とモデル性能</a:t>
             </a:r>
             <a:endParaRPr sz="1400" lang="ja-JP">
               <a:latin typeface="Noto Sans"/>
@@ -16760,7 +16760,7 @@
                 <a:ea typeface="Noto Sans CJK JP"/>
                 <a:cs typeface="Noto Sans"/>
               </a:rPr>
-              <a:t>3 画像分類の評価指標とモデル性能</a:t>
+              <a:t>3. 画像分類の評価指標とモデル性能</a:t>
             </a:r>
             <a:endParaRPr sz="1400" lang="ja-JP">
               <a:latin typeface="Noto Sans"/>
@@ -17776,7 +17776,7 @@
                 <a:ea typeface="Noto Sans CJK JP"/>
                 <a:cs typeface="Noto Sans"/>
               </a:rPr>
-              <a:t>1 ImageNet-1kの画像分類とカテゴリ</a:t>
+              <a:t>1. ImageNet-1kの画像分類とカテゴリ</a:t>
             </a:r>
             <a:endParaRPr sz="4000" lang="ja-JP">
               <a:latin typeface="Noto Sans"/>
@@ -17821,7 +17821,7 @@
                 <a:ea typeface="Noto Sans CJK JP"/>
                 <a:cs typeface="Noto Sans"/>
               </a:rPr>
-              <a:t>1 ImageNet-1kの画像分類とカテゴリ</a:t>
+              <a:t>1. ImageNet-1kの画像分類とカテゴリ</a:t>
             </a:r>
           </a:p>
         </p:txBody>
@@ -17932,7 +17932,7 @@
                 <a:ea typeface="Noto Sans CJK JP"/>
                 <a:cs typeface="Noto Sans"/>
               </a:rPr>
-              <a:t>3 画像分類の評価指標とモデル性能</a:t>
+              <a:t>3. 画像分類の評価指標とモデル性能</a:t>
             </a:r>
           </a:p>
         </p:txBody>
@@ -18303,7 +18303,7 @@
                 <a:ea typeface="Noto Sans CJK JP"/>
                 <a:cs typeface="Noto Sans"/>
               </a:rPr>
-              <a:t>3 画像分類の評価指標とモデル性能</a:t>
+              <a:t>3. 画像分類の評価指標とモデル性能</a:t>
             </a:r>
             <a:endParaRPr sz="1400" lang="ja-JP">
               <a:latin typeface="Noto Sans"/>
@@ -19319,7 +19319,7 @@
                 <a:ea typeface="Noto Sans CJK JP"/>
                 <a:cs typeface="Noto Sans"/>
               </a:rPr>
-              <a:t>4 ImageNetの利用動向と後続データ</a:t>
+              <a:t>4. ImageNetの利用動向と後続データ</a:t>
             </a:r>
             <a:endParaRPr sz="4000" lang="ja-JP">
               <a:latin typeface="Noto Sans"/>
@@ -19364,7 +19364,7 @@
                 <a:ea typeface="Noto Sans CJK JP"/>
                 <a:cs typeface="Noto Sans"/>
               </a:rPr>
-              <a:t>4 ImageNetの利用動向と後続データ</a:t>
+              <a:t>4. ImageNetの利用動向と後続データ</a:t>
             </a:r>
           </a:p>
         </p:txBody>
@@ -19488,7 +19488,7 @@
                 <a:ea typeface="Noto Sans CJK JP"/>
                 <a:cs typeface="Noto Sans"/>
               </a:rPr>
-              <a:t>4 ImageNetの利用動向と後続データ</a:t>
+              <a:t>4. ImageNetの利用動向と後続データ</a:t>
             </a:r>
             <a:endParaRPr sz="1400" lang="ja-JP">
               <a:latin typeface="Noto Sans"/>
@@ -19974,7 +19974,7 @@
                 <a:ea typeface="Noto Sans CJK JP"/>
                 <a:cs typeface="Noto Sans"/>
               </a:rPr>
-              <a:t>4 ImageNetの利用動向と後続データ</a:t>
+              <a:t>4. ImageNetの利用動向と後続データ</a:t>
             </a:r>
             <a:endParaRPr sz="1400" lang="ja-JP">
               <a:latin typeface="Noto Sans"/>
@@ -20350,7 +20350,7 @@
                 <a:ea typeface="Noto Sans CJK JP"/>
                 <a:cs typeface="Noto Sans"/>
               </a:rPr>
-              <a:t>4 ImageNetの利用動向と後続データ</a:t>
+              <a:t>4. ImageNetの利用動向と後続データ</a:t>
             </a:r>
             <a:endParaRPr sz="1400" lang="ja-JP">
               <a:latin typeface="Noto Sans"/>
@@ -20766,7 +20766,7 @@
                 <a:ea typeface="Noto Sans CJK JP"/>
                 <a:cs typeface="Noto Sans"/>
               </a:rPr>
-              <a:t>5 配布画像の入手方法と利用条件</a:t>
+              <a:t>5. 配布画像の入手方法と利用条件</a:t>
             </a:r>
             <a:endParaRPr sz="4000" lang="ja-JP">
               <a:latin typeface="Noto Sans"/>
@@ -20811,7 +20811,7 @@
                 <a:ea typeface="Noto Sans CJK JP"/>
                 <a:cs typeface="Noto Sans"/>
               </a:rPr>
-              <a:t>5 配布画像の入手方法と利用条件</a:t>
+              <a:t>5. 配布画像の入手方法と利用条件</a:t>
             </a:r>
           </a:p>
         </p:txBody>
@@ -20938,7 +20938,7 @@
                 <a:ea typeface="Noto Sans CJK JP"/>
                 <a:cs typeface="Noto Sans"/>
               </a:rPr>
-              <a:t>5 配布画像の入手方法と利用条件</a:t>
+              <a:t>5. 配布画像の入手方法と利用条件</a:t>
             </a:r>
             <a:endParaRPr sz="1400" lang="ja-JP">
               <a:latin typeface="Noto Sans"/>
@@ -21314,7 +21314,7 @@
                 <a:ea typeface="Noto Sans CJK JP"/>
                 <a:cs typeface="Noto Sans"/>
               </a:rPr>
-              <a:t>5 配布画像の入手方法と利用条件</a:t>
+              <a:t>5. 配布画像の入手方法と利用条件</a:t>
             </a:r>
             <a:endParaRPr sz="1400" lang="ja-JP">
               <a:latin typeface="Noto Sans"/>
@@ -21719,7 +21719,7 @@
                 <a:ea typeface="Noto Sans CJK JP"/>
                 <a:cs typeface="Noto Sans"/>
               </a:rPr>
-              <a:t>1 ImageNet-1kの画像分類とカテゴリ</a:t>
+              <a:t>1. ImageNet-1kの画像分類とカテゴリ</a:t>
             </a:r>
             <a:endParaRPr sz="1400" lang="ja-JP">
               <a:latin typeface="Noto Sans"/>
@@ -22338,7 +22338,7 @@
                 <a:ea typeface="Noto Sans CJK JP"/>
                 <a:cs typeface="Noto Sans"/>
               </a:rPr>
-              <a:t>Appendix: 1 開発者の研究と発表先</a:t>
+              <a:t>Appendix: 1. 開発者の研究と発表先</a:t>
             </a:r>
             <a:endParaRPr sz="1400" lang="ja-JP">
               <a:latin typeface="Noto Sans"/>
@@ -22777,7 +22777,7 @@
                 <a:ea typeface="Noto Sans CJK JP"/>
                 <a:cs typeface="Noto Sans"/>
               </a:rPr>
-              <a:t>Appendix: 2 生物・人工物のカテゴリの例</a:t>
+              <a:t>Appendix: 2. 生物・人工物のカテゴリの例</a:t>
             </a:r>
             <a:endParaRPr sz="1400" lang="ja-JP">
               <a:latin typeface="Noto Sans"/>
@@ -24314,7 +24314,7 @@
                 <a:ea typeface="Noto Sans CJK JP"/>
                 <a:cs typeface="Noto Sans"/>
               </a:rPr>
-              <a:t>Appendix: 2 生物・人工物のカテゴリの例</a:t>
+              <a:t>Appendix: 2. 生物・人工物のカテゴリの例</a:t>
             </a:r>
             <a:endParaRPr sz="1400" lang="ja-JP">
               <a:latin typeface="Noto Sans"/>
@@ -25851,7 +25851,7 @@
                 <a:ea typeface="Noto Sans CJK JP"/>
                 <a:cs typeface="Noto Sans"/>
               </a:rPr>
-              <a:t>Appendix: 2 生物・人工物のカテゴリの例</a:t>
+              <a:t>Appendix: 2. 生物・人工物のカテゴリの例</a:t>
             </a:r>
             <a:endParaRPr sz="1400" lang="ja-JP">
               <a:latin typeface="Noto Sans"/>
@@ -27388,7 +27388,7 @@
                 <a:ea typeface="Noto Sans CJK JP"/>
                 <a:cs typeface="Noto Sans"/>
               </a:rPr>
-              <a:t>Appendix: 2 生物・人工物のカテゴリの例</a:t>
+              <a:t>Appendix: 2. 生物・人工物のカテゴリの例</a:t>
             </a:r>
             <a:endParaRPr sz="1400" lang="ja-JP">
               <a:latin typeface="Noto Sans"/>
@@ -28925,7 +28925,7 @@
                 <a:ea typeface="Noto Sans CJK JP"/>
                 <a:cs typeface="Noto Sans"/>
               </a:rPr>
-              <a:t>Appendix: 2 生物・人工物のカテゴリの例</a:t>
+              <a:t>Appendix: 2. 生物・人工物のカテゴリの例</a:t>
             </a:r>
             <a:endParaRPr sz="1400" lang="ja-JP">
               <a:latin typeface="Noto Sans"/>
@@ -30462,7 +30462,7 @@
                 <a:ea typeface="Noto Sans CJK JP"/>
                 <a:cs typeface="Noto Sans"/>
               </a:rPr>
-              <a:t>Appendix: 3 画像と正解カテゴリの追加例</a:t>
+              <a:t>Appendix: 3. 画像と正解カテゴリの追加例</a:t>
             </a:r>
             <a:endParaRPr sz="1400" lang="ja-JP">
               <a:latin typeface="Noto Sans"/>
@@ -30773,7 +30773,7 @@
                 <a:ea typeface="Noto Sans CJK JP"/>
                 <a:cs typeface="Noto Sans"/>
               </a:rPr>
-              <a:t>Appendix: 3 画像と正解カテゴリの追加例</a:t>
+              <a:t>Appendix: 3. 画像と正解カテゴリの追加例</a:t>
             </a:r>
             <a:endParaRPr sz="1400" lang="ja-JP">
               <a:latin typeface="Noto Sans"/>
@@ -31160,7 +31160,7 @@
                 <a:ea typeface="Noto Sans CJK JP"/>
                 <a:cs typeface="Noto Sans"/>
               </a:rPr>
-              <a:t>Appendix: 3 画像と正解カテゴリの追加例</a:t>
+              <a:t>Appendix: 3. 画像と正解カテゴリの追加例</a:t>
             </a:r>
             <a:endParaRPr sz="1400" lang="ja-JP">
               <a:latin typeface="Noto Sans"/>
@@ -31533,7 +31533,7 @@
                 <a:ea typeface="Noto Sans CJK JP"/>
                 <a:cs typeface="Noto Sans"/>
               </a:rPr>
-              <a:t>1 ImageNet-1kの画像分類とカテゴリ</a:t>
+              <a:t>1. ImageNet-1kの画像分類とカテゴリ</a:t>
             </a:r>
           </a:p>
         </p:txBody>
@@ -31905,7 +31905,7 @@
                 <a:ea typeface="Noto Sans CJK JP"/>
                 <a:cs typeface="Noto Sans"/>
               </a:rPr>
-              <a:t>Appendix: 3 画像と正解カテゴリの追加例</a:t>
+              <a:t>Appendix: 3. 画像と正解カテゴリの追加例</a:t>
             </a:r>
             <a:endParaRPr sz="1400" lang="ja-JP">
               <a:latin typeface="Noto Sans"/>
@@ -32292,7 +32292,7 @@
                 <a:ea typeface="Noto Sans CJK JP"/>
                 <a:cs typeface="Noto Sans"/>
               </a:rPr>
-              <a:t>Appendix: 3 画像と正解カテゴリの追加例</a:t>
+              <a:t>Appendix: 3. 画像と正解カテゴリの追加例</a:t>
             </a:r>
             <a:endParaRPr sz="1400" lang="ja-JP">
               <a:latin typeface="Noto Sans"/>
@@ -32679,7 +32679,7 @@
                 <a:ea typeface="Noto Sans CJK JP"/>
                 <a:cs typeface="Noto Sans"/>
               </a:rPr>
-              <a:t>Appendix: 3 画像と正解カテゴリの追加例</a:t>
+              <a:t>Appendix: 3. 画像と正解カテゴリの追加例</a:t>
             </a:r>
             <a:endParaRPr sz="1400" lang="ja-JP">
               <a:latin typeface="Noto Sans"/>
@@ -33066,7 +33066,7 @@
                 <a:ea typeface="Noto Sans CJK JP"/>
                 <a:cs typeface="Noto Sans"/>
               </a:rPr>
-              <a:t>Appendix: 3 画像と正解カテゴリの追加例</a:t>
+              <a:t>Appendix: 3. 画像と正解カテゴリの追加例</a:t>
             </a:r>
             <a:endParaRPr sz="1400" lang="ja-JP">
               <a:latin typeface="Noto Sans"/>
@@ -33453,7 +33453,7 @@
                 <a:ea typeface="Noto Sans CJK JP"/>
                 <a:cs typeface="Noto Sans"/>
               </a:rPr>
-              <a:t>Appendix: 3 画像と正解カテゴリの追加例</a:t>
+              <a:t>Appendix: 3. 画像と正解カテゴリの追加例</a:t>
             </a:r>
             <a:endParaRPr sz="1400" lang="ja-JP">
               <a:latin typeface="Noto Sans"/>
@@ -33764,7 +33764,7 @@
                 <a:ea typeface="Noto Sans CJK JP"/>
                 <a:cs typeface="Noto Sans"/>
               </a:rPr>
-              <a:t>Appendix: 3 画像と正解カテゴリの追加例</a:t>
+              <a:t>Appendix: 3. 画像と正解カテゴリの追加例</a:t>
             </a:r>
             <a:endParaRPr sz="1400" lang="ja-JP">
               <a:latin typeface="Noto Sans"/>
@@ -34151,7 +34151,7 @@
                 <a:ea typeface="Noto Sans CJK JP"/>
                 <a:cs typeface="Noto Sans"/>
               </a:rPr>
-              <a:t>Appendix: 4 1,000クラスの学習画像数の統計</a:t>
+              <a:t>Appendix: 4. 1,000クラスの学習画像数の統計</a:t>
             </a:r>
             <a:endParaRPr sz="1400" lang="ja-JP">
               <a:latin typeface="Noto Sans"/>
@@ -35241,7 +35241,7 @@
                 <a:ea typeface="Noto Sans CJK JP"/>
                 <a:cs typeface="Noto Sans"/>
               </a:rPr>
-              <a:t>Appendix: 5 小規模版Imagenetteの画像サイズ</a:t>
+              <a:t>Appendix: 5. 小規模版Imagenetteの画像サイズ</a:t>
             </a:r>
             <a:endParaRPr sz="1400" lang="ja-JP">
               <a:latin typeface="Noto Sans"/>
@@ -35598,7 +35598,7 @@
                 <a:ea typeface="Noto Sans CJK JP"/>
                 <a:cs typeface="Noto Sans"/>
               </a:rPr>
-              <a:t>Appendix: 5 小規模版Imagenetteの画像サイズ</a:t>
+              <a:t>Appendix: 5. 小規模版Imagenetteの画像サイズ</a:t>
             </a:r>
             <a:endParaRPr sz="1400" lang="ja-JP">
               <a:latin typeface="Noto Sans"/>
@@ -37371,7 +37371,7 @@
                 <a:ea typeface="Noto Sans CJK JP"/>
                 <a:cs typeface="Noto Sans"/>
               </a:rPr>
-              <a:t>Appendix: 5 小規模版Imagenetteの画像サイズ</a:t>
+              <a:t>Appendix: 5. 小規模版Imagenetteの画像サイズ</a:t>
             </a:r>
             <a:endParaRPr sz="1400" lang="ja-JP">
               <a:latin typeface="Noto Sans"/>
@@ -39146,7 +39146,7 @@
                 <a:ea typeface="Noto Sans CJK JP"/>
                 <a:cs typeface="Noto Sans"/>
               </a:rPr>
-              <a:t>1 ImageNet-1kの画像分類とカテゴリ</a:t>
+              <a:t>1. ImageNet-1kの画像分類とカテゴリ</a:t>
             </a:r>
             <a:endParaRPr sz="1400" lang="ja-JP">
               <a:latin typeface="Noto Sans"/>
@@ -39640,7 +39640,7 @@
                 <a:ea typeface="Noto Sans CJK JP"/>
                 <a:cs typeface="Noto Sans"/>
               </a:rPr>
-              <a:t>Appendix: 5 小規模版Imagenetteの画像サイズ</a:t>
+              <a:t>Appendix: 5. 小規模版Imagenetteの画像サイズ</a:t>
             </a:r>
             <a:endParaRPr sz="1400" lang="ja-JP">
               <a:latin typeface="Noto Sans"/>
@@ -40143,7 +40143,7 @@
                 <a:ea typeface="Noto Sans CJK JP"/>
                 <a:cs typeface="Noto Sans"/>
               </a:rPr>
-              <a:t>Appendix: 5 小規模版Imagenetteの画像サイズ</a:t>
+              <a:t>Appendix: 5. 小規模版Imagenetteの画像サイズ</a:t>
             </a:r>
             <a:endParaRPr sz="1400" lang="ja-JP">
               <a:latin typeface="Noto Sans"/>
@@ -40646,7 +40646,7 @@
                 <a:ea typeface="Noto Sans CJK JP"/>
                 <a:cs typeface="Noto Sans"/>
               </a:rPr>
-              <a:t>Appendix: 5 小規模版Imagenetteの画像サイズ</a:t>
+              <a:t>Appendix: 5. 小規模版Imagenetteの画像サイズ</a:t>
             </a:r>
             <a:endParaRPr sz="1400" lang="ja-JP">
               <a:latin typeface="Noto Sans"/>
@@ -41028,7 +41028,7 @@
                 <a:ea typeface="Noto Sans CJK JP"/>
                 <a:cs typeface="Noto Sans"/>
               </a:rPr>
-              <a:t>Appendix: 5 小規模版Imagenetteの画像サイズ</a:t>
+              <a:t>Appendix: 5. 小規模版Imagenetteの画像サイズ</a:t>
             </a:r>
             <a:endParaRPr sz="1400" lang="ja-JP">
               <a:latin typeface="Noto Sans"/>
@@ -42823,7 +42823,7 @@
                 <a:ea typeface="Noto Sans CJK JP"/>
                 <a:cs typeface="Noto Sans"/>
               </a:rPr>
-              <a:t>Appendix: 6 分類モデルの評価条件と前処理</a:t>
+              <a:t>Appendix: 6. 分類モデルの評価条件と前処理</a:t>
             </a:r>
             <a:endParaRPr sz="1400" lang="ja-JP">
               <a:latin typeface="Noto Sans"/>
@@ -43845,7 +43845,7 @@
                 <a:ea typeface="Noto Sans CJK JP"/>
                 <a:cs typeface="Noto Sans"/>
               </a:rPr>
-              <a:t>Appendix: 6 分類モデルの評価条件と前処理</a:t>
+              <a:t>Appendix: 6. 分類モデルの評価条件と前処理</a:t>
             </a:r>
             <a:endParaRPr sz="1400" lang="ja-JP">
               <a:latin typeface="Noto Sans"/>
@@ -45158,7 +45158,7 @@
                 <a:ea typeface="Noto Sans CJK JP"/>
                 <a:cs typeface="Noto Sans"/>
               </a:rPr>
-              <a:t>Appendix: 6 分類モデルの評価条件と前処理</a:t>
+              <a:t>Appendix: 6. 分類モデルの評価条件と前処理</a:t>
             </a:r>
             <a:endParaRPr sz="1400" lang="ja-JP">
               <a:latin typeface="Noto Sans"/>
@@ -45542,7 +45542,7 @@
                 <a:ea typeface="Noto Sans CJK JP"/>
                 <a:cs typeface="Noto Sans"/>
               </a:rPr>
-              <a:t>Appendix: 7 画像の読込コードと関連文献</a:t>
+              <a:t>Appendix: 7. 画像の読込コードと関連文献</a:t>
             </a:r>
             <a:endParaRPr sz="1400" lang="ja-JP">
               <a:latin typeface="Noto Sans"/>
@@ -46168,7 +46168,7 @@
                 <a:ea typeface="Noto Sans CJK JP"/>
                 <a:cs typeface="Noto Sans"/>
               </a:rPr>
-              <a:t>Appendix: 7 画像の読込コードと関連文献</a:t>
+              <a:t>Appendix: 7. 画像の読込コードと関連文献</a:t>
             </a:r>
             <a:endParaRPr sz="1400" lang="ja-JP">
               <a:latin typeface="Noto Sans"/>
@@ -46951,7 +46951,7 @@
                 <a:ea typeface="Noto Sans CJK JP"/>
                 <a:cs typeface="Noto Sans"/>
               </a:rPr>
-              <a:t>Appendix: 7 画像の読込コードと関連文献</a:t>
+              <a:t>Appendix: 7. 画像の読込コードと関連文献</a:t>
             </a:r>
             <a:endParaRPr sz="1400" lang="ja-JP">
               <a:latin typeface="Noto Sans"/>
@@ -47516,7 +47516,7 @@
                 <a:ea typeface="Noto Sans CJK JP"/>
                 <a:cs typeface="Noto Sans"/>
               </a:rPr>
-              <a:t>1 ImageNet-1kの画像分類とカテゴリ</a:t>
+              <a:t>1. ImageNet-1kの画像分類とカテゴリ</a:t>
             </a:r>
             <a:endParaRPr sz="1400" lang="ja-JP">
               <a:latin typeface="Noto Sans"/>
@@ -47977,7 +47977,7 @@
                 <a:ea typeface="Noto Sans CJK JP"/>
                 <a:cs typeface="Noto Sans"/>
               </a:rPr>
-              <a:t>Appendix: 7 参考文献</a:t>
+              <a:t>Appendix: 7. 参考文献</a:t>
             </a:r>
           </a:p>
         </p:txBody>
@@ -48481,7 +48481,7 @@
                 <a:ea typeface="Noto Sans CJK JP"/>
                 <a:cs typeface="Noto Sans"/>
               </a:rPr>
-              <a:t>Appendix: 7 参考文献</a:t>
+              <a:t>Appendix: 7. 参考文献</a:t>
             </a:r>
           </a:p>
         </p:txBody>
@@ -48985,7 +48985,7 @@
                 <a:ea typeface="Noto Sans CJK JP"/>
                 <a:cs typeface="Noto Sans"/>
               </a:rPr>
-              <a:t>Appendix: 7 参考文献</a:t>
+              <a:t>Appendix: 7. 参考文献</a:t>
             </a:r>
           </a:p>
         </p:txBody>
@@ -49489,7 +49489,7 @@
                 <a:ea typeface="Noto Sans CJK JP"/>
                 <a:cs typeface="Noto Sans"/>
               </a:rPr>
-              <a:t>Appendix: 7 参考文献</a:t>
+              <a:t>Appendix: 7. 参考文献</a:t>
             </a:r>
           </a:p>
         </p:txBody>
@@ -49993,7 +49993,7 @@
                 <a:ea typeface="Noto Sans CJK JP"/>
                 <a:cs typeface="Noto Sans"/>
               </a:rPr>
-              <a:t>Appendix: 7 参考文献</a:t>
+              <a:t>Appendix: 7. 参考文献</a:t>
             </a:r>
           </a:p>
         </p:txBody>
@@ -50309,7 +50309,7 @@
                 <a:ea typeface="Noto Sans CJK JP"/>
                 <a:cs typeface="Noto Sans"/>
               </a:rPr>
-              <a:t>1 ImageNet-1kの画像分類とカテゴリ</a:t>
+              <a:t>1. ImageNet-1kの画像分類とカテゴリ</a:t>
             </a:r>
             <a:endParaRPr sz="1400" lang="ja-JP">
               <a:latin typeface="Noto Sans"/>
@@ -50803,7 +50803,7 @@
                 <a:ea typeface="Noto Sans CJK JP"/>
                 <a:cs typeface="Noto Sans"/>
               </a:rPr>
-              <a:t>1 ImageNet-1kの画像分類とカテゴリ</a:t>
+              <a:t>1. ImageNet-1kの画像分類とカテゴリ</a:t>
             </a:r>
             <a:endParaRPr sz="1400" lang="ja-JP">
               <a:latin typeface="Noto Sans"/>

--- a/slides/datasets-in-10-minutes-imagenet.pptx
+++ b/slides/datasets-in-10-minutes-imagenet.pptx
@@ -31,11 +31,11 @@
     <p:sldId id="311" r:id="rId62"/>
     <p:sldId id="298" r:id="rId49"/>
     <p:sldId id="269" r:id="rId20"/>
-    <p:sldId id="329" r:id="rId77"/>
     <p:sldId id="270" r:id="rId21"/>
     <p:sldId id="299" r:id="rId50"/>
+    <p:sldId id="271" r:id="rId22"/>
+    <p:sldId id="329" r:id="rId77"/>
     <p:sldId id="330" r:id="rId78"/>
-    <p:sldId id="271" r:id="rId22"/>
     <p:sldId id="312" r:id="rId63"/>
     <p:sldId id="272" r:id="rId23"/>
     <p:sldId id="273" r:id="rId24"/>
@@ -11823,7 +11823,7 @@
         </p:nvSpPr>
         <p:spPr>
           <a:xfrm>
-            <a:off x="594360" y="1234440"/>
+            <a:off x="594360" y="1479613"/>
             <a:ext cx="7955279" cy="3749039"/>
           </a:xfrm>
           <a:prstGeom prst="rect">
@@ -21959,7 +21959,7 @@
         </p:nvSpPr>
         <p:spPr>
           <a:xfrm>
-            <a:off x="594360" y="914400"/>
+            <a:off x="594360" y="1073169"/>
             <a:ext cx="7955279" cy="3749039"/>
           </a:xfrm>
           <a:prstGeom prst="rect">

--- a/slides/datasets-in-10-minutes-imagenet.pptx
+++ b/slides/datasets-in-10-minutes-imagenet.pptx
@@ -782,8 +782,8 @@
         </p:nvSpPr>
         <p:spPr>
           <a:xfrm>
-            <a:off x="8607898" y="-10450"/>
-            <a:ext cx="548701" cy="479700"/>
+            <a:off x="8412480" y="7937"/>
+            <a:ext cx="640080" cy="480059"/>
           </a:xfrm>
           <a:prstGeom prst="rect">
             <a:avLst/>
@@ -794,10 +794,20 @@
           </a:ln>
         </p:spPr>
         <p:txBody>
-          <a:bodyPr anchor="ctr"/>
-          <a:lstStyle/>
-          <a:p>
-            <a:pPr algn="ctr"/>
+          <a:bodyPr anchor="ctr" lIns="0" tIns="0" bIns="0"/>
+          <a:lstStyle/>
+          <a:p>
+            <a:pPr algn="r">
+              <a:lnSpc>
+                <a:spcPct val="100000"/>
+              </a:lnSpc>
+              <a:spcBef>
+                <a:spcPts val="0"/>
+              </a:spcBef>
+              <a:spcAft>
+                <a:spcPts val="0"/>
+              </a:spcAft>
+            </a:pPr>
             <a:fld id="{00000000-1234-1234-1234-000000000999}" type="slidenum">
               <a:rPr lang="ja-JP" sz="1800" b="1">
                 <a:solidFill>
@@ -2245,8 +2255,8 @@
         </p:nvSpPr>
         <p:spPr>
           <a:xfrm>
-            <a:off x="8501908" y="28683"/>
-            <a:ext cx="548700" cy="393600"/>
+            <a:off x="8412480" y="7937"/>
+            <a:ext cx="640080" cy="480059"/>
           </a:xfrm>
           <a:prstGeom prst="rect">
             <a:avLst/>
@@ -2257,10 +2267,20 @@
           </a:ln>
         </p:spPr>
         <p:txBody>
-          <a:bodyPr anchor="ctr"/>
-          <a:lstStyle/>
-          <a:p>
-            <a:pPr algn="r"/>
+          <a:bodyPr anchor="ctr" lIns="0" tIns="0" bIns="0"/>
+          <a:lstStyle/>
+          <a:p>
+            <a:pPr algn="r">
+              <a:lnSpc>
+                <a:spcPct val="100000"/>
+              </a:lnSpc>
+              <a:spcBef>
+                <a:spcPts val="0"/>
+              </a:spcBef>
+              <a:spcAft>
+                <a:spcPts val="0"/>
+              </a:spcAft>
+            </a:pPr>
             <a:fld id="{00000000-1234-1234-1234-000000000999}" type="slidenum">
               <a:rPr lang="ja-JP" sz="1800" b="1">
                 <a:solidFill>
@@ -2938,8 +2958,8 @@
         </p:nvSpPr>
         <p:spPr>
           <a:xfrm>
-            <a:off x="8501908" y="28683"/>
-            <a:ext cx="548700" cy="393600"/>
+            <a:off x="8412480" y="7937"/>
+            <a:ext cx="640080" cy="480059"/>
           </a:xfrm>
           <a:prstGeom prst="rect">
             <a:avLst/>
@@ -2950,10 +2970,20 @@
           </a:ln>
         </p:spPr>
         <p:txBody>
-          <a:bodyPr anchor="ctr"/>
-          <a:lstStyle/>
-          <a:p>
-            <a:pPr algn="r"/>
+          <a:bodyPr anchor="ctr" lIns="0" tIns="0" bIns="0"/>
+          <a:lstStyle/>
+          <a:p>
+            <a:pPr algn="r">
+              <a:lnSpc>
+                <a:spcPct val="100000"/>
+              </a:lnSpc>
+              <a:spcBef>
+                <a:spcPts val="0"/>
+              </a:spcBef>
+              <a:spcAft>
+                <a:spcPts val="0"/>
+              </a:spcAft>
+            </a:pPr>
             <a:fld id="{00000000-1234-1234-1234-000000000999}" type="slidenum">
               <a:rPr lang="ja-JP" sz="1800" b="1">
                 <a:solidFill>
@@ -3399,8 +3429,8 @@
         </p:nvSpPr>
         <p:spPr>
           <a:xfrm>
-            <a:off x="8501908" y="28683"/>
-            <a:ext cx="548700" cy="393600"/>
+            <a:off x="8412480" y="7937"/>
+            <a:ext cx="640080" cy="480059"/>
           </a:xfrm>
           <a:prstGeom prst="rect">
             <a:avLst/>
@@ -3411,10 +3441,20 @@
           </a:ln>
         </p:spPr>
         <p:txBody>
-          <a:bodyPr anchor="ctr"/>
-          <a:lstStyle/>
-          <a:p>
-            <a:pPr algn="r"/>
+          <a:bodyPr anchor="ctr" lIns="0" tIns="0" bIns="0"/>
+          <a:lstStyle/>
+          <a:p>
+            <a:pPr algn="r">
+              <a:lnSpc>
+                <a:spcPct val="100000"/>
+              </a:lnSpc>
+              <a:spcBef>
+                <a:spcPts val="0"/>
+              </a:spcBef>
+              <a:spcAft>
+                <a:spcPts val="0"/>
+              </a:spcAft>
+            </a:pPr>
             <a:fld id="{00000000-1234-1234-1234-000000000999}" type="slidenum">
               <a:rPr lang="ja-JP" sz="1800" b="1">
                 <a:solidFill>
@@ -3860,8 +3900,8 @@
         </p:nvSpPr>
         <p:spPr>
           <a:xfrm>
-            <a:off x="8501908" y="28683"/>
-            <a:ext cx="548700" cy="393600"/>
+            <a:off x="8412480" y="7937"/>
+            <a:ext cx="640080" cy="480059"/>
           </a:xfrm>
           <a:prstGeom prst="rect">
             <a:avLst/>
@@ -3872,10 +3912,20 @@
           </a:ln>
         </p:spPr>
         <p:txBody>
-          <a:bodyPr anchor="ctr"/>
-          <a:lstStyle/>
-          <a:p>
-            <a:pPr algn="r"/>
+          <a:bodyPr anchor="ctr" lIns="0" tIns="0" bIns="0"/>
+          <a:lstStyle/>
+          <a:p>
+            <a:pPr algn="r">
+              <a:lnSpc>
+                <a:spcPct val="100000"/>
+              </a:lnSpc>
+              <a:spcBef>
+                <a:spcPts val="0"/>
+              </a:spcBef>
+              <a:spcAft>
+                <a:spcPts val="0"/>
+              </a:spcAft>
+            </a:pPr>
             <a:fld id="{00000000-1234-1234-1234-000000000999}" type="slidenum">
               <a:rPr lang="ja-JP" sz="1800" b="1">
                 <a:solidFill>
@@ -4387,8 +4437,8 @@
         </p:nvSpPr>
         <p:spPr>
           <a:xfrm>
-            <a:off x="8501908" y="28683"/>
-            <a:ext cx="548700" cy="393600"/>
+            <a:off x="8412480" y="7937"/>
+            <a:ext cx="640080" cy="480059"/>
           </a:xfrm>
           <a:prstGeom prst="rect">
             <a:avLst/>
@@ -4399,10 +4449,20 @@
           </a:ln>
         </p:spPr>
         <p:txBody>
-          <a:bodyPr anchor="ctr"/>
-          <a:lstStyle/>
-          <a:p>
-            <a:pPr algn="r"/>
+          <a:bodyPr anchor="ctr" lIns="0" tIns="0" bIns="0"/>
+          <a:lstStyle/>
+          <a:p>
+            <a:pPr algn="r">
+              <a:lnSpc>
+                <a:spcPct val="100000"/>
+              </a:lnSpc>
+              <a:spcBef>
+                <a:spcPts val="0"/>
+              </a:spcBef>
+              <a:spcAft>
+                <a:spcPts val="0"/>
+              </a:spcAft>
+            </a:pPr>
             <a:fld id="{00000000-1234-1234-1234-000000000999}" type="slidenum">
               <a:rPr lang="ja-JP" sz="1800" b="1">
                 <a:solidFill>
@@ -4682,8 +4742,8 @@
         </p:nvSpPr>
         <p:spPr>
           <a:xfrm>
-            <a:off x="8501908" y="28683"/>
-            <a:ext cx="548700" cy="393600"/>
+            <a:off x="8412480" y="7937"/>
+            <a:ext cx="640080" cy="480059"/>
           </a:xfrm>
           <a:prstGeom prst="rect">
             <a:avLst/>
@@ -4694,10 +4754,20 @@
           </a:ln>
         </p:spPr>
         <p:txBody>
-          <a:bodyPr anchor="ctr"/>
-          <a:lstStyle/>
-          <a:p>
-            <a:pPr algn="r"/>
+          <a:bodyPr anchor="ctr" lIns="0" tIns="0" bIns="0"/>
+          <a:lstStyle/>
+          <a:p>
+            <a:pPr algn="r">
+              <a:lnSpc>
+                <a:spcPct val="100000"/>
+              </a:lnSpc>
+              <a:spcBef>
+                <a:spcPts val="0"/>
+              </a:spcBef>
+              <a:spcAft>
+                <a:spcPts val="0"/>
+              </a:spcAft>
+            </a:pPr>
             <a:fld id="{00000000-1234-1234-1234-000000000999}" type="slidenum">
               <a:rPr lang="ja-JP" sz="1800" b="1">
                 <a:solidFill>
@@ -5310,8 +5380,8 @@
         </p:nvSpPr>
         <p:spPr>
           <a:xfrm>
-            <a:off x="8501908" y="28683"/>
-            <a:ext cx="548700" cy="393600"/>
+            <a:off x="8412480" y="7937"/>
+            <a:ext cx="640080" cy="480059"/>
           </a:xfrm>
           <a:prstGeom prst="rect">
             <a:avLst/>
@@ -5322,10 +5392,20 @@
           </a:ln>
         </p:spPr>
         <p:txBody>
-          <a:bodyPr anchor="ctr"/>
-          <a:lstStyle/>
-          <a:p>
-            <a:pPr algn="r"/>
+          <a:bodyPr anchor="ctr" lIns="0" tIns="0" bIns="0"/>
+          <a:lstStyle/>
+          <a:p>
+            <a:pPr algn="r">
+              <a:lnSpc>
+                <a:spcPct val="100000"/>
+              </a:lnSpc>
+              <a:spcBef>
+                <a:spcPts val="0"/>
+              </a:spcBef>
+              <a:spcAft>
+                <a:spcPts val="0"/>
+              </a:spcAft>
+            </a:pPr>
             <a:fld id="{00000000-1234-1234-1234-000000000999}" type="slidenum">
               <a:rPr lang="ja-JP" sz="1800" b="1">
                 <a:solidFill>
@@ -5624,8 +5704,8 @@
         </p:nvSpPr>
         <p:spPr>
           <a:xfrm>
-            <a:off x="8472458" y="28683"/>
-            <a:ext cx="548700" cy="393600"/>
+            <a:off x="8412480" y="7937"/>
+            <a:ext cx="640080" cy="480059"/>
           </a:xfrm>
           <a:prstGeom prst="rect">
             <a:avLst/>
@@ -5636,10 +5716,20 @@
           </a:ln>
         </p:spPr>
         <p:txBody>
-          <a:bodyPr anchor="ctr"/>
-          <a:lstStyle/>
-          <a:p>
-            <a:pPr algn="r"/>
+          <a:bodyPr anchor="ctr" lIns="0" tIns="0" bIns="0"/>
+          <a:lstStyle/>
+          <a:p>
+            <a:pPr algn="r">
+              <a:lnSpc>
+                <a:spcPct val="100000"/>
+              </a:lnSpc>
+              <a:spcBef>
+                <a:spcPts val="0"/>
+              </a:spcBef>
+              <a:spcAft>
+                <a:spcPts val="0"/>
+              </a:spcAft>
+            </a:pPr>
             <a:fld id="{00000000-1234-1234-1234-000000000999}" type="slidenum">
               <a:rPr lang="ja-JP" sz="1800" b="1">
                 <a:solidFill>
@@ -6185,8 +6275,8 @@
         </p:nvSpPr>
         <p:spPr>
           <a:xfrm>
-            <a:off x="8472458" y="4663217"/>
-            <a:ext cx="548700" cy="393600"/>
+            <a:off x="8412480" y="7937"/>
+            <a:ext cx="640080" cy="480059"/>
           </a:xfrm>
           <a:prstGeom prst="rect">
             <a:avLst/>
@@ -6197,7 +6287,7 @@
           </a:ln>
         </p:spPr>
         <p:txBody>
-          <a:bodyPr spcFirstLastPara="1" wrap="square" lIns="91425" tIns="91425" rIns="91425" bIns="91425" anchor="ctr" anchorCtr="0">
+          <a:bodyPr spcFirstLastPara="1" wrap="square" lIns="0" tIns="0" bIns="0" anchor="ctr" anchorCtr="0">
             <a:normAutofit/>
           </a:bodyPr>
           <a:lstStyle>
@@ -6303,6 +6393,9 @@
           </a:lstStyle>
           <a:p>
             <a:pPr marL="0" lvl="0" indent="0" algn="r" rtl="0">
+              <a:lnSpc>
+                <a:spcPct val="100000"/>
+              </a:lnSpc>
               <a:spcBef>
                 <a:spcPts val="0"/>
               </a:spcBef>
@@ -7616,8 +7709,8 @@
         </p:nvSpPr>
         <p:spPr>
           <a:xfrm>
-            <a:off x="502920" y="4699000"/>
-            <a:ext cx="8183879" cy="177800"/>
+            <a:off x="3642117" y="4539526"/>
+            <a:ext cx="5044682" cy="177800"/>
           </a:xfrm>
           <a:prstGeom prst="rect">
             <a:avLst/>
@@ -7625,7 +7718,7 @@
           <a:noFill/>
         </p:spPr>
         <p:txBody>
-          <a:bodyPr wrap="square" lIns="0" rIns="0" tIns="0" bIns="0">
+          <a:bodyPr wrap="none" lIns="0" rIns="0" tIns="0" bIns="0">
             <a:spAutoFit/>
           </a:bodyPr>
           <a:lstStyle/>
@@ -8003,8 +8096,8 @@
         </p:nvSpPr>
         <p:spPr>
           <a:xfrm>
-            <a:off x="502920" y="4699000"/>
-            <a:ext cx="8183879" cy="177800"/>
+            <a:off x="3642117" y="4539526"/>
+            <a:ext cx="5044682" cy="177800"/>
           </a:xfrm>
           <a:prstGeom prst="rect">
             <a:avLst/>
@@ -8012,7 +8105,7 @@
           <a:noFill/>
         </p:spPr>
         <p:txBody>
-          <a:bodyPr wrap="square" lIns="0" rIns="0" tIns="0" bIns="0">
+          <a:bodyPr wrap="none" lIns="0" rIns="0" tIns="0" bIns="0">
             <a:spAutoFit/>
           </a:bodyPr>
           <a:lstStyle/>
@@ -8533,8 +8626,8 @@
         </p:nvSpPr>
         <p:spPr>
           <a:xfrm>
-            <a:off x="502920" y="4876800"/>
-            <a:ext cx="8183879" cy="177800"/>
+            <a:off x="5137522" y="4717326"/>
+            <a:ext cx="3549277" cy="177800"/>
           </a:xfrm>
           <a:prstGeom prst="rect">
             <a:avLst/>
@@ -8542,7 +8635,7 @@
           <a:noFill/>
         </p:spPr>
         <p:txBody>
-          <a:bodyPr wrap="square" lIns="0" rIns="0" tIns="0" bIns="0">
+          <a:bodyPr wrap="none" lIns="0" rIns="0" tIns="0" bIns="0">
             <a:spAutoFit/>
           </a:bodyPr>
           <a:lstStyle/>
@@ -8912,8 +9005,8 @@
         </p:nvSpPr>
         <p:spPr>
           <a:xfrm>
-            <a:off x="502920" y="4876800"/>
-            <a:ext cx="8183879" cy="177800"/>
+            <a:off x="5137522" y="4717326"/>
+            <a:ext cx="3549277" cy="177800"/>
           </a:xfrm>
           <a:prstGeom prst="rect">
             <a:avLst/>
@@ -8921,7 +9014,7 @@
           <a:noFill/>
         </p:spPr>
         <p:txBody>
-          <a:bodyPr wrap="square" lIns="0" rIns="0" tIns="0" bIns="0">
+          <a:bodyPr wrap="none" lIns="0" rIns="0" tIns="0" bIns="0">
             <a:spAutoFit/>
           </a:bodyPr>
           <a:lstStyle/>
@@ -9345,8 +9438,8 @@
         </p:nvSpPr>
         <p:spPr>
           <a:xfrm>
-            <a:off x="502920" y="4876800"/>
-            <a:ext cx="8183879" cy="177800"/>
+            <a:off x="5137522" y="4717326"/>
+            <a:ext cx="3549277" cy="177800"/>
           </a:xfrm>
           <a:prstGeom prst="rect">
             <a:avLst/>
@@ -9354,7 +9447,7 @@
           <a:noFill/>
         </p:spPr>
         <p:txBody>
-          <a:bodyPr wrap="square" lIns="0" rIns="0" tIns="0" bIns="0">
+          <a:bodyPr wrap="none" lIns="0" rIns="0" tIns="0" bIns="0">
             <a:spAutoFit/>
           </a:bodyPr>
           <a:lstStyle/>
@@ -9778,8 +9871,8 @@
         </p:nvSpPr>
         <p:spPr>
           <a:xfrm>
-            <a:off x="502920" y="4876800"/>
-            <a:ext cx="8183879" cy="177800"/>
+            <a:off x="5137522" y="4717326"/>
+            <a:ext cx="3549277" cy="177800"/>
           </a:xfrm>
           <a:prstGeom prst="rect">
             <a:avLst/>
@@ -9787,7 +9880,7 @@
           <a:noFill/>
         </p:spPr>
         <p:txBody>
-          <a:bodyPr wrap="square" lIns="0" rIns="0" tIns="0" bIns="0">
+          <a:bodyPr wrap="none" lIns="0" rIns="0" tIns="0" bIns="0">
             <a:spAutoFit/>
           </a:bodyPr>
           <a:lstStyle/>
@@ -10183,8 +10276,8 @@
         </p:nvSpPr>
         <p:spPr>
           <a:xfrm>
-            <a:off x="502920" y="4876800"/>
-            <a:ext cx="8183879" cy="177800"/>
+            <a:off x="5137522" y="4717326"/>
+            <a:ext cx="3549277" cy="177800"/>
           </a:xfrm>
           <a:prstGeom prst="rect">
             <a:avLst/>
@@ -10192,7 +10285,7 @@
           <a:noFill/>
         </p:spPr>
         <p:txBody>
-          <a:bodyPr wrap="square" lIns="0" rIns="0" tIns="0" bIns="0">
+          <a:bodyPr wrap="none" lIns="0" rIns="0" tIns="0" bIns="0">
             <a:spAutoFit/>
           </a:bodyPr>
           <a:lstStyle/>
@@ -11837,7 +11930,7 @@
           </a:bodyPr>
           <a:lstStyle/>
           <a:p>
-            <a:pPr lvl="0" marL="457200" indent="-355600">
+            <a:pPr lvl="0" marL="558800" indent="-457200">
               <a:lnSpc>
                 <a:spcPct val="100000"/>
               </a:lnSpc>
@@ -11872,7 +11965,7 @@
             </a:r>
           </a:p>
           <a:p>
-            <a:pPr lvl="0" marL="457200" indent="-355600">
+            <a:pPr lvl="0" marL="558800" indent="-457200">
               <a:lnSpc>
                 <a:spcPct val="100000"/>
               </a:lnSpc>
@@ -11907,7 +12000,7 @@
             </a:r>
           </a:p>
           <a:p>
-            <a:pPr lvl="0" marL="457200" indent="-355600">
+            <a:pPr lvl="0" marL="558800" indent="-457200">
               <a:lnSpc>
                 <a:spcPct val="100000"/>
               </a:lnSpc>
@@ -11942,7 +12035,7 @@
             </a:r>
           </a:p>
           <a:p>
-            <a:pPr lvl="0" marL="457200" indent="-355600">
+            <a:pPr lvl="0" marL="558800" indent="-457200">
               <a:lnSpc>
                 <a:spcPct val="100000"/>
               </a:lnSpc>
@@ -11977,7 +12070,7 @@
             </a:r>
           </a:p>
           <a:p>
-            <a:pPr lvl="0" marL="457200" indent="-355600">
+            <a:pPr lvl="0" marL="558800" indent="-457200">
               <a:lnSpc>
                 <a:spcPct val="100000"/>
               </a:lnSpc>
@@ -15518,8 +15611,8 @@
         </p:nvSpPr>
         <p:spPr>
           <a:xfrm>
-            <a:off x="502920" y="4876800"/>
-            <a:ext cx="8183879" cy="177800"/>
+            <a:off x="4664725" y="4717326"/>
+            <a:ext cx="4022074" cy="177800"/>
           </a:xfrm>
           <a:prstGeom prst="rect">
             <a:avLst/>
@@ -15527,7 +15620,7 @@
           <a:noFill/>
         </p:spPr>
         <p:txBody>
-          <a:bodyPr wrap="square" lIns="0" rIns="0" tIns="0" bIns="0">
+          <a:bodyPr wrap="none" lIns="0" rIns="0" tIns="0" bIns="0">
             <a:spAutoFit/>
           </a:bodyPr>
           <a:lstStyle/>
@@ -17661,8 +17754,8 @@
         </p:nvSpPr>
         <p:spPr>
           <a:xfrm>
-            <a:off x="502920" y="4876800"/>
-            <a:ext cx="8183879" cy="177800"/>
+            <a:off x="5027673" y="4717326"/>
+            <a:ext cx="3659126" cy="177800"/>
           </a:xfrm>
           <a:prstGeom prst="rect">
             <a:avLst/>
@@ -17670,7 +17763,7 @@
           <a:noFill/>
         </p:spPr>
         <p:txBody>
-          <a:bodyPr wrap="square" lIns="0" rIns="0" tIns="0" bIns="0">
+          <a:bodyPr wrap="none" lIns="0" rIns="0" tIns="0" bIns="0">
             <a:spAutoFit/>
           </a:bodyPr>
           <a:lstStyle/>
@@ -18133,8 +18226,8 @@
         </p:nvSpPr>
         <p:spPr>
           <a:xfrm>
-            <a:off x="502920" y="4876800"/>
-            <a:ext cx="8183879" cy="177800"/>
+            <a:off x="2994861" y="4717326"/>
+            <a:ext cx="5691938" cy="177800"/>
           </a:xfrm>
           <a:prstGeom prst="rect">
             <a:avLst/>
@@ -18142,7 +18235,7 @@
           <a:noFill/>
         </p:spPr>
         <p:txBody>
-          <a:bodyPr wrap="square" lIns="0" rIns="0" tIns="0" bIns="0">
+          <a:bodyPr wrap="none" lIns="0" rIns="0" tIns="0" bIns="0">
             <a:spAutoFit/>
           </a:bodyPr>
           <a:lstStyle/>
@@ -18248,7 +18341,7 @@
                 <a:ea typeface="Noto Sans CJK JP"/>
                 <a:cs typeface="Noto Sans"/>
               </a:rPr>
-              <a:t>2025年もImageNetで画像特徴を評価している</a:t>
+              <a:t>2025年の固定特徴による画像分類の正解率</a:t>
             </a:r>
             <a:endParaRPr sz="2800" lang="ja-JP">
               <a:latin typeface="Noto Sans"/>
@@ -19204,8 +19297,8 @@
         </p:nvSpPr>
         <p:spPr>
           <a:xfrm>
-            <a:off x="502920" y="4876800"/>
-            <a:ext cx="8183879" cy="177800"/>
+            <a:off x="3358012" y="4717326"/>
+            <a:ext cx="5328787" cy="177800"/>
           </a:xfrm>
           <a:prstGeom prst="rect">
             <a:avLst/>
@@ -19213,7 +19306,7 @@
           <a:noFill/>
         </p:spPr>
         <p:txBody>
-          <a:bodyPr wrap="square" lIns="0" rIns="0" tIns="0" bIns="0">
+          <a:bodyPr wrap="none" lIns="0" rIns="0" tIns="0" bIns="0">
             <a:spAutoFit/>
           </a:bodyPr>
           <a:lstStyle/>
@@ -19801,8 +19894,8 @@
         </p:nvSpPr>
         <p:spPr>
           <a:xfrm>
-            <a:off x="502920" y="4876800"/>
-            <a:ext cx="8183879" cy="177800"/>
+            <a:off x="3886850" y="4717326"/>
+            <a:ext cx="4799949" cy="177800"/>
           </a:xfrm>
           <a:prstGeom prst="rect">
             <a:avLst/>
@@ -19810,7 +19903,7 @@
           <a:noFill/>
         </p:spPr>
         <p:txBody>
-          <a:bodyPr wrap="square" lIns="0" rIns="0" tIns="0" bIns="0">
+          <a:bodyPr wrap="none" lIns="0" rIns="0" tIns="0" bIns="0">
             <a:spAutoFit/>
           </a:bodyPr>
           <a:lstStyle/>
@@ -21144,8 +21237,8 @@
         </p:nvSpPr>
         <p:spPr>
           <a:xfrm>
-            <a:off x="502920" y="4876800"/>
-            <a:ext cx="8183879" cy="177800"/>
+            <a:off x="3642117" y="4717326"/>
+            <a:ext cx="5044682" cy="177800"/>
           </a:xfrm>
           <a:prstGeom prst="rect">
             <a:avLst/>
@@ -21153,7 +21246,7 @@
           <a:noFill/>
         </p:spPr>
         <p:txBody>
-          <a:bodyPr wrap="square" lIns="0" rIns="0" tIns="0" bIns="0">
+          <a:bodyPr wrap="none" lIns="0" rIns="0" tIns="0" bIns="0">
             <a:spAutoFit/>
           </a:bodyPr>
           <a:lstStyle/>
@@ -21973,7 +22066,7 @@
           </a:bodyPr>
           <a:lstStyle/>
           <a:p>
-            <a:pPr lvl="0" marL="457200" indent="-355600">
+            <a:pPr lvl="0" marL="558800" indent="-457200">
               <a:lnSpc>
                 <a:spcPct val="100000"/>
               </a:lnSpc>
@@ -22008,7 +22101,7 @@
             </a:r>
           </a:p>
           <a:p>
-            <a:pPr lvl="0" marL="457200" indent="-355600">
+            <a:pPr lvl="0" marL="558800" indent="-457200">
               <a:lnSpc>
                 <a:spcPct val="100000"/>
               </a:lnSpc>
@@ -22043,7 +22136,7 @@
             </a:r>
           </a:p>
           <a:p>
-            <a:pPr lvl="0" marL="457200" indent="-355600">
+            <a:pPr lvl="0" marL="558800" indent="-457200">
               <a:lnSpc>
                 <a:spcPct val="100000"/>
               </a:lnSpc>
@@ -22078,7 +22171,7 @@
             </a:r>
           </a:p>
           <a:p>
-            <a:pPr lvl="0" marL="457200" indent="-355600">
+            <a:pPr lvl="0" marL="558800" indent="-457200">
               <a:lnSpc>
                 <a:spcPct val="100000"/>
               </a:lnSpc>
@@ -22113,7 +22206,7 @@
             </a:r>
           </a:p>
           <a:p>
-            <a:pPr lvl="0" marL="457200" indent="-355600">
+            <a:pPr lvl="0" marL="558800" indent="-457200">
               <a:lnSpc>
                 <a:spcPct val="100000"/>
               </a:lnSpc>
@@ -22148,7 +22241,7 @@
             </a:r>
           </a:p>
           <a:p>
-            <a:pPr lvl="0" marL="457200" indent="-355600">
+            <a:pPr lvl="0" marL="558800" indent="-457200">
               <a:lnSpc>
                 <a:spcPct val="100000"/>
               </a:lnSpc>
@@ -22183,7 +22276,7 @@
             </a:r>
           </a:p>
           <a:p>
-            <a:pPr lvl="0" marL="457200" indent="-355600">
+            <a:pPr lvl="0" marL="558800" indent="-457200">
               <a:lnSpc>
                 <a:spcPct val="100000"/>
               </a:lnSpc>
@@ -22536,8 +22629,8 @@
         </p:nvSpPr>
         <p:spPr>
           <a:xfrm>
-            <a:off x="502920" y="4699000"/>
-            <a:ext cx="8183879" cy="177800"/>
+            <a:off x="5137522" y="4539526"/>
+            <a:ext cx="3549277" cy="177800"/>
           </a:xfrm>
           <a:prstGeom prst="rect">
             <a:avLst/>
@@ -22545,7 +22638,7 @@
           <a:noFill/>
         </p:spPr>
         <p:txBody>
-          <a:bodyPr wrap="square" lIns="0" rIns="0" tIns="0" bIns="0">
+          <a:bodyPr wrap="none" lIns="0" rIns="0" tIns="0" bIns="0">
             <a:spAutoFit/>
           </a:bodyPr>
           <a:lstStyle/>
@@ -30931,8 +31024,8 @@
         </p:nvSpPr>
         <p:spPr>
           <a:xfrm>
-            <a:off x="502920" y="4699000"/>
-            <a:ext cx="8183879" cy="177800"/>
+            <a:off x="3642117" y="4539526"/>
+            <a:ext cx="5044682" cy="177800"/>
           </a:xfrm>
           <a:prstGeom prst="rect">
             <a:avLst/>
@@ -30940,7 +31033,7 @@
           <a:noFill/>
         </p:spPr>
         <p:txBody>
-          <a:bodyPr wrap="square" lIns="0" rIns="0" tIns="0" bIns="0">
+          <a:bodyPr wrap="none" lIns="0" rIns="0" tIns="0" bIns="0">
             <a:spAutoFit/>
           </a:bodyPr>
           <a:lstStyle/>
@@ -31318,8 +31411,8 @@
         </p:nvSpPr>
         <p:spPr>
           <a:xfrm>
-            <a:off x="502920" y="4699000"/>
-            <a:ext cx="8183879" cy="177800"/>
+            <a:off x="3642117" y="4539526"/>
+            <a:ext cx="5044682" cy="177800"/>
           </a:xfrm>
           <a:prstGeom prst="rect">
             <a:avLst/>
@@ -31327,7 +31420,7 @@
           <a:noFill/>
         </p:spPr>
         <p:txBody>
-          <a:bodyPr wrap="square" lIns="0" rIns="0" tIns="0" bIns="0">
+          <a:bodyPr wrap="none" lIns="0" rIns="0" tIns="0" bIns="0">
             <a:spAutoFit/>
           </a:bodyPr>
           <a:lstStyle/>
@@ -32063,8 +32156,8 @@
         </p:nvSpPr>
         <p:spPr>
           <a:xfrm>
-            <a:off x="502920" y="4699000"/>
-            <a:ext cx="8183879" cy="177800"/>
+            <a:off x="3642117" y="4539526"/>
+            <a:ext cx="5044682" cy="177800"/>
           </a:xfrm>
           <a:prstGeom prst="rect">
             <a:avLst/>
@@ -32072,7 +32165,7 @@
           <a:noFill/>
         </p:spPr>
         <p:txBody>
-          <a:bodyPr wrap="square" lIns="0" rIns="0" tIns="0" bIns="0">
+          <a:bodyPr wrap="none" lIns="0" rIns="0" tIns="0" bIns="0">
             <a:spAutoFit/>
           </a:bodyPr>
           <a:lstStyle/>
@@ -32450,8 +32543,8 @@
         </p:nvSpPr>
         <p:spPr>
           <a:xfrm>
-            <a:off x="502920" y="4699000"/>
-            <a:ext cx="8183879" cy="177800"/>
+            <a:off x="3642117" y="4539526"/>
+            <a:ext cx="5044682" cy="177800"/>
           </a:xfrm>
           <a:prstGeom prst="rect">
             <a:avLst/>
@@ -32459,7 +32552,7 @@
           <a:noFill/>
         </p:spPr>
         <p:txBody>
-          <a:bodyPr wrap="square" lIns="0" rIns="0" tIns="0" bIns="0">
+          <a:bodyPr wrap="none" lIns="0" rIns="0" tIns="0" bIns="0">
             <a:spAutoFit/>
           </a:bodyPr>
           <a:lstStyle/>
@@ -32837,8 +32930,8 @@
         </p:nvSpPr>
         <p:spPr>
           <a:xfrm>
-            <a:off x="502920" y="4699000"/>
-            <a:ext cx="8183879" cy="177800"/>
+            <a:off x="3642117" y="4539526"/>
+            <a:ext cx="5044682" cy="177800"/>
           </a:xfrm>
           <a:prstGeom prst="rect">
             <a:avLst/>
@@ -32846,7 +32939,7 @@
           <a:noFill/>
         </p:spPr>
         <p:txBody>
-          <a:bodyPr wrap="square" lIns="0" rIns="0" tIns="0" bIns="0">
+          <a:bodyPr wrap="none" lIns="0" rIns="0" tIns="0" bIns="0">
             <a:spAutoFit/>
           </a:bodyPr>
           <a:lstStyle/>
@@ -33224,8 +33317,8 @@
         </p:nvSpPr>
         <p:spPr>
           <a:xfrm>
-            <a:off x="502920" y="4699000"/>
-            <a:ext cx="8183879" cy="177800"/>
+            <a:off x="3642117" y="4539526"/>
+            <a:ext cx="5044682" cy="177800"/>
           </a:xfrm>
           <a:prstGeom prst="rect">
             <a:avLst/>
@@ -33233,7 +33326,7 @@
           <a:noFill/>
         </p:spPr>
         <p:txBody>
-          <a:bodyPr wrap="square" lIns="0" rIns="0" tIns="0" bIns="0">
+          <a:bodyPr wrap="none" lIns="0" rIns="0" tIns="0" bIns="0">
             <a:spAutoFit/>
           </a:bodyPr>
           <a:lstStyle/>
@@ -33922,8 +34015,8 @@
         </p:nvSpPr>
         <p:spPr>
           <a:xfrm>
-            <a:off x="502920" y="4699000"/>
-            <a:ext cx="8183879" cy="177800"/>
+            <a:off x="3642117" y="4539526"/>
+            <a:ext cx="5044682" cy="177800"/>
           </a:xfrm>
           <a:prstGeom prst="rect">
             <a:avLst/>
@@ -33931,7 +34024,7 @@
           <a:noFill/>
         </p:spPr>
         <p:txBody>
-          <a:bodyPr wrap="square" lIns="0" rIns="0" tIns="0" bIns="0">
+          <a:bodyPr wrap="none" lIns="0" rIns="0" tIns="0" bIns="0">
             <a:spAutoFit/>
           </a:bodyPr>
           <a:lstStyle/>
@@ -35427,8 +35520,8 @@
         </p:nvSpPr>
         <p:spPr>
           <a:xfrm>
-            <a:off x="502920" y="4876800"/>
-            <a:ext cx="8183879" cy="177800"/>
+            <a:off x="3642117" y="4717326"/>
+            <a:ext cx="5044682" cy="177800"/>
           </a:xfrm>
           <a:prstGeom prst="rect">
             <a:avLst/>
@@ -35436,7 +35529,7 @@
           <a:noFill/>
         </p:spPr>
         <p:txBody>
-          <a:bodyPr wrap="square" lIns="0" rIns="0" tIns="0" bIns="0">
+          <a:bodyPr wrap="none" lIns="0" rIns="0" tIns="0" bIns="0">
             <a:spAutoFit/>
           </a:bodyPr>
           <a:lstStyle/>
@@ -37200,8 +37293,8 @@
         </p:nvSpPr>
         <p:spPr>
           <a:xfrm>
-            <a:off x="502920" y="4876800"/>
-            <a:ext cx="8183879" cy="177800"/>
+            <a:off x="3642117" y="4717326"/>
+            <a:ext cx="5044682" cy="177800"/>
           </a:xfrm>
           <a:prstGeom prst="rect">
             <a:avLst/>
@@ -37209,7 +37302,7 @@
           <a:noFill/>
         </p:spPr>
         <p:txBody>
-          <a:bodyPr wrap="square" lIns="0" rIns="0" tIns="0" bIns="0">
+          <a:bodyPr wrap="none" lIns="0" rIns="0" tIns="0" bIns="0">
             <a:spAutoFit/>
           </a:bodyPr>
           <a:lstStyle/>
@@ -38973,8 +39066,8 @@
         </p:nvSpPr>
         <p:spPr>
           <a:xfrm>
-            <a:off x="502920" y="4876800"/>
-            <a:ext cx="8183879" cy="177800"/>
+            <a:off x="3642117" y="4717326"/>
+            <a:ext cx="5044682" cy="177800"/>
           </a:xfrm>
           <a:prstGeom prst="rect">
             <a:avLst/>
@@ -38982,7 +39075,7 @@
           <a:noFill/>
         </p:spPr>
         <p:txBody>
-          <a:bodyPr wrap="square" lIns="0" rIns="0" tIns="0" bIns="0">
+          <a:bodyPr wrap="none" lIns="0" rIns="0" tIns="0" bIns="0">
             <a:spAutoFit/>
           </a:bodyPr>
           <a:lstStyle/>
@@ -39352,8 +39445,8 @@
         </p:nvSpPr>
         <p:spPr>
           <a:xfrm>
-            <a:off x="502920" y="4521200"/>
-            <a:ext cx="8183879" cy="177800"/>
+            <a:off x="5137522" y="4361713"/>
+            <a:ext cx="3549277" cy="177800"/>
           </a:xfrm>
           <a:prstGeom prst="rect">
             <a:avLst/>
@@ -39361,7 +39454,7 @@
           <a:noFill/>
         </p:spPr>
         <p:txBody>
-          <a:bodyPr wrap="square" lIns="0" rIns="0" tIns="0" bIns="0">
+          <a:bodyPr wrap="none" lIns="0" rIns="0" tIns="0" bIns="0">
             <a:spAutoFit/>
           </a:bodyPr>
           <a:lstStyle/>
@@ -39914,8 +40007,8 @@
         </p:nvSpPr>
         <p:spPr>
           <a:xfrm>
-            <a:off x="502920" y="4699000"/>
-            <a:ext cx="8183879" cy="177800"/>
+            <a:off x="3642117" y="4539526"/>
+            <a:ext cx="5044682" cy="177800"/>
           </a:xfrm>
           <a:prstGeom prst="rect">
             <a:avLst/>
@@ -39923,7 +40016,7 @@
           <a:noFill/>
         </p:spPr>
         <p:txBody>
-          <a:bodyPr wrap="square" lIns="0" rIns="0" tIns="0" bIns="0">
+          <a:bodyPr wrap="none" lIns="0" rIns="0" tIns="0" bIns="0">
             <a:spAutoFit/>
           </a:bodyPr>
           <a:lstStyle/>
@@ -40417,8 +40510,8 @@
         </p:nvSpPr>
         <p:spPr>
           <a:xfrm>
-            <a:off x="502920" y="4699000"/>
-            <a:ext cx="8183879" cy="177800"/>
+            <a:off x="3642117" y="4539526"/>
+            <a:ext cx="5044682" cy="177800"/>
           </a:xfrm>
           <a:prstGeom prst="rect">
             <a:avLst/>
@@ -40426,7 +40519,7 @@
           <a:noFill/>
         </p:spPr>
         <p:txBody>
-          <a:bodyPr wrap="square" lIns="0" rIns="0" tIns="0" bIns="0">
+          <a:bodyPr wrap="none" lIns="0" rIns="0" tIns="0" bIns="0">
             <a:spAutoFit/>
           </a:bodyPr>
           <a:lstStyle/>
@@ -40799,8 +40892,8 @@
         </p:nvSpPr>
         <p:spPr>
           <a:xfrm>
-            <a:off x="502920" y="4699000"/>
-            <a:ext cx="8183879" cy="177800"/>
+            <a:off x="3642117" y="4539526"/>
+            <a:ext cx="5044682" cy="177800"/>
           </a:xfrm>
           <a:prstGeom prst="rect">
             <a:avLst/>
@@ -40808,7 +40901,7 @@
           <a:noFill/>
         </p:spPr>
         <p:txBody>
-          <a:bodyPr wrap="square" lIns="0" rIns="0" tIns="0" bIns="0">
+          <a:bodyPr wrap="none" lIns="0" rIns="0" tIns="0" bIns="0">
             <a:spAutoFit/>
           </a:bodyPr>
           <a:lstStyle/>
@@ -42652,8 +42745,8 @@
         </p:nvSpPr>
         <p:spPr>
           <a:xfrm>
-            <a:off x="502920" y="4876800"/>
-            <a:ext cx="8183879" cy="177800"/>
+            <a:off x="3642117" y="4717326"/>
+            <a:ext cx="5044682" cy="177800"/>
           </a:xfrm>
           <a:prstGeom prst="rect">
             <a:avLst/>
@@ -42661,7 +42754,7 @@
           <a:noFill/>
         </p:spPr>
         <p:txBody>
-          <a:bodyPr wrap="square" lIns="0" rIns="0" tIns="0" bIns="0">
+          <a:bodyPr wrap="none" lIns="0" rIns="0" tIns="0" bIns="0">
             <a:spAutoFit/>
           </a:bodyPr>
           <a:lstStyle/>
@@ -44987,8 +45080,8 @@
         </p:nvSpPr>
         <p:spPr>
           <a:xfrm>
-            <a:off x="502920" y="4876800"/>
-            <a:ext cx="8183879" cy="177800"/>
+            <a:off x="3358012" y="4717326"/>
+            <a:ext cx="5328787" cy="177800"/>
           </a:xfrm>
           <a:prstGeom prst="rect">
             <a:avLst/>
@@ -44996,7 +45089,7 @@
           <a:noFill/>
         </p:spPr>
         <p:txBody>
-          <a:bodyPr wrap="square" lIns="0" rIns="0" tIns="0" bIns="0">
+          <a:bodyPr wrap="none" lIns="0" rIns="0" tIns="0" bIns="0">
             <a:spAutoFit/>
           </a:bodyPr>
           <a:lstStyle/>
@@ -46780,8 +46873,8 @@
         </p:nvSpPr>
         <p:spPr>
           <a:xfrm>
-            <a:off x="502920" y="4876800"/>
-            <a:ext cx="8183879" cy="177800"/>
+            <a:off x="3642117" y="4717326"/>
+            <a:ext cx="5044682" cy="177800"/>
           </a:xfrm>
           <a:prstGeom prst="rect">
             <a:avLst/>
@@ -46789,7 +46882,7 @@
           <a:noFill/>
         </p:spPr>
         <p:txBody>
-          <a:bodyPr wrap="square" lIns="0" rIns="0" tIns="0" bIns="0">
+          <a:bodyPr wrap="none" lIns="0" rIns="0" tIns="0" bIns="0">
             <a:spAutoFit/>
           </a:bodyPr>
           <a:lstStyle/>
@@ -47790,8 +47883,8 @@
         </p:nvSpPr>
         <p:spPr>
           <a:xfrm>
-            <a:off x="502920" y="4699000"/>
-            <a:ext cx="8183879" cy="177800"/>
+            <a:off x="3642117" y="4539526"/>
+            <a:ext cx="5044682" cy="177800"/>
           </a:xfrm>
           <a:prstGeom prst="rect">
             <a:avLst/>
@@ -47799,7 +47892,7 @@
           <a:noFill/>
         </p:spPr>
         <p:txBody>
-          <a:bodyPr wrap="square" lIns="0" rIns="0" tIns="0" bIns="0">
+          <a:bodyPr wrap="none" lIns="0" rIns="0" tIns="0" bIns="0">
             <a:spAutoFit/>
           </a:bodyPr>
           <a:lstStyle/>
@@ -50515,8 +50608,8 @@
         </p:nvSpPr>
         <p:spPr>
           <a:xfrm>
-            <a:off x="502920" y="4521200"/>
-            <a:ext cx="8183879" cy="177800"/>
+            <a:off x="5137522" y="4361713"/>
+            <a:ext cx="3549277" cy="177800"/>
           </a:xfrm>
           <a:prstGeom prst="rect">
             <a:avLst/>
@@ -50524,7 +50617,7 @@
           <a:noFill/>
         </p:spPr>
         <p:txBody>
-          <a:bodyPr wrap="square" lIns="0" rIns="0" tIns="0" bIns="0">
+          <a:bodyPr wrap="none" lIns="0" rIns="0" tIns="0" bIns="0">
             <a:spAutoFit/>
           </a:bodyPr>
           <a:lstStyle/>

--- a/slides/datasets-in-10-minutes-imagenet.pptx
+++ b/slides/datasets-in-10-minutes-imagenet.pptx
@@ -10538,13 +10538,13 @@
                     <a:lnR w="0">
                       <a:noFill/>
                     </a:lnR>
-                    <a:lnT w="10160">
+                    <a:lnT w="15240">
                       <a:solidFill>
                         <a:srgbClr val="626669"/>
                       </a:solidFill>
                       <a:prstDash val="solid"/>
                     </a:lnT>
-                    <a:lnB w="10160">
+                    <a:lnB w="7620">
                       <a:solidFill>
                         <a:srgbClr val="626669"/>
                       </a:solidFill>
@@ -10601,13 +10601,13 @@
                     <a:lnR w="0">
                       <a:noFill/>
                     </a:lnR>
-                    <a:lnT w="10160">
+                    <a:lnT w="15240">
                       <a:solidFill>
                         <a:srgbClr val="626669"/>
                       </a:solidFill>
                       <a:prstDash val="solid"/>
                     </a:lnT>
-                    <a:lnB w="10160">
+                    <a:lnB w="7620">
                       <a:solidFill>
                         <a:srgbClr val="626669"/>
                       </a:solidFill>
@@ -10664,13 +10664,13 @@
                     <a:lnR w="0">
                       <a:noFill/>
                     </a:lnR>
-                    <a:lnT w="10160">
+                    <a:lnT w="15240">
                       <a:solidFill>
                         <a:srgbClr val="626669"/>
                       </a:solidFill>
                       <a:prstDash val="solid"/>
                     </a:lnT>
-                    <a:lnB w="10160">
+                    <a:lnB w="7620">
                       <a:solidFill>
                         <a:srgbClr val="626669"/>
                       </a:solidFill>
@@ -10729,7 +10729,7 @@
                     <a:lnR w="0">
                       <a:noFill/>
                     </a:lnR>
-                    <a:lnT w="10160">
+                    <a:lnT w="7620">
                       <a:solidFill>
                         <a:srgbClr val="626669"/>
                       </a:solidFill>
@@ -10789,7 +10789,7 @@
                     <a:lnR w="0">
                       <a:noFill/>
                     </a:lnR>
-                    <a:lnT w="10160">
+                    <a:lnT w="7620">
                       <a:solidFill>
                         <a:srgbClr val="626669"/>
                       </a:solidFill>
@@ -10849,7 +10849,7 @@
                     <a:lnR w="0">
                       <a:noFill/>
                     </a:lnR>
-                    <a:lnT w="10160">
+                    <a:lnT w="7620">
                       <a:solidFill>
                         <a:srgbClr val="626669"/>
                       </a:solidFill>
@@ -11087,7 +11087,7 @@
                     <a:lnT w="0">
                       <a:noFill/>
                     </a:lnT>
-                    <a:lnB w="10160">
+                    <a:lnB w="15240">
                       <a:solidFill>
                         <a:srgbClr val="626669"/>
                       </a:solidFill>
@@ -11147,7 +11147,7 @@
                     <a:lnT w="0">
                       <a:noFill/>
                     </a:lnT>
-                    <a:lnB w="10160">
+                    <a:lnB w="15240">
                       <a:solidFill>
                         <a:srgbClr val="626669"/>
                       </a:solidFill>
@@ -11207,7 +11207,7 @@
                     <a:lnT w="0">
                       <a:noFill/>
                     </a:lnT>
-                    <a:lnB w="10160">
+                    <a:lnB w="15240">
                       <a:solidFill>
                         <a:srgbClr val="626669"/>
                       </a:solidFill>
@@ -13217,13 +13217,13 @@
                     <a:lnR w="0">
                       <a:noFill/>
                     </a:lnR>
-                    <a:lnT w="10160">
+                    <a:lnT w="15240">
                       <a:solidFill>
                         <a:srgbClr val="626669"/>
                       </a:solidFill>
                       <a:prstDash val="solid"/>
                     </a:lnT>
-                    <a:lnB w="10160">
+                    <a:lnB w="7620">
                       <a:solidFill>
                         <a:srgbClr val="626669"/>
                       </a:solidFill>
@@ -13281,13 +13281,13 @@
                     <a:lnR w="0">
                       <a:noFill/>
                     </a:lnR>
-                    <a:lnT w="10160">
+                    <a:lnT w="15240">
                       <a:solidFill>
                         <a:srgbClr val="626669"/>
                       </a:solidFill>
                       <a:prstDash val="solid"/>
                     </a:lnT>
-                    <a:lnB w="10160">
+                    <a:lnB w="7620">
                       <a:solidFill>
                         <a:srgbClr val="626669"/>
                       </a:solidFill>
@@ -13347,7 +13347,7 @@
                     <a:lnR w="0">
                       <a:noFill/>
                     </a:lnR>
-                    <a:lnT w="10160">
+                    <a:lnT w="7620">
                       <a:solidFill>
                         <a:srgbClr val="626669"/>
                       </a:solidFill>
@@ -13408,7 +13408,7 @@
                     <a:lnR w="0">
                       <a:noFill/>
                     </a:lnR>
-                    <a:lnT w="10160">
+                    <a:lnT w="7620">
                       <a:solidFill>
                         <a:srgbClr val="626669"/>
                       </a:solidFill>
@@ -13592,7 +13592,7 @@
                     <a:lnT w="0">
                       <a:noFill/>
                     </a:lnT>
-                    <a:lnB w="10160">
+                    <a:lnB w="15240">
                       <a:solidFill>
                         <a:srgbClr val="626669"/>
                       </a:solidFill>
@@ -13653,7 +13653,7 @@
                     <a:lnT w="0">
                       <a:noFill/>
                     </a:lnT>
-                    <a:lnB w="10160">
+                    <a:lnB w="15240">
                       <a:solidFill>
                         <a:srgbClr val="626669"/>
                       </a:solidFill>
@@ -14115,13 +14115,13 @@
                     <a:lnR w="0">
                       <a:noFill/>
                     </a:lnR>
-                    <a:lnT w="10160">
+                    <a:lnT w="15240">
                       <a:solidFill>
                         <a:srgbClr val="626669"/>
                       </a:solidFill>
                       <a:prstDash val="solid"/>
                     </a:lnT>
-                    <a:lnB w="10160">
+                    <a:lnB w="7620">
                       <a:solidFill>
                         <a:srgbClr val="626669"/>
                       </a:solidFill>
@@ -14178,13 +14178,13 @@
                     <a:lnR w="0">
                       <a:noFill/>
                     </a:lnR>
-                    <a:lnT w="10160">
+                    <a:lnT w="15240">
                       <a:solidFill>
                         <a:srgbClr val="626669"/>
                       </a:solidFill>
                       <a:prstDash val="solid"/>
                     </a:lnT>
-                    <a:lnB w="10160">
+                    <a:lnB w="7620">
                       <a:solidFill>
                         <a:srgbClr val="626669"/>
                       </a:solidFill>
@@ -14241,13 +14241,13 @@
                     <a:lnR w="0">
                       <a:noFill/>
                     </a:lnR>
-                    <a:lnT w="10160">
+                    <a:lnT w="15240">
                       <a:solidFill>
                         <a:srgbClr val="626669"/>
                       </a:solidFill>
                       <a:prstDash val="solid"/>
                     </a:lnT>
-                    <a:lnB w="10160">
+                    <a:lnB w="7620">
                       <a:solidFill>
                         <a:srgbClr val="626669"/>
                       </a:solidFill>
@@ -14306,7 +14306,7 @@
                     <a:lnR w="0">
                       <a:noFill/>
                     </a:lnR>
-                    <a:lnT w="10160">
+                    <a:lnT w="7620">
                       <a:solidFill>
                         <a:srgbClr val="626669"/>
                       </a:solidFill>
@@ -14366,7 +14366,7 @@
                     <a:lnR w="0">
                       <a:noFill/>
                     </a:lnR>
-                    <a:lnT w="10160">
+                    <a:lnT w="7620">
                       <a:solidFill>
                         <a:srgbClr val="626669"/>
                       </a:solidFill>
@@ -14426,7 +14426,7 @@
                     <a:lnR w="0">
                       <a:noFill/>
                     </a:lnR>
-                    <a:lnT w="10160">
+                    <a:lnT w="7620">
                       <a:solidFill>
                         <a:srgbClr val="626669"/>
                       </a:solidFill>
@@ -14664,7 +14664,7 @@
                     <a:lnT w="0">
                       <a:noFill/>
                     </a:lnT>
-                    <a:lnB w="10160">
+                    <a:lnB w="15240">
                       <a:solidFill>
                         <a:srgbClr val="626669"/>
                       </a:solidFill>
@@ -14724,7 +14724,7 @@
                     <a:lnT w="0">
                       <a:noFill/>
                     </a:lnT>
-                    <a:lnB w="10160">
+                    <a:lnB w="15240">
                       <a:solidFill>
                         <a:srgbClr val="626669"/>
                       </a:solidFill>
@@ -14784,7 +14784,7 @@
                     <a:lnT w="0">
                       <a:noFill/>
                     </a:lnT>
-                    <a:lnB w="10160">
+                    <a:lnB w="15240">
                       <a:solidFill>
                         <a:srgbClr val="626669"/>
                       </a:solidFill>
@@ -15873,13 +15873,13 @@
                     <a:lnR w="0">
                       <a:noFill/>
                     </a:lnR>
-                    <a:lnT w="10160">
+                    <a:lnT w="15240">
                       <a:solidFill>
                         <a:srgbClr val="626669"/>
                       </a:solidFill>
                       <a:prstDash val="solid"/>
                     </a:lnT>
-                    <a:lnB w="10160">
+                    <a:lnB w="7620">
                       <a:solidFill>
                         <a:srgbClr val="626669"/>
                       </a:solidFill>
@@ -15936,13 +15936,13 @@
                     <a:lnR w="0">
                       <a:noFill/>
                     </a:lnR>
-                    <a:lnT w="10160">
+                    <a:lnT w="15240">
                       <a:solidFill>
                         <a:srgbClr val="626669"/>
                       </a:solidFill>
                       <a:prstDash val="solid"/>
                     </a:lnT>
-                    <a:lnB w="10160">
+                    <a:lnB w="7620">
                       <a:solidFill>
                         <a:srgbClr val="626669"/>
                       </a:solidFill>
@@ -15999,13 +15999,13 @@
                     <a:lnR w="0">
                       <a:noFill/>
                     </a:lnR>
-                    <a:lnT w="10160">
+                    <a:lnT w="15240">
                       <a:solidFill>
                         <a:srgbClr val="626669"/>
                       </a:solidFill>
                       <a:prstDash val="solid"/>
                     </a:lnT>
-                    <a:lnB w="10160">
+                    <a:lnB w="7620">
                       <a:solidFill>
                         <a:srgbClr val="626669"/>
                       </a:solidFill>
@@ -16064,7 +16064,7 @@
                     <a:lnR w="0">
                       <a:noFill/>
                     </a:lnR>
-                    <a:lnT w="10160">
+                    <a:lnT w="7620">
                       <a:solidFill>
                         <a:srgbClr val="626669"/>
                       </a:solidFill>
@@ -16124,7 +16124,7 @@
                     <a:lnR w="0">
                       <a:noFill/>
                     </a:lnR>
-                    <a:lnT w="10160">
+                    <a:lnT w="7620">
                       <a:solidFill>
                         <a:srgbClr val="626669"/>
                       </a:solidFill>
@@ -16184,7 +16184,7 @@
                     <a:lnR w="0">
                       <a:noFill/>
                     </a:lnR>
-                    <a:lnT w="10160">
+                    <a:lnT w="7620">
                       <a:solidFill>
                         <a:srgbClr val="626669"/>
                       </a:solidFill>
@@ -16422,7 +16422,7 @@
                     <a:lnT w="0">
                       <a:noFill/>
                     </a:lnT>
-                    <a:lnB w="10160">
+                    <a:lnB w="15240">
                       <a:solidFill>
                         <a:srgbClr val="626669"/>
                       </a:solidFill>
@@ -16482,7 +16482,7 @@
                     <a:lnT w="0">
                       <a:noFill/>
                     </a:lnT>
-                    <a:lnB w="10160">
+                    <a:lnB w="15240">
                       <a:solidFill>
                         <a:srgbClr val="626669"/>
                       </a:solidFill>
@@ -16542,7 +16542,7 @@
                     <a:lnT w="0">
                       <a:noFill/>
                     </a:lnT>
-                    <a:lnB w="10160">
+                    <a:lnB w="15240">
                       <a:solidFill>
                         <a:srgbClr val="626669"/>
                       </a:solidFill>
@@ -16945,13 +16945,13 @@
                     <a:lnR w="0">
                       <a:noFill/>
                     </a:lnR>
-                    <a:lnT w="10160">
+                    <a:lnT w="15240">
                       <a:solidFill>
                         <a:srgbClr val="626669"/>
                       </a:solidFill>
                       <a:prstDash val="solid"/>
                     </a:lnT>
-                    <a:lnB w="10160">
+                    <a:lnB w="7620">
                       <a:solidFill>
                         <a:srgbClr val="626669"/>
                       </a:solidFill>
@@ -17008,13 +17008,13 @@
                     <a:lnR w="0">
                       <a:noFill/>
                     </a:lnR>
-                    <a:lnT w="10160">
+                    <a:lnT w="15240">
                       <a:solidFill>
                         <a:srgbClr val="626669"/>
                       </a:solidFill>
                       <a:prstDash val="solid"/>
                     </a:lnT>
-                    <a:lnB w="10160">
+                    <a:lnB w="7620">
                       <a:solidFill>
                         <a:srgbClr val="626669"/>
                       </a:solidFill>
@@ -17071,13 +17071,13 @@
                     <a:lnR w="0">
                       <a:noFill/>
                     </a:lnR>
-                    <a:lnT w="10160">
+                    <a:lnT w="15240">
                       <a:solidFill>
                         <a:srgbClr val="626669"/>
                       </a:solidFill>
                       <a:prstDash val="solid"/>
                     </a:lnT>
-                    <a:lnB w="10160">
+                    <a:lnB w="7620">
                       <a:solidFill>
                         <a:srgbClr val="626669"/>
                       </a:solidFill>
@@ -17136,7 +17136,7 @@
                     <a:lnR w="0">
                       <a:noFill/>
                     </a:lnR>
-                    <a:lnT w="10160">
+                    <a:lnT w="7620">
                       <a:solidFill>
                         <a:srgbClr val="626669"/>
                       </a:solidFill>
@@ -17196,7 +17196,7 @@
                     <a:lnR w="0">
                       <a:noFill/>
                     </a:lnR>
-                    <a:lnT w="10160">
+                    <a:lnT w="7620">
                       <a:solidFill>
                         <a:srgbClr val="626669"/>
                       </a:solidFill>
@@ -17256,7 +17256,7 @@
                     <a:lnR w="0">
                       <a:noFill/>
                     </a:lnR>
-                    <a:lnT w="10160">
+                    <a:lnT w="7620">
                       <a:solidFill>
                         <a:srgbClr val="626669"/>
                       </a:solidFill>
@@ -17494,7 +17494,7 @@
                     <a:lnT w="0">
                       <a:noFill/>
                     </a:lnT>
-                    <a:lnB w="10160">
+                    <a:lnB w="15240">
                       <a:solidFill>
                         <a:srgbClr val="626669"/>
                       </a:solidFill>
@@ -17554,7 +17554,7 @@
                     <a:lnT w="0">
                       <a:noFill/>
                     </a:lnT>
-                    <a:lnB w="10160">
+                    <a:lnB w="15240">
                       <a:solidFill>
                         <a:srgbClr val="626669"/>
                       </a:solidFill>
@@ -17614,7 +17614,7 @@
                     <a:lnT w="0">
                       <a:noFill/>
                     </a:lnT>
-                    <a:lnB w="10160">
+                    <a:lnB w="15240">
                       <a:solidFill>
                         <a:srgbClr val="626669"/>
                       </a:solidFill>
@@ -18488,13 +18488,13 @@
                     <a:lnR w="0">
                       <a:noFill/>
                     </a:lnR>
-                    <a:lnT w="10160">
+                    <a:lnT w="15240">
                       <a:solidFill>
                         <a:srgbClr val="626669"/>
                       </a:solidFill>
                       <a:prstDash val="solid"/>
                     </a:lnT>
-                    <a:lnB w="10160">
+                    <a:lnB w="7620">
                       <a:solidFill>
                         <a:srgbClr val="626669"/>
                       </a:solidFill>
@@ -18551,13 +18551,13 @@
                     <a:lnR w="0">
                       <a:noFill/>
                     </a:lnR>
-                    <a:lnT w="10160">
+                    <a:lnT w="15240">
                       <a:solidFill>
                         <a:srgbClr val="626669"/>
                       </a:solidFill>
                       <a:prstDash val="solid"/>
                     </a:lnT>
-                    <a:lnB w="10160">
+                    <a:lnB w="7620">
                       <a:solidFill>
                         <a:srgbClr val="626669"/>
                       </a:solidFill>
@@ -18614,13 +18614,13 @@
                     <a:lnR w="0">
                       <a:noFill/>
                     </a:lnR>
-                    <a:lnT w="10160">
+                    <a:lnT w="15240">
                       <a:solidFill>
                         <a:srgbClr val="626669"/>
                       </a:solidFill>
                       <a:prstDash val="solid"/>
                     </a:lnT>
-                    <a:lnB w="10160">
+                    <a:lnB w="7620">
                       <a:solidFill>
                         <a:srgbClr val="626669"/>
                       </a:solidFill>
@@ -18679,7 +18679,7 @@
                     <a:lnR w="0">
                       <a:noFill/>
                     </a:lnR>
-                    <a:lnT w="10160">
+                    <a:lnT w="7620">
                       <a:solidFill>
                         <a:srgbClr val="626669"/>
                       </a:solidFill>
@@ -18739,7 +18739,7 @@
                     <a:lnR w="0">
                       <a:noFill/>
                     </a:lnR>
-                    <a:lnT w="10160">
+                    <a:lnT w="7620">
                       <a:solidFill>
                         <a:srgbClr val="626669"/>
                       </a:solidFill>
@@ -18799,7 +18799,7 @@
                     <a:lnR w="0">
                       <a:noFill/>
                     </a:lnR>
-                    <a:lnT w="10160">
+                    <a:lnT w="7620">
                       <a:solidFill>
                         <a:srgbClr val="626669"/>
                       </a:solidFill>
@@ -19037,7 +19037,7 @@
                     <a:lnT w="0">
                       <a:noFill/>
                     </a:lnT>
-                    <a:lnB w="10160">
+                    <a:lnB w="15240">
                       <a:solidFill>
                         <a:srgbClr val="626669"/>
                       </a:solidFill>
@@ -19097,7 +19097,7 @@
                     <a:lnT w="0">
                       <a:noFill/>
                     </a:lnT>
-                    <a:lnB w="10160">
+                    <a:lnB w="15240">
                       <a:solidFill>
                         <a:srgbClr val="626669"/>
                       </a:solidFill>
@@ -19157,7 +19157,7 @@
                     <a:lnT w="0">
                       <a:noFill/>
                     </a:lnT>
-                    <a:lnB w="10160">
+                    <a:lnB w="15240">
                       <a:solidFill>
                         <a:srgbClr val="626669"/>
                       </a:solidFill>
@@ -34339,13 +34339,13 @@
                     <a:lnR w="0">
                       <a:noFill/>
                     </a:lnR>
-                    <a:lnT w="10160">
+                    <a:lnT w="15240">
                       <a:solidFill>
                         <a:srgbClr val="626669"/>
                       </a:solidFill>
                       <a:prstDash val="solid"/>
                     </a:lnT>
-                    <a:lnB w="10160">
+                    <a:lnB w="7620">
                       <a:solidFill>
                         <a:srgbClr val="626669"/>
                       </a:solidFill>
@@ -34402,13 +34402,13 @@
                     <a:lnR w="0">
                       <a:noFill/>
                     </a:lnR>
-                    <a:lnT w="10160">
+                    <a:lnT w="15240">
                       <a:solidFill>
                         <a:srgbClr val="626669"/>
                       </a:solidFill>
                       <a:prstDash val="solid"/>
                     </a:lnT>
-                    <a:lnB w="10160">
+                    <a:lnB w="7620">
                       <a:solidFill>
                         <a:srgbClr val="626669"/>
                       </a:solidFill>
@@ -34465,13 +34465,13 @@
                     <a:lnR w="0">
                       <a:noFill/>
                     </a:lnR>
-                    <a:lnT w="10160">
+                    <a:lnT w="15240">
                       <a:solidFill>
                         <a:srgbClr val="626669"/>
                       </a:solidFill>
                       <a:prstDash val="solid"/>
                     </a:lnT>
-                    <a:lnB w="10160">
+                    <a:lnB w="7620">
                       <a:solidFill>
                         <a:srgbClr val="626669"/>
                       </a:solidFill>
@@ -34528,13 +34528,13 @@
                     <a:lnR w="0">
                       <a:noFill/>
                     </a:lnR>
-                    <a:lnT w="10160">
+                    <a:lnT w="15240">
                       <a:solidFill>
                         <a:srgbClr val="626669"/>
                       </a:solidFill>
                       <a:prstDash val="solid"/>
                     </a:lnT>
-                    <a:lnB w="10160">
+                    <a:lnB w="7620">
                       <a:solidFill>
                         <a:srgbClr val="626669"/>
                       </a:solidFill>
@@ -34591,13 +34591,13 @@
                     <a:lnR w="0">
                       <a:noFill/>
                     </a:lnR>
-                    <a:lnT w="10160">
+                    <a:lnT w="15240">
                       <a:solidFill>
                         <a:srgbClr val="626669"/>
                       </a:solidFill>
                       <a:prstDash val="solid"/>
                     </a:lnT>
-                    <a:lnB w="10160">
+                    <a:lnB w="7620">
                       <a:solidFill>
                         <a:srgbClr val="626669"/>
                       </a:solidFill>
@@ -34654,13 +34654,13 @@
                     <a:lnR w="0">
                       <a:noFill/>
                     </a:lnR>
-                    <a:lnT w="10160">
+                    <a:lnT w="15240">
                       <a:solidFill>
                         <a:srgbClr val="626669"/>
                       </a:solidFill>
                       <a:prstDash val="solid"/>
                     </a:lnT>
-                    <a:lnB w="10160">
+                    <a:lnB w="7620">
                       <a:solidFill>
                         <a:srgbClr val="626669"/>
                       </a:solidFill>
@@ -34719,13 +34719,13 @@
                     <a:lnR w="0">
                       <a:noFill/>
                     </a:lnR>
-                    <a:lnT w="10160">
+                    <a:lnT w="7620">
                       <a:solidFill>
                         <a:srgbClr val="626669"/>
                       </a:solidFill>
                       <a:prstDash val="solid"/>
                     </a:lnT>
-                    <a:lnB w="10160">
+                    <a:lnB w="15240">
                       <a:solidFill>
                         <a:srgbClr val="626669"/>
                       </a:solidFill>
@@ -34782,13 +34782,13 @@
                     <a:lnR w="0">
                       <a:noFill/>
                     </a:lnR>
-                    <a:lnT w="10160">
+                    <a:lnT w="7620">
                       <a:solidFill>
                         <a:srgbClr val="626669"/>
                       </a:solidFill>
                       <a:prstDash val="solid"/>
                     </a:lnT>
-                    <a:lnB w="10160">
+                    <a:lnB w="15240">
                       <a:solidFill>
                         <a:srgbClr val="626669"/>
                       </a:solidFill>
@@ -34845,13 +34845,13 @@
                     <a:lnR w="0">
                       <a:noFill/>
                     </a:lnR>
-                    <a:lnT w="10160">
+                    <a:lnT w="7620">
                       <a:solidFill>
                         <a:srgbClr val="626669"/>
                       </a:solidFill>
                       <a:prstDash val="solid"/>
                     </a:lnT>
-                    <a:lnB w="10160">
+                    <a:lnB w="15240">
                       <a:solidFill>
                         <a:srgbClr val="626669"/>
                       </a:solidFill>
@@ -34908,13 +34908,13 @@
                     <a:lnR w="0">
                       <a:noFill/>
                     </a:lnR>
-                    <a:lnT w="10160">
+                    <a:lnT w="7620">
                       <a:solidFill>
                         <a:srgbClr val="626669"/>
                       </a:solidFill>
                       <a:prstDash val="solid"/>
                     </a:lnT>
-                    <a:lnB w="10160">
+                    <a:lnB w="15240">
                       <a:solidFill>
                         <a:srgbClr val="626669"/>
                       </a:solidFill>
@@ -34971,13 +34971,13 @@
                     <a:lnR w="0">
                       <a:noFill/>
                     </a:lnR>
-                    <a:lnT w="10160">
+                    <a:lnT w="7620">
                       <a:solidFill>
                         <a:srgbClr val="626669"/>
                       </a:solidFill>
                       <a:prstDash val="solid"/>
                     </a:lnT>
-                    <a:lnB w="10160">
+                    <a:lnB w="15240">
                       <a:solidFill>
                         <a:srgbClr val="626669"/>
                       </a:solidFill>
@@ -35034,13 +35034,13 @@
                     <a:lnR w="0">
                       <a:noFill/>
                     </a:lnR>
-                    <a:lnT w="10160">
+                    <a:lnT w="7620">
                       <a:solidFill>
                         <a:srgbClr val="626669"/>
                       </a:solidFill>
                       <a:prstDash val="solid"/>
                     </a:lnT>
-                    <a:lnB w="10160">
+                    <a:lnB w="15240">
                       <a:solidFill>
                         <a:srgbClr val="626669"/>
                       </a:solidFill>
@@ -35784,13 +35784,13 @@
                     <a:lnR w="0">
                       <a:noFill/>
                     </a:lnR>
-                    <a:lnT w="10160">
+                    <a:lnT w="15240">
                       <a:solidFill>
                         <a:srgbClr val="626669"/>
                       </a:solidFill>
                       <a:prstDash val="solid"/>
                     </a:lnT>
-                    <a:lnB w="10160">
+                    <a:lnB w="7620">
                       <a:solidFill>
                         <a:srgbClr val="626669"/>
                       </a:solidFill>
@@ -35847,13 +35847,13 @@
                     <a:lnR w="0">
                       <a:noFill/>
                     </a:lnR>
-                    <a:lnT w="10160">
+                    <a:lnT w="15240">
                       <a:solidFill>
                         <a:srgbClr val="626669"/>
                       </a:solidFill>
                       <a:prstDash val="solid"/>
                     </a:lnT>
-                    <a:lnB w="10160">
+                    <a:lnB w="7620">
                       <a:solidFill>
                         <a:srgbClr val="626669"/>
                       </a:solidFill>
@@ -35910,13 +35910,13 @@
                     <a:lnR w="0">
                       <a:noFill/>
                     </a:lnR>
-                    <a:lnT w="10160">
+                    <a:lnT w="15240">
                       <a:solidFill>
                         <a:srgbClr val="626669"/>
                       </a:solidFill>
                       <a:prstDash val="solid"/>
                     </a:lnT>
-                    <a:lnB w="10160">
+                    <a:lnB w="7620">
                       <a:solidFill>
                         <a:srgbClr val="626669"/>
                       </a:solidFill>
@@ -35973,13 +35973,13 @@
                     <a:lnR w="0">
                       <a:noFill/>
                     </a:lnR>
-                    <a:lnT w="10160">
+                    <a:lnT w="15240">
                       <a:solidFill>
                         <a:srgbClr val="626669"/>
                       </a:solidFill>
                       <a:prstDash val="solid"/>
                     </a:lnT>
-                    <a:lnB w="10160">
+                    <a:lnB w="7620">
                       <a:solidFill>
                         <a:srgbClr val="626669"/>
                       </a:solidFill>
@@ -36038,7 +36038,7 @@
                     <a:lnR w="0">
                       <a:noFill/>
                     </a:lnR>
-                    <a:lnT w="10160">
+                    <a:lnT w="7620">
                       <a:solidFill>
                         <a:srgbClr val="626669"/>
                       </a:solidFill>
@@ -36098,7 +36098,7 @@
                     <a:lnR w="0">
                       <a:noFill/>
                     </a:lnR>
-                    <a:lnT w="10160">
+                    <a:lnT w="7620">
                       <a:solidFill>
                         <a:srgbClr val="626669"/>
                       </a:solidFill>
@@ -36158,7 +36158,7 @@
                     <a:lnR w="0">
                       <a:noFill/>
                     </a:lnR>
-                    <a:lnT w="10160">
+                    <a:lnT w="7620">
                       <a:solidFill>
                         <a:srgbClr val="626669"/>
                       </a:solidFill>
@@ -36218,7 +36218,7 @@
                     <a:lnR w="0">
                       <a:noFill/>
                     </a:lnR>
-                    <a:lnT w="10160">
+                    <a:lnT w="7620">
                       <a:solidFill>
                         <a:srgbClr val="626669"/>
                       </a:solidFill>
@@ -36973,7 +36973,7 @@
                     <a:lnT w="0">
                       <a:noFill/>
                     </a:lnT>
-                    <a:lnB w="10160">
+                    <a:lnB w="15240">
                       <a:solidFill>
                         <a:srgbClr val="626669"/>
                       </a:solidFill>
@@ -37033,7 +37033,7 @@
                     <a:lnT w="0">
                       <a:noFill/>
                     </a:lnT>
-                    <a:lnB w="10160">
+                    <a:lnB w="15240">
                       <a:solidFill>
                         <a:srgbClr val="626669"/>
                       </a:solidFill>
@@ -37093,7 +37093,7 @@
                     <a:lnT w="0">
                       <a:noFill/>
                     </a:lnT>
-                    <a:lnB w="10160">
+                    <a:lnB w="15240">
                       <a:solidFill>
                         <a:srgbClr val="626669"/>
                       </a:solidFill>
@@ -37153,7 +37153,7 @@
                     <a:lnT w="0">
                       <a:noFill/>
                     </a:lnT>
-                    <a:lnB w="10160">
+                    <a:lnB w="15240">
                       <a:solidFill>
                         <a:srgbClr val="626669"/>
                       </a:solidFill>
@@ -37557,13 +37557,13 @@
                     <a:lnR w="0">
                       <a:noFill/>
                     </a:lnR>
-                    <a:lnT w="10160">
+                    <a:lnT w="15240">
                       <a:solidFill>
                         <a:srgbClr val="626669"/>
                       </a:solidFill>
                       <a:prstDash val="solid"/>
                     </a:lnT>
-                    <a:lnB w="10160">
+                    <a:lnB w="7620">
                       <a:solidFill>
                         <a:srgbClr val="626669"/>
                       </a:solidFill>
@@ -37620,13 +37620,13 @@
                     <a:lnR w="0">
                       <a:noFill/>
                     </a:lnR>
-                    <a:lnT w="10160">
+                    <a:lnT w="15240">
                       <a:solidFill>
                         <a:srgbClr val="626669"/>
                       </a:solidFill>
                       <a:prstDash val="solid"/>
                     </a:lnT>
-                    <a:lnB w="10160">
+                    <a:lnB w="7620">
                       <a:solidFill>
                         <a:srgbClr val="626669"/>
                       </a:solidFill>
@@ -37683,13 +37683,13 @@
                     <a:lnR w="0">
                       <a:noFill/>
                     </a:lnR>
-                    <a:lnT w="10160">
+                    <a:lnT w="15240">
                       <a:solidFill>
                         <a:srgbClr val="626669"/>
                       </a:solidFill>
                       <a:prstDash val="solid"/>
                     </a:lnT>
-                    <a:lnB w="10160">
+                    <a:lnB w="7620">
                       <a:solidFill>
                         <a:srgbClr val="626669"/>
                       </a:solidFill>
@@ -37746,13 +37746,13 @@
                     <a:lnR w="0">
                       <a:noFill/>
                     </a:lnR>
-                    <a:lnT w="10160">
+                    <a:lnT w="15240">
                       <a:solidFill>
                         <a:srgbClr val="626669"/>
                       </a:solidFill>
                       <a:prstDash val="solid"/>
                     </a:lnT>
-                    <a:lnB w="10160">
+                    <a:lnB w="7620">
                       <a:solidFill>
                         <a:srgbClr val="626669"/>
                       </a:solidFill>
@@ -37811,7 +37811,7 @@
                     <a:lnR w="0">
                       <a:noFill/>
                     </a:lnR>
-                    <a:lnT w="10160">
+                    <a:lnT w="7620">
                       <a:solidFill>
                         <a:srgbClr val="626669"/>
                       </a:solidFill>
@@ -37871,7 +37871,7 @@
                     <a:lnR w="0">
                       <a:noFill/>
                     </a:lnR>
-                    <a:lnT w="10160">
+                    <a:lnT w="7620">
                       <a:solidFill>
                         <a:srgbClr val="626669"/>
                       </a:solidFill>
@@ -37931,7 +37931,7 @@
                     <a:lnR w="0">
                       <a:noFill/>
                     </a:lnR>
-                    <a:lnT w="10160">
+                    <a:lnT w="7620">
                       <a:solidFill>
                         <a:srgbClr val="626669"/>
                       </a:solidFill>
@@ -37991,7 +37991,7 @@
                     <a:lnR w="0">
                       <a:noFill/>
                     </a:lnR>
-                    <a:lnT w="10160">
+                    <a:lnT w="7620">
                       <a:solidFill>
                         <a:srgbClr val="626669"/>
                       </a:solidFill>
@@ -38746,7 +38746,7 @@
                     <a:lnT w="0">
                       <a:noFill/>
                     </a:lnT>
-                    <a:lnB w="10160">
+                    <a:lnB w="15240">
                       <a:solidFill>
                         <a:srgbClr val="626669"/>
                       </a:solidFill>
@@ -38806,7 +38806,7 @@
                     <a:lnT w="0">
                       <a:noFill/>
                     </a:lnT>
-                    <a:lnB w="10160">
+                    <a:lnB w="15240">
                       <a:solidFill>
                         <a:srgbClr val="626669"/>
                       </a:solidFill>
@@ -38866,7 +38866,7 @@
                     <a:lnT w="0">
                       <a:noFill/>
                     </a:lnT>
-                    <a:lnB w="10160">
+                    <a:lnB w="15240">
                       <a:solidFill>
                         <a:srgbClr val="626669"/>
                       </a:solidFill>
@@ -38926,7 +38926,7 @@
                     <a:lnT w="0">
                       <a:noFill/>
                     </a:lnT>
-                    <a:lnB w="10160">
+                    <a:lnB w="15240">
                       <a:solidFill>
                         <a:srgbClr val="626669"/>
                       </a:solidFill>
@@ -41216,13 +41216,13 @@
                     <a:lnR w="0">
                       <a:noFill/>
                     </a:lnR>
-                    <a:lnT w="10160">
+                    <a:lnT w="15240">
                       <a:solidFill>
                         <a:srgbClr val="626669"/>
                       </a:solidFill>
                       <a:prstDash val="solid"/>
                     </a:lnT>
-                    <a:lnB w="10160">
+                    <a:lnB w="7620">
                       <a:solidFill>
                         <a:srgbClr val="626669"/>
                       </a:solidFill>
@@ -41279,13 +41279,13 @@
                     <a:lnR w="0">
                       <a:noFill/>
                     </a:lnR>
-                    <a:lnT w="10160">
+                    <a:lnT w="15240">
                       <a:solidFill>
                         <a:srgbClr val="626669"/>
                       </a:solidFill>
                       <a:prstDash val="solid"/>
                     </a:lnT>
-                    <a:lnB w="10160">
+                    <a:lnB w="7620">
                       <a:solidFill>
                         <a:srgbClr val="626669"/>
                       </a:solidFill>
@@ -41342,13 +41342,13 @@
                     <a:lnR w="0">
                       <a:noFill/>
                     </a:lnR>
-                    <a:lnT w="10160">
+                    <a:lnT w="15240">
                       <a:solidFill>
                         <a:srgbClr val="626669"/>
                       </a:solidFill>
                       <a:prstDash val="solid"/>
                     </a:lnT>
-                    <a:lnB w="10160">
+                    <a:lnB w="7620">
                       <a:solidFill>
                         <a:srgbClr val="626669"/>
                       </a:solidFill>
@@ -41405,13 +41405,13 @@
                     <a:lnR w="0">
                       <a:noFill/>
                     </a:lnR>
-                    <a:lnT w="10160">
+                    <a:lnT w="15240">
                       <a:solidFill>
                         <a:srgbClr val="626669"/>
                       </a:solidFill>
                       <a:prstDash val="solid"/>
                     </a:lnT>
-                    <a:lnB w="10160">
+                    <a:lnB w="7620">
                       <a:solidFill>
                         <a:srgbClr val="626669"/>
                       </a:solidFill>
@@ -41468,13 +41468,13 @@
                     <a:lnR w="0">
                       <a:noFill/>
                     </a:lnR>
-                    <a:lnT w="10160">
+                    <a:lnT w="15240">
                       <a:solidFill>
                         <a:srgbClr val="626669"/>
                       </a:solidFill>
                       <a:prstDash val="solid"/>
                     </a:lnT>
-                    <a:lnB w="10160">
+                    <a:lnB w="7620">
                       <a:solidFill>
                         <a:srgbClr val="626669"/>
                       </a:solidFill>
@@ -41531,13 +41531,13 @@
                     <a:lnR w="0">
                       <a:noFill/>
                     </a:lnR>
-                    <a:lnT w="10160">
+                    <a:lnT w="15240">
                       <a:solidFill>
                         <a:srgbClr val="626669"/>
                       </a:solidFill>
                       <a:prstDash val="solid"/>
                     </a:lnT>
-                    <a:lnB w="10160">
+                    <a:lnB w="7620">
                       <a:solidFill>
                         <a:srgbClr val="626669"/>
                       </a:solidFill>
@@ -41596,7 +41596,7 @@
                     <a:lnR w="0">
                       <a:noFill/>
                     </a:lnR>
-                    <a:lnT w="10160">
+                    <a:lnT w="7620">
                       <a:solidFill>
                         <a:srgbClr val="626669"/>
                       </a:solidFill>
@@ -41656,7 +41656,7 @@
                     <a:lnR w="0">
                       <a:noFill/>
                     </a:lnR>
-                    <a:lnT w="10160">
+                    <a:lnT w="7620">
                       <a:solidFill>
                         <a:srgbClr val="626669"/>
                       </a:solidFill>
@@ -41716,7 +41716,7 @@
                     <a:lnR w="0">
                       <a:noFill/>
                     </a:lnR>
-                    <a:lnT w="10160">
+                    <a:lnT w="7620">
                       <a:solidFill>
                         <a:srgbClr val="626669"/>
                       </a:solidFill>
@@ -41776,7 +41776,7 @@
                     <a:lnR w="0">
                       <a:noFill/>
                     </a:lnR>
-                    <a:lnT w="10160">
+                    <a:lnT w="7620">
                       <a:solidFill>
                         <a:srgbClr val="626669"/>
                       </a:solidFill>
@@ -41836,7 +41836,7 @@
                     <a:lnR w="0">
                       <a:noFill/>
                     </a:lnR>
-                    <a:lnT w="10160">
+                    <a:lnT w="7620">
                       <a:solidFill>
                         <a:srgbClr val="626669"/>
                       </a:solidFill>
@@ -41896,7 +41896,7 @@
                     <a:lnR w="0">
                       <a:noFill/>
                     </a:lnR>
-                    <a:lnT w="10160">
+                    <a:lnT w="7620">
                       <a:solidFill>
                         <a:srgbClr val="626669"/>
                       </a:solidFill>
@@ -42305,7 +42305,7 @@
                     <a:lnT w="0">
                       <a:noFill/>
                     </a:lnT>
-                    <a:lnB w="10160">
+                    <a:lnB w="15240">
                       <a:solidFill>
                         <a:srgbClr val="626669"/>
                       </a:solidFill>
@@ -42365,7 +42365,7 @@
                     <a:lnT w="0">
                       <a:noFill/>
                     </a:lnT>
-                    <a:lnB w="10160">
+                    <a:lnB w="15240">
                       <a:solidFill>
                         <a:srgbClr val="626669"/>
                       </a:solidFill>
@@ -42425,7 +42425,7 @@
                     <a:lnT w="0">
                       <a:noFill/>
                     </a:lnT>
-                    <a:lnB w="10160">
+                    <a:lnB w="15240">
                       <a:solidFill>
                         <a:srgbClr val="626669"/>
                       </a:solidFill>
@@ -42485,7 +42485,7 @@
                     <a:lnT w="0">
                       <a:noFill/>
                     </a:lnT>
-                    <a:lnB w="10160">
+                    <a:lnB w="15240">
                       <a:solidFill>
                         <a:srgbClr val="626669"/>
                       </a:solidFill>
@@ -42545,7 +42545,7 @@
                     <a:lnT w="0">
                       <a:noFill/>
                     </a:lnT>
-                    <a:lnB w="10160">
+                    <a:lnB w="15240">
                       <a:solidFill>
                         <a:srgbClr val="626669"/>
                       </a:solidFill>
@@ -42605,7 +42605,7 @@
                     <a:lnT w="0">
                       <a:noFill/>
                     </a:lnT>
-                    <a:lnB w="10160">
+                    <a:lnB w="15240">
                       <a:solidFill>
                         <a:srgbClr val="626669"/>
                       </a:solidFill>
@@ -43008,13 +43008,13 @@
                     <a:lnR w="0">
                       <a:noFill/>
                     </a:lnR>
-                    <a:lnT w="10160">
+                    <a:lnT w="15240">
                       <a:solidFill>
                         <a:srgbClr val="626669"/>
                       </a:solidFill>
                       <a:prstDash val="solid"/>
                     </a:lnT>
-                    <a:lnB w="10160">
+                    <a:lnB w="7620">
                       <a:solidFill>
                         <a:srgbClr val="626669"/>
                       </a:solidFill>
@@ -43071,13 +43071,13 @@
                     <a:lnR w="0">
                       <a:noFill/>
                     </a:lnR>
-                    <a:lnT w="10160">
+                    <a:lnT w="15240">
                       <a:solidFill>
                         <a:srgbClr val="626669"/>
                       </a:solidFill>
                       <a:prstDash val="solid"/>
                     </a:lnT>
-                    <a:lnB w="10160">
+                    <a:lnB w="7620">
                       <a:solidFill>
                         <a:srgbClr val="626669"/>
                       </a:solidFill>
@@ -43134,13 +43134,13 @@
                     <a:lnR w="0">
                       <a:noFill/>
                     </a:lnR>
-                    <a:lnT w="10160">
+                    <a:lnT w="15240">
                       <a:solidFill>
                         <a:srgbClr val="626669"/>
                       </a:solidFill>
                       <a:prstDash val="solid"/>
                     </a:lnT>
-                    <a:lnB w="10160">
+                    <a:lnB w="7620">
                       <a:solidFill>
                         <a:srgbClr val="626669"/>
                       </a:solidFill>
@@ -43199,7 +43199,7 @@
                     <a:lnR w="0">
                       <a:noFill/>
                     </a:lnR>
-                    <a:lnT w="10160">
+                    <a:lnT w="7620">
                       <a:solidFill>
                         <a:srgbClr val="626669"/>
                       </a:solidFill>
@@ -43259,7 +43259,7 @@
                     <a:lnR w="0">
                       <a:noFill/>
                     </a:lnR>
-                    <a:lnT w="10160">
+                    <a:lnT w="7620">
                       <a:solidFill>
                         <a:srgbClr val="626669"/>
                       </a:solidFill>
@@ -43319,7 +43319,7 @@
                     <a:lnR w="0">
                       <a:noFill/>
                     </a:lnR>
-                    <a:lnT w="10160">
+                    <a:lnT w="7620">
                       <a:solidFill>
                         <a:srgbClr val="626669"/>
                       </a:solidFill>
@@ -43557,7 +43557,7 @@
                     <a:lnT w="0">
                       <a:noFill/>
                     </a:lnT>
-                    <a:lnB w="10160">
+                    <a:lnB w="15240">
                       <a:solidFill>
                         <a:srgbClr val="626669"/>
                       </a:solidFill>
@@ -43617,7 +43617,7 @@
                     <a:lnT w="0">
                       <a:noFill/>
                     </a:lnT>
-                    <a:lnB w="10160">
+                    <a:lnB w="15240">
                       <a:solidFill>
                         <a:srgbClr val="626669"/>
                       </a:solidFill>
@@ -43677,7 +43677,7 @@
                     <a:lnT w="0">
                       <a:noFill/>
                     </a:lnT>
-                    <a:lnB w="10160">
+                    <a:lnB w="15240">
                       <a:solidFill>
                         <a:srgbClr val="626669"/>
                       </a:solidFill>
@@ -44031,13 +44031,13 @@
                     <a:lnR w="0">
                       <a:noFill/>
                     </a:lnR>
-                    <a:lnT w="10160">
+                    <a:lnT w="15240">
                       <a:solidFill>
                         <a:srgbClr val="626669"/>
                       </a:solidFill>
                       <a:prstDash val="solid"/>
                     </a:lnT>
-                    <a:lnB w="10160">
+                    <a:lnB w="7620">
                       <a:solidFill>
                         <a:srgbClr val="626669"/>
                       </a:solidFill>
@@ -44094,13 +44094,13 @@
                     <a:lnR w="0">
                       <a:noFill/>
                     </a:lnR>
-                    <a:lnT w="10160">
+                    <a:lnT w="15240">
                       <a:solidFill>
                         <a:srgbClr val="626669"/>
                       </a:solidFill>
                       <a:prstDash val="solid"/>
                     </a:lnT>
-                    <a:lnB w="10160">
+                    <a:lnB w="7620">
                       <a:solidFill>
                         <a:srgbClr val="626669"/>
                       </a:solidFill>
@@ -44157,13 +44157,13 @@
                     <a:lnR w="0">
                       <a:noFill/>
                     </a:lnR>
-                    <a:lnT w="10160">
+                    <a:lnT w="15240">
                       <a:solidFill>
                         <a:srgbClr val="626669"/>
                       </a:solidFill>
                       <a:prstDash val="solid"/>
                     </a:lnT>
-                    <a:lnB w="10160">
+                    <a:lnB w="7620">
                       <a:solidFill>
                         <a:srgbClr val="626669"/>
                       </a:solidFill>
@@ -44220,13 +44220,13 @@
                     <a:lnR w="0">
                       <a:noFill/>
                     </a:lnR>
-                    <a:lnT w="10160">
+                    <a:lnT w="15240">
                       <a:solidFill>
                         <a:srgbClr val="626669"/>
                       </a:solidFill>
                       <a:prstDash val="solid"/>
                     </a:lnT>
-                    <a:lnB w="10160">
+                    <a:lnB w="7620">
                       <a:solidFill>
                         <a:srgbClr val="626669"/>
                       </a:solidFill>
@@ -44285,7 +44285,7 @@
                     <a:lnR w="0">
                       <a:noFill/>
                     </a:lnR>
-                    <a:lnT w="10160">
+                    <a:lnT w="7620">
                       <a:solidFill>
                         <a:srgbClr val="626669"/>
                       </a:solidFill>
@@ -44345,7 +44345,7 @@
                     <a:lnR w="0">
                       <a:noFill/>
                     </a:lnR>
-                    <a:lnT w="10160">
+                    <a:lnT w="7620">
                       <a:solidFill>
                         <a:srgbClr val="626669"/>
                       </a:solidFill>
@@ -44405,7 +44405,7 @@
                     <a:lnR w="0">
                       <a:noFill/>
                     </a:lnR>
-                    <a:lnT w="10160">
+                    <a:lnT w="7620">
                       <a:solidFill>
                         <a:srgbClr val="626669"/>
                       </a:solidFill>
@@ -44465,7 +44465,7 @@
                     <a:lnR w="0">
                       <a:noFill/>
                     </a:lnR>
-                    <a:lnT w="10160">
+                    <a:lnT w="7620">
                       <a:solidFill>
                         <a:srgbClr val="626669"/>
                       </a:solidFill>
@@ -44760,7 +44760,7 @@
                     <a:lnT w="0">
                       <a:noFill/>
                     </a:lnT>
-                    <a:lnB w="10160">
+                    <a:lnB w="15240">
                       <a:solidFill>
                         <a:srgbClr val="626669"/>
                       </a:solidFill>
@@ -44820,7 +44820,7 @@
                     <a:lnT w="0">
                       <a:noFill/>
                     </a:lnT>
-                    <a:lnB w="10160">
+                    <a:lnB w="15240">
                       <a:solidFill>
                         <a:srgbClr val="626669"/>
                       </a:solidFill>
@@ -44880,7 +44880,7 @@
                     <a:lnT w="0">
                       <a:noFill/>
                     </a:lnT>
-                    <a:lnB w="10160">
+                    <a:lnB w="15240">
                       <a:solidFill>
                         <a:srgbClr val="626669"/>
                       </a:solidFill>
@@ -44940,7 +44940,7 @@
                     <a:lnT w="0">
                       <a:noFill/>
                     </a:lnT>
-                    <a:lnB w="10160">
+                    <a:lnB w="15240">
                       <a:solidFill>
                         <a:srgbClr val="626669"/>
                       </a:solidFill>

--- a/slides/datasets-in-10-minutes-imagenet.pptx
+++ b/slides/datasets-in-10-minutes-imagenet.pptx
@@ -15339,364 +15339,6 @@
           </a:xfrm>
         </p:spPr>
         <p:txBody>
-          <a:bodyPr wrap="none" lIns="0" rIns="0" tIns="0" bIns="0"/>
-          <a:lstStyle/>
-          <a:p>
-            <a:pPr algn="l">
-              <a:lnSpc>
-                <a:spcPct val="100000"/>
-              </a:lnSpc>
-              <a:spcBef>
-                <a:spcPts val="0"/>
-              </a:spcBef>
-              <a:spcAft>
-                <a:spcPts val="0"/>
-              </a:spcAft>
-              <a:defRPr sz="2800" b="1" lang="ja-JP">
-                <a:solidFill>
-                  <a:srgbClr val="303437"/>
-                </a:solidFill>
-                <a:latin typeface="Noto Sans"/>
-                <a:ea typeface="Noto Sans CJK JP"/>
-                <a:cs typeface="Noto Sans"/>
-              </a:defRPr>
-            </a:pPr>
-            <a:r>
-              <a:rPr sz="2800" b="1" lang="ja-JP">
-                <a:solidFill>
-                  <a:srgbClr val="303437"/>
-                </a:solidFill>
-                <a:latin typeface="Noto Sans"/>
-                <a:ea typeface="Noto Sans CJK JP"/>
-                <a:cs typeface="Noto Sans"/>
-              </a:rPr>
-              <a:t>画像から特徴を取り出して分類する</a:t>
-            </a:r>
-          </a:p>
-        </p:txBody>
-      </p:sp>
-      <p:sp>
-        <p:nvSpPr>
-          <p:cNvPr id="4" name="Title 3"/>
-          <p:cNvSpPr>
-            <a:spLocks noGrp="1"/>
-          </p:cNvSpPr>
-          <p:nvPr>
-            <p:ph type="title" idx="2"/>
-          </p:nvPr>
-        </p:nvSpPr>
-        <p:spPr/>
-        <p:txBody>
-          <a:bodyPr anchor="ctr" tIns="0" bIns="0"/>
-          <a:lstStyle/>
-          <a:p>
-            <a:pPr>
-              <a:lnSpc>
-                <a:spcPct val="100000"/>
-              </a:lnSpc>
-              <a:spcBef>
-                <a:spcPts val="0"/>
-              </a:spcBef>
-              <a:spcAft>
-                <a:spcPts val="0"/>
-              </a:spcAft>
-            </a:pPr>
-            <a:r>
-              <a:rPr sz="1400" b="1" lang="ja-JP">
-                <a:solidFill>
-                  <a:srgbClr val="FFFEF8"/>
-                </a:solidFill>
-                <a:latin typeface="Noto Sans"/>
-                <a:ea typeface="Noto Sans CJK JP"/>
-                <a:cs typeface="Noto Sans"/>
-              </a:rPr>
-              <a:t>3. 画像分類の評価指標とモデル性能</a:t>
-            </a:r>
-          </a:p>
-        </p:txBody>
-      </p:sp>
-      <p:sp>
-        <p:nvSpPr>
-          <p:cNvPr id="5" name="body"/>
-          <p:cNvSpPr/>
-          <p:nvPr>
-            <p:ph type="body" idx="1"/>
-          </p:nvPr>
-        </p:nvSpPr>
-        <p:spPr>
-          <a:xfrm>
-            <a:off x="594360" y="1309010"/>
-            <a:ext cx="7955279" cy="3200400"/>
-          </a:xfrm>
-          <a:prstGeom prst="rect">
-            <a:avLst/>
-          </a:prstGeom>
-          <a:noFill/>
-        </p:spPr>
-        <p:txBody>
-          <a:bodyPr wrap="square" lIns="0" rIns="0" tIns="0" bIns="0">
-            <a:spAutoFit/>
-          </a:bodyPr>
-          <a:lstStyle/>
-          <a:p>
-            <a:pPr lvl="0" marL="457200" indent="-355600">
-              <a:lnSpc>
-                <a:spcPct val="110000"/>
-              </a:lnSpc>
-              <a:spcBef>
-                <a:spcPts val="0"/>
-              </a:spcBef>
-              <a:spcAft>
-                <a:spcPts val="800"/>
-              </a:spcAft>
-              <a:buSzPct val="57826"/>
-              <a:buFont typeface="Noto Sans CJK JP"/>
-              <a:buChar char="●"/>
-              <a:defRPr sz="2300" b="0" lang="ja-JP">
-                <a:solidFill>
-                  <a:srgbClr val="303437"/>
-                </a:solidFill>
-                <a:latin typeface="Noto Sans"/>
-                <a:ea typeface="Noto Sans CJK JP"/>
-                <a:cs typeface="Noto Sans"/>
-              </a:defRPr>
-            </a:pPr>
-            <a:r>
-              <a:rPr sz="2300" b="0" lang="ja-JP">
-                <a:solidFill>
-                  <a:srgbClr val="303437"/>
-                </a:solidFill>
-                <a:latin typeface="Noto Sans"/>
-                <a:ea typeface="Noto Sans CJK JP"/>
-                <a:cs typeface="Noto Sans"/>
-              </a:rPr>
-              <a:t>畳み込みニューラルネットワークは、画像の局所的な模様を段階的に組み合わせて特徴を得る。AlexNetやResNetはこの方式を使う。</a:t>
-            </a:r>
-          </a:p>
-          <a:p>
-            <a:pPr lvl="0" marL="457200" indent="-355600">
-              <a:lnSpc>
-                <a:spcPct val="110000"/>
-              </a:lnSpc>
-              <a:spcBef>
-                <a:spcPts val="0"/>
-              </a:spcBef>
-              <a:spcAft>
-                <a:spcPts val="800"/>
-              </a:spcAft>
-              <a:buSzPct val="57826"/>
-              <a:buFont typeface="Noto Sans CJK JP"/>
-              <a:buChar char="●"/>
-              <a:defRPr sz="2300" b="0" lang="ja-JP">
-                <a:solidFill>
-                  <a:srgbClr val="303437"/>
-                </a:solidFill>
-                <a:latin typeface="Noto Sans"/>
-                <a:ea typeface="Noto Sans CJK JP"/>
-                <a:cs typeface="Noto Sans"/>
-              </a:defRPr>
-            </a:pPr>
-            <a:r>
-              <a:rPr sz="2300" b="0" lang="ja-JP">
-                <a:solidFill>
-                  <a:srgbClr val="303437"/>
-                </a:solidFill>
-                <a:latin typeface="Noto Sans"/>
-                <a:ea typeface="Noto Sans CJK JP"/>
-                <a:cs typeface="Noto Sans"/>
-              </a:rPr>
-              <a:t>ResNetは層の入力を後段へ加える残差接続を使い、深いネットワークを学習する。50・101・152は層数を表す。</a:t>
-            </a:r>
-          </a:p>
-          <a:p>
-            <a:pPr lvl="0" marL="457200" indent="-355600">
-              <a:lnSpc>
-                <a:spcPct val="110000"/>
-              </a:lnSpc>
-              <a:spcBef>
-                <a:spcPts val="0"/>
-              </a:spcBef>
-              <a:spcAft>
-                <a:spcPts val="800"/>
-              </a:spcAft>
-              <a:buSzPct val="57826"/>
-              <a:buFont typeface="Noto Sans CJK JP"/>
-              <a:buChar char="●"/>
-              <a:defRPr sz="2300" b="0" lang="ja-JP">
-                <a:solidFill>
-                  <a:srgbClr val="303437"/>
-                </a:solidFill>
-                <a:latin typeface="Noto Sans"/>
-                <a:ea typeface="Noto Sans CJK JP"/>
-                <a:cs typeface="Noto Sans"/>
-              </a:defRPr>
-            </a:pPr>
-            <a:r>
-              <a:rPr sz="2300" b="0" lang="ja-JP">
-                <a:solidFill>
-                  <a:srgbClr val="303437"/>
-                </a:solidFill>
-                <a:latin typeface="Noto Sans"/>
-                <a:ea typeface="Noto Sans CJK JP"/>
-                <a:cs typeface="Noto Sans"/>
-              </a:rPr>
-              <a:t>これらの特徴からクラスの得点を出し、その順位でTop-1・Top-5を評価する。</a:t>
-            </a:r>
-          </a:p>
-        </p:txBody>
-      </p:sp>
-      <p:sp>
-        <p:nvSpPr>
-          <p:cNvPr id="6" name="TextBox 5"/>
-          <p:cNvSpPr txBox="1"/>
-          <p:nvPr/>
-        </p:nvSpPr>
-        <p:spPr>
-          <a:xfrm>
-            <a:off x="502920" y="4699000"/>
-            <a:ext cx="8183879" cy="177800"/>
-          </a:xfrm>
-          <a:prstGeom prst="rect">
-            <a:avLst/>
-          </a:prstGeom>
-          <a:noFill/>
-        </p:spPr>
-        <p:txBody>
-          <a:bodyPr wrap="square" lIns="0" rIns="0" tIns="0" bIns="0">
-            <a:spAutoFit/>
-          </a:bodyPr>
-          <a:lstStyle/>
-          <a:p>
-            <a:pPr algn="l">
-              <a:lnSpc>
-                <a:spcPts val="1400"/>
-              </a:lnSpc>
-              <a:spcBef>
-                <a:spcPts val="0"/>
-              </a:spcBef>
-              <a:spcAft>
-                <a:spcPts val="0"/>
-              </a:spcAft>
-            </a:pPr>
-            <a:r>
-              <a:rPr sz="800" b="0" lang="ja-JP">
-                <a:solidFill>
-                  <a:srgbClr val="626669"/>
-                </a:solidFill>
-                <a:latin typeface="Noto Sans"/>
-                <a:ea typeface="Noto Sans CJK JP"/>
-                <a:cs typeface="Noto Sans"/>
-              </a:rPr>
-              <a:t/>
-            </a:r>
-            <a:r>
-              <a:rPr sz="800" lang="ja-JP">
-                <a:solidFill>
-                  <a:srgbClr val="626669"/>
-                </a:solidFill>
-                <a:latin typeface="Noto Sans"/>
-                <a:ea typeface="Noto Sans CJK JP"/>
-                <a:cs typeface="Noto Sans"/>
-              </a:rPr>
-              <a:t>[1] He et al. (2016). CVPR, pp. 770–778. Deep Residual Learning for Image Recognition.</a:t>
-            </a:r>
-          </a:p>
-        </p:txBody>
-      </p:sp>
-      <p:sp>
-        <p:nvSpPr>
-          <p:cNvPr id="7" name="TextBox 6"/>
-          <p:cNvSpPr txBox="1"/>
-          <p:nvPr/>
-        </p:nvSpPr>
-        <p:spPr>
-          <a:xfrm>
-            <a:off x="4664725" y="4717326"/>
-            <a:ext cx="4022074" cy="177800"/>
-          </a:xfrm>
-          <a:prstGeom prst="rect">
-            <a:avLst/>
-          </a:prstGeom>
-          <a:noFill/>
-        </p:spPr>
-        <p:txBody>
-          <a:bodyPr wrap="none" lIns="0" rIns="0" tIns="0" bIns="0">
-            <a:spAutoFit/>
-          </a:bodyPr>
-          <a:lstStyle/>
-          <a:p>
-            <a:pPr algn="l">
-              <a:lnSpc>
-                <a:spcPts val="1400"/>
-              </a:lnSpc>
-              <a:spcBef>
-                <a:spcPts val="0"/>
-              </a:spcBef>
-              <a:spcAft>
-                <a:spcPts val="0"/>
-              </a:spcAft>
-            </a:pPr>
-            <a:r>
-              <a:rPr sz="800" b="0" lang="ja-JP">
-                <a:solidFill>
-                  <a:srgbClr val="626669"/>
-                </a:solidFill>
-                <a:latin typeface="Noto Sans"/>
-                <a:ea typeface="Noto Sans CJK JP"/>
-                <a:cs typeface="Noto Sans"/>
-              </a:rPr>
-              <a:t/>
-            </a:r>
-            <a:r>
-              <a:rPr sz="800" lang="ja-JP">
-                <a:solidFill>
-                  <a:srgbClr val="626669"/>
-                </a:solidFill>
-                <a:latin typeface="Noto Sans"/>
-                <a:ea typeface="Noto Sans CJK JP"/>
-                <a:cs typeface="Noto Sans"/>
-                <a:hlinkClick r:id="rId2"/>
-              </a:rPr>
-              <a:t>https://arxiv.org/abs/1512.03385</a:t>
-            </a:r>
-          </a:p>
-        </p:txBody>
-      </p:sp>
-    </p:spTree>
-  </p:cSld>
-  <p:clrMapOvr>
-    <a:masterClrMapping/>
-  </p:clrMapOvr>
-</p:sld>
-</file>
-
-<file path=ppt/slides/slide28.xml><?xml version="1.0" encoding="utf-8"?>
-<p:sld xmlns:a="http://schemas.openxmlformats.org/drawingml/2006/main" xmlns:p="http://schemas.openxmlformats.org/presentationml/2006/main" xmlns:r="http://schemas.openxmlformats.org/officeDocument/2006/relationships">
-  <p:cSld>
-    <p:spTree>
-      <p:nvGrpSpPr>
-        <p:cNvPr id="1" name=""/>
-        <p:cNvGrpSpPr/>
-        <p:nvPr/>
-      </p:nvGrpSpPr>
-      <p:grpSpPr/>
-      <p:sp>
-        <p:nvSpPr>
-          <p:cNvPr id="2" name="Title 1"/>
-          <p:cNvSpPr>
-            <a:spLocks noGrp="1"/>
-          </p:cNvSpPr>
-          <p:nvPr>
-            <p:ph type="title"/>
-          </p:nvPr>
-        </p:nvSpPr>
-        <p:spPr>
-          <a:xfrm>
-            <a:off x="468172" y="650138"/>
-            <a:ext cx="8206740" cy="616305"/>
-          </a:xfrm>
-        </p:spPr>
-        <p:txBody>
           <a:bodyPr wrap="none" lIns="0" rIns="0" tIns="0" bIns="0" anchor="t"/>
           <a:lstStyle/>
           <a:p>
@@ -16741,7 +16383,7 @@
 </p:sld>
 </file>
 
-<file path=ppt/slides/slide29.xml><?xml version="1.0" encoding="utf-8"?>
+<file path=ppt/slides/slide28.xml><?xml version="1.0" encoding="utf-8"?>
 <p:sld xmlns:a="http://schemas.openxmlformats.org/drawingml/2006/main" xmlns:p="http://schemas.openxmlformats.org/presentationml/2006/main" xmlns:r="http://schemas.openxmlformats.org/officeDocument/2006/relationships">
   <p:cSld>
     <p:spTree>
@@ -17813,479 +17455,7 @@
 </p:sld>
 </file>
 
-<file path=ppt/slides/slide3.xml><?xml version="1.0" encoding="utf-8"?>
-<p:sld xmlns:a="http://schemas.openxmlformats.org/drawingml/2006/main" xmlns:p="http://schemas.openxmlformats.org/presentationml/2006/main" xmlns:r="http://schemas.openxmlformats.org/officeDocument/2006/relationships">
-  <p:cSld>
-    <p:spTree>
-      <p:nvGrpSpPr>
-        <p:cNvPr id="1" name=""/>
-        <p:cNvGrpSpPr/>
-        <p:nvPr/>
-      </p:nvGrpSpPr>
-      <p:grpSpPr/>
-      <p:sp>
-        <p:nvSpPr>
-          <p:cNvPr id="2" name="Title 1"/>
-          <p:cNvSpPr>
-            <a:spLocks noGrp="1"/>
-          </p:cNvSpPr>
-          <p:nvPr>
-            <p:ph type="title"/>
-          </p:nvPr>
-        </p:nvSpPr>
-        <p:spPr>
-          <a:xfrm>
-            <a:off x="548640" y="2459852"/>
-            <a:ext cx="8046720" cy="731520"/>
-          </a:xfrm>
-        </p:spPr>
-        <p:txBody>
-          <a:bodyPr wrap="square" lIns="0" rIns="0" tIns="0" bIns="0" anchor="ctr"/>
-          <a:lstStyle/>
-          <a:p>
-            <a:pPr algn="ctr" marL="0" indent="0">
-              <a:lnSpc>
-                <a:spcPct val="100000"/>
-              </a:lnSpc>
-              <a:spcBef>
-                <a:spcPts val="0"/>
-              </a:spcBef>
-              <a:spcAft>
-                <a:spcPts val="0"/>
-              </a:spcAft>
-              <a:buNone/>
-              <a:defRPr sz="4000" lang="ja-JP">
-                <a:latin typeface="Noto Sans"/>
-                <a:ea typeface="Noto Sans CJK JP"/>
-                <a:cs typeface="Noto Sans"/>
-              </a:defRPr>
-            </a:pPr>
-            <a:r>
-              <a:rPr sz="3200" b="1" lang="ja-JP">
-                <a:solidFill>
-                  <a:srgbClr val="303437"/>
-                </a:solidFill>
-                <a:latin typeface="Noto Sans"/>
-                <a:ea typeface="Noto Sans CJK JP"/>
-                <a:cs typeface="Noto Sans"/>
-              </a:rPr>
-              <a:t>1. ImageNet-1kの画像分類とカテゴリ</a:t>
-            </a:r>
-            <a:endParaRPr sz="4000" lang="ja-JP">
-              <a:latin typeface="Noto Sans"/>
-              <a:ea typeface="Noto Sans CJK JP"/>
-              <a:cs typeface="Noto Sans"/>
-            </a:endParaRPr>
-          </a:p>
-        </p:txBody>
-      </p:sp>
-      <p:sp>
-        <p:nvSpPr>
-          <p:cNvPr id="3" name="Title 2"/>
-          <p:cNvSpPr>
-            <a:spLocks noGrp="1"/>
-          </p:cNvSpPr>
-          <p:nvPr>
-            <p:ph type="title" idx="2"/>
-          </p:nvPr>
-        </p:nvSpPr>
-        <p:spPr/>
-        <p:txBody>
-          <a:bodyPr anchor="ctr" tIns="0" bIns="0"/>
-          <a:lstStyle/>
-          <a:p>
-            <a:pPr>
-              <a:lnSpc>
-                <a:spcPct val="100000"/>
-              </a:lnSpc>
-              <a:spcBef>
-                <a:spcPts val="0"/>
-              </a:spcBef>
-              <a:spcAft>
-                <a:spcPts val="0"/>
-              </a:spcAft>
-            </a:pPr>
-            <a:r>
-              <a:rPr sz="1400" b="1" lang="ja-JP">
-                <a:solidFill>
-                  <a:srgbClr val="FFFEF8"/>
-                </a:solidFill>
-                <a:latin typeface="Noto Sans"/>
-                <a:ea typeface="Noto Sans CJK JP"/>
-                <a:cs typeface="Noto Sans"/>
-              </a:rPr>
-              <a:t>1. ImageNet-1kの画像分類とカテゴリ</a:t>
-            </a:r>
-          </a:p>
-        </p:txBody>
-      </p:sp>
-    </p:spTree>
-  </p:cSld>
-  <p:clrMapOvr>
-    <a:masterClrMapping/>
-  </p:clrMapOvr>
-</p:sld>
-</file>
-
-<file path=ppt/slides/slide30.xml><?xml version="1.0" encoding="utf-8"?>
-<p:sld xmlns:a="http://schemas.openxmlformats.org/drawingml/2006/main" xmlns:p="http://schemas.openxmlformats.org/presentationml/2006/main" xmlns:r="http://schemas.openxmlformats.org/officeDocument/2006/relationships">
-  <p:cSld>
-    <p:spTree>
-      <p:nvGrpSpPr>
-        <p:cNvPr id="1" name=""/>
-        <p:cNvGrpSpPr/>
-        <p:nvPr/>
-      </p:nvGrpSpPr>
-      <p:grpSpPr/>
-      <p:sp>
-        <p:nvSpPr>
-          <p:cNvPr id="2" name="Title 1"/>
-          <p:cNvSpPr>
-            <a:spLocks noGrp="1"/>
-          </p:cNvSpPr>
-          <p:nvPr>
-            <p:ph type="title"/>
-          </p:nvPr>
-        </p:nvSpPr>
-        <p:spPr>
-          <a:xfrm>
-            <a:off x="468172" y="650138"/>
-            <a:ext cx="8206740" cy="616305"/>
-          </a:xfrm>
-        </p:spPr>
-        <p:txBody>
-          <a:bodyPr wrap="none" lIns="0" rIns="0" tIns="0" bIns="0"/>
-          <a:lstStyle/>
-          <a:p>
-            <a:pPr algn="l">
-              <a:lnSpc>
-                <a:spcPct val="100000"/>
-              </a:lnSpc>
-              <a:spcBef>
-                <a:spcPts val="0"/>
-              </a:spcBef>
-              <a:spcAft>
-                <a:spcPts val="0"/>
-              </a:spcAft>
-              <a:defRPr sz="2800" b="1" lang="ja-JP">
-                <a:solidFill>
-                  <a:srgbClr val="303437"/>
-                </a:solidFill>
-                <a:latin typeface="Noto Sans"/>
-                <a:ea typeface="Noto Sans CJK JP"/>
-                <a:cs typeface="Noto Sans"/>
-              </a:defRPr>
-            </a:pPr>
-            <a:r>
-              <a:rPr sz="2800" b="1" lang="ja-JP">
-                <a:solidFill>
-                  <a:srgbClr val="303437"/>
-                </a:solidFill>
-                <a:latin typeface="Noto Sans"/>
-                <a:ea typeface="Noto Sans CJK JP"/>
-                <a:cs typeface="Noto Sans"/>
-              </a:rPr>
-              <a:t>画像特徴の事前学習と線形分類による評価</a:t>
-            </a:r>
-          </a:p>
-        </p:txBody>
-      </p:sp>
-      <p:sp>
-        <p:nvSpPr>
-          <p:cNvPr id="4" name="Title 3"/>
-          <p:cNvSpPr>
-            <a:spLocks noGrp="1"/>
-          </p:cNvSpPr>
-          <p:nvPr>
-            <p:ph type="title" idx="2"/>
-          </p:nvPr>
-        </p:nvSpPr>
-        <p:spPr/>
-        <p:txBody>
-          <a:bodyPr anchor="ctr" tIns="0" bIns="0"/>
-          <a:lstStyle/>
-          <a:p>
-            <a:pPr>
-              <a:lnSpc>
-                <a:spcPct val="100000"/>
-              </a:lnSpc>
-              <a:spcBef>
-                <a:spcPts val="0"/>
-              </a:spcBef>
-              <a:spcAft>
-                <a:spcPts val="0"/>
-              </a:spcAft>
-            </a:pPr>
-            <a:r>
-              <a:rPr sz="1400" b="1" lang="ja-JP">
-                <a:solidFill>
-                  <a:srgbClr val="FFFEF8"/>
-                </a:solidFill>
-                <a:latin typeface="Noto Sans"/>
-                <a:ea typeface="Noto Sans CJK JP"/>
-                <a:cs typeface="Noto Sans"/>
-              </a:rPr>
-              <a:t>3. 画像分類の評価指標とモデル性能</a:t>
-            </a:r>
-          </a:p>
-        </p:txBody>
-      </p:sp>
-      <p:sp>
-        <p:nvSpPr>
-          <p:cNvPr id="5" name="body"/>
-          <p:cNvSpPr/>
-          <p:nvPr>
-            <p:ph type="body" idx="1"/>
-          </p:nvPr>
-        </p:nvSpPr>
-        <p:spPr>
-          <a:xfrm>
-            <a:off x="594360" y="1371600"/>
-            <a:ext cx="7955279" cy="3200400"/>
-          </a:xfrm>
-          <a:prstGeom prst="rect">
-            <a:avLst/>
-          </a:prstGeom>
-          <a:noFill/>
-        </p:spPr>
-        <p:txBody>
-          <a:bodyPr wrap="square" lIns="0" rIns="0" tIns="0" bIns="0">
-            <a:spAutoFit/>
-          </a:bodyPr>
-          <a:lstStyle/>
-          <a:p>
-            <a:pPr lvl="0" marL="457200" indent="-355600">
-              <a:lnSpc>
-                <a:spcPct val="110000"/>
-              </a:lnSpc>
-              <a:spcBef>
-                <a:spcPts val="0"/>
-              </a:spcBef>
-              <a:spcAft>
-                <a:spcPts val="800"/>
-              </a:spcAft>
-              <a:buSzPct val="60455"/>
-              <a:buFont typeface="Noto Sans CJK JP"/>
-              <a:buChar char="●"/>
-              <a:defRPr sz="2200" b="0" lang="ja-JP">
-                <a:solidFill>
-                  <a:srgbClr val="303437"/>
-                </a:solidFill>
-                <a:latin typeface="Noto Sans"/>
-                <a:ea typeface="Noto Sans CJK JP"/>
-                <a:cs typeface="Noto Sans"/>
-              </a:defRPr>
-            </a:pPr>
-            <a:r>
-              <a:rPr sz="2200" b="0" lang="ja-JP">
-                <a:solidFill>
-                  <a:srgbClr val="303437"/>
-                </a:solidFill>
-                <a:latin typeface="Noto Sans"/>
-                <a:ea typeface="Noto Sans CJK JP"/>
-                <a:cs typeface="Noto Sans"/>
-              </a:rPr>
-              <a:t>事前学習は、分類に利用する画像特徴を先に学ぶ工程である。自己教師あり学習は画像自体から、画像・テキスト学習は対応する組から学ぶ。</a:t>
-            </a:r>
-          </a:p>
-          <a:p>
-            <a:pPr lvl="0" marL="457200" indent="-355600">
-              <a:lnSpc>
-                <a:spcPct val="110000"/>
-              </a:lnSpc>
-              <a:spcBef>
-                <a:spcPts val="0"/>
-              </a:spcBef>
-              <a:spcAft>
-                <a:spcPts val="800"/>
-              </a:spcAft>
-              <a:buSzPct val="60455"/>
-              <a:buFont typeface="Noto Sans CJK JP"/>
-              <a:buChar char="●"/>
-              <a:defRPr sz="2200" b="0" lang="ja-JP">
-                <a:solidFill>
-                  <a:srgbClr val="303437"/>
-                </a:solidFill>
-                <a:latin typeface="Noto Sans"/>
-                <a:ea typeface="Noto Sans CJK JP"/>
-                <a:cs typeface="Noto Sans"/>
-              </a:defRPr>
-            </a:pPr>
-            <a:r>
-              <a:rPr sz="2200" b="0" lang="ja-JP">
-                <a:solidFill>
-                  <a:srgbClr val="303437"/>
-                </a:solidFill>
-                <a:latin typeface="Noto Sans"/>
-                <a:ea typeface="Noto Sans CJK JP"/>
-                <a:cs typeface="Noto Sans"/>
-              </a:rPr>
-              <a:t>微調整では、事前学習した特徴モデルも更新する。一方、線形分類では特徴モデルを固定し、その出力からクラスを選ぶ分類器だけを学習する。</a:t>
-            </a:r>
-          </a:p>
-          <a:p>
-            <a:pPr lvl="0" marL="457200" indent="-355600">
-              <a:lnSpc>
-                <a:spcPct val="110000"/>
-              </a:lnSpc>
-              <a:spcBef>
-                <a:spcPts val="0"/>
-              </a:spcBef>
-              <a:spcAft>
-                <a:spcPts val="800"/>
-              </a:spcAft>
-              <a:buSzPct val="60455"/>
-              <a:buFont typeface="Noto Sans CJK JP"/>
-              <a:buChar char="●"/>
-              <a:defRPr sz="2200" b="0" lang="ja-JP">
-                <a:solidFill>
-                  <a:srgbClr val="303437"/>
-                </a:solidFill>
-                <a:latin typeface="Noto Sans"/>
-                <a:ea typeface="Noto Sans CJK JP"/>
-                <a:cs typeface="Noto Sans"/>
-              </a:defRPr>
-            </a:pPr>
-            <a:r>
-              <a:rPr sz="2200" b="0" lang="ja-JP">
-                <a:solidFill>
-                  <a:srgbClr val="303437"/>
-                </a:solidFill>
-                <a:latin typeface="Noto Sans"/>
-                <a:ea typeface="Noto Sans CJK JP"/>
-                <a:cs typeface="Noto Sans"/>
-              </a:rPr>
-              <a:t>線形分類の正解率は、固定した画像特徴が1,000クラスの区別にどの程度使えるかを示す。</a:t>
-            </a:r>
-          </a:p>
-        </p:txBody>
-      </p:sp>
-      <p:sp>
-        <p:nvSpPr>
-          <p:cNvPr id="6" name="TextBox 5"/>
-          <p:cNvSpPr txBox="1"/>
-          <p:nvPr/>
-        </p:nvSpPr>
-        <p:spPr>
-          <a:xfrm>
-            <a:off x="502920" y="4699000"/>
-            <a:ext cx="8183879" cy="177800"/>
-          </a:xfrm>
-          <a:prstGeom prst="rect">
-            <a:avLst/>
-          </a:prstGeom>
-          <a:noFill/>
-        </p:spPr>
-        <p:txBody>
-          <a:bodyPr wrap="square" lIns="0" rIns="0" tIns="0" bIns="0">
-            <a:spAutoFit/>
-          </a:bodyPr>
-          <a:lstStyle/>
-          <a:p>
-            <a:pPr algn="l">
-              <a:lnSpc>
-                <a:spcPts val="1400"/>
-              </a:lnSpc>
-              <a:spcBef>
-                <a:spcPts val="0"/>
-              </a:spcBef>
-              <a:spcAft>
-                <a:spcPts val="0"/>
-              </a:spcAft>
-            </a:pPr>
-            <a:r>
-              <a:rPr sz="800" b="0" lang="ja-JP">
-                <a:solidFill>
-                  <a:srgbClr val="626669"/>
-                </a:solidFill>
-                <a:latin typeface="Noto Sans"/>
-                <a:ea typeface="Noto Sans CJK JP"/>
-                <a:cs typeface="Noto Sans"/>
-              </a:rPr>
-              <a:t/>
-            </a:r>
-            <a:r>
-              <a:rPr sz="800" lang="ja-JP">
-                <a:solidFill>
-                  <a:srgbClr val="626669"/>
-                </a:solidFill>
-                <a:latin typeface="Noto Sans"/>
-                <a:ea typeface="Noto Sans CJK JP"/>
-                <a:cs typeface="Noto Sans"/>
-              </a:rPr>
-              <a:t>[1] Siméoni et al. (2025). arXiv:2508.10104. DINOv3.</a:t>
-            </a:r>
-          </a:p>
-        </p:txBody>
-      </p:sp>
-      <p:sp>
-        <p:nvSpPr>
-          <p:cNvPr id="7" name="TextBox 6"/>
-          <p:cNvSpPr txBox="1"/>
-          <p:nvPr/>
-        </p:nvSpPr>
-        <p:spPr>
-          <a:xfrm>
-            <a:off x="2994861" y="4717326"/>
-            <a:ext cx="5691938" cy="177800"/>
-          </a:xfrm>
-          <a:prstGeom prst="rect">
-            <a:avLst/>
-          </a:prstGeom>
-          <a:noFill/>
-        </p:spPr>
-        <p:txBody>
-          <a:bodyPr wrap="none" lIns="0" rIns="0" tIns="0" bIns="0">
-            <a:spAutoFit/>
-          </a:bodyPr>
-          <a:lstStyle/>
-          <a:p>
-            <a:pPr algn="l">
-              <a:lnSpc>
-                <a:spcPts val="1400"/>
-              </a:lnSpc>
-              <a:spcBef>
-                <a:spcPts val="0"/>
-              </a:spcBef>
-              <a:spcAft>
-                <a:spcPts val="0"/>
-              </a:spcAft>
-            </a:pPr>
-            <a:r>
-              <a:rPr sz="800" b="0" lang="ja-JP">
-                <a:solidFill>
-                  <a:srgbClr val="626669"/>
-                </a:solidFill>
-                <a:latin typeface="Noto Sans"/>
-                <a:ea typeface="Noto Sans CJK JP"/>
-                <a:cs typeface="Noto Sans"/>
-              </a:rPr>
-              <a:t/>
-            </a:r>
-            <a:r>
-              <a:rPr sz="800" lang="ja-JP">
-                <a:solidFill>
-                  <a:srgbClr val="626669"/>
-                </a:solidFill>
-                <a:latin typeface="Noto Sans"/>
-                <a:ea typeface="Noto Sans CJK JP"/>
-                <a:cs typeface="Noto Sans"/>
-                <a:hlinkClick r:id="rId2"/>
-              </a:rPr>
-              <a:t>https://arxiv.org/abs/2508.10104</a:t>
-            </a:r>
-          </a:p>
-        </p:txBody>
-      </p:sp>
-    </p:spTree>
-  </p:cSld>
-  <p:clrMapOvr>
-    <a:masterClrMapping/>
-  </p:clrMapOvr>
-</p:sld>
-</file>
-
-<file path=ppt/slides/slide31.xml><?xml version="1.0" encoding="utf-8"?>
+<file path=ppt/slides/slide29.xml><?xml version="1.0" encoding="utf-8"?>
 <p:sld xmlns:a="http://schemas.openxmlformats.org/drawingml/2006/main" xmlns:p="http://schemas.openxmlformats.org/presentationml/2006/main" xmlns:r="http://schemas.openxmlformats.org/officeDocument/2006/relationships">
   <p:cSld>
     <p:spTree>
@@ -19356,6 +18526,836 @@
 </p:sld>
 </file>
 
+<file path=ppt/slides/slide3.xml><?xml version="1.0" encoding="utf-8"?>
+<p:sld xmlns:a="http://schemas.openxmlformats.org/drawingml/2006/main" xmlns:p="http://schemas.openxmlformats.org/presentationml/2006/main" xmlns:r="http://schemas.openxmlformats.org/officeDocument/2006/relationships">
+  <p:cSld>
+    <p:spTree>
+      <p:nvGrpSpPr>
+        <p:cNvPr id="1" name=""/>
+        <p:cNvGrpSpPr/>
+        <p:nvPr/>
+      </p:nvGrpSpPr>
+      <p:grpSpPr/>
+      <p:sp>
+        <p:nvSpPr>
+          <p:cNvPr id="2" name="Title 1"/>
+          <p:cNvSpPr>
+            <a:spLocks noGrp="1"/>
+          </p:cNvSpPr>
+          <p:nvPr>
+            <p:ph type="title"/>
+          </p:nvPr>
+        </p:nvSpPr>
+        <p:spPr>
+          <a:xfrm>
+            <a:off x="548640" y="2459852"/>
+            <a:ext cx="8046720" cy="731520"/>
+          </a:xfrm>
+        </p:spPr>
+        <p:txBody>
+          <a:bodyPr wrap="square" lIns="0" rIns="0" tIns="0" bIns="0" anchor="ctr"/>
+          <a:lstStyle/>
+          <a:p>
+            <a:pPr algn="ctr" marL="0" indent="0">
+              <a:lnSpc>
+                <a:spcPct val="100000"/>
+              </a:lnSpc>
+              <a:spcBef>
+                <a:spcPts val="0"/>
+              </a:spcBef>
+              <a:spcAft>
+                <a:spcPts val="0"/>
+              </a:spcAft>
+              <a:buNone/>
+              <a:defRPr sz="4000" lang="ja-JP">
+                <a:latin typeface="Noto Sans"/>
+                <a:ea typeface="Noto Sans CJK JP"/>
+                <a:cs typeface="Noto Sans"/>
+              </a:defRPr>
+            </a:pPr>
+            <a:r>
+              <a:rPr sz="3200" b="1" lang="ja-JP">
+                <a:solidFill>
+                  <a:srgbClr val="303437"/>
+                </a:solidFill>
+                <a:latin typeface="Noto Sans"/>
+                <a:ea typeface="Noto Sans CJK JP"/>
+                <a:cs typeface="Noto Sans"/>
+              </a:rPr>
+              <a:t>1. ImageNet-1kの画像分類とカテゴリ</a:t>
+            </a:r>
+            <a:endParaRPr sz="4000" lang="ja-JP">
+              <a:latin typeface="Noto Sans"/>
+              <a:ea typeface="Noto Sans CJK JP"/>
+              <a:cs typeface="Noto Sans"/>
+            </a:endParaRPr>
+          </a:p>
+        </p:txBody>
+      </p:sp>
+      <p:sp>
+        <p:nvSpPr>
+          <p:cNvPr id="3" name="Title 2"/>
+          <p:cNvSpPr>
+            <a:spLocks noGrp="1"/>
+          </p:cNvSpPr>
+          <p:nvPr>
+            <p:ph type="title" idx="2"/>
+          </p:nvPr>
+        </p:nvSpPr>
+        <p:spPr/>
+        <p:txBody>
+          <a:bodyPr anchor="ctr" tIns="0" bIns="0"/>
+          <a:lstStyle/>
+          <a:p>
+            <a:pPr>
+              <a:lnSpc>
+                <a:spcPct val="100000"/>
+              </a:lnSpc>
+              <a:spcBef>
+                <a:spcPts val="0"/>
+              </a:spcBef>
+              <a:spcAft>
+                <a:spcPts val="0"/>
+              </a:spcAft>
+            </a:pPr>
+            <a:r>
+              <a:rPr sz="1400" b="1" lang="ja-JP">
+                <a:solidFill>
+                  <a:srgbClr val="FFFEF8"/>
+                </a:solidFill>
+                <a:latin typeface="Noto Sans"/>
+                <a:ea typeface="Noto Sans CJK JP"/>
+                <a:cs typeface="Noto Sans"/>
+              </a:rPr>
+              <a:t>1. ImageNet-1kの画像分類とカテゴリ</a:t>
+            </a:r>
+          </a:p>
+        </p:txBody>
+      </p:sp>
+    </p:spTree>
+  </p:cSld>
+  <p:clrMapOvr>
+    <a:masterClrMapping/>
+  </p:clrMapOvr>
+</p:sld>
+</file>
+
+<file path=ppt/slides/slide30.xml><?xml version="1.0" encoding="utf-8"?>
+<p:sld xmlns:a="http://schemas.openxmlformats.org/drawingml/2006/main" xmlns:p="http://schemas.openxmlformats.org/presentationml/2006/main" xmlns:r="http://schemas.openxmlformats.org/officeDocument/2006/relationships">
+  <p:cSld>
+    <p:spTree>
+      <p:nvGrpSpPr>
+        <p:cNvPr id="1" name=""/>
+        <p:cNvGrpSpPr/>
+        <p:nvPr/>
+      </p:nvGrpSpPr>
+      <p:grpSpPr/>
+      <p:sp>
+        <p:nvSpPr>
+          <p:cNvPr id="2" name="Title 1"/>
+          <p:cNvSpPr>
+            <a:spLocks noGrp="1"/>
+          </p:cNvSpPr>
+          <p:nvPr>
+            <p:ph type="title"/>
+          </p:nvPr>
+        </p:nvSpPr>
+        <p:spPr>
+          <a:xfrm>
+            <a:off x="468172" y="650138"/>
+            <a:ext cx="8206740" cy="616305"/>
+          </a:xfrm>
+        </p:spPr>
+        <p:txBody>
+          <a:bodyPr wrap="none" lIns="0" rIns="0" tIns="0" bIns="0"/>
+          <a:lstStyle/>
+          <a:p>
+            <a:pPr algn="l">
+              <a:lnSpc>
+                <a:spcPct val="100000"/>
+              </a:lnSpc>
+              <a:spcBef>
+                <a:spcPts val="0"/>
+              </a:spcBef>
+              <a:spcAft>
+                <a:spcPts val="0"/>
+              </a:spcAft>
+              <a:defRPr sz="2800" b="1" lang="ja-JP">
+                <a:solidFill>
+                  <a:srgbClr val="303437"/>
+                </a:solidFill>
+                <a:latin typeface="Noto Sans"/>
+                <a:ea typeface="Noto Sans CJK JP"/>
+                <a:cs typeface="Noto Sans"/>
+              </a:defRPr>
+            </a:pPr>
+            <a:r>
+              <a:rPr sz="2800" b="1" lang="ja-JP">
+                <a:solidFill>
+                  <a:srgbClr val="303437"/>
+                </a:solidFill>
+                <a:latin typeface="Noto Sans"/>
+                <a:ea typeface="Noto Sans CJK JP"/>
+                <a:cs typeface="Noto Sans"/>
+              </a:rPr>
+              <a:t>画像から特徴を取り出して分類する</a:t>
+            </a:r>
+          </a:p>
+        </p:txBody>
+      </p:sp>
+      <p:sp>
+        <p:nvSpPr>
+          <p:cNvPr id="4" name="Title 3"/>
+          <p:cNvSpPr>
+            <a:spLocks noGrp="1"/>
+          </p:cNvSpPr>
+          <p:nvPr>
+            <p:ph type="title" idx="2"/>
+          </p:nvPr>
+        </p:nvSpPr>
+        <p:spPr/>
+        <p:txBody>
+          <a:bodyPr anchor="ctr" tIns="0" bIns="0"/>
+          <a:lstStyle/>
+          <a:p>
+            <a:pPr>
+              <a:lnSpc>
+                <a:spcPct val="100000"/>
+              </a:lnSpc>
+              <a:spcBef>
+                <a:spcPts val="0"/>
+              </a:spcBef>
+              <a:spcAft>
+                <a:spcPts val="0"/>
+              </a:spcAft>
+            </a:pPr>
+            <a:r>
+              <a:rPr sz="1400" b="1" lang="ja-JP">
+                <a:solidFill>
+                  <a:srgbClr val="FFFEF8"/>
+                </a:solidFill>
+                <a:latin typeface="Noto Sans"/>
+                <a:ea typeface="Noto Sans CJK JP"/>
+                <a:cs typeface="Noto Sans"/>
+              </a:rPr>
+              <a:t>3. 画像分類の評価指標とモデル性能</a:t>
+            </a:r>
+          </a:p>
+        </p:txBody>
+      </p:sp>
+      <p:sp>
+        <p:nvSpPr>
+          <p:cNvPr id="5" name="body"/>
+          <p:cNvSpPr/>
+          <p:nvPr>
+            <p:ph type="body" idx="1"/>
+          </p:nvPr>
+        </p:nvSpPr>
+        <p:spPr>
+          <a:xfrm>
+            <a:off x="594360" y="1309010"/>
+            <a:ext cx="7955279" cy="3200400"/>
+          </a:xfrm>
+          <a:prstGeom prst="rect">
+            <a:avLst/>
+          </a:prstGeom>
+          <a:noFill/>
+        </p:spPr>
+        <p:txBody>
+          <a:bodyPr wrap="square" lIns="0" rIns="0" tIns="0" bIns="0">
+            <a:spAutoFit/>
+          </a:bodyPr>
+          <a:lstStyle/>
+          <a:p>
+            <a:pPr lvl="0" marL="457200" indent="-355600">
+              <a:lnSpc>
+                <a:spcPct val="110000"/>
+              </a:lnSpc>
+              <a:spcBef>
+                <a:spcPts val="0"/>
+              </a:spcBef>
+              <a:spcAft>
+                <a:spcPts val="800"/>
+              </a:spcAft>
+              <a:buSzPct val="57826"/>
+              <a:buFont typeface="Noto Sans CJK JP"/>
+              <a:buChar char="●"/>
+              <a:defRPr sz="2300" b="0" lang="ja-JP">
+                <a:solidFill>
+                  <a:srgbClr val="303437"/>
+                </a:solidFill>
+                <a:latin typeface="Noto Sans"/>
+                <a:ea typeface="Noto Sans CJK JP"/>
+                <a:cs typeface="Noto Sans"/>
+              </a:defRPr>
+            </a:pPr>
+            <a:r>
+              <a:rPr sz="2300" b="0" lang="ja-JP">
+                <a:solidFill>
+                  <a:srgbClr val="303437"/>
+                </a:solidFill>
+                <a:latin typeface="Noto Sans"/>
+                <a:ea typeface="Noto Sans CJK JP"/>
+                <a:cs typeface="Noto Sans"/>
+              </a:rPr>
+              <a:t>畳み込みニューラルネットワークは、画像の局所的な模様を段階的に組み合わせて特徴を得る。AlexNetやResNetはこの方式を使う。</a:t>
+            </a:r>
+          </a:p>
+          <a:p>
+            <a:pPr lvl="0" marL="457200" indent="-355600">
+              <a:lnSpc>
+                <a:spcPct val="110000"/>
+              </a:lnSpc>
+              <a:spcBef>
+                <a:spcPts val="0"/>
+              </a:spcBef>
+              <a:spcAft>
+                <a:spcPts val="800"/>
+              </a:spcAft>
+              <a:buSzPct val="57826"/>
+              <a:buFont typeface="Noto Sans CJK JP"/>
+              <a:buChar char="●"/>
+              <a:defRPr sz="2300" b="0" lang="ja-JP">
+                <a:solidFill>
+                  <a:srgbClr val="303437"/>
+                </a:solidFill>
+                <a:latin typeface="Noto Sans"/>
+                <a:ea typeface="Noto Sans CJK JP"/>
+                <a:cs typeface="Noto Sans"/>
+              </a:defRPr>
+            </a:pPr>
+            <a:r>
+              <a:rPr sz="2300" b="0" lang="ja-JP">
+                <a:solidFill>
+                  <a:srgbClr val="303437"/>
+                </a:solidFill>
+                <a:latin typeface="Noto Sans"/>
+                <a:ea typeface="Noto Sans CJK JP"/>
+                <a:cs typeface="Noto Sans"/>
+              </a:rPr>
+              <a:t>ResNetは層の入力を後段へ加える残差接続を使い、深いネットワークを学習する。50・101・152は層数を表す。</a:t>
+            </a:r>
+          </a:p>
+          <a:p>
+            <a:pPr lvl="0" marL="457200" indent="-355600">
+              <a:lnSpc>
+                <a:spcPct val="110000"/>
+              </a:lnSpc>
+              <a:spcBef>
+                <a:spcPts val="0"/>
+              </a:spcBef>
+              <a:spcAft>
+                <a:spcPts val="800"/>
+              </a:spcAft>
+              <a:buSzPct val="57826"/>
+              <a:buFont typeface="Noto Sans CJK JP"/>
+              <a:buChar char="●"/>
+              <a:defRPr sz="2300" b="0" lang="ja-JP">
+                <a:solidFill>
+                  <a:srgbClr val="303437"/>
+                </a:solidFill>
+                <a:latin typeface="Noto Sans"/>
+                <a:ea typeface="Noto Sans CJK JP"/>
+                <a:cs typeface="Noto Sans"/>
+              </a:defRPr>
+            </a:pPr>
+            <a:r>
+              <a:rPr sz="2300" b="0" lang="ja-JP">
+                <a:solidFill>
+                  <a:srgbClr val="303437"/>
+                </a:solidFill>
+                <a:latin typeface="Noto Sans"/>
+                <a:ea typeface="Noto Sans CJK JP"/>
+                <a:cs typeface="Noto Sans"/>
+              </a:rPr>
+              <a:t>これらの特徴からクラスの得点を出し、その順位でTop-1・Top-5を評価する。</a:t>
+            </a:r>
+          </a:p>
+        </p:txBody>
+      </p:sp>
+      <p:sp>
+        <p:nvSpPr>
+          <p:cNvPr id="6" name="TextBox 5"/>
+          <p:cNvSpPr txBox="1"/>
+          <p:nvPr/>
+        </p:nvSpPr>
+        <p:spPr>
+          <a:xfrm>
+            <a:off x="502920" y="4699000"/>
+            <a:ext cx="8183879" cy="177800"/>
+          </a:xfrm>
+          <a:prstGeom prst="rect">
+            <a:avLst/>
+          </a:prstGeom>
+          <a:noFill/>
+        </p:spPr>
+        <p:txBody>
+          <a:bodyPr wrap="square" lIns="0" rIns="0" tIns="0" bIns="0">
+            <a:spAutoFit/>
+          </a:bodyPr>
+          <a:lstStyle/>
+          <a:p>
+            <a:pPr algn="l">
+              <a:lnSpc>
+                <a:spcPts val="1400"/>
+              </a:lnSpc>
+              <a:spcBef>
+                <a:spcPts val="0"/>
+              </a:spcBef>
+              <a:spcAft>
+                <a:spcPts val="0"/>
+              </a:spcAft>
+            </a:pPr>
+            <a:r>
+              <a:rPr sz="800" b="0" lang="ja-JP">
+                <a:solidFill>
+                  <a:srgbClr val="626669"/>
+                </a:solidFill>
+                <a:latin typeface="Noto Sans"/>
+                <a:ea typeface="Noto Sans CJK JP"/>
+                <a:cs typeface="Noto Sans"/>
+              </a:rPr>
+              <a:t/>
+            </a:r>
+            <a:r>
+              <a:rPr sz="800" lang="ja-JP">
+                <a:solidFill>
+                  <a:srgbClr val="626669"/>
+                </a:solidFill>
+                <a:latin typeface="Noto Sans"/>
+                <a:ea typeface="Noto Sans CJK JP"/>
+                <a:cs typeface="Noto Sans"/>
+              </a:rPr>
+              <a:t>[1] He et al. (2016). CVPR, pp. 770–778. Deep Residual Learning for Image Recognition.</a:t>
+            </a:r>
+          </a:p>
+        </p:txBody>
+      </p:sp>
+      <p:sp>
+        <p:nvSpPr>
+          <p:cNvPr id="7" name="TextBox 6"/>
+          <p:cNvSpPr txBox="1"/>
+          <p:nvPr/>
+        </p:nvSpPr>
+        <p:spPr>
+          <a:xfrm>
+            <a:off x="4664725" y="4717326"/>
+            <a:ext cx="4022074" cy="177800"/>
+          </a:xfrm>
+          <a:prstGeom prst="rect">
+            <a:avLst/>
+          </a:prstGeom>
+          <a:noFill/>
+        </p:spPr>
+        <p:txBody>
+          <a:bodyPr wrap="none" lIns="0" rIns="0" tIns="0" bIns="0">
+            <a:spAutoFit/>
+          </a:bodyPr>
+          <a:lstStyle/>
+          <a:p>
+            <a:pPr algn="l">
+              <a:lnSpc>
+                <a:spcPts val="1400"/>
+              </a:lnSpc>
+              <a:spcBef>
+                <a:spcPts val="0"/>
+              </a:spcBef>
+              <a:spcAft>
+                <a:spcPts val="0"/>
+              </a:spcAft>
+            </a:pPr>
+            <a:r>
+              <a:rPr sz="800" b="0" lang="ja-JP">
+                <a:solidFill>
+                  <a:srgbClr val="626669"/>
+                </a:solidFill>
+                <a:latin typeface="Noto Sans"/>
+                <a:ea typeface="Noto Sans CJK JP"/>
+                <a:cs typeface="Noto Sans"/>
+              </a:rPr>
+              <a:t/>
+            </a:r>
+            <a:r>
+              <a:rPr sz="800" lang="ja-JP">
+                <a:solidFill>
+                  <a:srgbClr val="626669"/>
+                </a:solidFill>
+                <a:latin typeface="Noto Sans"/>
+                <a:ea typeface="Noto Sans CJK JP"/>
+                <a:cs typeface="Noto Sans"/>
+                <a:hlinkClick r:id="rId2"/>
+              </a:rPr>
+              <a:t>https://arxiv.org/abs/1512.03385</a:t>
+            </a:r>
+          </a:p>
+        </p:txBody>
+      </p:sp>
+    </p:spTree>
+  </p:cSld>
+  <p:clrMapOvr>
+    <a:masterClrMapping/>
+  </p:clrMapOvr>
+</p:sld>
+</file>
+
+<file path=ppt/slides/slide31.xml><?xml version="1.0" encoding="utf-8"?>
+<p:sld xmlns:a="http://schemas.openxmlformats.org/drawingml/2006/main" xmlns:p="http://schemas.openxmlformats.org/presentationml/2006/main" xmlns:r="http://schemas.openxmlformats.org/officeDocument/2006/relationships">
+  <p:cSld>
+    <p:spTree>
+      <p:nvGrpSpPr>
+        <p:cNvPr id="1" name=""/>
+        <p:cNvGrpSpPr/>
+        <p:nvPr/>
+      </p:nvGrpSpPr>
+      <p:grpSpPr/>
+      <p:sp>
+        <p:nvSpPr>
+          <p:cNvPr id="2" name="Title 1"/>
+          <p:cNvSpPr>
+            <a:spLocks noGrp="1"/>
+          </p:cNvSpPr>
+          <p:nvPr>
+            <p:ph type="title"/>
+          </p:nvPr>
+        </p:nvSpPr>
+        <p:spPr>
+          <a:xfrm>
+            <a:off x="468172" y="650138"/>
+            <a:ext cx="8206740" cy="616305"/>
+          </a:xfrm>
+        </p:spPr>
+        <p:txBody>
+          <a:bodyPr wrap="none" lIns="0" rIns="0" tIns="0" bIns="0"/>
+          <a:lstStyle/>
+          <a:p>
+            <a:pPr algn="l">
+              <a:lnSpc>
+                <a:spcPct val="100000"/>
+              </a:lnSpc>
+              <a:spcBef>
+                <a:spcPts val="0"/>
+              </a:spcBef>
+              <a:spcAft>
+                <a:spcPts val="0"/>
+              </a:spcAft>
+              <a:defRPr sz="2800" b="1" lang="ja-JP">
+                <a:solidFill>
+                  <a:srgbClr val="303437"/>
+                </a:solidFill>
+                <a:latin typeface="Noto Sans"/>
+                <a:ea typeface="Noto Sans CJK JP"/>
+                <a:cs typeface="Noto Sans"/>
+              </a:defRPr>
+            </a:pPr>
+            <a:r>
+              <a:rPr sz="2800" b="1" lang="ja-JP">
+                <a:solidFill>
+                  <a:srgbClr val="303437"/>
+                </a:solidFill>
+                <a:latin typeface="Noto Sans"/>
+                <a:ea typeface="Noto Sans CJK JP"/>
+                <a:cs typeface="Noto Sans"/>
+              </a:rPr>
+              <a:t>画像特徴の事前学習と線形分類による評価</a:t>
+            </a:r>
+          </a:p>
+        </p:txBody>
+      </p:sp>
+      <p:sp>
+        <p:nvSpPr>
+          <p:cNvPr id="4" name="Title 3"/>
+          <p:cNvSpPr>
+            <a:spLocks noGrp="1"/>
+          </p:cNvSpPr>
+          <p:nvPr>
+            <p:ph type="title" idx="2"/>
+          </p:nvPr>
+        </p:nvSpPr>
+        <p:spPr/>
+        <p:txBody>
+          <a:bodyPr anchor="ctr" tIns="0" bIns="0"/>
+          <a:lstStyle/>
+          <a:p>
+            <a:pPr>
+              <a:lnSpc>
+                <a:spcPct val="100000"/>
+              </a:lnSpc>
+              <a:spcBef>
+                <a:spcPts val="0"/>
+              </a:spcBef>
+              <a:spcAft>
+                <a:spcPts val="0"/>
+              </a:spcAft>
+            </a:pPr>
+            <a:r>
+              <a:rPr sz="1400" b="1" lang="ja-JP">
+                <a:solidFill>
+                  <a:srgbClr val="FFFEF8"/>
+                </a:solidFill>
+                <a:latin typeface="Noto Sans"/>
+                <a:ea typeface="Noto Sans CJK JP"/>
+                <a:cs typeface="Noto Sans"/>
+              </a:rPr>
+              <a:t>3. 画像分類の評価指標とモデル性能</a:t>
+            </a:r>
+          </a:p>
+        </p:txBody>
+      </p:sp>
+      <p:sp>
+        <p:nvSpPr>
+          <p:cNvPr id="5" name="body"/>
+          <p:cNvSpPr/>
+          <p:nvPr>
+            <p:ph type="body" idx="1"/>
+          </p:nvPr>
+        </p:nvSpPr>
+        <p:spPr>
+          <a:xfrm>
+            <a:off x="594360" y="1371600"/>
+            <a:ext cx="7955279" cy="3200400"/>
+          </a:xfrm>
+          <a:prstGeom prst="rect">
+            <a:avLst/>
+          </a:prstGeom>
+          <a:noFill/>
+        </p:spPr>
+        <p:txBody>
+          <a:bodyPr wrap="square" lIns="0" rIns="0" tIns="0" bIns="0">
+            <a:spAutoFit/>
+          </a:bodyPr>
+          <a:lstStyle/>
+          <a:p>
+            <a:pPr lvl="0" marL="457200" indent="-355600">
+              <a:lnSpc>
+                <a:spcPct val="110000"/>
+              </a:lnSpc>
+              <a:spcBef>
+                <a:spcPts val="0"/>
+              </a:spcBef>
+              <a:spcAft>
+                <a:spcPts val="800"/>
+              </a:spcAft>
+              <a:buSzPct val="60455"/>
+              <a:buFont typeface="Noto Sans CJK JP"/>
+              <a:buChar char="●"/>
+              <a:defRPr sz="2200" b="0" lang="ja-JP">
+                <a:solidFill>
+                  <a:srgbClr val="303437"/>
+                </a:solidFill>
+                <a:latin typeface="Noto Sans"/>
+                <a:ea typeface="Noto Sans CJK JP"/>
+                <a:cs typeface="Noto Sans"/>
+              </a:defRPr>
+            </a:pPr>
+            <a:r>
+              <a:rPr sz="2200" b="0" lang="ja-JP">
+                <a:solidFill>
+                  <a:srgbClr val="303437"/>
+                </a:solidFill>
+                <a:latin typeface="Noto Sans"/>
+                <a:ea typeface="Noto Sans CJK JP"/>
+                <a:cs typeface="Noto Sans"/>
+              </a:rPr>
+              <a:t>事前学習は、分類に利用する画像特徴を先に学ぶ工程である。自己教師あり学習は画像自体から、画像・テキスト学習は対応する組から学ぶ。</a:t>
+            </a:r>
+          </a:p>
+          <a:p>
+            <a:pPr lvl="0" marL="457200" indent="-355600">
+              <a:lnSpc>
+                <a:spcPct val="110000"/>
+              </a:lnSpc>
+              <a:spcBef>
+                <a:spcPts val="0"/>
+              </a:spcBef>
+              <a:spcAft>
+                <a:spcPts val="800"/>
+              </a:spcAft>
+              <a:buSzPct val="60455"/>
+              <a:buFont typeface="Noto Sans CJK JP"/>
+              <a:buChar char="●"/>
+              <a:defRPr sz="2200" b="0" lang="ja-JP">
+                <a:solidFill>
+                  <a:srgbClr val="303437"/>
+                </a:solidFill>
+                <a:latin typeface="Noto Sans"/>
+                <a:ea typeface="Noto Sans CJK JP"/>
+                <a:cs typeface="Noto Sans"/>
+              </a:defRPr>
+            </a:pPr>
+            <a:r>
+              <a:rPr sz="2200" b="0" lang="ja-JP">
+                <a:solidFill>
+                  <a:srgbClr val="303437"/>
+                </a:solidFill>
+                <a:latin typeface="Noto Sans"/>
+                <a:ea typeface="Noto Sans CJK JP"/>
+                <a:cs typeface="Noto Sans"/>
+              </a:rPr>
+              <a:t>微調整では、事前学習した特徴モデルも更新する。一方、線形分類では特徴モデルを固定し、その出力からクラスを選ぶ分類器だけを学習する。</a:t>
+            </a:r>
+          </a:p>
+          <a:p>
+            <a:pPr lvl="0" marL="457200" indent="-355600">
+              <a:lnSpc>
+                <a:spcPct val="110000"/>
+              </a:lnSpc>
+              <a:spcBef>
+                <a:spcPts val="0"/>
+              </a:spcBef>
+              <a:spcAft>
+                <a:spcPts val="800"/>
+              </a:spcAft>
+              <a:buSzPct val="60455"/>
+              <a:buFont typeface="Noto Sans CJK JP"/>
+              <a:buChar char="●"/>
+              <a:defRPr sz="2200" b="0" lang="ja-JP">
+                <a:solidFill>
+                  <a:srgbClr val="303437"/>
+                </a:solidFill>
+                <a:latin typeface="Noto Sans"/>
+                <a:ea typeface="Noto Sans CJK JP"/>
+                <a:cs typeface="Noto Sans"/>
+              </a:defRPr>
+            </a:pPr>
+            <a:r>
+              <a:rPr sz="2200" b="0" lang="ja-JP">
+                <a:solidFill>
+                  <a:srgbClr val="303437"/>
+                </a:solidFill>
+                <a:latin typeface="Noto Sans"/>
+                <a:ea typeface="Noto Sans CJK JP"/>
+                <a:cs typeface="Noto Sans"/>
+              </a:rPr>
+              <a:t>線形分類の正解率は、固定した画像特徴が1,000クラスの区別にどの程度使えるかを示す。</a:t>
+            </a:r>
+          </a:p>
+        </p:txBody>
+      </p:sp>
+      <p:sp>
+        <p:nvSpPr>
+          <p:cNvPr id="6" name="TextBox 5"/>
+          <p:cNvSpPr txBox="1"/>
+          <p:nvPr/>
+        </p:nvSpPr>
+        <p:spPr>
+          <a:xfrm>
+            <a:off x="502920" y="4699000"/>
+            <a:ext cx="8183879" cy="177800"/>
+          </a:xfrm>
+          <a:prstGeom prst="rect">
+            <a:avLst/>
+          </a:prstGeom>
+          <a:noFill/>
+        </p:spPr>
+        <p:txBody>
+          <a:bodyPr wrap="square" lIns="0" rIns="0" tIns="0" bIns="0">
+            <a:spAutoFit/>
+          </a:bodyPr>
+          <a:lstStyle/>
+          <a:p>
+            <a:pPr algn="l">
+              <a:lnSpc>
+                <a:spcPts val="1400"/>
+              </a:lnSpc>
+              <a:spcBef>
+                <a:spcPts val="0"/>
+              </a:spcBef>
+              <a:spcAft>
+                <a:spcPts val="0"/>
+              </a:spcAft>
+            </a:pPr>
+            <a:r>
+              <a:rPr sz="800" b="0" lang="ja-JP">
+                <a:solidFill>
+                  <a:srgbClr val="626669"/>
+                </a:solidFill>
+                <a:latin typeface="Noto Sans"/>
+                <a:ea typeface="Noto Sans CJK JP"/>
+                <a:cs typeface="Noto Sans"/>
+              </a:rPr>
+              <a:t/>
+            </a:r>
+            <a:r>
+              <a:rPr sz="800" lang="ja-JP">
+                <a:solidFill>
+                  <a:srgbClr val="626669"/>
+                </a:solidFill>
+                <a:latin typeface="Noto Sans"/>
+                <a:ea typeface="Noto Sans CJK JP"/>
+                <a:cs typeface="Noto Sans"/>
+              </a:rPr>
+              <a:t>[1] Siméoni et al. (2025). arXiv:2508.10104. DINOv3.</a:t>
+            </a:r>
+          </a:p>
+        </p:txBody>
+      </p:sp>
+      <p:sp>
+        <p:nvSpPr>
+          <p:cNvPr id="7" name="TextBox 6"/>
+          <p:cNvSpPr txBox="1"/>
+          <p:nvPr/>
+        </p:nvSpPr>
+        <p:spPr>
+          <a:xfrm>
+            <a:off x="2994861" y="4717326"/>
+            <a:ext cx="5691938" cy="177800"/>
+          </a:xfrm>
+          <a:prstGeom prst="rect">
+            <a:avLst/>
+          </a:prstGeom>
+          <a:noFill/>
+        </p:spPr>
+        <p:txBody>
+          <a:bodyPr wrap="none" lIns="0" rIns="0" tIns="0" bIns="0">
+            <a:spAutoFit/>
+          </a:bodyPr>
+          <a:lstStyle/>
+          <a:p>
+            <a:pPr algn="l">
+              <a:lnSpc>
+                <a:spcPts val="1400"/>
+              </a:lnSpc>
+              <a:spcBef>
+                <a:spcPts val="0"/>
+              </a:spcBef>
+              <a:spcAft>
+                <a:spcPts val="0"/>
+              </a:spcAft>
+            </a:pPr>
+            <a:r>
+              <a:rPr sz="800" b="0" lang="ja-JP">
+                <a:solidFill>
+                  <a:srgbClr val="626669"/>
+                </a:solidFill>
+                <a:latin typeface="Noto Sans"/>
+                <a:ea typeface="Noto Sans CJK JP"/>
+                <a:cs typeface="Noto Sans"/>
+              </a:rPr>
+              <a:t/>
+            </a:r>
+            <a:r>
+              <a:rPr sz="800" lang="ja-JP">
+                <a:solidFill>
+                  <a:srgbClr val="626669"/>
+                </a:solidFill>
+                <a:latin typeface="Noto Sans"/>
+                <a:ea typeface="Noto Sans CJK JP"/>
+                <a:cs typeface="Noto Sans"/>
+                <a:hlinkClick r:id="rId2"/>
+              </a:rPr>
+              <a:t>https://arxiv.org/abs/2508.10104</a:t>
+            </a:r>
+          </a:p>
+        </p:txBody>
+      </p:sp>
+    </p:spTree>
+  </p:cSld>
+  <p:clrMapOvr>
+    <a:masterClrMapping/>
+  </p:clrMapOvr>
+</p:sld>
+</file>
+
 <file path=ppt/slides/slide32.xml><?xml version="1.0" encoding="utf-8"?>
 <p:sld xmlns:a="http://schemas.openxmlformats.org/drawingml/2006/main" xmlns:p="http://schemas.openxmlformats.org/presentationml/2006/main" xmlns:r="http://schemas.openxmlformats.org/officeDocument/2006/relationships">
   <p:cSld>
@@ -19526,7 +19526,7 @@
                 <a:ea typeface="Noto Sans CJK JP"/>
                 <a:cs typeface="Noto Sans"/>
               </a:rPr>
-              <a:t>分類の高い正解率だけでは汎用性を示せない</a:t>
+              <a:t>ImageNet-ReaLは複数の正解ラベルを付ける</a:t>
             </a:r>
             <a:endParaRPr sz="2800" lang="ja-JP">
               <a:latin typeface="Noto Sans"/>
@@ -19619,7 +19619,7 @@
               <a:buSzPct val="60455"/>
               <a:buFont typeface="Noto Sans CJK JP"/>
               <a:buChar char="●"/>
-              <a:defRPr sz="2200" b="0" lang="ja-JP">
+              <a:defRPr sz="2200" lang="ja-JP">
                 <a:latin typeface="Noto Sans"/>
                 <a:ea typeface="Noto Sans CJK JP"/>
                 <a:cs typeface="Noto Sans"/>
@@ -19634,7 +19634,29 @@
                 <a:ea typeface="Noto Sans CJK JP"/>
                 <a:cs typeface="Noto Sans"/>
               </a:rPr>
-              <a:t>1,000クラス分類は、画像の意味全体を説明しない。</a:t>
+              <a:t>複数物体が写っても、通常の正解は1クラスである </a:t>
+            </a:r>
+            <a:r>
+              <a:rPr sz="2200" lang="ja-JP">
+                <a:solidFill>
+                  <a:srgbClr val="303437"/>
+                </a:solidFill>
+                <a:latin typeface="Noto Sans"/>
+                <a:ea typeface="Noto Sans CJK JP"/>
+                <a:cs typeface="Noto Sans"/>
+              </a:rPr>
+              <a:t>[1]</a:t>
+            </a:r>
+            <a:r>
+              <a:rPr sz="2200" lang="ja-JP">
+                <a:solidFill>
+                  <a:srgbClr val="303437"/>
+                </a:solidFill>
+                <a:latin typeface="Noto Sans"/>
+                <a:ea typeface="Noto Sans CJK JP"/>
+                <a:cs typeface="Noto Sans"/>
+              </a:rPr>
+              <a:t>。</a:t>
             </a:r>
             <a:endParaRPr sz="2200" lang="ja-JP">
               <a:latin typeface="Noto Sans"/>
@@ -19662,7 +19684,29 @@
                 <a:ea typeface="Noto Sans CJK JP"/>
                 <a:cs typeface="Noto Sans"/>
               </a:rPr>
-              <a:t>対象物より背景の手がかりを使う可能性がある。</a:t>
+              <a:t>そこでImageNet-ReaLは正解ラベルを見直した </a:t>
+            </a:r>
+            <a:r>
+              <a:rPr sz="2200" lang="ja-JP">
+                <a:solidFill>
+                  <a:srgbClr val="303437"/>
+                </a:solidFill>
+                <a:latin typeface="Noto Sans"/>
+                <a:ea typeface="Noto Sans CJK JP"/>
+                <a:cs typeface="Noto Sans"/>
+              </a:rPr>
+              <a:t>[2]</a:t>
+            </a:r>
+            <a:r>
+              <a:rPr sz="2200" lang="ja-JP">
+                <a:solidFill>
+                  <a:srgbClr val="303437"/>
+                </a:solidFill>
+                <a:latin typeface="Noto Sans"/>
+                <a:ea typeface="Noto Sans CJK JP"/>
+                <a:cs typeface="Noto Sans"/>
+              </a:rPr>
+              <a:t>。</a:t>
             </a:r>
             <a:endParaRPr sz="2200" lang="ja-JP">
               <a:latin typeface="Noto Sans"/>
@@ -19671,106 +19715,6 @@
             </a:endParaRPr>
           </a:p>
           <a:p>
-            <a:pPr algn="l" lvl="0" marL="457200" indent="-355600">
-              <a:buSzPct val="60455"/>
-              <a:buFont typeface="Noto Sans CJK JP"/>
-              <a:buChar char="●"/>
-              <a:defRPr sz="2200" lang="ja-JP">
-                <a:latin typeface="Noto Sans"/>
-                <a:ea typeface="Noto Sans CJK JP"/>
-                <a:cs typeface="Noto Sans"/>
-              </a:defRPr>
-            </a:pPr>
-            <a:r>
-              <a:rPr sz="2200" lang="ja-JP">
-                <a:solidFill>
-                  <a:srgbClr val="303437"/>
-                </a:solidFill>
-                <a:latin typeface="Noto Sans"/>
-                <a:ea typeface="Noto Sans CJK JP"/>
-                <a:cs typeface="Noto Sans"/>
-              </a:rPr>
-              <a:t>複数物体が写っても、通常の正解は1クラスである </a:t>
-            </a:r>
-            <a:r>
-              <a:rPr sz="2200" lang="ja-JP">
-                <a:solidFill>
-                  <a:srgbClr val="303437"/>
-                </a:solidFill>
-                <a:latin typeface="Noto Sans"/>
-                <a:ea typeface="Noto Sans CJK JP"/>
-                <a:cs typeface="Noto Sans"/>
-              </a:rPr>
-              <a:t>[1]</a:t>
-            </a:r>
-            <a:r>
-              <a:rPr sz="2200" lang="ja-JP">
-                <a:solidFill>
-                  <a:srgbClr val="303437"/>
-                </a:solidFill>
-                <a:latin typeface="Noto Sans"/>
-                <a:ea typeface="Noto Sans CJK JP"/>
-                <a:cs typeface="Noto Sans"/>
-              </a:rPr>
-              <a:t>。</a:t>
-            </a:r>
-            <a:endParaRPr sz="2200" lang="ja-JP">
-              <a:latin typeface="Noto Sans"/>
-              <a:ea typeface="Noto Sans CJK JP"/>
-              <a:cs typeface="Noto Sans"/>
-            </a:endParaRPr>
-          </a:p>
-          <a:p>
-            <a:pPr algn="l" lvl="0" marL="457200" indent="-355600">
-              <a:buSzPct val="60455"/>
-              <a:buFont typeface="Noto Sans CJK JP"/>
-              <a:buChar char="●"/>
-              <a:defRPr sz="2200" lang="ja-JP">
-                <a:latin typeface="Noto Sans"/>
-                <a:ea typeface="Noto Sans CJK JP"/>
-                <a:cs typeface="Noto Sans"/>
-              </a:defRPr>
-            </a:pPr>
-            <a:r>
-              <a:rPr sz="2200" lang="ja-JP">
-                <a:solidFill>
-                  <a:srgbClr val="303437"/>
-                </a:solidFill>
-                <a:latin typeface="Noto Sans"/>
-                <a:ea typeface="Noto Sans CJK JP"/>
-                <a:cs typeface="Noto Sans"/>
-              </a:rPr>
-              <a:t>そこでImageNet-ReaLは正解ラベルを見直した </a:t>
-            </a:r>
-            <a:r>
-              <a:rPr sz="2200" lang="ja-JP">
-                <a:solidFill>
-                  <a:srgbClr val="303437"/>
-                </a:solidFill>
-                <a:latin typeface="Noto Sans"/>
-                <a:ea typeface="Noto Sans CJK JP"/>
-                <a:cs typeface="Noto Sans"/>
-              </a:rPr>
-              <a:t>[2]</a:t>
-            </a:r>
-            <a:r>
-              <a:rPr sz="2200" lang="ja-JP">
-                <a:solidFill>
-                  <a:srgbClr val="303437"/>
-                </a:solidFill>
-                <a:latin typeface="Noto Sans"/>
-                <a:ea typeface="Noto Sans CJK JP"/>
-                <a:cs typeface="Noto Sans"/>
-              </a:rPr>
-              <a:t>。</a:t>
-            </a:r>
-            <a:endParaRPr sz="2200" lang="ja-JP">
-              <a:latin typeface="Noto Sans"/>
-              <a:ea typeface="Noto Sans CJK JP"/>
-              <a:cs typeface="Noto Sans"/>
-            </a:endParaRPr>
-          </a:p>
-          <a:p>
             <a:pPr algn="l" lvl="1" marL="914400" indent="-355600">
               <a:buSzPct val="60455"/>
               <a:buFont typeface="Noto Sans CJK JP"/>
@@ -19791,34 +19735,6 @@
                 <a:cs typeface="Noto Sans"/>
               </a:rPr>
               <a:t>既存の検証画像に、複数の妥当なラベルを付け直す。</a:t>
-            </a:r>
-            <a:endParaRPr sz="2200" lang="ja-JP">
-              <a:latin typeface="Noto Sans"/>
-              <a:ea typeface="Noto Sans CJK JP"/>
-              <a:cs typeface="Noto Sans"/>
-            </a:endParaRPr>
-          </a:p>
-          <a:p>
-            <a:pPr algn="l" lvl="0" marL="457200" indent="-355600">
-              <a:buSzPct val="60455"/>
-              <a:buFont typeface="Noto Sans CJK JP"/>
-              <a:buChar char="●"/>
-              <a:defRPr sz="2200" lang="ja-JP">
-                <a:latin typeface="Noto Sans"/>
-                <a:ea typeface="Noto Sans CJK JP"/>
-                <a:cs typeface="Noto Sans"/>
-              </a:defRPr>
-            </a:pPr>
-            <a:r>
-              <a:rPr sz="2200" lang="ja-JP">
-                <a:solidFill>
-                  <a:srgbClr val="303437"/>
-                </a:solidFill>
-                <a:latin typeface="Noto Sans"/>
-                <a:ea typeface="Noto Sans CJK JP"/>
-                <a:cs typeface="Noto Sans"/>
-              </a:rPr>
-              <a:t>別の画像集合や撮影条件では、成績が変わる。</a:t>
             </a:r>
             <a:endParaRPr sz="2200" lang="ja-JP">
               <a:latin typeface="Noto Sans"/>
@@ -21544,34 +21460,6 @@
                 <a:ea typeface="Noto Sans CJK JP"/>
                 <a:cs typeface="Noto Sans"/>
               </a:rPr>
-              <a:t>Top-1・Top-5と、学習・評価条件を区別する。</a:t>
-            </a:r>
-            <a:endParaRPr sz="2400" lang="ja-JP">
-              <a:latin typeface="Noto Sans"/>
-              <a:ea typeface="Noto Sans CJK JP"/>
-              <a:cs typeface="Noto Sans"/>
-            </a:endParaRPr>
-          </a:p>
-          <a:p>
-            <a:pPr algn="l" lvl="0" marL="457200" indent="-355600">
-              <a:buSzPct val="55417"/>
-              <a:buFont typeface="Noto Sans CJK JP"/>
-              <a:buChar char="●"/>
-              <a:defRPr sz="2400" lang="ja-JP">
-                <a:latin typeface="Noto Sans"/>
-                <a:ea typeface="Noto Sans CJK JP"/>
-                <a:cs typeface="Noto Sans"/>
-              </a:defRPr>
-            </a:pPr>
-            <a:r>
-              <a:rPr sz="2400" lang="ja-JP">
-                <a:solidFill>
-                  <a:srgbClr val="303437"/>
-                </a:solidFill>
-                <a:latin typeface="Noto Sans"/>
-                <a:ea typeface="Noto Sans CJK JP"/>
-                <a:cs typeface="Noto Sans"/>
-              </a:rPr>
               <a:t>現在は特徴評価にも使い、汎化は別画像で調べる。</a:t>
             </a:r>
             <a:endParaRPr sz="2400" lang="ja-JP">
@@ -31756,7 +31644,7 @@
                 <a:ea typeface="Noto Sans CJK JP"/>
                 <a:cs typeface="Noto Sans"/>
               </a:rPr>
-              <a:t>カテゴリとクラスは、いずれも正解ラベルの種類を指す。物体の位置や輪郭は、この分類課題の出力には含まれない。</a:t>
+              <a:t>カテゴリとクラスは、いずれも正解ラベルの種類を指す。</a:t>
             </a:r>
           </a:p>
         </p:txBody>
@@ -32080,7 +31968,7 @@
                 <a:ea typeface="Noto Sans CJK JP"/>
                 <a:cs typeface="Noto Sans"/>
               </a:rPr>
-              <a:t>低い照度の画像も含む。写真全体の明るさと、建造物のクラスは別の特徴である。</a:t>
+              <a:t>低い照度の画像も含む。</a:t>
             </a:r>
             <a:endParaRPr sz="2100" lang="ja-JP">
               <a:latin typeface="Noto Sans"/>
@@ -39931,7 +39819,7 @@
                 <a:ea typeface="Noto Sans CJK JP"/>
                 <a:cs typeface="Noto Sans"/>
               </a:rPr>
-              <a:t>幅802 px・高さ160 px。縦横比は5.0125。横に細長くてもラベルはcassette playerである。</a:t>
+              <a:t>幅802 px・高さ160 px。縦横比は5.0125。</a:t>
             </a:r>
             <a:endParaRPr sz="2100" lang="ja-JP">
               <a:latin typeface="Noto Sans"/>
@@ -42860,7 +42748,7 @@
                 <a:ea typeface="Noto Sans CJK JP"/>
                 <a:cs typeface="Noto Sans"/>
               </a:rPr>
-              <a:t>公開済み重みの結果は実装の条件にも依存する</a:t>
+              <a:t>画像分類用の公開済み重みと評価結果</a:t>
             </a:r>
             <a:endParaRPr sz="2800" lang="ja-JP">
               <a:latin typeface="Noto Sans"/>
@@ -43741,7 +43629,7 @@
                 <a:ea typeface="Noto Sans CJK JP"/>
                 <a:cs typeface="Noto Sans"/>
               </a:rPr>
-              <a:t>いずれもImageNet-1k検証用。学習レシピはモデルごとに異なる。画像のパッチを処理するViTも、同じ分類用データで評価する。</a:t>
+              <a:t>ImageNet-1k検証用で評価 [1]。</a:t>
             </a:r>
             <a:endParaRPr sz="1600" lang="ja-JP">
               <a:latin typeface="Noto Sans"/>
@@ -45004,7 +44892,7 @@
                 <a:ea typeface="Noto Sans CJK JP"/>
                 <a:cs typeface="Noto Sans"/>
               </a:rPr>
-              <a:t>元の検証用は1,000クラス、ImageNet-Rはそのうち200クラス。クラス数と画像集合が異なるため、列同士を同じ難易度とはみなせない。</a:t>
+              <a:t>元の検証用は1,000クラス、ImageNet-Rはそのうち200クラス。</a:t>
             </a:r>
             <a:endParaRPr sz="1600" lang="ja-JP">
               <a:latin typeface="Noto Sans"/>
@@ -45418,34 +45306,6 @@
               <a:cs typeface="Noto Sans"/>
             </a:endParaRPr>
           </a:p>
-          <a:p>
-            <a:pPr algn="l" lvl="0" marL="457200" indent="-355600">
-              <a:buSzPct val="60455"/>
-              <a:buFont typeface="Noto Sans CJK JP"/>
-              <a:buChar char="●"/>
-              <a:defRPr sz="2200" lang="ja-JP">
-                <a:latin typeface="Noto Sans"/>
-                <a:ea typeface="Noto Sans CJK JP"/>
-                <a:cs typeface="Noto Sans"/>
-              </a:defRPr>
-            </a:pPr>
-            <a:r>
-              <a:rPr sz="2200" lang="ja-JP">
-                <a:solidFill>
-                  <a:srgbClr val="303437"/>
-                </a:solidFill>
-                <a:latin typeface="Noto Sans"/>
-                <a:ea typeface="Noto Sans CJK JP"/>
-                <a:cs typeface="Noto Sans"/>
-              </a:rPr>
-              <a:t>公式トップの1,420万枚という表示だけで、更新後の収録範囲を判断しない。</a:t>
-            </a:r>
-            <a:endParaRPr sz="2200" lang="ja-JP">
-              <a:latin typeface="Noto Sans"/>
-              <a:ea typeface="Noto Sans CJK JP"/>
-              <a:cs typeface="Noto Sans"/>
-            </a:endParaRPr>
-          </a:p>
         </p:txBody>
       </p:sp>
       <p:sp>
@@ -46064,7 +45924,7 @@
                 <a:ea typeface="Noto Sans CJK JP"/>
                 <a:cs typeface="Noto Sans"/>
               </a:rPr>
-              <a:t>devkitを取得・展開した後に実行する。scipyを利用する。WordNet IDとモデルのクラス番号を同一視しない。</a:t>
+              <a:t>devkitを取得・展開した後に実行する。scipyを利用する。</a:t>
             </a:r>
             <a:endParaRPr sz="1700" lang="ja-JP">
               <a:latin typeface="Noto Sans"/>

--- a/slides/datasets-in-10-minutes-imagenet.pptx
+++ b/slides/datasets-in-10-minutes-imagenet.pptx
@@ -8020,7 +8020,7 @@
                 <a:ea typeface="Noto Sans CJK JP"/>
                 <a:cs typeface="Noto Sans"/>
               </a:rPr>
-              <a:t>犬種を表すクラスである。犬という上位概念より、細かな区別を求める。</a:t>
+              <a:t>犬種を表すクラスである。犬という上位概念よりも細かな区別が求められる。</a:t>
             </a:r>
             <a:endParaRPr sz="2100" lang="ja-JP">
               <a:latin typeface="Noto Sans"/>
@@ -9661,7 +9661,7 @@
                 <a:ea typeface="Noto Sans CJK JP"/>
                 <a:cs typeface="Noto Sans"/>
               </a:rPr>
-              <a:t>有償作業のAmazon Mechanical Turkを使った </a:t>
+              <a:t>有償クラウドソーシングのAmazon Mechanical Turkを使った </a:t>
             </a:r>
             <a:r>
               <a:rPr sz="2400" lang="ja-JP">
@@ -9776,18 +9776,18 @@
             </a:endParaRPr>
           </a:p>
           <a:p>
-            <a:pPr algn="l" lvl="0" marL="457200" indent="-355600">
-              <a:buSzPct val="55417"/>
+            <a:pPr algn="l" lvl="1" marL="914400" indent="-355600">
+              <a:buSzPct val="63333"/>
               <a:buFont typeface="Noto Sans CJK JP"/>
-              <a:buChar char="●"/>
-              <a:defRPr sz="2400" lang="ja-JP">
-                <a:latin typeface="Noto Sans"/>
-                <a:ea typeface="Noto Sans CJK JP"/>
-                <a:cs typeface="Noto Sans"/>
-              </a:defRPr>
-            </a:pPr>
-            <a:r>
-              <a:rPr sz="2400" lang="ja-JP">
+              <a:buChar char="○"/>
+              <a:defRPr sz="2100" lang="ja-JP">
+                <a:latin typeface="Noto Sans"/>
+                <a:ea typeface="Noto Sans CJK JP"/>
+                <a:cs typeface="Noto Sans"/>
+              </a:defRPr>
+            </a:pPr>
+            <a:r>
+              <a:rPr sz="2100" lang="ja-JP">
                 <a:solidFill>
                   <a:srgbClr val="303437"/>
                 </a:solidFill>
@@ -9797,7 +9797,7 @@
               </a:rPr>
               <a:t>見やすい単独物体だけに限定しなかった。</a:t>
             </a:r>
-            <a:endParaRPr sz="2400" lang="ja-JP">
+            <a:endParaRPr sz="2100" lang="ja-JP">
               <a:latin typeface="Noto Sans"/>
               <a:ea typeface="Noto Sans CJK JP"/>
               <a:cs typeface="Noto Sans"/>
@@ -13967,7 +13967,7 @@
                 <a:ea typeface="Noto Sans CJK JP"/>
                 <a:cs typeface="Noto Sans"/>
               </a:rPr>
-              <a:t>順位に応じてTop-1とTop-5が変わる</a:t>
+              <a:t>順位に応じてTop-1とTop-5の得点が変わる</a:t>
             </a:r>
             <a:endParaRPr sz="2800" lang="ja-JP">
               <a:latin typeface="Noto Sans"/>
@@ -17320,7 +17320,7 @@
                 <a:ea typeface="Noto Sans CJK JP"/>
                 <a:cs typeface="Noto Sans"/>
               </a:rPr>
-              <a:t>残差接続を用いるResNetの、10クロップ評価による値。同じ画像から10領域を切り出し、予測をまとめる。</a:t>
+              <a:t>残差接続を用いるResNetをImageNetの検証用データで10クロップ評価した値。同じ画像から10領域を切り出し、予測を統合する。</a:t>
             </a:r>
             <a:endParaRPr sz="1600" lang="ja-JP">
               <a:latin typeface="Noto Sans"/>
@@ -18391,7 +18391,7 @@
                 <a:ea typeface="Noto Sans CJK JP"/>
                 <a:cs typeface="Noto Sans"/>
               </a:rPr>
-              <a:t>特徴モデルを固定し、ImageNetの学習用で線形分類器を学習する。検証用で条件を選び、同じ検証用で評価する。入力解像度は異なる。</a:t>
+              <a:t>特徴モデルを固定し、ImageNetの学習データで線形分類器を学習する。検証データで条件を選び、同じ検証データで評価する。入力解像度はモデルごとに異なる。</a:t>
             </a:r>
             <a:endParaRPr sz="1600" lang="ja-JP">
               <a:latin typeface="Noto Sans"/>
@@ -19695,7 +19695,7 @@
                 <a:ea typeface="Noto Sans CJK JP"/>
                 <a:cs typeface="Noto Sans"/>
               </a:rPr>
-              <a:t>[2]</a:t>
+              <a:t>[1]</a:t>
             </a:r>
             <a:r>
               <a:rPr sz="2200" lang="ja-JP">
@@ -20490,7 +20490,7 @@
                 <a:ea typeface="Noto Sans CJK JP"/>
                 <a:cs typeface="Noto Sans"/>
               </a:rPr>
-              <a:t>その後、絵画のImageNet-Rや、画像を劣化させたImageNet-Cも作られた [2]。</a:t>
+              <a:t>絵画のImageNet-Rや、画像を劣化させたImageNet-Cも作られた。</a:t>
             </a:r>
             <a:r>
               <a:rPr sz="2100" lang="ja-JP">
@@ -20540,7 +20540,7 @@
                 <a:ea typeface="Noto Sans CJK JP"/>
                 <a:cs typeface="Noto Sans"/>
               </a:rPr>
-              <a:t>2025年のDINOv3論文も、これらで汎化性能を調べている。</a:t>
+              <a:t>2025年のDINOv3論文も、これらで汎化性能を調べている [2]。</a:t>
             </a:r>
             <a:endParaRPr sz="2100" lang="ja-JP">
               <a:latin typeface="Noto Sans"/>
@@ -20568,7 +20568,7 @@
                 <a:ea typeface="Noto Sans CJK JP"/>
                 <a:cs typeface="Noto Sans"/>
               </a:rPr>
-              <a:t>2026年も公開実装に、ImageNetでの評価手順がある </a:t>
+              <a:t>2026年の公開実装にも、ImageNetでの評価手順が含まれる </a:t>
             </a:r>
             <a:r>
               <a:rPr sz="2100" lang="ja-JP">
@@ -21404,7 +21404,7 @@
                 <a:ea typeface="Noto Sans CJK JP"/>
                 <a:cs typeface="Noto Sans"/>
               </a:rPr>
-              <a:t>2009年に発表され、多数の画像を人手で確認した。</a:t>
+              <a:t>2009年に発表され、多数の画像が人手で確認された。</a:t>
             </a:r>
             <a:endParaRPr sz="2400" lang="ja-JP">
               <a:latin typeface="Noto Sans"/>
@@ -21460,7 +21460,7 @@
                 <a:ea typeface="Noto Sans CJK JP"/>
                 <a:cs typeface="Noto Sans"/>
               </a:rPr>
-              <a:t>現在は特徴評価にも使い、汎化は別画像で調べる。</a:t>
+              <a:t>現在は特徴評価にも使われ、汎化性能は別画像で調べる。</a:t>
             </a:r>
             <a:endParaRPr sz="2400" lang="ja-JP">
               <a:latin typeface="Noto Sans"/>
@@ -24239,7 +24239,7 @@
                 <a:ea typeface="Noto Sans CJK JP"/>
                 <a:cs typeface="Noto Sans"/>
               </a:rPr>
-              <a:t>爬虫類と両生類と魚類と水生無脊椎動物のカテゴリ</a:t>
+              <a:t>爬虫類・両生類・魚類・水生無脊椎動物の例</a:t>
             </a:r>
             <a:endParaRPr sz="2800" lang="ja-JP">
               <a:latin typeface="Noto Sans"/>
@@ -25776,7 +25776,7 @@
                 <a:ea typeface="Noto Sans CJK JP"/>
                 <a:cs typeface="Noto Sans"/>
               </a:rPr>
-              <a:t>昆虫と陸生節足動物と乗り物のカテゴリ</a:t>
+              <a:t>昆虫・陸生節足動物・乗り物の例</a:t>
             </a:r>
             <a:endParaRPr sz="2800" lang="ja-JP">
               <a:latin typeface="Noto Sans"/>
@@ -27313,7 +27313,7 @@
                 <a:ea typeface="Noto Sans CJK JP"/>
                 <a:cs typeface="Noto Sans"/>
               </a:rPr>
-              <a:t>電子機器と機械と衣類と生活用品のカテゴリ</a:t>
+              <a:t>電子機器・機械・衣類・生活用品の例</a:t>
             </a:r>
             <a:endParaRPr sz="2800" lang="ja-JP">
               <a:latin typeface="Noto Sans"/>
@@ -28850,7 +28850,7 @@
                 <a:ea typeface="Noto Sans CJK JP"/>
                 <a:cs typeface="Noto Sans"/>
               </a:rPr>
-              <a:t>建物と構造物と食品と農作物のカテゴリ</a:t>
+              <a:t>建物・構造物・食品・農作物の例</a:t>
             </a:r>
             <a:endParaRPr sz="2800" lang="ja-JP">
               <a:latin typeface="Noto Sans"/>
@@ -31609,7 +31609,7 @@
                 <a:ea typeface="Noto Sans CJK JP"/>
                 <a:cs typeface="Noto Sans"/>
               </a:rPr>
-              <a:t>この資料で扱うImageNet-1kの課題は画像分類であり、1枚の画像から1,000候補のカテゴリを予測する。</a:t>
+              <a:t>この資料で扱うImageNet-1kの課題は画像分類であり、1枚の画像に対して1,000候補の中からカテゴリを予測する。</a:t>
             </a:r>
           </a:p>
           <a:p>
@@ -31968,7 +31968,7 @@
                 <a:ea typeface="Noto Sans CJK JP"/>
                 <a:cs typeface="Noto Sans"/>
               </a:rPr>
-              <a:t>低い照度の画像も含む。</a:t>
+              <a:t>低照度の画像も含む。</a:t>
             </a:r>
             <a:endParaRPr sz="2100" lang="ja-JP">
               <a:latin typeface="Noto Sans"/>
@@ -35282,7 +35282,7 @@
                 <a:ea typeface="Noto Sans CJK JP"/>
                 <a:cs typeface="Noto Sans"/>
               </a:rPr>
-              <a:t>ImageNet-1kの学習用は約128万枚ある。そこで、画像サイズの実測には10クラス・13,394枚のImagenetteを使う [1, 2]。</a:t>
+              <a:t>ImageNet-1kの学習用は約128万枚ある。そこで、画像サイズの実測には10クラス・13,394枚のImagenetteを使う [1]。</a:t>
             </a:r>
             <a:endParaRPr sz="2400" lang="ja-JP">
               <a:latin typeface="Noto Sans"/>
@@ -37065,7 +37065,7 @@
         </p:nvSpPr>
         <p:spPr>
           <a:xfrm>
-            <a:off x="594360" y="4271256"/>
+            <a:off x="594360" y="4169656"/>
             <a:ext cx="7955279" cy="349885"/>
           </a:xfrm>
           <a:prstGeom prst="rect">
@@ -37105,7 +37105,7 @@
                 <a:ea typeface="Noto Sans CJK JP"/>
                 <a:cs typeface="Noto Sans"/>
               </a:rPr>
-              <a:t>Imagenette 160 px版。各画像のフォルダ名でクラスと分割を数えた。</a:t>
+              <a:t>Imagenette 160 px版。フォルダ名からクラス別・分割別に集計。</a:t>
             </a:r>
             <a:endParaRPr sz="1600" lang="ja-JP">
               <a:latin typeface="Noto Sans"/>
@@ -38838,7 +38838,7 @@
         </p:nvSpPr>
         <p:spPr>
           <a:xfrm>
-            <a:off x="594360" y="4271256"/>
+            <a:off x="594360" y="4169656"/>
             <a:ext cx="7955279" cy="349885"/>
           </a:xfrm>
           <a:prstGeom prst="rect">
@@ -38878,7 +38878,7 @@
                 <a:ea typeface="Noto Sans CJK JP"/>
                 <a:cs typeface="Noto Sans"/>
               </a:rPr>
-              <a:t>Imagenette 160 px版。各画像のフォルダ名でクラスと分割を数えた。</a:t>
+              <a:t>Imagenette 160 px版。フォルダ名からクラス別・分割別に集計。</a:t>
             </a:r>
             <a:endParaRPr sz="1600" lang="ja-JP">
               <a:latin typeface="Noto Sans"/>
@@ -45298,7 +45298,7 @@
                 <a:ea typeface="Noto Sans CJK JP"/>
                 <a:cs typeface="Noto Sans"/>
               </a:rPr>
-              <a:t>そこで顔を注釈し、顔をぼかした、ILSVRC大会の1,000クラス分類用データを検討した。</a:t>
+              <a:t>そこで顔を注釈し、顔をぼかしたILSVRC大会の1,000クラス分類用データを検討した。</a:t>
             </a:r>
             <a:endParaRPr sz="2200" lang="ja-JP">
               <a:latin typeface="Noto Sans"/>

--- a/slides/datasets-in-10-minutes-imagenet.pptx
+++ b/slides/datasets-in-10-minutes-imagenet.pptx
@@ -35132,7 +35132,7 @@
         </p:nvSpPr>
         <p:spPr>
           <a:xfrm>
-            <a:off x="468172" y="1306789"/>
+            <a:off x="468172" y="650240"/>
             <a:ext cx="8206740" cy="594360"/>
           </a:xfrm>
         </p:spPr>
@@ -35140,7 +35140,7 @@
           <a:bodyPr wrap="square" lIns="0" rIns="0" tIns="0" bIns="0" anchor="t"/>
           <a:lstStyle/>
           <a:p>
-            <a:pPr algn="ctr" marL="0" indent="0">
+            <a:pPr algn="l" marL="0" indent="0">
               <a:lnSpc>
                 <a:spcPct val="100000"/>
               </a:lnSpc>
@@ -35242,8 +35242,8 @@
         </p:nvSpPr>
         <p:spPr>
           <a:xfrm>
-            <a:off x="594360" y="2221189"/>
-            <a:ext cx="7955279" cy="1737360"/>
+            <a:off x="594360" y="1508760"/>
+            <a:ext cx="7955279" cy="2794000"/>
           </a:xfrm>
           <a:prstGeom prst="rect">
             <a:avLst/>
@@ -35256,7 +35256,7 @@
           </a:bodyPr>
           <a:lstStyle/>
           <a:p>
-            <a:pPr algn="ctr" lvl="0" marL="0" indent="0">
+            <a:pPr algn="l" lvl="0" marL="0" indent="0">
               <a:lnSpc>
                 <a:spcPct val="100000"/>
               </a:lnSpc>
@@ -35282,7 +35282,7 @@
                 <a:ea typeface="Noto Sans CJK JP"/>
                 <a:cs typeface="Noto Sans"/>
               </a:rPr>
-              <a:t>ImageNet-1kの学習用は約128万枚ある。そこで、画像サイズの実測には10クラス・13,394枚のImagenetteを使う [1]。</a:t>
+              <a:t>ImageNet-1kの学習用画像は約128万枚あるため、画像サイズの実測には10クラス・13,394枚のImagenetteを使う [1]。</a:t>
             </a:r>
             <a:endParaRPr sz="2400" lang="ja-JP">
               <a:latin typeface="Noto Sans"/>
@@ -35291,7 +35291,7 @@
             </a:endParaRPr>
           </a:p>
           <a:p>
-            <a:pPr algn="ctr" marL="0" indent="0">
+            <a:pPr algn="l" marL="0" indent="0">
               <a:lnSpc>
                 <a:spcPct val="100000"/>
               </a:lnSpc>
@@ -35312,11 +35312,11 @@
                 <a:ea typeface="Noto Sans CJK JP"/>
                 <a:cs typeface="Noto Sans"/>
               </a:rPr>
-              <a:t>分析には、短辺160 pxへリサイズしたImagenetteの画像を使用する。</a:t>
-            </a:r>
-          </a:p>
-          <a:p>
-            <a:pPr algn="ctr" marL="0" indent="0">
+              <a:t>分析対象は、短辺を160 pxにリサイズした画像である。</a:t>
+            </a:r>
+          </a:p>
+          <a:p>
+            <a:pPr algn="l" marL="0" indent="0">
               <a:lnSpc>
                 <a:spcPct val="100000"/>
               </a:lnSpc>
@@ -35337,7 +35337,7 @@
                 <a:ea typeface="Noto Sans CJK JP"/>
                 <a:cs typeface="Noto Sans"/>
               </a:rPr>
-              <a:t>学習用9,469枚、検証用3,925枚。分割はImagenette独自のものである。</a:t>
+              <a:t>内訳は学習用9,469枚、検証用3,925枚で、Imagenette独自の分割を用いる。</a:t>
             </a:r>
           </a:p>
         </p:txBody>

--- a/slides/datasets-in-10-minutes-imagenet.pptx
+++ b/slides/datasets-in-10-minutes-imagenet.pptx
@@ -8520,7 +8520,7 @@
                 <a:ea typeface="Noto Sans CJK JP"/>
                 <a:cs typeface="Noto Sans"/>
               </a:rPr>
-              <a:t>これに対し、2009年のImageNet原著は約320万枚・5,247カテゴリを報告した。</a:t>
+              <a:t>これに対し、2009年には約320万枚・5,247カテゴリが報告された。</a:t>
             </a:r>
           </a:p>
           <a:p>
@@ -16439,7 +16439,7 @@
                 <a:ea typeface="Noto Sans CJK JP"/>
                 <a:cs typeface="Noto Sans"/>
               </a:rPr>
-              <a:t>2016年のResNet原著の評価結果</a:t>
+              <a:t>2016年のResNetの評価結果</a:t>
             </a:r>
             <a:endParaRPr sz="2800" lang="ja-JP">
               <a:latin typeface="Noto Sans"/>
@@ -22372,7 +22372,7 @@
                 <a:ea typeface="Noto Sans CJK JP"/>
                 <a:cs typeface="Noto Sans"/>
               </a:rPr>
-              <a:t>原著は2009年のCVPRで発表された [1]。</a:t>
+              <a:t>ImageNetは2009年のCVPRで発表された [1]。</a:t>
             </a:r>
             <a:endParaRPr sz="2300" lang="ja-JP">
               <a:latin typeface="Noto Sans"/>
@@ -22446,7 +22446,7 @@
                 <a:ea typeface="Noto Sans CJK JP"/>
                 <a:cs typeface="Noto Sans"/>
               </a:rPr>
-              <a:t>発表当時の所属はPrinceton大学だった。原著は2019年にPAMI Longuet-Higgins Prizeを受賞した [2]。</a:t>
+              <a:t>当時の所属はPrinceton大学だった。論文は2019年にPAMI Longuet-Higgins Prizeを受賞した [2]。</a:t>
             </a:r>
           </a:p>
         </p:txBody>
@@ -48071,7 +48071,7 @@
                 <a:ea typeface="Noto Sans CJK JP"/>
                 <a:cs typeface="Noto Sans"/>
               </a:rPr>
-              <a:t>ImageNetの原著論文。WordNet階層に沿う画像収集と人手による注釈を報告する。</a:t>
+              <a:t>WordNet階層に沿う画像収集と人手による注釈を報告する。</a:t>
             </a:r>
           </a:p>
         </p:txBody>
@@ -48575,7 +48575,7 @@
                 <a:ea typeface="Noto Sans CJK JP"/>
                 <a:cs typeface="Noto Sans"/>
               </a:rPr>
-              <a:t>ResNetの原著論文。残差接続による深いネットワークの学習とImageNet評価を示す。</a:t>
+              <a:t>残差接続による深いネットワークの学習とImageNet評価を示す。</a:t>
             </a:r>
           </a:p>
         </p:txBody>
@@ -49583,7 +49583,7 @@
                 <a:ea typeface="Noto Sans CJK JP"/>
                 <a:cs typeface="Noto Sans"/>
               </a:rPr>
-              <a:t>ImageNetV2の原著論文。新たに収集した画像で既存分類器の汎化性能を検証する。</a:t>
+              <a:t>新たに収集した画像で既存分類器の汎化性能を検証する。</a:t>
             </a:r>
           </a:p>
         </p:txBody>

--- a/slides/datasets-in-10-minutes-imagenet.pptx
+++ b/slides/datasets-in-10-minutes-imagenet.pptx
@@ -7509,9 +7509,9 @@
               </a:defRPr>
             </a:pPr>
             <a:r>
-              <a:rPr sz="2300" lang="ja-JP">
-                <a:solidFill>
-                  <a:srgbClr val="B13731"/>
+              <a:rPr sz="2300" lang="ja-JP" b="1">
+                <a:solidFill>
+                  <a:schemeClr val="accent1"/>
                 </a:solidFill>
                 <a:latin typeface="Noto Sans"/>
                 <a:ea typeface="Noto Sans CJK JP"/>
@@ -39695,9 +39695,9 @@
               </a:defRPr>
             </a:pPr>
             <a:r>
-              <a:rPr sz="2300" lang="ja-JP">
-                <a:solidFill>
-                  <a:srgbClr val="B13731"/>
+              <a:rPr sz="2300" lang="ja-JP" b="1">
+                <a:solidFill>
+                  <a:schemeClr val="accent1"/>
                 </a:solidFill>
                 <a:latin typeface="Noto Sans"/>
                 <a:ea typeface="Noto Sans CJK JP"/>
@@ -40198,9 +40198,9 @@
               </a:defRPr>
             </a:pPr>
             <a:r>
-              <a:rPr sz="2300" lang="ja-JP">
-                <a:solidFill>
-                  <a:srgbClr val="B13731"/>
+              <a:rPr sz="2300" lang="ja-JP" b="1">
+                <a:solidFill>
+                  <a:schemeClr val="accent1"/>
                 </a:solidFill>
                 <a:latin typeface="Noto Sans"/>
                 <a:ea typeface="Noto Sans CJK JP"/>
@@ -47543,9 +47543,9 @@
               </a:defRPr>
             </a:pPr>
             <a:r>
-              <a:rPr sz="2300" lang="ja-JP">
-                <a:solidFill>
-                  <a:srgbClr val="B13731"/>
+              <a:rPr sz="2300" lang="ja-JP" b="1">
+                <a:solidFill>
+                  <a:schemeClr val="accent1"/>
                 </a:solidFill>
                 <a:latin typeface="Noto Sans"/>
                 <a:ea typeface="Noto Sans CJK JP"/>
